--- a/docs/第二单_SecondOrder_路演.pptx
+++ b/docs/第二单_SecondOrder_路演.pptx
@@ -476,362 +476,40 @@
 </p:notesMaster>
 </file>
 
-<file path=ppt/notesSlides/notesSlide1.xml><?xml version="1.0" encoding="utf-8"?>
-<p:notes xmlns:a="http://schemas.openxmlformats.org/drawingml/2006/main" xmlns:r="http://schemas.openxmlformats.org/officeDocument/2006/relationships" xmlns:p="http://schemas.openxmlformats.org/presentationml/2006/main">
-  <p:cSld>
-    <p:spTree>
-      <p:nvGrpSpPr>
-        <p:cNvPr id="1" name=""/>
-        <p:cNvGrpSpPr/>
-        <p:nvPr/>
-      </p:nvGrpSpPr>
-      <p:grpSpPr>
-        <a:xfrm>
-          <a:off x="0" y="0"/>
-          <a:ext cx="0" cy="0"/>
-          <a:chOff x="0" y="0"/>
-          <a:chExt cx="0" cy="0"/>
-        </a:xfrm>
-      </p:grpSpPr>
-      <p:sp>
-        <p:nvSpPr>
-          <p:cNvPr id="2" name="Slide Image Placeholder 1"/>
-          <p:cNvSpPr>
-            <a:spLocks noGrp="1" noRot="1" noChangeAspect="1"/>
-          </p:cNvSpPr>
-          <p:nvPr>
-            <p:ph type="sldImg"/>
-          </p:nvPr>
-        </p:nvSpPr>
-        <p:spPr/>
-      </p:sp>
-      <p:sp>
-        <p:nvSpPr>
-          <p:cNvPr id="3" name="Notes Placeholder 2"/>
-          <p:cNvSpPr>
-            <a:spLocks noGrp="1"/>
-          </p:cNvSpPr>
-          <p:nvPr>
-            <p:ph type="body" idx="1"/>
-          </p:nvPr>
-        </p:nvSpPr>
-        <p:spPr/>
-        <p:txBody>
-          <a:bodyPr/>
-          <a:lstStyle/>
-          <a:p>
-            <a:r>
-              <a:rPr lang="en-US" dirty="0"/>
-              <a:t>（0:00–0:20）开场，指着大标题。
-「扫码验茅台真假，大家都会。这次扫的不是酒，是买家。」停一拍。
-我们做的是贵州白酒出海的首单决策副驾。</a:t>
-            </a:r>
-            <a:endParaRPr lang="en-US" dirty="0"/>
-          </a:p>
-        </p:txBody>
-      </p:sp>
-      <p:sp>
-        <p:nvSpPr>
-          <p:cNvPr id="4" name="Slide Number Placeholder 3"/>
-          <p:cNvSpPr>
-            <a:spLocks noGrp="1"/>
-          </p:cNvSpPr>
-          <p:nvPr>
-            <p:ph type="sldNum" sz="quarter" idx="10"/>
-          </p:nvPr>
-        </p:nvSpPr>
-        <p:spPr/>
-        <p:txBody>
-          <a:bodyPr/>
-          <a:lstStyle/>
-          <a:p>
-            <a:fld id="{F7021451-1387-4CA6-816F-3879F97B5CBC}" type="slidenum">
-              <a:rPr lang="en-US"/>
-              <a:t>1</a:t>
-            </a:fld>
-            <a:endParaRPr lang="en-US"/>
-          </a:p>
-        </p:txBody>
-      </p:sp>
-    </p:spTree>
-    <p:extLst>
-      <p:ext uri="{BB962C8B-B14F-4D97-AF65-F5344CB8AC3E}">
-        <p14:creationId xmlns:p14="http://schemas.microsoft.com/office/powerpoint/2010/main" val="1024086991"/>
-      </p:ext>
-    </p:extLst>
-  </p:cSld>
-  <p:clrMapOvr>
-    <a:masterClrMapping/>
-  </p:clrMapOvr>
-</p:notes>
+<file path=ppt/notesSlides/notesSlide1.xml><?xml version="1.0" encoding="UTF-8" standalone="yes"?>
+<p:notes xmlns:a="http://schemas.openxmlformats.org/drawingml/2006/main" xmlns:r="http://schemas.openxmlformats.org/officeDocument/2006/relationships" xmlns:p="http://schemas.openxmlformats.org/presentationml/2006/main"><p:cSld><p:spTree><p:nvGrpSpPr><p:cNvPr id="1" name=""/><p:cNvGrpSpPr/><p:nvPr/></p:nvGrpSpPr><p:grpSpPr><a:xfrm><a:off x="0" y="0"/><a:ext cx="0" cy="0"/><a:chOff x="0" y="0"/><a:chExt cx="0" cy="0"/></a:xfrm></p:grpSpPr><p:sp><p:nvSpPr><p:cNvPr id="2" name="Slide Image Placeholder 1"/><p:cNvSpPr><a:spLocks noGrp="1" noRot="1" noChangeAspect="1"/></p:cNvSpPr><p:nvPr><p:ph type="sldImg"/></p:nvPr></p:nvSpPr><p:spPr/></p:sp><p:sp><p:nvSpPr><p:cNvPr id="3" name="Notes Placeholder 2"/><p:cNvSpPr><a:spLocks noGrp="1"/></p:cNvSpPr><p:nvPr><p:ph type="body" idx="1"/></p:nvPr></p:nvSpPr><p:spPr/><p:txBody><a:bodyPr/><a:lstStyle/><a:p><a:r><a:rPr lang="en-US" dirty="0"/><a:t>（0:00–0:20）+[停两秒，让大家先看到标题]+各位评委好。+扫码验茅台真假，大家都会。+[停一拍]+我们做的这个东西，扫的不是酒，是买家。+它叫「第二单」，是给贵州中小酒企外贸专员用的首单决策副驾。</a:t></a:r><a:endParaRPr lang="en-US" dirty="0"/></a:p></p:txBody></p:sp><p:sp><p:nvSpPr><p:cNvPr id="4" name="Slide Number Placeholder 3"/><p:cNvSpPr><a:spLocks noGrp="1"/></p:cNvSpPr><p:nvPr><p:ph type="sldNum" sz="quarter" idx="10"/></p:nvPr></p:nvSpPr><p:spPr/><p:txBody><a:bodyPr/><a:lstStyle/><a:p><a:fld id="{F7021451-1387-4CA6-816F-3879F97B5CBC}" type="slidenum"><a:rPr lang="en-US"/><a:t>1</a:t></a:fld><a:endParaRPr lang="en-US"/></a:p></p:txBody></p:sp></p:spTree><p:extLst><p:ext uri="{BB962C8B-B14F-4D97-AF65-F5344CB8AC3E}"><p14:creationId xmlns:p14="http://schemas.microsoft.com/office/powerpoint/2010/main" val="1024086991"/></p:ext></p:extLst></p:cSld><p:clrMapOvr><a:masterClrMapping/></p:clrMapOvr></p:notes>
 </file>
 
-<file path=ppt/notesSlides/notesSlide10.xml><?xml version="1.0" encoding="utf-8"?>
-<p:notes xmlns:a="http://schemas.openxmlformats.org/drawingml/2006/main" xmlns:r="http://schemas.openxmlformats.org/officeDocument/2006/relationships" xmlns:p="http://schemas.openxmlformats.org/presentationml/2006/main">
-  <p:cSld>
-    <p:spTree>
-      <p:nvGrpSpPr>
-        <p:cNvPr id="1" name=""/>
-        <p:cNvGrpSpPr/>
-        <p:nvPr/>
-      </p:nvGrpSpPr>
-      <p:grpSpPr>
-        <a:xfrm>
-          <a:off x="0" y="0"/>
-          <a:ext cx="0" cy="0"/>
-          <a:chOff x="0" y="0"/>
-          <a:chExt cx="0" cy="0"/>
-        </a:xfrm>
-      </p:grpSpPr>
-      <p:sp>
-        <p:nvSpPr>
-          <p:cNvPr id="2" name="Slide Image Placeholder 1"/>
-          <p:cNvSpPr>
-            <a:spLocks noGrp="1" noRot="1" noChangeAspect="1"/>
-          </p:cNvSpPr>
-          <p:nvPr>
-            <p:ph type="sldImg"/>
-          </p:nvPr>
-        </p:nvSpPr>
-        <p:spPr/>
-      </p:sp>
-      <p:sp>
-        <p:nvSpPr>
-          <p:cNvPr id="3" name="Notes Placeholder 2"/>
-          <p:cNvSpPr>
-            <a:spLocks noGrp="1"/>
-          </p:cNvSpPr>
-          <p:nvPr>
-            <p:ph type="body" idx="1"/>
-          </p:nvPr>
-        </p:nvSpPr>
-        <p:spPr/>
-        <p:txBody>
-          <a:bodyPr/>
-          <a:lstStyle/>
-          <a:p>
-            <a:r>
-              <a:rPr lang="en-US" dirty="0"/>
-              <a:t>（4:00–4:25）技术主张：规则算账，模型说人话。
-税则、牌照、条款、去留判定全是可审计的纯函数，每条带来源与生效日期。模型只负责读懂对话和写成人话。
-模型挂了主链路照样跑完——现场断网也能演示。</a:t>
-            </a:r>
-            <a:endParaRPr lang="en-US" dirty="0"/>
-          </a:p>
-        </p:txBody>
-      </p:sp>
-      <p:sp>
-        <p:nvSpPr>
-          <p:cNvPr id="4" name="Slide Number Placeholder 3"/>
-          <p:cNvSpPr>
-            <a:spLocks noGrp="1"/>
-          </p:cNvSpPr>
-          <p:nvPr>
-            <p:ph type="sldNum" sz="quarter" idx="10"/>
-          </p:nvPr>
-        </p:nvSpPr>
-        <p:spPr/>
-        <p:txBody>
-          <a:bodyPr/>
-          <a:lstStyle/>
-          <a:p>
-            <a:fld id="{F7021451-1387-4CA6-816F-3879F97B5CBC}" type="slidenum">
-              <a:rPr lang="en-US"/>
-              <a:t>10</a:t>
-            </a:fld>
-            <a:endParaRPr lang="en-US"/>
-          </a:p>
-        </p:txBody>
-      </p:sp>
-    </p:spTree>
-    <p:extLst>
-      <p:ext uri="{BB962C8B-B14F-4D97-AF65-F5344CB8AC3E}">
-        <p14:creationId xmlns:p14="http://schemas.microsoft.com/office/powerpoint/2010/main" val="1024086991"/>
-      </p:ext>
-    </p:extLst>
-  </p:cSld>
-  <p:clrMapOvr>
-    <a:masterClrMapping/>
-  </p:clrMapOvr>
-</p:notes>
+<file path=ppt/notesSlides/notesSlide10.xml><?xml version="1.0" encoding="UTF-8" standalone="yes"?>
+<p:notes xmlns:a="http://schemas.openxmlformats.org/drawingml/2006/main" xmlns:r="http://schemas.openxmlformats.org/officeDocument/2006/relationships" xmlns:p="http://schemas.openxmlformats.org/presentationml/2006/main"><p:cSld><p:spTree><p:nvGrpSpPr><p:cNvPr id="1" name=""/><p:cNvGrpSpPr/><p:nvPr/></p:nvGrpSpPr><p:grpSpPr><a:xfrm><a:off x="0" y="0"/><a:ext cx="0" cy="0"/><a:chOff x="0" y="0"/><a:chExt cx="0" cy="0"/></a:xfrm></p:grpSpPr><p:sp><p:nvSpPr><p:cNvPr id="2" name="Slide Image Placeholder 1"/><p:cNvSpPr><a:spLocks noGrp="1" noRot="1" noChangeAspect="1"/></p:cNvSpPr><p:nvPr><p:ph type="sldImg"/></p:nvPr></p:nvSpPr><p:spPr/></p:sp><p:sp><p:nvSpPr><p:cNvPr id="3" name="Notes Placeholder 2"/><p:cNvSpPr><a:spLocks noGrp="1"/></p:cNvSpPr><p:nvPr><p:ph type="body" idx="1"/></p:nvPr></p:nvSpPr><p:spPr/><p:txBody><a:bodyPr/><a:lstStyle/><a:p><a:r><a:rPr lang="en-US" dirty="0"/><a:t>（4:05–4:30）+技术上我们只坚持一件事：规则算账，模型说人话。+税则、牌照、风险评分、合同条款，全部是可审计的纯函数，+同样输入永远同样输出，每一条都带来源和生效日期。+模型只负责它真正擅长的两件事——读懂对话，和写成人话。+所以模型挂了，主链路照样跑完。现场断网也能演示。</a:t></a:r><a:endParaRPr lang="en-US" dirty="0"/></a:p></p:txBody></p:sp><p:sp><p:nvSpPr><p:cNvPr id="4" name="Slide Number Placeholder 3"/><p:cNvSpPr><a:spLocks noGrp="1"/></p:cNvSpPr><p:nvPr><p:ph type="sldNum" sz="quarter" idx="10"/></p:nvPr></p:nvSpPr><p:spPr/><p:txBody><a:bodyPr/><a:lstStyle/><a:p><a:fld id="{F7021451-1387-4CA6-816F-3879F97B5CBC}" type="slidenum"><a:rPr lang="en-US"/><a:t>10</a:t></a:fld><a:endParaRPr lang="en-US"/></a:p></p:txBody></p:sp></p:spTree><p:extLst><p:ext uri="{BB962C8B-B14F-4D97-AF65-F5344CB8AC3E}"><p14:creationId xmlns:p14="http://schemas.microsoft.com/office/powerpoint/2010/main" val="1024086991"/></p:ext></p:extLst></p:cSld><p:clrMapOvr><a:masterClrMapping/></p:clrMapOvr></p:notes>
 </file>
 
-<file path=ppt/notesSlides/notesSlide11.xml><?xml version="1.0" encoding="utf-8"?>
-<p:notes xmlns:a="http://schemas.openxmlformats.org/drawingml/2006/main" xmlns:r="http://schemas.openxmlformats.org/officeDocument/2006/relationships" xmlns:p="http://schemas.openxmlformats.org/presentationml/2006/main">
-  <p:cSld>
-    <p:spTree>
-      <p:nvGrpSpPr>
-        <p:cNvPr id="1" name=""/>
-        <p:cNvGrpSpPr/>
-        <p:nvPr/>
-      </p:nvGrpSpPr>
-      <p:grpSpPr>
-        <a:xfrm>
-          <a:off x="0" y="0"/>
-          <a:ext cx="0" cy="0"/>
-          <a:chOff x="0" y="0"/>
-          <a:chExt cx="0" cy="0"/>
-        </a:xfrm>
-      </p:grpSpPr>
-      <p:sp>
-        <p:nvSpPr>
-          <p:cNvPr id="2" name="Slide Image Placeholder 1"/>
-          <p:cNvSpPr>
-            <a:spLocks noGrp="1" noRot="1" noChangeAspect="1"/>
-          </p:cNvSpPr>
-          <p:nvPr>
-            <p:ph type="sldImg"/>
-          </p:nvPr>
-        </p:nvSpPr>
-        <p:spPr/>
-      </p:sp>
-      <p:sp>
-        <p:nvSpPr>
-          <p:cNvPr id="3" name="Notes Placeholder 2"/>
-          <p:cNvSpPr>
-            <a:spLocks noGrp="1"/>
-          </p:cNvSpPr>
-          <p:nvPr>
-            <p:ph type="body" idx="1"/>
-          </p:nvPr>
-        </p:nvSpPr>
-        <p:spPr/>
-        <p:txBody>
-          <a:bodyPr/>
-          <a:lstStyle/>
-          <a:p>
-            <a:r>
-              <a:rPr lang="en-US" dirty="0"/>
-              <a:t>（4:25–4:45）一百天怎么落地。第三步是设计来证伪自己的：拿报关单回来验落地价，误差超过 20% 就得重做税则模型。</a:t>
-            </a:r>
-            <a:endParaRPr lang="en-US" dirty="0"/>
-          </a:p>
-        </p:txBody>
-      </p:sp>
-      <p:sp>
-        <p:nvSpPr>
-          <p:cNvPr id="4" name="Slide Number Placeholder 3"/>
-          <p:cNvSpPr>
-            <a:spLocks noGrp="1"/>
-          </p:cNvSpPr>
-          <p:nvPr>
-            <p:ph type="sldNum" sz="quarter" idx="10"/>
-          </p:nvPr>
-        </p:nvSpPr>
-        <p:spPr/>
-        <p:txBody>
-          <a:bodyPr/>
-          <a:lstStyle/>
-          <a:p>
-            <a:fld id="{F7021451-1387-4CA6-816F-3879F97B5CBC}" type="slidenum">
-              <a:rPr lang="en-US"/>
-              <a:t>11</a:t>
-            </a:fld>
-            <a:endParaRPr lang="en-US"/>
-          </a:p>
-        </p:txBody>
-      </p:sp>
-    </p:spTree>
-    <p:extLst>
-      <p:ext uri="{BB962C8B-B14F-4D97-AF65-F5344CB8AC3E}">
-        <p14:creationId xmlns:p14="http://schemas.microsoft.com/office/powerpoint/2010/main" val="1024086991"/>
-      </p:ext>
-    </p:extLst>
-  </p:cSld>
-  <p:clrMapOvr>
-    <a:masterClrMapping/>
-  </p:clrMapOvr>
-</p:notes>
+<file path=ppt/notesSlides/notesSlide11.xml><?xml version="1.0" encoding="UTF-8" standalone="yes"?>
+<p:notes xmlns:a="http://schemas.openxmlformats.org/drawingml/2006/main" xmlns:r="http://schemas.openxmlformats.org/officeDocument/2006/relationships" xmlns:p="http://schemas.openxmlformats.org/presentationml/2006/main"><p:cSld><p:spTree><p:nvGrpSpPr><p:cNvPr id="1" name=""/><p:cNvGrpSpPr/><p:nvPr/></p:nvGrpSpPr><p:grpSpPr><a:xfrm><a:off x="0" y="0"/><a:ext cx="0" cy="0"/><a:chOff x="0" y="0"/><a:chExt cx="0" cy="0"/></a:xfrm></p:grpSpPr><p:sp><p:nvSpPr><p:cNvPr id="2" name="Slide Image Placeholder 1"/><p:cNvSpPr><a:spLocks noGrp="1" noRot="1" noChangeAspect="1"/></p:cNvSpPr><p:nvPr><p:ph type="sldImg"/></p:nvPr></p:nvSpPr><p:spPr/></p:sp><p:sp><p:nvSpPr><p:cNvPr id="3" name="Notes Placeholder 2"/><p:cNvSpPr><a:spLocks noGrp="1"/></p:cNvSpPr><p:nvPr><p:ph type="body" idx="1"/></p:nvPr></p:nvSpPr><p:spPr/><p:txBody><a:bodyPr/><a:lstStyle/><a:p><a:r><a:rPr lang="en-US" dirty="0"/><a:t>（4:30–4:48）+接下来一百天，第三步是设计来证伪我们自己的：+跟三家走完一次首单，拿报关单回来验落地价。+误差百分之五以内这工具就能用，+差到百分之二十，税则模型就得重做。</a:t></a:r><a:endParaRPr lang="en-US" dirty="0"/></a:p></p:txBody></p:sp><p:sp><p:nvSpPr><p:cNvPr id="4" name="Slide Number Placeholder 3"/><p:cNvSpPr><a:spLocks noGrp="1"/></p:cNvSpPr><p:nvPr><p:ph type="sldNum" sz="quarter" idx="10"/></p:nvPr></p:nvSpPr><p:spPr/><p:txBody><a:bodyPr/><a:lstStyle/><a:p><a:fld id="{F7021451-1387-4CA6-816F-3879F97B5CBC}" type="slidenum"><a:rPr lang="en-US"/><a:t>11</a:t></a:fld><a:endParaRPr lang="en-US"/></a:p></p:txBody></p:sp></p:spTree><p:extLst><p:ext uri="{BB962C8B-B14F-4D97-AF65-F5344CB8AC3E}"><p14:creationId xmlns:p14="http://schemas.microsoft.com/office/powerpoint/2010/main" val="1024086991"/></p:ext></p:extLst></p:cSld><p:clrMapOvr><a:masterClrMapping/></p:clrMapOvr></p:notes>
 </file>
 
-<file path=ppt/notesSlides/notesSlide12.xml><?xml version="1.0" encoding="utf-8"?>
-<p:notes xmlns:a="http://schemas.openxmlformats.org/drawingml/2006/main" xmlns:r="http://schemas.openxmlformats.org/officeDocument/2006/relationships" xmlns:p="http://schemas.openxmlformats.org/presentationml/2006/main">
-  <p:cSld>
-    <p:spTree>
-      <p:nvGrpSpPr>
-        <p:cNvPr id="1" name=""/>
-        <p:cNvGrpSpPr/>
-        <p:nvPr/>
-      </p:nvGrpSpPr>
-      <p:grpSpPr>
-        <a:xfrm>
-          <a:off x="0" y="0"/>
-          <a:ext cx="0" cy="0"/>
-          <a:chOff x="0" y="0"/>
-          <a:chExt cx="0" cy="0"/>
-        </a:xfrm>
-      </p:grpSpPr>
-      <p:sp>
-        <p:nvSpPr>
-          <p:cNvPr id="2" name="Slide Image Placeholder 1"/>
-          <p:cNvSpPr>
-            <a:spLocks noGrp="1" noRot="1" noChangeAspect="1"/>
-          </p:cNvSpPr>
-          <p:nvPr>
-            <p:ph type="sldImg"/>
-          </p:nvPr>
-        </p:nvSpPr>
-        <p:spPr/>
-      </p:sp>
-      <p:sp>
-        <p:nvSpPr>
-          <p:cNvPr id="3" name="Notes Placeholder 2"/>
-          <p:cNvSpPr>
-            <a:spLocks noGrp="1"/>
-          </p:cNvSpPr>
-          <p:nvPr>
-            <p:ph type="body" idx="1"/>
-          </p:nvPr>
-        </p:nvSpPr>
-        <p:spPr/>
-        <p:txBody>
-          <a:bodyPr/>
-          <a:lstStyle/>
-          <a:p>
-            <a:r>
-              <a:rPr lang="en-US" dirty="0"/>
-              <a:t>（4:45–5:00）收尾。
-出海不缺第一单，缺的是第二单。货在他仓里没动，他就不会再下单——而你到那时才知道，已经晚了九十天。
-谢谢。</a:t>
-            </a:r>
-            <a:endParaRPr lang="en-US" dirty="0"/>
-          </a:p>
-        </p:txBody>
-      </p:sp>
-      <p:sp>
-        <p:nvSpPr>
-          <p:cNvPr id="4" name="Slide Number Placeholder 3"/>
-          <p:cNvSpPr>
-            <a:spLocks noGrp="1"/>
-          </p:cNvSpPr>
-          <p:nvPr>
-            <p:ph type="sldNum" sz="quarter" idx="10"/>
-          </p:nvPr>
-        </p:nvSpPr>
-        <p:spPr/>
-        <p:txBody>
-          <a:bodyPr/>
-          <a:lstStyle/>
-          <a:p>
-            <a:fld id="{F7021451-1387-4CA6-816F-3879F97B5CBC}" type="slidenum">
-              <a:rPr lang="en-US"/>
-              <a:t>12</a:t>
-            </a:fld>
-            <a:endParaRPr lang="en-US"/>
-          </a:p>
-        </p:txBody>
-      </p:sp>
-    </p:spTree>
-    <p:extLst>
-      <p:ext uri="{BB962C8B-B14F-4D97-AF65-F5344CB8AC3E}">
-        <p14:creationId xmlns:p14="http://schemas.microsoft.com/office/powerpoint/2010/main" val="1024086991"/>
-      </p:ext>
-    </p:extLst>
-  </p:cSld>
-  <p:clrMapOvr>
-    <a:masterClrMapping/>
-  </p:clrMapOvr>
-</p:notes>
+<file path=ppt/notesSlides/notesSlide12.xml><?xml version="1.0" encoding="UTF-8" standalone="yes"?>
+<p:notes xmlns:a="http://schemas.openxmlformats.org/drawingml/2006/main" xmlns:r="http://schemas.openxmlformats.org/officeDocument/2006/relationships" xmlns:p="http://schemas.openxmlformats.org/presentationml/2006/main"><p:cSld><p:spTree><p:nvGrpSpPr><p:cNvPr id="1" name=""/><p:cNvGrpSpPr/><p:nvPr/></p:nvGrpSpPr><p:grpSpPr><a:xfrm><a:off x="0" y="0"/><a:ext cx="0" cy="0"/><a:chOff x="0" y="0"/><a:chExt cx="0" cy="0"/></a:xfrm></p:grpSpPr><p:sp><p:nvSpPr><p:cNvPr id="2" name="Slide Image Placeholder 1"/><p:cNvSpPr><a:spLocks noGrp="1" noRot="1" noChangeAspect="1"/></p:cNvSpPr><p:nvPr><p:ph type="sldImg"/></p:nvPr></p:nvSpPr><p:spPr/></p:sp><p:sp><p:nvSpPr><p:cNvPr id="3" name="Notes Placeholder 2"/><p:cNvSpPr><a:spLocks noGrp="1"/></p:cNvSpPr><p:nvPr><p:ph type="body" idx="1"/></p:nvPr></p:nvSpPr><p:spPr/><p:txBody><a:bodyPr/><a:lstStyle/><a:p><a:r><a:rPr lang="en-US" dirty="0"/><a:t>（4:48–5:00）+最后一句话。+出海不缺第一单。缺的是第二单。+货在他仓里没动，他就不会再下单——+而你到那时才知道，已经晚了九十天。+谢谢。</a:t></a:r><a:endParaRPr lang="en-US" dirty="0"/></a:p></p:txBody></p:sp><p:sp><p:nvSpPr><p:cNvPr id="4" name="Slide Number Placeholder 3"/><p:cNvSpPr><a:spLocks noGrp="1"/></p:cNvSpPr><p:nvPr><p:ph type="sldNum" sz="quarter" idx="10"/></p:nvPr></p:nvSpPr><p:spPr/><p:txBody><a:bodyPr/><a:lstStyle/><a:p><a:fld id="{F7021451-1387-4CA6-816F-3879F97B5CBC}" type="slidenum"><a:rPr lang="en-US"/><a:t>12</a:t></a:fld><a:endParaRPr lang="en-US"/></a:p></p:txBody></p:sp></p:spTree><p:extLst><p:ext uri="{BB962C8B-B14F-4D97-AF65-F5344CB8AC3E}"><p14:creationId xmlns:p14="http://schemas.microsoft.com/office/powerpoint/2010/main" val="1024086991"/></p:ext></p:extLst></p:cSld><p:clrMapOvr><a:masterClrMapping/></p:clrMapOvr></p:notes>
 </file>
 
 <file path=ppt/notesSlides/notesSlide13.xml><?xml version="1.0" encoding="utf-8"?>
@@ -880,7 +558,7 @@
           <a:p>
             <a:r>
               <a:rPr lang="en-US" dirty="0"/>
-              <a:t/>
+              <a:t>以下不参与五分钟路演。评委提问时直接跳到对应页。</a:t>
             </a:r>
             <a:endParaRPr lang="en-US" dirty="0"/>
           </a:p>
@@ -922,356 +600,24 @@
 </p:notes>
 </file>
 
-<file path=ppt/notesSlides/notesSlide14.xml><?xml version="1.0" encoding="utf-8"?>
-<p:notes xmlns:a="http://schemas.openxmlformats.org/drawingml/2006/main" xmlns:r="http://schemas.openxmlformats.org/officeDocument/2006/relationships" xmlns:p="http://schemas.openxmlformats.org/presentationml/2006/main">
-  <p:cSld>
-    <p:spTree>
-      <p:nvGrpSpPr>
-        <p:cNvPr id="1" name=""/>
-        <p:cNvGrpSpPr/>
-        <p:nvPr/>
-      </p:nvGrpSpPr>
-      <p:grpSpPr>
-        <a:xfrm>
-          <a:off x="0" y="0"/>
-          <a:ext cx="0" cy="0"/>
-          <a:chOff x="0" y="0"/>
-          <a:chExt cx="0" cy="0"/>
-        </a:xfrm>
-      </p:grpSpPr>
-      <p:sp>
-        <p:nvSpPr>
-          <p:cNvPr id="2" name="Slide Image Placeholder 1"/>
-          <p:cNvSpPr>
-            <a:spLocks noGrp="1" noRot="1" noChangeAspect="1"/>
-          </p:cNvSpPr>
-          <p:nvPr>
-            <p:ph type="sldImg"/>
-          </p:nvPr>
-        </p:nvSpPr>
-        <p:spPr/>
-      </p:sp>
-      <p:sp>
-        <p:nvSpPr>
-          <p:cNvPr id="3" name="Notes Placeholder 2"/>
-          <p:cNvSpPr>
-            <a:spLocks noGrp="1"/>
-          </p:cNvSpPr>
-          <p:nvPr>
-            <p:ph type="body" idx="1"/>
-          </p:nvPr>
-        </p:nvSpPr>
-        <p:spPr/>
-        <p:txBody>
-          <a:bodyPr/>
-          <a:lstStyle/>
-          <a:p>
-            <a:r>
-              <a:rPr lang="en-US" dirty="0"/>
-              <a:t/>
-            </a:r>
-            <a:endParaRPr lang="en-US" dirty="0"/>
-          </a:p>
-        </p:txBody>
-      </p:sp>
-      <p:sp>
-        <p:nvSpPr>
-          <p:cNvPr id="4" name="Slide Number Placeholder 3"/>
-          <p:cNvSpPr>
-            <a:spLocks noGrp="1"/>
-          </p:cNvSpPr>
-          <p:nvPr>
-            <p:ph type="sldNum" sz="quarter" idx="10"/>
-          </p:nvPr>
-        </p:nvSpPr>
-        <p:spPr/>
-        <p:txBody>
-          <a:bodyPr/>
-          <a:lstStyle/>
-          <a:p>
-            <a:fld id="{F7021451-1387-4CA6-816F-3879F97B5CBC}" type="slidenum">
-              <a:rPr lang="en-US"/>
-              <a:t>14</a:t>
-            </a:fld>
-            <a:endParaRPr lang="en-US"/>
-          </a:p>
-        </p:txBody>
-      </p:sp>
-    </p:spTree>
-    <p:extLst>
-      <p:ext uri="{BB962C8B-B14F-4D97-AF65-F5344CB8AC3E}">
-        <p14:creationId xmlns:p14="http://schemas.microsoft.com/office/powerpoint/2010/main" val="1024086991"/>
-      </p:ext>
-    </p:extLst>
-  </p:cSld>
-  <p:clrMapOvr>
-    <a:masterClrMapping/>
-  </p:clrMapOvr>
-</p:notes>
+<file path=ppt/notesSlides/notesSlide14.xml><?xml version="1.0" encoding="UTF-8" standalone="yes"?>
+<p:notes xmlns:a="http://schemas.openxmlformats.org/drawingml/2006/main" xmlns:r="http://schemas.openxmlformats.org/officeDocument/2006/relationships" xmlns:p="http://schemas.openxmlformats.org/presentationml/2006/main"><p:cSld><p:spTree><p:nvGrpSpPr><p:cNvPr id="1" name=""/><p:cNvGrpSpPr/><p:nvPr/></p:nvGrpSpPr><p:grpSpPr><a:xfrm><a:off x="0" y="0"/><a:ext cx="0" cy="0"/><a:chOff x="0" y="0"/><a:chExt cx="0" cy="0"/></a:xfrm></p:grpSpPr><p:sp><p:nvSpPr><p:cNvPr id="2" name="Slide Image Placeholder 1"/><p:cNvSpPr><a:spLocks noGrp="1" noRot="1" noChangeAspect="1"/></p:cNvSpPr><p:nvPr><p:ph type="sldImg"/></p:nvPr></p:nvSpPr><p:spPr/></p:sp><p:sp><p:nvSpPr><p:cNvPr id="3" name="Notes Placeholder 2"/><p:cNvSpPr><a:spLocks noGrp="1"/></p:cNvSpPr><p:nvPr><p:ph type="body" idx="1"/></p:nvPr></p:nvSpPr><p:spPr/><p:txBody><a:bodyPr/><a:lstStyle/><a:p><a:r><a:rPr lang="en-US" dirty="0"/><a:t>怎么答：不要辩护「我们的数字很准」，直接说「不保证对，保证可查」，然后当场演示 ⓘ 弹出的来源与生效日期。+如果被追问日本／欧盟：坦白说没收，因为公开资料表述不够明确，收一条不确定的税率会毁掉整个规则库的可信度。</a:t></a:r><a:endParaRPr lang="en-US" dirty="0"/></a:p></p:txBody></p:sp><p:sp><p:nvSpPr><p:cNvPr id="4" name="Slide Number Placeholder 3"/><p:cNvSpPr><a:spLocks noGrp="1"/></p:cNvSpPr><p:nvPr><p:ph type="sldNum" sz="quarter" idx="10"/></p:nvPr></p:nvSpPr><p:spPr/><p:txBody><a:bodyPr/><a:lstStyle/><a:p><a:fld id="{F7021451-1387-4CA6-816F-3879F97B5CBC}" type="slidenum"><a:rPr lang="en-US"/><a:t>14</a:t></a:fld><a:endParaRPr lang="en-US"/></a:p></p:txBody></p:sp></p:spTree><p:extLst><p:ext uri="{BB962C8B-B14F-4D97-AF65-F5344CB8AC3E}"><p14:creationId xmlns:p14="http://schemas.microsoft.com/office/powerpoint/2010/main" val="1024086991"/></p:ext></p:extLst></p:cSld><p:clrMapOvr><a:masterClrMapping/></p:clrMapOvr></p:notes>
 </file>
 
-<file path=ppt/notesSlides/notesSlide15.xml><?xml version="1.0" encoding="utf-8"?>
-<p:notes xmlns:a="http://schemas.openxmlformats.org/drawingml/2006/main" xmlns:r="http://schemas.openxmlformats.org/officeDocument/2006/relationships" xmlns:p="http://schemas.openxmlformats.org/presentationml/2006/main">
-  <p:cSld>
-    <p:spTree>
-      <p:nvGrpSpPr>
-        <p:cNvPr id="1" name=""/>
-        <p:cNvGrpSpPr/>
-        <p:nvPr/>
-      </p:nvGrpSpPr>
-      <p:grpSpPr>
-        <a:xfrm>
-          <a:off x="0" y="0"/>
-          <a:ext cx="0" cy="0"/>
-          <a:chOff x="0" y="0"/>
-          <a:chExt cx="0" cy="0"/>
-        </a:xfrm>
-      </p:grpSpPr>
-      <p:sp>
-        <p:nvSpPr>
-          <p:cNvPr id="2" name="Slide Image Placeholder 1"/>
-          <p:cNvSpPr>
-            <a:spLocks noGrp="1" noRot="1" noChangeAspect="1"/>
-          </p:cNvSpPr>
-          <p:nvPr>
-            <p:ph type="sldImg"/>
-          </p:nvPr>
-        </p:nvSpPr>
-        <p:spPr/>
-      </p:sp>
-      <p:sp>
-        <p:nvSpPr>
-          <p:cNvPr id="3" name="Notes Placeholder 2"/>
-          <p:cNvSpPr>
-            <a:spLocks noGrp="1"/>
-          </p:cNvSpPr>
-          <p:nvPr>
-            <p:ph type="body" idx="1"/>
-          </p:nvPr>
-        </p:nvSpPr>
-        <p:spPr/>
-        <p:txBody>
-          <a:bodyPr/>
-          <a:lstStyle/>
-          <a:p>
-            <a:r>
-              <a:rPr lang="en-US" dirty="0"/>
-              <a:t/>
-            </a:r>
-            <a:endParaRPr lang="en-US" dirty="0"/>
-          </a:p>
-        </p:txBody>
-      </p:sp>
-      <p:sp>
-        <p:nvSpPr>
-          <p:cNvPr id="4" name="Slide Number Placeholder 3"/>
-          <p:cNvSpPr>
-            <a:spLocks noGrp="1"/>
-          </p:cNvSpPr>
-          <p:nvPr>
-            <p:ph type="sldNum" sz="quarter" idx="10"/>
-          </p:nvPr>
-        </p:nvSpPr>
-        <p:spPr/>
-        <p:txBody>
-          <a:bodyPr/>
-          <a:lstStyle/>
-          <a:p>
-            <a:fld id="{F7021451-1387-4CA6-816F-3879F97B5CBC}" type="slidenum">
-              <a:rPr lang="en-US"/>
-              <a:t>15</a:t>
-            </a:fld>
-            <a:endParaRPr lang="en-US"/>
-          </a:p>
-        </p:txBody>
-      </p:sp>
-    </p:spTree>
-    <p:extLst>
-      <p:ext uri="{BB962C8B-B14F-4D97-AF65-F5344CB8AC3E}">
-        <p14:creationId xmlns:p14="http://schemas.microsoft.com/office/powerpoint/2010/main" val="1024086991"/>
-      </p:ext>
-    </p:extLst>
-  </p:cSld>
-  <p:clrMapOvr>
-    <a:masterClrMapping/>
-  </p:clrMapOvr>
-</p:notes>
+<file path=ppt/notesSlides/notesSlide15.xml><?xml version="1.0" encoding="UTF-8" standalone="yes"?>
+<p:notes xmlns:a="http://schemas.openxmlformats.org/drawingml/2006/main" xmlns:r="http://schemas.openxmlformats.org/officeDocument/2006/relationships" xmlns:p="http://schemas.openxmlformats.org/presentationml/2006/main"><p:cSld><p:spTree><p:nvGrpSpPr><p:cNvPr id="1" name=""/><p:cNvGrpSpPr/><p:nvPr/></p:nvGrpSpPr><p:grpSpPr><a:xfrm><a:off x="0" y="0"/><a:ext cx="0" cy="0"/><a:chOff x="0" y="0"/><a:chExt cx="0" cy="0"/></a:xfrm></p:grpSpPr><p:sp><p:nvSpPr><p:cNvPr id="2" name="Slide Image Placeholder 1"/><p:cNvSpPr><a:spLocks noGrp="1" noRot="1" noChangeAspect="1"/></p:cNvSpPr><p:nvPr><p:ph type="sldImg"/></p:nvPr></p:nvSpPr><p:spPr/></p:sp><p:sp><p:nvSpPr><p:cNvPr id="3" name="Notes Placeholder 2"/><p:cNvSpPr><a:spLocks noGrp="1"/></p:cNvSpPr><p:nvPr><p:ph type="body" idx="1"/></p:nvPr></p:nvSpPr><p:spPr/><p:txBody><a:bodyPr/><a:lstStyle/><a:p><a:r><a:rPr lang="en-US" dirty="0"/><a:t>怎么答：这题几乎一定会被问。三个字回答——细节、稳定、可追溯。+最有杀伤力的是当场对比：让评委用手机问通用模型「白酒出口新加坡税负多少」，多半会得到一个区间；我们给的是按纯酒精量算出来的具体数字，附税则出处。</a:t></a:r><a:endParaRPr lang="en-US" dirty="0"/></a:p></p:txBody></p:sp><p:sp><p:nvSpPr><p:cNvPr id="4" name="Slide Number Placeholder 3"/><p:cNvSpPr><a:spLocks noGrp="1"/></p:cNvSpPr><p:nvPr><p:ph type="sldNum" sz="quarter" idx="10"/></p:nvPr></p:nvSpPr><p:spPr/><p:txBody><a:bodyPr/><a:lstStyle/><a:p><a:fld id="{F7021451-1387-4CA6-816F-3879F97B5CBC}" type="slidenum"><a:rPr lang="en-US"/><a:t>15</a:t></a:fld><a:endParaRPr lang="en-US"/></a:p></p:txBody></p:sp></p:spTree><p:extLst><p:ext uri="{BB962C8B-B14F-4D97-AF65-F5344CB8AC3E}"><p14:creationId xmlns:p14="http://schemas.microsoft.com/office/powerpoint/2010/main" val="1024086991"/></p:ext></p:extLst></p:cSld><p:clrMapOvr><a:masterClrMapping/></p:clrMapOvr></p:notes>
 </file>
 
-<file path=ppt/notesSlides/notesSlide16.xml><?xml version="1.0" encoding="utf-8"?>
-<p:notes xmlns:a="http://schemas.openxmlformats.org/drawingml/2006/main" xmlns:r="http://schemas.openxmlformats.org/officeDocument/2006/relationships" xmlns:p="http://schemas.openxmlformats.org/presentationml/2006/main">
-  <p:cSld>
-    <p:spTree>
-      <p:nvGrpSpPr>
-        <p:cNvPr id="1" name=""/>
-        <p:cNvGrpSpPr/>
-        <p:nvPr/>
-      </p:nvGrpSpPr>
-      <p:grpSpPr>
-        <a:xfrm>
-          <a:off x="0" y="0"/>
-          <a:ext cx="0" cy="0"/>
-          <a:chOff x="0" y="0"/>
-          <a:chExt cx="0" cy="0"/>
-        </a:xfrm>
-      </p:grpSpPr>
-      <p:sp>
-        <p:nvSpPr>
-          <p:cNvPr id="2" name="Slide Image Placeholder 1"/>
-          <p:cNvSpPr>
-            <a:spLocks noGrp="1" noRot="1" noChangeAspect="1"/>
-          </p:cNvSpPr>
-          <p:nvPr>
-            <p:ph type="sldImg"/>
-          </p:nvPr>
-        </p:nvSpPr>
-        <p:spPr/>
-      </p:sp>
-      <p:sp>
-        <p:nvSpPr>
-          <p:cNvPr id="3" name="Notes Placeholder 2"/>
-          <p:cNvSpPr>
-            <a:spLocks noGrp="1"/>
-          </p:cNvSpPr>
-          <p:nvPr>
-            <p:ph type="body" idx="1"/>
-          </p:nvPr>
-        </p:nvSpPr>
-        <p:spPr/>
-        <p:txBody>
-          <a:bodyPr/>
-          <a:lstStyle/>
-          <a:p>
-            <a:r>
-              <a:rPr lang="en-US" dirty="0"/>
-              <a:t/>
-            </a:r>
-            <a:endParaRPr lang="en-US" dirty="0"/>
-          </a:p>
-        </p:txBody>
-      </p:sp>
-      <p:sp>
-        <p:nvSpPr>
-          <p:cNvPr id="4" name="Slide Number Placeholder 3"/>
-          <p:cNvSpPr>
-            <a:spLocks noGrp="1"/>
-          </p:cNvSpPr>
-          <p:nvPr>
-            <p:ph type="sldNum" sz="quarter" idx="10"/>
-          </p:nvPr>
-        </p:nvSpPr>
-        <p:spPr/>
-        <p:txBody>
-          <a:bodyPr/>
-          <a:lstStyle/>
-          <a:p>
-            <a:fld id="{F7021451-1387-4CA6-816F-3879F97B5CBC}" type="slidenum">
-              <a:rPr lang="en-US"/>
-              <a:t>16</a:t>
-            </a:fld>
-            <a:endParaRPr lang="en-US"/>
-          </a:p>
-        </p:txBody>
-      </p:sp>
-    </p:spTree>
-    <p:extLst>
-      <p:ext uri="{BB962C8B-B14F-4D97-AF65-F5344CB8AC3E}">
-        <p14:creationId xmlns:p14="http://schemas.microsoft.com/office/powerpoint/2010/main" val="1024086991"/>
-      </p:ext>
-    </p:extLst>
-  </p:cSld>
-  <p:clrMapOvr>
-    <a:masterClrMapping/>
-  </p:clrMapOvr>
-</p:notes>
+<file path=ppt/notesSlides/notesSlide16.xml><?xml version="1.0" encoding="UTF-8" standalone="yes"?>
+<p:notes xmlns:a="http://schemas.openxmlformats.org/drawingml/2006/main" xmlns:r="http://schemas.openxmlformats.org/officeDocument/2006/relationships" xmlns:p="http://schemas.openxmlformats.org/presentationml/2006/main"><p:cSld><p:spTree><p:nvGrpSpPr><p:cNvPr id="1" name=""/><p:cNvGrpSpPr/><p:nvPr/></p:nvGrpSpPr><p:grpSpPr><a:xfrm><a:off x="0" y="0"/><a:ext cx="0" cy="0"/><a:chOff x="0" y="0"/><a:chExt cx="0" cy="0"/></a:xfrm></p:grpSpPr><p:sp><p:nvSpPr><p:cNvPr id="2" name="Slide Image Placeholder 1"/><p:cNvSpPr><a:spLocks noGrp="1" noRot="1" noChangeAspect="1"/></p:cNvSpPr><p:nvPr><p:ph type="sldImg"/></p:nvPr></p:nvSpPr><p:spPr/></p:sp><p:sp><p:nvSpPr><p:cNvPr id="3" name="Notes Placeholder 2"/><p:cNvSpPr><a:spLocks noGrp="1"/></p:cNvSpPr><p:nvPr><p:ph type="body" idx="1"/></p:nvPr></p:nvSpPr><p:spPr/><p:txBody><a:bodyPr/><a:lstStyle/><a:p><a:r><a:rPr lang="en-US" dirty="0"/><a:t>怎么答：不要硬编商业模式。先承认「现在谈还太早」，再给唯一现实的入口——产区服务平台。+如果评委追问「那你们靠什么活」：中小酒企不会为网页付费，会为「少亏一柜」付费，所以第一步是把误差验出来。</a:t></a:r><a:endParaRPr lang="en-US" dirty="0"/></a:p></p:txBody></p:sp><p:sp><p:nvSpPr><p:cNvPr id="4" name="Slide Number Placeholder 3"/><p:cNvSpPr><a:spLocks noGrp="1"/></p:cNvSpPr><p:nvPr><p:ph type="sldNum" sz="quarter" idx="10"/></p:nvPr></p:nvSpPr><p:spPr/><p:txBody><a:bodyPr/><a:lstStyle/><a:p><a:fld id="{F7021451-1387-4CA6-816F-3879F97B5CBC}" type="slidenum"><a:rPr lang="en-US"/><a:t>16</a:t></a:fld><a:endParaRPr lang="en-US"/></a:p></p:txBody></p:sp></p:spTree><p:extLst><p:ext uri="{BB962C8B-B14F-4D97-AF65-F5344CB8AC3E}"><p14:creationId xmlns:p14="http://schemas.microsoft.com/office/powerpoint/2010/main" val="1024086991"/></p:ext></p:extLst></p:cSld><p:clrMapOvr><a:masterClrMapping/></p:clrMapOvr></p:notes>
 </file>
 
-<file path=ppt/notesSlides/notesSlide17.xml><?xml version="1.0" encoding="utf-8"?>
-<p:notes xmlns:a="http://schemas.openxmlformats.org/drawingml/2006/main" xmlns:r="http://schemas.openxmlformats.org/officeDocument/2006/relationships" xmlns:p="http://schemas.openxmlformats.org/presentationml/2006/main">
-  <p:cSld>
-    <p:spTree>
-      <p:nvGrpSpPr>
-        <p:cNvPr id="1" name=""/>
-        <p:cNvGrpSpPr/>
-        <p:nvPr/>
-      </p:nvGrpSpPr>
-      <p:grpSpPr>
-        <a:xfrm>
-          <a:off x="0" y="0"/>
-          <a:ext cx="0" cy="0"/>
-          <a:chOff x="0" y="0"/>
-          <a:chExt cx="0" cy="0"/>
-        </a:xfrm>
-      </p:grpSpPr>
-      <p:sp>
-        <p:nvSpPr>
-          <p:cNvPr id="2" name="Slide Image Placeholder 1"/>
-          <p:cNvSpPr>
-            <a:spLocks noGrp="1" noRot="1" noChangeAspect="1"/>
-          </p:cNvSpPr>
-          <p:nvPr>
-            <p:ph type="sldImg"/>
-          </p:nvPr>
-        </p:nvSpPr>
-        <p:spPr/>
-      </p:sp>
-      <p:sp>
-        <p:nvSpPr>
-          <p:cNvPr id="3" name="Notes Placeholder 2"/>
-          <p:cNvSpPr>
-            <a:spLocks noGrp="1"/>
-          </p:cNvSpPr>
-          <p:nvPr>
-            <p:ph type="body" idx="1"/>
-          </p:nvPr>
-        </p:nvSpPr>
-        <p:spPr/>
-        <p:txBody>
-          <a:bodyPr/>
-          <a:lstStyle/>
-          <a:p>
-            <a:r>
-              <a:rPr lang="en-US" dirty="0"/>
-              <a:t/>
-            </a:r>
-            <a:endParaRPr lang="en-US" dirty="0"/>
-          </a:p>
-        </p:txBody>
-      </p:sp>
-      <p:sp>
-        <p:nvSpPr>
-          <p:cNvPr id="4" name="Slide Number Placeholder 3"/>
-          <p:cNvSpPr>
-            <a:spLocks noGrp="1"/>
-          </p:cNvSpPr>
-          <p:nvPr>
-            <p:ph type="sldNum" sz="quarter" idx="10"/>
-          </p:nvPr>
-        </p:nvSpPr>
-        <p:spPr/>
-        <p:txBody>
-          <a:bodyPr/>
-          <a:lstStyle/>
-          <a:p>
-            <a:fld id="{F7021451-1387-4CA6-816F-3879F97B5CBC}" type="slidenum">
-              <a:rPr lang="en-US"/>
-              <a:t>17</a:t>
-            </a:fld>
-            <a:endParaRPr lang="en-US"/>
-          </a:p>
-        </p:txBody>
-      </p:sp>
-    </p:spTree>
-    <p:extLst>
-      <p:ext uri="{BB962C8B-B14F-4D97-AF65-F5344CB8AC3E}">
-        <p14:creationId xmlns:p14="http://schemas.microsoft.com/office/powerpoint/2010/main" val="1024086991"/>
-      </p:ext>
-    </p:extLst>
-  </p:cSld>
-  <p:clrMapOvr>
-    <a:masterClrMapping/>
-  </p:clrMapOvr>
-</p:notes>
+<file path=ppt/notesSlides/notesSlide17.xml><?xml version="1.0" encoding="UTF-8" standalone="yes"?>
+<p:notes xmlns:a="http://schemas.openxmlformats.org/drawingml/2006/main" xmlns:r="http://schemas.openxmlformats.org/officeDocument/2006/relationships" xmlns:p="http://schemas.openxmlformats.org/presentationml/2006/main"><p:cSld><p:spTree><p:nvGrpSpPr><p:cNvPr id="1" name=""/><p:cNvGrpSpPr/><p:nvPr/></p:nvGrpSpPr><p:grpSpPr><a:xfrm><a:off x="0" y="0"/><a:ext cx="0" cy="0"/><a:chOff x="0" y="0"/><a:chExt cx="0" cy="0"/></a:xfrm></p:grpSpPr><p:sp><p:nvSpPr><p:cNvPr id="2" name="Slide Image Placeholder 1"/><p:cNvSpPr><a:spLocks noGrp="1" noRot="1" noChangeAspect="1"/></p:cNvSpPr><p:nvPr><p:ph type="sldImg"/></p:nvPr></p:nvSpPr><p:spPr/></p:sp><p:sp><p:nvSpPr><p:cNvPr id="3" name="Notes Placeholder 2"/><p:cNvSpPr><a:spLocks noGrp="1"/></p:cNvSpPr><p:nvPr><p:ph type="body" idx="1"/></p:nvPr></p:nvSpPr><p:spPr/><p:txBody><a:bodyPr/><a:lstStyle/><a:p><a:r><a:rPr lang="en-US" dirty="0"/><a:t>怎么答：分两层——官方公开资料（税则牌照）和团队自建数据库（品项与用法，每条标注证据强度）。+强调五十六支贵州白酒是逐支核过的，不是抓的。</a:t></a:r><a:endParaRPr lang="en-US" dirty="0"/></a:p></p:txBody></p:sp><p:sp><p:nvSpPr><p:cNvPr id="4" name="Slide Number Placeholder 3"/><p:cNvSpPr><a:spLocks noGrp="1"/></p:cNvSpPr><p:nvPr><p:ph type="sldNum" sz="quarter" idx="10"/></p:nvPr></p:nvSpPr><p:spPr/><p:txBody><a:bodyPr/><a:lstStyle/><a:p><a:fld id="{F7021451-1387-4CA6-816F-3879F97B5CBC}" type="slidenum"><a:rPr lang="en-US"/><a:t>17</a:t></a:fld><a:endParaRPr lang="en-US"/></a:p></p:txBody></p:sp></p:spTree><p:extLst><p:ext uri="{BB962C8B-B14F-4D97-AF65-F5344CB8AC3E}"><p14:creationId xmlns:p14="http://schemas.microsoft.com/office/powerpoint/2010/main" val="1024086991"/></p:ext></p:extLst></p:cSld><p:clrMapOvr><a:masterClrMapping/></p:clrMapOvr></p:notes>
 </file>
 
 <file path=ppt/notesSlides/notesSlide18.xml><?xml version="1.0" encoding="utf-8"?>
@@ -1320,7 +666,7 @@
           <a:p>
             <a:r>
               <a:rPr lang="en-US" dirty="0"/>
-              <a:t/>
+              <a:t>怎么答：承认网页不是终态。但要说清楚为什么先做网页——规则库、信号权重、落地价误差这三件事没验完之前，做成机器人只是把还没校准的答案推给更多人。</a:t>
             </a:r>
             <a:endParaRPr lang="en-US" dirty="0"/>
           </a:p>
@@ -1362,270 +708,26 @@
 </p:notes>
 </file>
 
-<file path=ppt/notesSlides/notesSlide19.xml><?xml version="1.0" encoding="utf-8"?>
-<p:notes xmlns:a="http://schemas.openxmlformats.org/drawingml/2006/main" xmlns:r="http://schemas.openxmlformats.org/officeDocument/2006/relationships" xmlns:p="http://schemas.openxmlformats.org/presentationml/2006/main">
-  <p:cSld>
-    <p:spTree>
-      <p:nvGrpSpPr>
-        <p:cNvPr id="1" name=""/>
-        <p:cNvGrpSpPr/>
-        <p:nvPr/>
-      </p:nvGrpSpPr>
-      <p:grpSpPr>
-        <a:xfrm>
-          <a:off x="0" y="0"/>
-          <a:ext cx="0" cy="0"/>
-          <a:chOff x="0" y="0"/>
-          <a:chExt cx="0" cy="0"/>
-        </a:xfrm>
-      </p:grpSpPr>
-      <p:sp>
-        <p:nvSpPr>
-          <p:cNvPr id="2" name="Slide Image Placeholder 1"/>
-          <p:cNvSpPr>
-            <a:spLocks noGrp="1" noRot="1" noChangeAspect="1"/>
-          </p:cNvSpPr>
-          <p:nvPr>
-            <p:ph type="sldImg"/>
-          </p:nvPr>
-        </p:nvSpPr>
-        <p:spPr/>
-      </p:sp>
-      <p:sp>
-        <p:nvSpPr>
-          <p:cNvPr id="3" name="Notes Placeholder 2"/>
-          <p:cNvSpPr>
-            <a:spLocks noGrp="1"/>
-          </p:cNvSpPr>
-          <p:nvPr>
-            <p:ph type="body" idx="1"/>
-          </p:nvPr>
-        </p:nvSpPr>
-        <p:spPr/>
-        <p:txBody>
-          <a:bodyPr/>
-          <a:lstStyle/>
-          <a:p>
-            <a:r>
-              <a:rPr lang="en-US" dirty="0"/>
-              <a:t/>
-            </a:r>
-            <a:endParaRPr lang="en-US" dirty="0"/>
-          </a:p>
-        </p:txBody>
-      </p:sp>
-      <p:sp>
-        <p:nvSpPr>
-          <p:cNvPr id="4" name="Slide Number Placeholder 3"/>
-          <p:cNvSpPr>
-            <a:spLocks noGrp="1"/>
-          </p:cNvSpPr>
-          <p:nvPr>
-            <p:ph type="sldNum" sz="quarter" idx="10"/>
-          </p:nvPr>
-        </p:nvSpPr>
-        <p:spPr/>
-        <p:txBody>
-          <a:bodyPr/>
-          <a:lstStyle/>
-          <a:p>
-            <a:fld id="{F7021451-1387-4CA6-816F-3879F97B5CBC}" type="slidenum">
-              <a:rPr lang="en-US"/>
-              <a:t>19</a:t>
-            </a:fld>
-            <a:endParaRPr lang="en-US"/>
-          </a:p>
-        </p:txBody>
-      </p:sp>
-    </p:spTree>
-    <p:extLst>
-      <p:ext uri="{BB962C8B-B14F-4D97-AF65-F5344CB8AC3E}">
-        <p14:creationId xmlns:p14="http://schemas.microsoft.com/office/powerpoint/2010/main" val="1024086991"/>
-      </p:ext>
-    </p:extLst>
-  </p:cSld>
-  <p:clrMapOvr>
-    <a:masterClrMapping/>
-  </p:clrMapOvr>
-</p:notes>
+<file path=ppt/notesSlides/notesSlide19.xml><?xml version="1.0" encoding="UTF-8" standalone="yes"?>
+<p:notes xmlns:a="http://schemas.openxmlformats.org/drawingml/2006/main" xmlns:r="http://schemas.openxmlformats.org/officeDocument/2006/relationships" xmlns:p="http://schemas.openxmlformats.org/presentationml/2006/main"><p:cSld><p:spTree><p:nvGrpSpPr><p:cNvPr id="1" name=""/><p:cNvGrpSpPr/><p:nvPr/></p:nvGrpSpPr><p:grpSpPr><a:xfrm><a:off x="0" y="0"/><a:ext cx="0" cy="0"/><a:chOff x="0" y="0"/><a:chExt cx="0" cy="0"/></a:xfrm></p:grpSpPr><p:sp><p:nvSpPr><p:cNvPr id="2" name="Slide Image Placeholder 1"/><p:cNvSpPr><a:spLocks noGrp="1" noRot="1" noChangeAspect="1"/></p:cNvSpPr><p:nvPr><p:ph type="sldImg"/></p:nvPr></p:nvSpPr><p:spPr/></p:sp><p:sp><p:nvSpPr><p:cNvPr id="3" name="Notes Placeholder 2"/><p:cNvSpPr><a:spLocks noGrp="1"/></p:cNvSpPr><p:nvPr><p:ph type="body" idx="1"/></p:nvPr></p:nvSpPr><p:spPr/><p:txBody><a:bodyPr/><a:lstStyle/><a:p><a:r><a:rPr lang="en-US" dirty="0"/><a:t>怎么答：主动说，不等被问。这一页的作用是把可信度拉起来——一个肯讲自己边界的团队，前面说的话才值得信。+最重要的一条是「信号权重还没用真实案例校准」，这也正好是一百天计划的第二步。</a:t></a:r><a:endParaRPr lang="en-US" dirty="0"/></a:p></p:txBody></p:sp><p:sp><p:nvSpPr><p:cNvPr id="4" name="Slide Number Placeholder 3"/><p:cNvSpPr><a:spLocks noGrp="1"/></p:cNvSpPr><p:nvPr><p:ph type="sldNum" sz="quarter" idx="10"/></p:nvPr></p:nvSpPr><p:spPr/><p:txBody><a:bodyPr/><a:lstStyle/><a:p><a:fld id="{F7021451-1387-4CA6-816F-3879F97B5CBC}" type="slidenum"><a:rPr lang="en-US"/><a:t>19</a:t></a:fld><a:endParaRPr lang="en-US"/></a:p></p:txBody></p:sp></p:spTree><p:extLst><p:ext uri="{BB962C8B-B14F-4D97-AF65-F5344CB8AC3E}"><p14:creationId xmlns:p14="http://schemas.microsoft.com/office/powerpoint/2010/main" val="1024086991"/></p:ext></p:extLst></p:cSld><p:clrMapOvr><a:masterClrMapping/></p:clrMapOvr></p:notes>
 </file>
 
-<file path=ppt/notesSlides/notesSlide2.xml><?xml version="1.0" encoding="utf-8"?>
-<p:notes xmlns:a="http://schemas.openxmlformats.org/drawingml/2006/main" xmlns:r="http://schemas.openxmlformats.org/officeDocument/2006/relationships" xmlns:p="http://schemas.openxmlformats.org/presentationml/2006/main">
-  <p:cSld>
-    <p:spTree>
-      <p:nvGrpSpPr>
-        <p:cNvPr id="1" name=""/>
-        <p:cNvGrpSpPr/>
-        <p:nvPr/>
-      </p:nvGrpSpPr>
-      <p:grpSpPr>
-        <a:xfrm>
-          <a:off x="0" y="0"/>
-          <a:ext cx="0" cy="0"/>
-          <a:chOff x="0" y="0"/>
-          <a:chExt cx="0" cy="0"/>
-        </a:xfrm>
-      </p:grpSpPr>
-      <p:sp>
-        <p:nvSpPr>
-          <p:cNvPr id="2" name="Slide Image Placeholder 1"/>
-          <p:cNvSpPr>
-            <a:spLocks noGrp="1" noRot="1" noChangeAspect="1"/>
-          </p:cNvSpPr>
-          <p:nvPr>
-            <p:ph type="sldImg"/>
-          </p:nvPr>
-        </p:nvSpPr>
-        <p:spPr/>
-      </p:sp>
-      <p:sp>
-        <p:nvSpPr>
-          <p:cNvPr id="3" name="Notes Placeholder 2"/>
-          <p:cNvSpPr>
-            <a:spLocks noGrp="1"/>
-          </p:cNvSpPr>
-          <p:nvPr>
-            <p:ph type="body" idx="1"/>
-          </p:nvPr>
-        </p:nvSpPr>
-        <p:spPr/>
-        <p:txBody>
-          <a:bodyPr/>
-          <a:lstStyle/>
-          <a:p>
-            <a:r>
-              <a:rPr lang="en-US" dirty="0"/>
-              <a:t>（0:20–0:55）遵义综保区 2025 年工作总结的一组罕见诚实数字。
-89 家完成出口备案，35 家有意向，11 家真的出了海，最后 5 家「建立初步联系」。转化率 5.6%。
-注意最后一级的措辞——是「建立初步联系」，不是签约，更不是复购。公开资料在这里就断了。</a:t>
-            </a:r>
-            <a:endParaRPr lang="en-US" dirty="0"/>
-          </a:p>
-        </p:txBody>
-      </p:sp>
-      <p:sp>
-        <p:nvSpPr>
-          <p:cNvPr id="4" name="Slide Number Placeholder 3"/>
-          <p:cNvSpPr>
-            <a:spLocks noGrp="1"/>
-          </p:cNvSpPr>
-          <p:nvPr>
-            <p:ph type="sldNum" sz="quarter" idx="10"/>
-          </p:nvPr>
-        </p:nvSpPr>
-        <p:spPr/>
-        <p:txBody>
-          <a:bodyPr/>
-          <a:lstStyle/>
-          <a:p>
-            <a:fld id="{F7021451-1387-4CA6-816F-3879F97B5CBC}" type="slidenum">
-              <a:rPr lang="en-US"/>
-              <a:t>2</a:t>
-            </a:fld>
-            <a:endParaRPr lang="en-US"/>
-          </a:p>
-        </p:txBody>
-      </p:sp>
-    </p:spTree>
-    <p:extLst>
-      <p:ext uri="{BB962C8B-B14F-4D97-AF65-F5344CB8AC3E}">
-        <p14:creationId xmlns:p14="http://schemas.microsoft.com/office/powerpoint/2010/main" val="1024086991"/>
-      </p:ext>
-    </p:extLst>
-  </p:cSld>
-  <p:clrMapOvr>
-    <a:masterClrMapping/>
-  </p:clrMapOvr>
-</p:notes>
+<file path=ppt/notesSlides/notesSlide2.xml><?xml version="1.0" encoding="UTF-8" standalone="yes"?>
+<p:notes xmlns:a="http://schemas.openxmlformats.org/drawingml/2006/main" xmlns:r="http://schemas.openxmlformats.org/officeDocument/2006/relationships" xmlns:p="http://schemas.openxmlformats.org/presentationml/2006/main"><p:cSld><p:spTree><p:nvGrpSpPr><p:cNvPr id="1" name=""/><p:cNvGrpSpPr/><p:nvPr/></p:nvGrpSpPr><p:grpSpPr><a:xfrm><a:off x="0" y="0"/><a:ext cx="0" cy="0"/><a:chOff x="0" y="0"/><a:chExt cx="0" cy="0"/></a:xfrm></p:grpSpPr><p:sp><p:nvSpPr><p:cNvPr id="2" name="Slide Image Placeholder 1"/><p:cNvSpPr><a:spLocks noGrp="1" noRot="1" noChangeAspect="1"/></p:cNvSpPr><p:nvPr><p:ph type="sldImg"/></p:nvPr></p:nvSpPr><p:spPr/></p:sp><p:sp><p:nvSpPr><p:cNvPr id="3" name="Notes Placeholder 2"/><p:cNvSpPr><a:spLocks noGrp="1"/></p:cNvSpPr><p:nvPr><p:ph type="body" idx="1"/></p:nvPr></p:nvSpPr><p:spPr/><p:txBody><a:bodyPr/><a:lstStyle/><a:p><a:r><a:rPr lang="en-US" dirty="0"/><a:t>（0:20–0:55）+先说我们为什么做这个。+遵义综合保税区二〇二五年的工作总结里，有一组很诚实的数字：+八十九家酒企完成出口备案，三十五家有意向，十一家真的出了海，+最后——五家和东南亚经销商「建立初步联系」。+转化率百分之五点六。+[指最后一级]+请注意最后一级的措辞，是「建立初步联系」，不是签约，更不是复购。+公开资料在这里就断了。</a:t></a:r><a:endParaRPr lang="en-US" dirty="0"/></a:p></p:txBody></p:sp><p:sp><p:nvSpPr><p:cNvPr id="4" name="Slide Number Placeholder 3"/><p:cNvSpPr><a:spLocks noGrp="1"/></p:cNvSpPr><p:nvPr><p:ph type="sldNum" sz="quarter" idx="10"/></p:nvPr></p:nvSpPr><p:spPr/><p:txBody><a:bodyPr/><a:lstStyle/><a:p><a:fld id="{F7021451-1387-4CA6-816F-3879F97B5CBC}" type="slidenum"><a:rPr lang="en-US"/><a:t>2</a:t></a:fld><a:endParaRPr lang="en-US"/></a:p></p:txBody></p:sp></p:spTree><p:extLst><p:ext uri="{BB962C8B-B14F-4D97-AF65-F5344CB8AC3E}"><p14:creationId xmlns:p14="http://schemas.microsoft.com/office/powerpoint/2010/main" val="1024086991"/></p:ext></p:extLst></p:cSld><p:clrMapOvr><a:masterClrMapping/></p:clrMapOvr></p:notes>
 </file>
 
-<file path=ppt/notesSlides/notesSlide20.xml><?xml version="1.0" encoding="utf-8"?>
-<p:notes xmlns:a="http://schemas.openxmlformats.org/drawingml/2006/main" xmlns:r="http://schemas.openxmlformats.org/officeDocument/2006/relationships" xmlns:p="http://schemas.openxmlformats.org/presentationml/2006/main">
-  <p:cSld>
-    <p:spTree>
-      <p:nvGrpSpPr>
-        <p:cNvPr id="1" name=""/>
-        <p:cNvGrpSpPr/>
-        <p:nvPr/>
-      </p:nvGrpSpPr>
-      <p:grpSpPr>
-        <a:xfrm>
-          <a:off x="0" y="0"/>
-          <a:ext cx="0" cy="0"/>
-          <a:chOff x="0" y="0"/>
-          <a:chExt cx="0" cy="0"/>
-        </a:xfrm>
-      </p:grpSpPr>
-      <p:sp>
-        <p:nvSpPr>
-          <p:cNvPr id="2" name="Slide Image Placeholder 1"/>
-          <p:cNvSpPr>
-            <a:spLocks noGrp="1" noRot="1" noChangeAspect="1"/>
-          </p:cNvSpPr>
-          <p:nvPr>
-            <p:ph type="sldImg"/>
-          </p:nvPr>
-        </p:nvSpPr>
-        <p:spPr/>
-      </p:sp>
-      <p:sp>
-        <p:nvSpPr>
-          <p:cNvPr id="3" name="Notes Placeholder 2"/>
-          <p:cNvSpPr>
-            <a:spLocks noGrp="1"/>
-          </p:cNvSpPr>
-          <p:nvPr>
-            <p:ph type="body" idx="1"/>
-          </p:nvPr>
-        </p:nvSpPr>
-        <p:spPr/>
-        <p:txBody>
-          <a:bodyPr/>
-          <a:lstStyle/>
-          <a:p>
-            <a:r>
-              <a:rPr lang="en-US" dirty="0"/>
-              <a:t/>
-            </a:r>
-            <a:endParaRPr lang="en-US" dirty="0"/>
-          </a:p>
-        </p:txBody>
-      </p:sp>
-      <p:sp>
-        <p:nvSpPr>
-          <p:cNvPr id="4" name="Slide Number Placeholder 3"/>
-          <p:cNvSpPr>
-            <a:spLocks noGrp="1"/>
-          </p:cNvSpPr>
-          <p:nvPr>
-            <p:ph type="sldNum" sz="quarter" idx="10"/>
-          </p:nvPr>
-        </p:nvSpPr>
-        <p:spPr/>
-        <p:txBody>
-          <a:bodyPr/>
-          <a:lstStyle/>
-          <a:p>
-            <a:fld id="{F7021451-1387-4CA6-816F-3879F97B5CBC}" type="slidenum">
-              <a:rPr lang="en-US"/>
-              <a:t>20</a:t>
-            </a:fld>
-            <a:endParaRPr lang="en-US"/>
-          </a:p>
-        </p:txBody>
-      </p:sp>
-    </p:spTree>
-    <p:extLst>
-      <p:ext uri="{BB962C8B-B14F-4D97-AF65-F5344CB8AC3E}">
-        <p14:creationId xmlns:p14="http://schemas.microsoft.com/office/powerpoint/2010/main" val="1024086991"/>
-      </p:ext>
-    </p:extLst>
-  </p:cSld>
-  <p:clrMapOvr>
-    <a:masterClrMapping/>
-  </p:clrMapOvr>
-</p:notes>
+<file path=ppt/notesSlides/notesSlide20.xml><?xml version="1.0" encoding="UTF-8" standalone="yes"?>
+<p:notes xmlns:a="http://schemas.openxmlformats.org/drawingml/2006/main" xmlns:r="http://schemas.openxmlformats.org/officeDocument/2006/relationships" xmlns:p="http://schemas.openxmlformats.org/presentationml/2006/main"><p:cSld><p:spTree><p:nvGrpSpPr><p:cNvPr id="1" name=""/><p:cNvGrpSpPr/><p:nvPr/></p:nvGrpSpPr><p:grpSpPr><a:xfrm><a:off x="0" y="0"/><a:ext cx="0" cy="0"/><a:chOff x="0" y="0"/><a:chExt cx="0" cy="0"/></a:xfrm></p:grpSpPr><p:sp><p:nvSpPr><p:cNvPr id="2" name="Slide Image Placeholder 1"/><p:cNvSpPr><a:spLocks noGrp="1" noRot="1" noChangeAspect="1"/></p:cNvSpPr><p:nvPr><p:ph type="sldImg"/></p:nvPr></p:nvSpPr><p:spPr/></p:sp><p:sp><p:nvSpPr><p:cNvPr id="3" name="Notes Placeholder 2"/><p:cNvSpPr><a:spLocks noGrp="1"/></p:cNvSpPr><p:nvPr><p:ph type="body" idx="1"/></p:nvPr></p:nvSpPr><p:spPr/><p:txBody><a:bodyPr/><a:lstStyle/><a:p><a:r><a:rPr lang="en-US" dirty="0"/><a:t>技术选型。如果评委是技术背景，重点讲那条分界线：规则是纯函数、模型只做抽取与措辞。+另外可以提「刻意没引入」那一行——不用图表库、不用组件库、不用数据库，税则是编译期常量，比数据库更适合审计与 diff。</a:t></a:r><a:endParaRPr lang="en-US" dirty="0"/></a:p></p:txBody></p:sp><p:sp><p:nvSpPr><p:cNvPr id="4" name="Slide Number Placeholder 3"/><p:cNvSpPr><a:spLocks noGrp="1"/></p:cNvSpPr><p:nvPr><p:ph type="sldNum" sz="quarter" idx="10"/></p:nvPr></p:nvSpPr><p:spPr/><p:txBody><a:bodyPr/><a:lstStyle/><a:p><a:fld id="{F7021451-1387-4CA6-816F-3879F97B5CBC}" type="slidenum"><a:rPr lang="en-US"/><a:t>20</a:t></a:fld><a:endParaRPr lang="en-US"/></a:p></p:txBody></p:sp></p:spTree><p:extLst><p:ext uri="{BB962C8B-B14F-4D97-AF65-F5344CB8AC3E}"><p14:creationId xmlns:p14="http://schemas.microsoft.com/office/powerpoint/2010/main" val="1024086991"/></p:ext></p:extLst></p:cSld><p:clrMapOvr><a:masterClrMapping/></p:clrMapOvr></p:notes>
 </file>
 
 <file path=ppt/notesSlides/notesSlide21.xml><?xml version="1.0" encoding="utf-8"?>
@@ -1674,7 +776,7 @@
           <a:p>
             <a:r>
               <a:rPr lang="en-US" dirty="0"/>
-              <a:t/>
+              <a:t>线上体验可以直接让评委扫码打开自己点。仓库是公开的，Topic 是 #Guikesong。</a:t>
             </a:r>
             <a:endParaRPr lang="en-US" dirty="0"/>
           </a:p>
@@ -1716,628 +818,76 @@
 </p:notes>
 </file>
 
-<file path=ppt/notesSlides/notesSlide3.xml><?xml version="1.0" encoding="utf-8"?>
-<p:notes xmlns:a="http://schemas.openxmlformats.org/drawingml/2006/main" xmlns:r="http://schemas.openxmlformats.org/officeDocument/2006/relationships" xmlns:p="http://schemas.openxmlformats.org/presentationml/2006/main">
-  <p:cSld>
-    <p:spTree>
-      <p:nvGrpSpPr>
-        <p:cNvPr id="1" name=""/>
-        <p:cNvGrpSpPr/>
-        <p:nvPr/>
-      </p:nvGrpSpPr>
-      <p:grpSpPr>
-        <a:xfrm>
-          <a:off x="0" y="0"/>
-          <a:ext cx="0" cy="0"/>
-          <a:chOff x="0" y="0"/>
-          <a:chExt cx="0" cy="0"/>
-        </a:xfrm>
-      </p:grpSpPr>
-      <p:sp>
-        <p:nvSpPr>
-          <p:cNvPr id="2" name="Slide Image Placeholder 1"/>
-          <p:cNvSpPr>
-            <a:spLocks noGrp="1" noRot="1" noChangeAspect="1"/>
-          </p:cNvSpPr>
-          <p:nvPr>
-            <p:ph type="sldImg"/>
-          </p:nvPr>
-        </p:nvSpPr>
-        <p:spPr/>
-      </p:sp>
-      <p:sp>
-        <p:nvSpPr>
-          <p:cNvPr id="3" name="Notes Placeholder 2"/>
-          <p:cNvSpPr>
-            <a:spLocks noGrp="1"/>
-          </p:cNvSpPr>
-          <p:nvPr>
-            <p:ph type="body" idx="1"/>
-          </p:nvPr>
-        </p:nvSpPr>
-        <p:spPr/>
-        <p:txBody>
-          <a:bodyPr/>
-          <a:lstStyle/>
-          <a:p>
-            <a:r>
-              <a:rPr lang="en-US" dirty="0"/>
-              <a:t>（0:55–1:20）中小酒企没有海外团队。展会散场，手上十几张名片，他真正的问题只有三个，而市面上的工具一个都没答。</a:t>
-            </a:r>
-            <a:endParaRPr lang="en-US" dirty="0"/>
-          </a:p>
-        </p:txBody>
-      </p:sp>
-      <p:sp>
-        <p:nvSpPr>
-          <p:cNvPr id="4" name="Slide Number Placeholder 3"/>
-          <p:cNvSpPr>
-            <a:spLocks noGrp="1"/>
-          </p:cNvSpPr>
-          <p:nvPr>
-            <p:ph type="sldNum" sz="quarter" idx="10"/>
-          </p:nvPr>
-        </p:nvSpPr>
-        <p:spPr/>
-        <p:txBody>
-          <a:bodyPr/>
-          <a:lstStyle/>
-          <a:p>
-            <a:fld id="{F7021451-1387-4CA6-816F-3879F97B5CBC}" type="slidenum">
-              <a:rPr lang="en-US"/>
-              <a:t>3</a:t>
-            </a:fld>
-            <a:endParaRPr lang="en-US"/>
-          </a:p>
-        </p:txBody>
-      </p:sp>
-    </p:spTree>
-    <p:extLst>
-      <p:ext uri="{BB962C8B-B14F-4D97-AF65-F5344CB8AC3E}">
-        <p14:creationId xmlns:p14="http://schemas.microsoft.com/office/powerpoint/2010/main" val="1024086991"/>
-      </p:ext>
-    </p:extLst>
-  </p:cSld>
-  <p:clrMapOvr>
-    <a:masterClrMapping/>
-  </p:clrMapOvr>
-</p:notes>
+<file path=ppt/notesSlides/notesSlide3.xml><?xml version="1.0" encoding="UTF-8" standalone="yes"?>
+<p:notes xmlns:a="http://schemas.openxmlformats.org/drawingml/2006/main" xmlns:r="http://schemas.openxmlformats.org/officeDocument/2006/relationships" xmlns:p="http://schemas.openxmlformats.org/presentationml/2006/main"><p:cSld><p:spTree><p:nvGrpSpPr><p:cNvPr id="1" name=""/><p:cNvGrpSpPr/><p:nvPr/></p:nvGrpSpPr><p:grpSpPr><a:xfrm><a:off x="0" y="0"/><a:ext cx="0" cy="0"/><a:chOff x="0" y="0"/><a:chExt cx="0" cy="0"/></a:xfrm></p:grpSpPr><p:sp><p:nvSpPr><p:cNvPr id="2" name="Slide Image Placeholder 1"/><p:cNvSpPr><a:spLocks noGrp="1" noRot="1" noChangeAspect="1"/></p:cNvSpPr><p:nvPr><p:ph type="sldImg"/></p:nvPr></p:nvSpPr><p:spPr/></p:sp><p:sp><p:nvSpPr><p:cNvPr id="3" name="Notes Placeholder 2"/><p:cNvSpPr><a:spLocks noGrp="1"/></p:cNvSpPr><p:nvPr><p:ph type="body" idx="1"/></p:nvPr></p:nvSpPr><p:spPr/><p:txBody><a:bodyPr/><a:lstStyle/><a:p><a:r><a:rPr lang="en-US" dirty="0"/><a:t>（0:55–1:20）+卡住的地方不在酿酒，在酿完之后。+中小酒企没有海外团队。展会散场，业务员手上十几张名片，+他真正的问题只有三个：+这个买家是真想卖酒，还是在做税差？+这瓶酒到他货架上要卖多少钱？+第一份合同该写死哪几条？+这三个问题，市面上的工具一个都没答。</a:t></a:r><a:endParaRPr lang="en-US" dirty="0"/></a:p></p:txBody></p:sp><p:sp><p:nvSpPr><p:cNvPr id="4" name="Slide Number Placeholder 3"/><p:cNvSpPr><a:spLocks noGrp="1"/></p:cNvSpPr><p:nvPr><p:ph type="sldNum" sz="quarter" idx="10"/></p:nvPr></p:nvSpPr><p:spPr/><p:txBody><a:bodyPr/><a:lstStyle/><a:p><a:fld id="{F7021451-1387-4CA6-816F-3879F97B5CBC}" type="slidenum"><a:rPr lang="en-US"/><a:t>3</a:t></a:fld><a:endParaRPr lang="en-US"/></a:p></p:txBody></p:sp></p:spTree><p:extLst><p:ext uri="{BB962C8B-B14F-4D97-AF65-F5344CB8AC3E}"><p14:creationId xmlns:p14="http://schemas.microsoft.com/office/powerpoint/2010/main" val="1024086991"/></p:ext></p:extLst></p:cSld><p:clrMapOvr><a:masterClrMapping/></p:clrMapOvr></p:notes>
 </file>
 
-<file path=ppt/notesSlides/notesSlide4.xml><?xml version="1.0" encoding="utf-8"?>
-<p:notes xmlns:a="http://schemas.openxmlformats.org/drawingml/2006/main" xmlns:r="http://schemas.openxmlformats.org/officeDocument/2006/relationships" xmlns:p="http://schemas.openxmlformats.org/presentationml/2006/main">
-  <p:cSld>
-    <p:spTree>
-      <p:nvGrpSpPr>
-        <p:cNvPr id="1" name=""/>
-        <p:cNvGrpSpPr/>
-        <p:nvPr/>
-      </p:nvGrpSpPr>
-      <p:grpSpPr>
-        <a:xfrm>
-          <a:off x="0" y="0"/>
-          <a:ext cx="0" cy="0"/>
-          <a:chOff x="0" y="0"/>
-          <a:chExt cx="0" cy="0"/>
-        </a:xfrm>
-      </p:grpSpPr>
-      <p:sp>
-        <p:nvSpPr>
-          <p:cNvPr id="2" name="Slide Image Placeholder 1"/>
-          <p:cNvSpPr>
-            <a:spLocks noGrp="1" noRot="1" noChangeAspect="1"/>
-          </p:cNvSpPr>
-          <p:nvPr>
-            <p:ph type="sldImg"/>
-          </p:nvPr>
-        </p:nvSpPr>
-        <p:spPr/>
-      </p:sp>
-      <p:sp>
-        <p:nvSpPr>
-          <p:cNvPr id="3" name="Notes Placeholder 2"/>
-          <p:cNvSpPr>
-            <a:spLocks noGrp="1"/>
-          </p:cNvSpPr>
-          <p:nvPr>
-            <p:ph type="body" idx="1"/>
-          </p:nvPr>
-        </p:nvSpPr>
-        <p:spPr/>
-        <p:txBody>
-          <a:bodyPr/>
-          <a:lstStyle/>
-          <a:p>
-            <a:r>
-              <a:rPr lang="en-US" dirty="0"/>
-              <a:t>（1:20–1:50）这是最关键的一页。
-套利型买家要的从来不是这瓶酒，是那 33%——消费税 20% 从价出口免征，加增值税退税 13%。
-他把货囤进自贸仓，转手就走，酒根本没上过货架。</a:t>
-            </a:r>
-            <a:endParaRPr lang="en-US" dirty="0"/>
-          </a:p>
-        </p:txBody>
-      </p:sp>
-      <p:sp>
-        <p:nvSpPr>
-          <p:cNvPr id="4" name="Slide Number Placeholder 3"/>
-          <p:cNvSpPr>
-            <a:spLocks noGrp="1"/>
-          </p:cNvSpPr>
-          <p:nvPr>
-            <p:ph type="sldNum" sz="quarter" idx="10"/>
-          </p:nvPr>
-        </p:nvSpPr>
-        <p:spPr/>
-        <p:txBody>
-          <a:bodyPr/>
-          <a:lstStyle/>
-          <a:p>
-            <a:fld id="{F7021451-1387-4CA6-816F-3879F97B5CBC}" type="slidenum">
-              <a:rPr lang="en-US"/>
-              <a:t>4</a:t>
-            </a:fld>
-            <a:endParaRPr lang="en-US"/>
-          </a:p>
-        </p:txBody>
-      </p:sp>
-    </p:spTree>
-    <p:extLst>
-      <p:ext uri="{BB962C8B-B14F-4D97-AF65-F5344CB8AC3E}">
-        <p14:creationId xmlns:p14="http://schemas.microsoft.com/office/powerpoint/2010/main" val="1024086991"/>
-      </p:ext>
-    </p:extLst>
-  </p:cSld>
-  <p:clrMapOvr>
-    <a:masterClrMapping/>
-  </p:clrMapOvr>
-</p:notes>
+<file path=ppt/notesSlides/notesSlide4.xml><?xml version="1.0" encoding="UTF-8" standalone="yes"?>
+<p:notes xmlns:a="http://schemas.openxmlformats.org/drawingml/2006/main" xmlns:r="http://schemas.openxmlformats.org/officeDocument/2006/relationships" xmlns:p="http://schemas.openxmlformats.org/presentationml/2006/main"><p:cSld><p:spTree><p:nvGrpSpPr><p:cNvPr id="1" name=""/><p:cNvGrpSpPr/><p:nvPr/></p:nvGrpSpPr><p:grpSpPr><a:xfrm><a:off x="0" y="0"/><a:ext cx="0" cy="0"/><a:chOff x="0" y="0"/><a:chExt cx="0" cy="0"/></a:xfrm></p:grpSpPr><p:sp><p:nvSpPr><p:cNvPr id="2" name="Slide Image Placeholder 1"/><p:cNvSpPr><a:spLocks noGrp="1" noRot="1" noChangeAspect="1"/></p:cNvSpPr><p:nvPr><p:ph type="sldImg"/></p:nvPr></p:nvSpPr><p:spPr/></p:sp><p:sp><p:nvSpPr><p:cNvPr id="3" name="Notes Placeholder 2"/><p:cNvSpPr><a:spLocks noGrp="1"/></p:cNvSpPr><p:nvPr><p:ph type="body" idx="1"/></p:nvPr></p:nvSpPr><p:spPr/><p:txBody><a:bodyPr/><a:lstStyle/><a:p><a:r><a:rPr lang="en-US" dirty="0"/><a:t>（1:20–1:55）+先说第一个问题，也是最要命的一个。+[指瓶子]+套利型买家要的，从来不是这瓶酒。+白酒出口，消费税百分之二十从价免征，再加增值税退税百分之十三。+他要的是这百分之三十三。+货囤进自贸仓，转手就走，酒根本没上过货架。+[停一拍]+而你以为你签下了第一个海外经销商。</a:t></a:r><a:endParaRPr lang="en-US" dirty="0"/></a:p></p:txBody></p:sp><p:sp><p:nvSpPr><p:cNvPr id="4" name="Slide Number Placeholder 3"/><p:cNvSpPr><a:spLocks noGrp="1"/></p:cNvSpPr><p:nvPr><p:ph type="sldNum" sz="quarter" idx="10"/></p:nvPr></p:nvSpPr><p:spPr/><p:txBody><a:bodyPr/><a:lstStyle/><a:p><a:fld id="{F7021451-1387-4CA6-816F-3879F97B5CBC}" type="slidenum"><a:rPr lang="en-US"/><a:t>4</a:t></a:fld><a:endParaRPr lang="en-US"/></a:p></p:txBody></p:sp></p:spTree><p:extLst><p:ext uri="{BB962C8B-B14F-4D97-AF65-F5344CB8AC3E}"><p14:creationId xmlns:p14="http://schemas.microsoft.com/office/powerpoint/2010/main" val="1024086991"/></p:ext></p:extLst></p:cSld><p:clrMapOvr><a:masterClrMapping/></p:clrMapOvr></p:notes>
 </file>
 
-<file path=ppt/notesSlides/notesSlide5.xml><?xml version="1.0" encoding="utf-8"?>
-<p:notes xmlns:a="http://schemas.openxmlformats.org/drawingml/2006/main" xmlns:r="http://schemas.openxmlformats.org/officeDocument/2006/relationships" xmlns:p="http://schemas.openxmlformats.org/presentationml/2006/main">
-  <p:cSld>
-    <p:spTree>
-      <p:nvGrpSpPr>
-        <p:cNvPr id="1" name=""/>
-        <p:cNvGrpSpPr/>
-        <p:nvPr/>
-      </p:nvGrpSpPr>
-      <p:grpSpPr>
-        <a:xfrm>
-          <a:off x="0" y="0"/>
-          <a:ext cx="0" cy="0"/>
-          <a:chOff x="0" y="0"/>
-          <a:chExt cx="0" cy="0"/>
-        </a:xfrm>
-      </p:grpSpPr>
-      <p:sp>
-        <p:nvSpPr>
-          <p:cNvPr id="2" name="Slide Image Placeholder 1"/>
-          <p:cNvSpPr>
-            <a:spLocks noGrp="1" noRot="1" noChangeAspect="1"/>
-          </p:cNvSpPr>
-          <p:nvPr>
-            <p:ph type="sldImg"/>
-          </p:nvPr>
-        </p:nvSpPr>
-        <p:spPr/>
-      </p:sp>
-      <p:sp>
-        <p:nvSpPr>
-          <p:cNvPr id="3" name="Notes Placeholder 2"/>
-          <p:cNvSpPr>
-            <a:spLocks noGrp="1"/>
-          </p:cNvSpPr>
-          <p:nvPr>
-            <p:ph type="body" idx="1"/>
-          </p:nvPr>
-        </p:nvSpPr>
-        <p:spPr/>
-        <p:txBody>
-          <a:bodyPr/>
-          <a:lstStyle/>
-          <a:p>
-            <a:r>
-              <a:rPr lang="en-US" dirty="0"/>
-              <a:t>（1:50–2:15）判断错了代价多少：一柜货值 261 万，卖不掉折价倒回国内亏 78 万。
-更贵的是当地价格体系被打乱，之后没有第二个经销商愿意接。</a:t>
-            </a:r>
-            <a:endParaRPr lang="en-US" dirty="0"/>
-          </a:p>
-        </p:txBody>
-      </p:sp>
-      <p:sp>
-        <p:nvSpPr>
-          <p:cNvPr id="4" name="Slide Number Placeholder 3"/>
-          <p:cNvSpPr>
-            <a:spLocks noGrp="1"/>
-          </p:cNvSpPr>
-          <p:nvPr>
-            <p:ph type="sldNum" sz="quarter" idx="10"/>
-          </p:nvPr>
-        </p:nvSpPr>
-        <p:spPr/>
-        <p:txBody>
-          <a:bodyPr/>
-          <a:lstStyle/>
-          <a:p>
-            <a:fld id="{F7021451-1387-4CA6-816F-3879F97B5CBC}" type="slidenum">
-              <a:rPr lang="en-US"/>
-              <a:t>5</a:t>
-            </a:fld>
-            <a:endParaRPr lang="en-US"/>
-          </a:p>
-        </p:txBody>
-      </p:sp>
-    </p:spTree>
-    <p:extLst>
-      <p:ext uri="{BB962C8B-B14F-4D97-AF65-F5344CB8AC3E}">
-        <p14:creationId xmlns:p14="http://schemas.microsoft.com/office/powerpoint/2010/main" val="1024086991"/>
-      </p:ext>
-    </p:extLst>
-  </p:cSld>
-  <p:clrMapOvr>
-    <a:masterClrMapping/>
-  </p:clrMapOvr>
-</p:notes>
+<file path=ppt/notesSlides/notesSlide5.xml><?xml version="1.0" encoding="UTF-8" standalone="yes"?>
+<p:notes xmlns:a="http://schemas.openxmlformats.org/drawingml/2006/main" xmlns:r="http://schemas.openxmlformats.org/officeDocument/2006/relationships" xmlns:p="http://schemas.openxmlformats.org/presentationml/2006/main"><p:cSld><p:spTree><p:nvGrpSpPr><p:cNvPr id="1" name=""/><p:cNvGrpSpPr/><p:nvPr/></p:nvGrpSpPr><p:grpSpPr><a:xfrm><a:off x="0" y="0"/><a:ext cx="0" cy="0"/><a:chOff x="0" y="0"/><a:chExt cx="0" cy="0"/></a:xfrm></p:grpSpPr><p:sp><p:nvSpPr><p:cNvPr id="2" name="Slide Image Placeholder 1"/><p:cNvSpPr><a:spLocks noGrp="1" noRot="1" noChangeAspect="1"/></p:cNvSpPr><p:nvPr><p:ph type="sldImg"/></p:nvPr></p:nvSpPr><p:spPr/></p:sp><p:sp><p:nvSpPr><p:cNvPr id="3" name="Notes Placeholder 2"/><p:cNvSpPr><a:spLocks noGrp="1"/></p:cNvSpPr><p:nvPr><p:ph type="body" idx="1"/></p:nvPr></p:nvSpPr><p:spPr/><p:txBody><a:bodyPr/><a:lstStyle/><a:p><a:r><a:rPr lang="en-US" dirty="0"/><a:t>（1:55–2:20）+判断错了，代价是多少。+一柜货值两百六十一万，卖不掉折价倒回国内，亏七十八万。+更贵的是——当地价格体系被打乱之后，+你再也找不到第二个愿意接的经销商。+而这些，你要到九十天之后才会知道。</a:t></a:r><a:endParaRPr lang="en-US" dirty="0"/></a:p></p:txBody></p:sp><p:sp><p:nvSpPr><p:cNvPr id="4" name="Slide Number Placeholder 3"/><p:cNvSpPr><a:spLocks noGrp="1"/></p:cNvSpPr><p:nvPr><p:ph type="sldNum" sz="quarter" idx="10"/></p:nvPr></p:nvSpPr><p:spPr/><p:txBody><a:bodyPr/><a:lstStyle/><a:p><a:fld id="{F7021451-1387-4CA6-816F-3879F97B5CBC}" type="slidenum"><a:rPr lang="en-US"/><a:t>5</a:t></a:fld><a:endParaRPr lang="en-US"/></a:p></p:txBody></p:sp></p:spTree><p:extLst><p:ext uri="{BB962C8B-B14F-4D97-AF65-F5344CB8AC3E}"><p14:creationId xmlns:p14="http://schemas.microsoft.com/office/powerpoint/2010/main" val="1024086991"/></p:ext></p:extLst></p:cSld><p:clrMapOvr><a:masterClrMapping/></p:clrMapOvr></p:notes>
 </file>
 
-<file path=ppt/notesSlides/notesSlide6.xml><?xml version="1.0" encoding="utf-8"?>
-<p:notes xmlns:a="http://schemas.openxmlformats.org/drawingml/2006/main" xmlns:r="http://schemas.openxmlformats.org/officeDocument/2006/relationships" xmlns:p="http://schemas.openxmlformats.org/presentationml/2006/main">
-  <p:cSld>
-    <p:spTree>
-      <p:nvGrpSpPr>
-        <p:cNvPr id="1" name=""/>
-        <p:cNvGrpSpPr/>
-        <p:nvPr/>
-      </p:nvGrpSpPr>
-      <p:grpSpPr>
-        <a:xfrm>
-          <a:off x="0" y="0"/>
-          <a:ext cx="0" cy="0"/>
-          <a:chOff x="0" y="0"/>
-          <a:chExt cx="0" cy="0"/>
-        </a:xfrm>
-      </p:grpSpPr>
-      <p:sp>
-        <p:nvSpPr>
-          <p:cNvPr id="2" name="Slide Image Placeholder 1"/>
-          <p:cNvSpPr>
-            <a:spLocks noGrp="1" noRot="1" noChangeAspect="1"/>
-          </p:cNvSpPr>
-          <p:nvPr>
-            <p:ph type="sldImg"/>
-          </p:nvPr>
-        </p:nvSpPr>
-        <p:spPr/>
-      </p:sp>
-      <p:sp>
-        <p:nvSpPr>
-          <p:cNvPr id="3" name="Notes Placeholder 2"/>
-          <p:cNvSpPr>
-            <a:spLocks noGrp="1"/>
-          </p:cNvSpPr>
-          <p:nvPr>
-            <p:ph type="body" idx="1"/>
-          </p:nvPr>
-        </p:nvSpPr>
-        <p:spPr/>
-        <p:txBody>
-          <a:bodyPr/>
-          <a:lstStyle/>
-          <a:p>
-            <a:r>
-              <a:rPr lang="en-US" dirty="0"/>
-              <a:t>（2:15–2:40）产品登场。贴一段微信对话进去，八秒出一份决策简报。
-模型只做一件事——把这段话读成结构。判定不归它管。</a:t>
-            </a:r>
-            <a:endParaRPr lang="en-US" dirty="0"/>
-          </a:p>
-        </p:txBody>
-      </p:sp>
-      <p:sp>
-        <p:nvSpPr>
-          <p:cNvPr id="4" name="Slide Number Placeholder 3"/>
-          <p:cNvSpPr>
-            <a:spLocks noGrp="1"/>
-          </p:cNvSpPr>
-          <p:nvPr>
-            <p:ph type="sldNum" sz="quarter" idx="10"/>
-          </p:nvPr>
-        </p:nvSpPr>
-        <p:spPr/>
-        <p:txBody>
-          <a:bodyPr/>
-          <a:lstStyle/>
-          <a:p>
-            <a:fld id="{F7021451-1387-4CA6-816F-3879F97B5CBC}" type="slidenum">
-              <a:rPr lang="en-US"/>
-              <a:t>6</a:t>
-            </a:fld>
-            <a:endParaRPr lang="en-US"/>
-          </a:p>
-        </p:txBody>
-      </p:sp>
-    </p:spTree>
-    <p:extLst>
-      <p:ext uri="{BB962C8B-B14F-4D97-AF65-F5344CB8AC3E}">
-        <p14:creationId xmlns:p14="http://schemas.microsoft.com/office/powerpoint/2010/main" val="1024086991"/>
-      </p:ext>
-    </p:extLst>
-  </p:cSld>
-  <p:clrMapOvr>
-    <a:masterClrMapping/>
-  </p:clrMapOvr>
-</p:notes>
+<file path=ppt/notesSlides/notesSlide6.xml><?xml version="1.0" encoding="UTF-8" standalone="yes"?>
+<p:notes xmlns:a="http://schemas.openxmlformats.org/drawingml/2006/main" xmlns:r="http://schemas.openxmlformats.org/officeDocument/2006/relationships" xmlns:p="http://schemas.openxmlformats.org/presentationml/2006/main"><p:cSld><p:spTree><p:nvGrpSpPr><p:cNvPr id="1" name=""/><p:cNvGrpSpPr/><p:nvPr/></p:nvGrpSpPr><p:grpSpPr><a:xfrm><a:off x="0" y="0"/><a:ext cx="0" cy="0"/><a:chOff x="0" y="0"/><a:chExt cx="0" cy="0"/></a:xfrm></p:grpSpPr><p:sp><p:nvSpPr><p:cNvPr id="2" name="Slide Image Placeholder 1"/><p:cNvSpPr><a:spLocks noGrp="1" noRot="1" noChangeAspect="1"/></p:cNvSpPr><p:nvPr><p:ph type="sldImg"/></p:nvPr></p:nvSpPr><p:spPr/></p:sp><p:sp><p:nvSpPr><p:cNvPr id="3" name="Notes Placeholder 2"/><p:cNvSpPr><a:spLocks noGrp="1"/></p:cNvSpPr><p:nvPr><p:ph type="body" idx="1"/></p:nvPr></p:nvSpPr><p:spPr/><p:txBody><a:bodyPr/><a:lstStyle/><a:p><a:r><a:rPr lang="en-US" dirty="0"/><a:t>（2:20–2:45）+所以我们做了这个工具。+把展会上那段微信对话，原样贴进去。+八秒钟，出一份可以直接给老板看的决策简报。+[指流程]+模型只做一件事：把这段乱七八糟的话读成结构。+判定不归它管。</a:t></a:r><a:endParaRPr lang="en-US" dirty="0"/></a:p></p:txBody></p:sp><p:sp><p:nvSpPr><p:cNvPr id="4" name="Slide Number Placeholder 3"/><p:cNvSpPr><a:spLocks noGrp="1"/></p:cNvSpPr><p:nvPr><p:ph type="sldNum" sz="quarter" idx="10"/></p:nvPr></p:nvSpPr><p:spPr/><p:txBody><a:bodyPr/><a:lstStyle/><a:p><a:fld id="{F7021451-1387-4CA6-816F-3879F97B5CBC}" type="slidenum"><a:rPr lang="en-US"/><a:t>6</a:t></a:fld><a:endParaRPr lang="en-US"/></a:p></p:txBody></p:sp></p:spTree><p:extLst><p:ext uri="{BB962C8B-B14F-4D97-AF65-F5344CB8AC3E}"><p14:creationId xmlns:p14="http://schemas.microsoft.com/office/powerpoint/2010/main" val="1024086991"/></p:ext></p:extLst></p:cSld><p:clrMapOvr><a:masterClrMapping/></p:clrMapOvr></p:notes>
 </file>
 
-<file path=ppt/notesSlides/notesSlide7.xml><?xml version="1.0" encoding="utf-8"?>
-<p:notes xmlns:a="http://schemas.openxmlformats.org/drawingml/2006/main" xmlns:r="http://schemas.openxmlformats.org/officeDocument/2006/relationships" xmlns:p="http://schemas.openxmlformats.org/presentationml/2006/main">
-  <p:cSld>
-    <p:spTree>
-      <p:nvGrpSpPr>
-        <p:cNvPr id="1" name=""/>
-        <p:cNvGrpSpPr/>
-        <p:nvPr/>
-      </p:nvGrpSpPr>
-      <p:grpSpPr>
-        <a:xfrm>
-          <a:off x="0" y="0"/>
-          <a:ext cx="0" cy="0"/>
-          <a:chOff x="0" y="0"/>
-          <a:chExt cx="0" cy="0"/>
-        </a:xfrm>
-      </p:grpSpPr>
-      <p:sp>
-        <p:nvSpPr>
-          <p:cNvPr id="2" name="Slide Image Placeholder 1"/>
-          <p:cNvSpPr>
-            <a:spLocks noGrp="1" noRot="1" noChangeAspect="1"/>
-          </p:cNvSpPr>
-          <p:nvPr>
-            <p:ph type="sldImg"/>
-          </p:nvPr>
-        </p:nvSpPr>
-        <p:spPr/>
-      </p:sp>
-      <p:sp>
-        <p:nvSpPr>
-          <p:cNvPr id="3" name="Notes Placeholder 2"/>
-          <p:cNvSpPr>
-            <a:spLocks noGrp="1"/>
-          </p:cNvSpPr>
-          <p:nvPr>
-            <p:ph type="body" idx="1"/>
-          </p:nvPr>
-        </p:nvSpPr>
-        <p:spPr/>
-        <p:txBody>
-          <a:bodyPr/>
-          <a:lstStyle/>
-          <a:p>
-            <a:r>
-              <a:rPr lang="en-US" dirty="0"/>
-              <a:t>（2:40–3:05）我们的判定用一瓶酒表示。
-瓶子永远是满的，变的是里面装什么。琥珀是酒，红色是税差，从瓶底把酒顶上来。</a:t>
-            </a:r>
-            <a:endParaRPr lang="en-US" dirty="0"/>
-          </a:p>
-        </p:txBody>
-      </p:sp>
-      <p:sp>
-        <p:nvSpPr>
-          <p:cNvPr id="4" name="Slide Number Placeholder 3"/>
-          <p:cNvSpPr>
-            <a:spLocks noGrp="1"/>
-          </p:cNvSpPr>
-          <p:nvPr>
-            <p:ph type="sldNum" sz="quarter" idx="10"/>
-          </p:nvPr>
-        </p:nvSpPr>
-        <p:spPr/>
-        <p:txBody>
-          <a:bodyPr/>
-          <a:lstStyle/>
-          <a:p>
-            <a:fld id="{F7021451-1387-4CA6-816F-3879F97B5CBC}" type="slidenum">
-              <a:rPr lang="en-US"/>
-              <a:t>7</a:t>
-            </a:fld>
-            <a:endParaRPr lang="en-US"/>
-          </a:p>
-        </p:txBody>
-      </p:sp>
-    </p:spTree>
-    <p:extLst>
-      <p:ext uri="{BB962C8B-B14F-4D97-AF65-F5344CB8AC3E}">
-        <p14:creationId xmlns:p14="http://schemas.microsoft.com/office/powerpoint/2010/main" val="1024086991"/>
-      </p:ext>
-    </p:extLst>
-  </p:cSld>
-  <p:clrMapOvr>
-    <a:masterClrMapping/>
-  </p:clrMapOvr>
-</p:notes>
+<file path=ppt/notesSlides/notesSlide7.xml><?xml version="1.0" encoding="UTF-8" standalone="yes"?>
+<p:notes xmlns:a="http://schemas.openxmlformats.org/drawingml/2006/main" xmlns:r="http://schemas.openxmlformats.org/officeDocument/2006/relationships" xmlns:p="http://schemas.openxmlformats.org/presentationml/2006/main"><p:cSld><p:spTree><p:nvGrpSpPr><p:cNvPr id="1" name=""/><p:cNvGrpSpPr/><p:nvPr/></p:nvGrpSpPr><p:grpSpPr><a:xfrm><a:off x="0" y="0"/><a:ext cx="0" cy="0"/><a:chOff x="0" y="0"/><a:chExt cx="0" cy="0"/></a:xfrm></p:grpSpPr><p:sp><p:nvSpPr><p:cNvPr id="2" name="Slide Image Placeholder 1"/><p:cNvSpPr><a:spLocks noGrp="1" noRot="1" noChangeAspect="1"/></p:cNvSpPr><p:nvPr><p:ph type="sldImg"/></p:nvPr></p:nvSpPr><p:spPr/></p:sp><p:sp><p:nvSpPr><p:cNvPr id="3" name="Notes Placeholder 2"/><p:cNvSpPr><a:spLocks noGrp="1"/></p:cNvSpPr><p:nvPr><p:ph type="body" idx="1"/></p:nvPr></p:nvSpPr><p:spPr/><p:txBody><a:bodyPr/><a:lstStyle/><a:p><a:r><a:rPr lang="en-US" dirty="0"/><a:t>（2:45–3:10）+我们的判定，用一瓶酒来表示。+[指两瓶]+瓶子永远是满的。变的是里面装什么。+左边这瓶装的是酒——他是来买酒的，可以谈。+右边这瓶，红的是税差，从瓶底把酒顶上来了。+这一瓶，不是酒。</a:t></a:r><a:endParaRPr lang="en-US" dirty="0"/></a:p></p:txBody></p:sp><p:sp><p:nvSpPr><p:cNvPr id="4" name="Slide Number Placeholder 3"/><p:cNvSpPr><a:spLocks noGrp="1"/></p:cNvSpPr><p:nvPr><p:ph type="sldNum" sz="quarter" idx="10"/></p:nvPr></p:nvSpPr><p:spPr/><p:txBody><a:bodyPr/><a:lstStyle/><a:p><a:fld id="{F7021451-1387-4CA6-816F-3879F97B5CBC}" type="slidenum"><a:rPr lang="en-US"/><a:t>7</a:t></a:fld><a:endParaRPr lang="en-US"/></a:p></p:txBody></p:sp></p:spTree><p:extLst><p:ext uri="{BB962C8B-B14F-4D97-AF65-F5344CB8AC3E}"><p14:creationId xmlns:p14="http://schemas.microsoft.com/office/powerpoint/2010/main" val="1024086991"/></p:ext></p:extLst></p:cSld><p:clrMapOvr><a:masterClrMapping/></p:clrMapOvr></p:notes>
 </file>
 
-<file path=ppt/notesSlides/notesSlide8.xml><?xml version="1.0" encoding="utf-8"?>
-<p:notes xmlns:a="http://schemas.openxmlformats.org/drawingml/2006/main" xmlns:r="http://schemas.openxmlformats.org/officeDocument/2006/relationships" xmlns:p="http://schemas.openxmlformats.org/presentationml/2006/main">
-  <p:cSld>
-    <p:spTree>
-      <p:nvGrpSpPr>
-        <p:cNvPr id="1" name=""/>
-        <p:cNvGrpSpPr/>
-        <p:nvPr/>
-      </p:nvGrpSpPr>
-      <p:grpSpPr>
-        <a:xfrm>
-          <a:off x="0" y="0"/>
-          <a:ext cx="0" cy="0"/>
-          <a:chOff x="0" y="0"/>
-          <a:chExt cx="0" cy="0"/>
-        </a:xfrm>
-      </p:grpSpPr>
-      <p:sp>
-        <p:nvSpPr>
-          <p:cNvPr id="2" name="Slide Image Placeholder 1"/>
-          <p:cNvSpPr>
-            <a:spLocks noGrp="1" noRot="1" noChangeAspect="1"/>
-          </p:cNvSpPr>
-          <p:nvPr>
-            <p:ph type="sldImg"/>
-          </p:nvPr>
-        </p:nvSpPr>
-        <p:spPr/>
-      </p:sp>
-      <p:sp>
-        <p:nvSpPr>
-          <p:cNvPr id="3" name="Notes Placeholder 2"/>
-          <p:cNvSpPr>
-            <a:spLocks noGrp="1"/>
-          </p:cNvSpPr>
-          <p:nvPr>
-            <p:ph type="body" idx="1"/>
-          </p:nvPr>
-        </p:nvSpPr>
-        <p:spPr/>
-        <p:txBody>
-          <a:bodyPr/>
-          <a:lstStyle/>
-          <a:p>
-            <a:r>
-              <a:rPr lang="en-US" dirty="0"/>
-              <a:t>（3:05–3:30）六个页签，一页回答一个问题。业务员站在展位上，需要的是六个答案，不是一篇文章。
-（现场 demo 就走这六页）</a:t>
-            </a:r>
-            <a:endParaRPr lang="en-US" dirty="0"/>
-          </a:p>
-        </p:txBody>
-      </p:sp>
-      <p:sp>
-        <p:nvSpPr>
-          <p:cNvPr id="4" name="Slide Number Placeholder 3"/>
-          <p:cNvSpPr>
-            <a:spLocks noGrp="1"/>
-          </p:cNvSpPr>
-          <p:nvPr>
-            <p:ph type="sldNum" sz="quarter" idx="10"/>
-          </p:nvPr>
-        </p:nvSpPr>
-        <p:spPr/>
-        <p:txBody>
-          <a:bodyPr/>
-          <a:lstStyle/>
-          <a:p>
-            <a:fld id="{F7021451-1387-4CA6-816F-3879F97B5CBC}" type="slidenum">
-              <a:rPr lang="en-US"/>
-              <a:t>8</a:t>
-            </a:fld>
-            <a:endParaRPr lang="en-US"/>
-          </a:p>
-        </p:txBody>
-      </p:sp>
-    </p:spTree>
-    <p:extLst>
-      <p:ext uri="{BB962C8B-B14F-4D97-AF65-F5344CB8AC3E}">
-        <p14:creationId xmlns:p14="http://schemas.microsoft.com/office/powerpoint/2010/main" val="1024086991"/>
-      </p:ext>
-    </p:extLst>
-  </p:cSld>
-  <p:clrMapOvr>
-    <a:masterClrMapping/>
-  </p:clrMapOvr>
-</p:notes>
+<file path=ppt/notesSlides/notesSlide8.xml><?xml version="1.0" encoding="UTF-8" standalone="yes"?>
+<p:notes xmlns:a="http://schemas.openxmlformats.org/drawingml/2006/main" xmlns:r="http://schemas.openxmlformats.org/officeDocument/2006/relationships" xmlns:p="http://schemas.openxmlformats.org/presentationml/2006/main"><p:cSld><p:spTree><p:nvGrpSpPr><p:cNvPr id="1" name=""/><p:cNvGrpSpPr/><p:nvPr/></p:nvGrpSpPr><p:grpSpPr><a:xfrm><a:off x="0" y="0"/><a:ext cx="0" cy="0"/><a:chOff x="0" y="0"/><a:chExt cx="0" cy="0"/></a:xfrm></p:grpSpPr><p:sp><p:nvSpPr><p:cNvPr id="2" name="Slide Image Placeholder 1"/><p:cNvSpPr><a:spLocks noGrp="1" noRot="1" noChangeAspect="1"/></p:cNvSpPr><p:nvPr><p:ph type="sldImg"/></p:nvPr></p:nvSpPr><p:spPr/></p:sp><p:sp><p:nvSpPr><p:cNvPr id="3" name="Notes Placeholder 2"/><p:cNvSpPr><a:spLocks noGrp="1"/></p:cNvSpPr><p:nvPr><p:ph type="body" idx="1"/></p:nvPr></p:nvSpPr><p:spPr/><p:txBody><a:bodyPr/><a:lstStyle/><a:p><a:r><a:rPr lang="en-US" dirty="0"/><a:t>（3:10–3:35）+展开是六个页签，一页回答一个问题。+[逐个点]+该不该做、凭什么这么判、这瓶酒卖多少钱、+他有没有牌照、怎么跟他讲、合同和之后九十天怎么盯。+业务员站在展位上，需要的是六个答案，不是一篇报告。+[这里切到现场 demo]</a:t></a:r><a:endParaRPr lang="en-US" dirty="0"/></a:p></p:txBody></p:sp><p:sp><p:nvSpPr><p:cNvPr id="4" name="Slide Number Placeholder 3"/><p:cNvSpPr><a:spLocks noGrp="1"/></p:cNvSpPr><p:nvPr><p:ph type="sldNum" sz="quarter" idx="10"/></p:nvPr></p:nvSpPr><p:spPr/><p:txBody><a:bodyPr/><a:lstStyle/><a:p><a:fld id="{F7021451-1387-4CA6-816F-3879F97B5CBC}" type="slidenum"><a:rPr lang="en-US"/><a:t>8</a:t></a:fld><a:endParaRPr lang="en-US"/></a:p></p:txBody></p:sp></p:spTree><p:extLst><p:ext uri="{BB962C8B-B14F-4D97-AF65-F5344CB8AC3E}"><p14:creationId xmlns:p14="http://schemas.microsoft.com/office/powerpoint/2010/main" val="1024086991"/></p:ext></p:extLst></p:cSld><p:clrMapOvr><a:masterClrMapping/></p:clrMapOvr></p:notes>
 </file>
 
-<file path=ppt/notesSlides/notesSlide9.xml><?xml version="1.0" encoding="utf-8"?>
-<p:notes xmlns:a="http://schemas.openxmlformats.org/drawingml/2006/main" xmlns:r="http://schemas.openxmlformats.org/officeDocument/2006/relationships" xmlns:p="http://schemas.openxmlformats.org/presentationml/2006/main">
-  <p:cSld>
-    <p:spTree>
-      <p:nvGrpSpPr>
-        <p:cNvPr id="1" name=""/>
-        <p:cNvGrpSpPr/>
-        <p:nvPr/>
-      </p:nvGrpSpPr>
-      <p:grpSpPr>
-        <a:xfrm>
-          <a:off x="0" y="0"/>
-          <a:ext cx="0" cy="0"/>
-          <a:chOff x="0" y="0"/>
-          <a:chExt cx="0" cy="0"/>
-        </a:xfrm>
-      </p:grpSpPr>
-      <p:sp>
-        <p:nvSpPr>
-          <p:cNvPr id="2" name="Slide Image Placeholder 1"/>
-          <p:cNvSpPr>
-            <a:spLocks noGrp="1" noRot="1" noChangeAspect="1"/>
-          </p:cNvSpPr>
-          <p:nvPr>
-            <p:ph type="sldImg"/>
-          </p:nvPr>
-        </p:nvSpPr>
-        <p:spPr/>
-      </p:sp>
-      <p:sp>
-        <p:nvSpPr>
-          <p:cNvPr id="3" name="Notes Placeholder 2"/>
-          <p:cNvSpPr>
-            <a:spLocks noGrp="1"/>
-          </p:cNvSpPr>
-          <p:nvPr>
-            <p:ph type="body" idx="1"/>
-          </p:nvPr>
-        </p:nvSpPr>
-        <p:spPr/>
-        <p:txBody>
-          <a:bodyPr/>
-          <a:lstStyle/>
-          <a:p>
-            <a:r>
-              <a:rPr lang="en-US" dirty="0"/>
-              <a:t>（3:30–4:00）三个通用大模型不会告诉你的细节，全是我们翻税则翻出来的：
-香港减税只减 200 港币以上那部分；新加坡按纯酒精量收，降度数等于直接少缴税；
-美国 CBMA 额度必须由中国生产商主动指派，进口商自己拿不到——约 10.7 元一瓶，一柜十几万，不花你一毛钱。</a:t>
-            </a:r>
-            <a:endParaRPr lang="en-US" dirty="0"/>
-          </a:p>
-        </p:txBody>
-      </p:sp>
-      <p:sp>
-        <p:nvSpPr>
-          <p:cNvPr id="4" name="Slide Number Placeholder 3"/>
-          <p:cNvSpPr>
-            <a:spLocks noGrp="1"/>
-          </p:cNvSpPr>
-          <p:nvPr>
-            <p:ph type="sldNum" sz="quarter" idx="10"/>
-          </p:nvPr>
-        </p:nvSpPr>
-        <p:spPr/>
-        <p:txBody>
-          <a:bodyPr/>
-          <a:lstStyle/>
-          <a:p>
-            <a:fld id="{F7021451-1387-4CA6-816F-3879F97B5CBC}" type="slidenum">
-              <a:rPr lang="en-US"/>
-              <a:t>9</a:t>
-            </a:fld>
-            <a:endParaRPr lang="en-US"/>
-          </a:p>
-        </p:txBody>
-      </p:sp>
-    </p:spTree>
-    <p:extLst>
-      <p:ext uri="{BB962C8B-B14F-4D97-AF65-F5344CB8AC3E}">
-        <p14:creationId xmlns:p14="http://schemas.microsoft.com/office/powerpoint/2010/main" val="1024086991"/>
-      </p:ext>
-    </p:extLst>
-  </p:cSld>
-  <p:clrMapOvr>
-    <a:masterClrMapping/>
-  </p:clrMapOvr>
-</p:notes>
+<file path=ppt/notesSlides/notesSlide9.xml><?xml version="1.0" encoding="UTF-8" standalone="yes"?>
+<p:notes xmlns:a="http://schemas.openxmlformats.org/drawingml/2006/main" xmlns:r="http://schemas.openxmlformats.org/officeDocument/2006/relationships" xmlns:p="http://schemas.openxmlformats.org/presentationml/2006/main"><p:cSld><p:spTree><p:nvGrpSpPr><p:cNvPr id="1" name=""/><p:cNvGrpSpPr/><p:nvPr/></p:nvGrpSpPr><p:grpSpPr><a:xfrm><a:off x="0" y="0"/><a:ext cx="0" cy="0"/><a:chOff x="0" y="0"/><a:chExt cx="0" cy="0"/></a:xfrm></p:grpSpPr><p:sp><p:nvSpPr><p:cNvPr id="2" name="Slide Image Placeholder 1"/><p:cNvSpPr><a:spLocks noGrp="1" noRot="1" noChangeAspect="1"/></p:cNvSpPr><p:nvPr><p:ph type="sldImg"/></p:nvPr></p:nvSpPr><p:spPr/></p:sp><p:sp><p:nvSpPr><p:cNvPr id="3" name="Notes Placeholder 2"/><p:cNvSpPr><a:spLocks noGrp="1"/></p:cNvSpPr><p:nvPr><p:ph type="body" idx="1"/></p:nvPr></p:nvSpPr><p:spPr/><p:txBody><a:bodyPr/><a:lstStyle/><a:p><a:r><a:rPr lang="en-US" dirty="0"/><a:t>（3:35–4:05）+为什么不直接问通用大模型？+因为这三条它不会告诉你，是我们逐条翻税则翻出来的：+香港烈酒减税，只减两百港币以上的那一部分。+新加坡按纯酒精量课税——降度数，等于直接少缴税。+美国的 CBMA 额度，必须由中国生产商主动指派，进口商自己拿不到。+一瓶差十块七，一柜十几万，不花你一毛钱。</a:t></a:r><a:endParaRPr lang="en-US" dirty="0"/></a:p></p:txBody></p:sp><p:sp><p:nvSpPr><p:cNvPr id="4" name="Slide Number Placeholder 3"/><p:cNvSpPr><a:spLocks noGrp="1"/></p:cNvSpPr><p:nvPr><p:ph type="sldNum" sz="quarter" idx="10"/></p:nvPr></p:nvSpPr><p:spPr/><p:txBody><a:bodyPr/><a:lstStyle/><a:p><a:fld id="{F7021451-1387-4CA6-816F-3879F97B5CBC}" type="slidenum"><a:rPr lang="en-US"/><a:t>9</a:t></a:fld><a:endParaRPr lang="en-US"/></a:p></p:txBody></p:sp></p:spTree><p:extLst><p:ext uri="{BB962C8B-B14F-4D97-AF65-F5344CB8AC3E}"><p14:creationId xmlns:p14="http://schemas.microsoft.com/office/powerpoint/2010/main" val="1024086991"/></p:ext></p:extLst></p:cSld><p:clrMapOvr><a:masterClrMapping/></p:clrMapOvr></p:notes>
 </file>
 
 <file path=ppt/slideLayouts/slideLayout1.xml><?xml version="1.0" encoding="utf-8"?>

--- a/docs/第二单_SecondOrder_路演.pptx
+++ b/docs/第二单_SecondOrder_路演.pptx
@@ -477,36 +477,47 @@
 </file>
 
 <file path=ppt/notesSlides/notesSlide1.xml><?xml version="1.0" encoding="UTF-8" standalone="yes"?>
-<p:notes xmlns:a="http://schemas.openxmlformats.org/drawingml/2006/main" xmlns:r="http://schemas.openxmlformats.org/officeDocument/2006/relationships" xmlns:p="http://schemas.openxmlformats.org/presentationml/2006/main"><p:cSld><p:spTree><p:nvGrpSpPr><p:cNvPr id="1" name=""/><p:cNvGrpSpPr/><p:nvPr/></p:nvGrpSpPr><p:grpSpPr><a:xfrm><a:off x="0" y="0"/><a:ext cx="0" cy="0"/><a:chOff x="0" y="0"/><a:chExt cx="0" cy="0"/></a:xfrm></p:grpSpPr><p:sp><p:nvSpPr><p:cNvPr id="2" name="Slide Image Placeholder 1"/><p:cNvSpPr><a:spLocks noGrp="1" noRot="1" noChangeAspect="1"/></p:cNvSpPr><p:nvPr><p:ph type="sldImg"/></p:nvPr></p:nvSpPr><p:spPr/></p:sp><p:sp><p:nvSpPr><p:cNvPr id="3" name="Notes Placeholder 2"/><p:cNvSpPr><a:spLocks noGrp="1"/></p:cNvSpPr><p:nvPr><p:ph type="body" idx="1"/></p:nvPr></p:nvSpPr><p:spPr/><p:txBody><a:bodyPr/><a:lstStyle/><a:p><a:r><a:rPr lang="en-US" dirty="0"/><a:t>（0:00–0:20）-[停两秒，让大家先看到标题]+<p:notes xmlns:a="http://schemas.openxmlformats.org/drawingml/2006/main" xmlns:r="http://schemas.openxmlformats.org/officeDocument/2006/relationships" xmlns:p="http://schemas.openxmlformats.org/presentationml/2006/main"><p:cSld><p:spTree><p:nvGrpSpPr><p:cNvPr id="1" name=""/><p:cNvGrpSpPr/><p:nvPr/></p:nvGrpSpPr><p:grpSpPr><a:xfrm><a:off x="0" y="0"/><a:ext cx="0" cy="0"/><a:chOff x="0" y="0"/><a:chExt cx="0" cy="0"/></a:xfrm></p:grpSpPr><p:sp><p:nvSpPr><p:cNvPr id="2" name="Slide Image Placeholder 1"/><p:cNvSpPr><a:spLocks noGrp="1" noRot="1" noChangeAspect="1"/></p:cNvSpPr><p:nvPr><p:ph type="sldImg"/></p:nvPr></p:nvSpPr><p:spPr/></p:sp><p:sp><p:nvSpPr><p:cNvPr id="3" name="Notes Placeholder 2"/><p:cNvSpPr><a:spLocks noGrp="1"/></p:cNvSpPr><p:nvPr><p:ph type="body" idx="1"/></p:nvPr></p:nvSpPr><p:spPr/><p:txBody><a:bodyPr/><a:lstStyle/><a:p><a:r><a:rPr lang="en-US" dirty="0"/><a:t>（0:00–0:18　18 秒　79 字）++[停两秒，让评委先看完标题] 各位评委好。-扫码验茅台真假，大家都会。-[停一拍]-我们做的这个东西，扫的不是酒，是买家。-它叫「第二单」，是给贵州中小酒企外贸专员用的首单决策副驾。</a:t></a:r><a:endParaRPr lang="en-US" dirty="0"/></a:p></p:txBody></p:sp><p:sp><p:nvSpPr><p:cNvPr id="4" name="Slide Number Placeholder 3"/><p:cNvSpPr><a:spLocks noGrp="1"/></p:cNvSpPr><p:nvPr><p:ph type="sldNum" sz="quarter" idx="10"/></p:nvPr></p:nvSpPr><p:spPr/><p:txBody><a:bodyPr/><a:lstStyle/><a:p><a:fld id="{F7021451-1387-4CA6-816F-3879F97B5CBC}" type="slidenum"><a:rPr lang="en-US"/><a:t>1</a:t></a:fld><a:endParaRPr lang="en-US"/></a:p></p:txBody></p:sp></p:spTree><p:extLst><p:ext uri="{BB962C8B-B14F-4D97-AF65-F5344CB8AC3E}"><p14:creationId xmlns:p14="http://schemas.microsoft.com/office/powerpoint/2010/main" val="1024086991"/></p:ext></p:extLst></p:cSld><p:clrMapOvr><a:masterClrMapping/></p:clrMapOvr></p:notes>
+扫码验茅台真假，大家都会。我们做的是同一个动作，方向反过来——+扫的不是酒，是买家。+它叫「第二单」，用户是贵州仁怀、遵义那些没有海外团队的中小酒企。++───── 时间充裕可加 ─────+为什么不是第一单，最后一页会回答。</a:t></a:r><a:endParaRPr lang="en-US" dirty="0"/></a:p></p:txBody></p:sp><p:sp><p:nvSpPr><p:cNvPr id="4" name="Slide Number Placeholder 3"/><p:cNvSpPr><a:spLocks noGrp="1"/></p:cNvSpPr><p:nvPr><p:ph type="sldNum" sz="quarter" idx="10"/></p:nvPr></p:nvSpPr><p:spPr/><p:txBody><a:bodyPr/><a:lstStyle/><a:p><a:fld id="{F7021451-1387-4CA6-816F-3879F97B5CBC}" type="slidenum"><a:rPr lang="en-US"/><a:t>1</a:t></a:fld><a:endParaRPr lang="en-US"/></a:p></p:txBody></p:sp></p:spTree><p:extLst><p:ext uri="{BB962C8B-B14F-4D97-AF65-F5344CB8AC3E}"><p14:creationId xmlns:p14="http://schemas.microsoft.com/office/powerpoint/2010/main" val="1024086991"/></p:ext></p:extLst></p:cSld><p:clrMapOvr><a:masterClrMapping/></p:clrMapOvr></p:notes>
 </file>
 
 <file path=ppt/notesSlides/notesSlide10.xml><?xml version="1.0" encoding="UTF-8" standalone="yes"?>
-<p:notes xmlns:a="http://schemas.openxmlformats.org/drawingml/2006/main" xmlns:r="http://schemas.openxmlformats.org/officeDocument/2006/relationships" xmlns:p="http://schemas.openxmlformats.org/presentationml/2006/main"><p:cSld><p:spTree><p:nvGrpSpPr><p:cNvPr id="1" name=""/><p:cNvGrpSpPr/><p:nvPr/></p:nvGrpSpPr><p:grpSpPr><a:xfrm><a:off x="0" y="0"/><a:ext cx="0" cy="0"/><a:chOff x="0" y="0"/><a:chExt cx="0" cy="0"/></a:xfrm></p:grpSpPr><p:sp><p:nvSpPr><p:cNvPr id="2" name="Slide Image Placeholder 1"/><p:cNvSpPr><a:spLocks noGrp="1" noRot="1" noChangeAspect="1"/></p:cNvSpPr><p:nvPr><p:ph type="sldImg"/></p:nvPr></p:nvSpPr><p:spPr/></p:sp><p:sp><p:nvSpPr><p:cNvPr id="3" name="Notes Placeholder 2"/><p:cNvSpPr><a:spLocks noGrp="1"/></p:cNvSpPr><p:nvPr><p:ph type="body" idx="1"/></p:nvPr></p:nvSpPr><p:spPr/><p:txBody><a:bodyPr/><a:lstStyle/><a:p><a:r><a:rPr lang="en-US" dirty="0"/><a:t>（4:05–4:30）-技术上我们只坚持一件事：规则算账，模型说人话。-税则、牌照、风险评分、合同条款，全部是可审计的纯函数，-同样输入永远同样输出，每一条都带来源和生效日期。-模型只负责它真正擅长的两件事——读懂对话，和写成人话。-所以模型挂了，主链路照样跑完。现场断网也能演示。</a:t></a:r><a:endParaRPr lang="en-US" dirty="0"/></a:p></p:txBody></p:sp><p:sp><p:nvSpPr><p:cNvPr id="4" name="Slide Number Placeholder 3"/><p:cNvSpPr><a:spLocks noGrp="1"/></p:cNvSpPr><p:nvPr><p:ph type="sldNum" sz="quarter" idx="10"/></p:nvPr></p:nvSpPr><p:spPr/><p:txBody><a:bodyPr/><a:lstStyle/><a:p><a:fld id="{F7021451-1387-4CA6-816F-3879F97B5CBC}" type="slidenum"><a:rPr lang="en-US"/><a:t>10</a:t></a:fld><a:endParaRPr lang="en-US"/></a:p></p:txBody></p:sp></p:spTree><p:extLst><p:ext uri="{BB962C8B-B14F-4D97-AF65-F5344CB8AC3E}"><p14:creationId xmlns:p14="http://schemas.microsoft.com/office/powerpoint/2010/main" val="1024086991"/></p:ext></p:extLst></p:cSld><p:clrMapOvr><a:masterClrMapping/></p:clrMapOvr></p:notes>
+<p:notes xmlns:a="http://schemas.openxmlformats.org/drawingml/2006/main" xmlns:r="http://schemas.openxmlformats.org/officeDocument/2006/relationships" xmlns:p="http://schemas.openxmlformats.org/presentationml/2006/main"><p:cSld><p:spTree><p:nvGrpSpPr><p:cNvPr id="1" name=""/><p:cNvGrpSpPr/><p:nvPr/></p:nvGrpSpPr><p:grpSpPr><a:xfrm><a:off x="0" y="0"/><a:ext cx="0" cy="0"/><a:chOff x="0" y="0"/><a:chExt cx="0" cy="0"/></a:xfrm></p:grpSpPr><p:sp><p:nvSpPr><p:cNvPr id="2" name="Slide Image Placeholder 1"/><p:cNvSpPr><a:spLocks noGrp="1" noRot="1" noChangeAspect="1"/></p:cNvSpPr><p:nvPr><p:ph type="sldImg"/></p:nvPr></p:nvSpPr><p:spPr/></p:sp><p:sp><p:nvSpPr><p:cNvPr id="3" name="Notes Placeholder 2"/><p:cNvSpPr><a:spLocks noGrp="1"/></p:cNvSpPr><p:nvPr><p:ph type="body" idx="1"/></p:nvPr></p:nvSpPr><p:spPr/><p:txBody><a:bodyPr/><a:lstStyle/><a:p><a:r><a:rPr lang="en-US" dirty="0"/><a:t>（4:04–4:30　26 秒　121 字）++技术上只坚持一件事：规则算账，模型说人话。+税则、牌照、风险评分、合同条款全是可审计的纯函数，+同样输入永远同样输出，每条都带来源和生效日期。+模型只负责两件事：读懂对话，把结论写成一封能寄出去的信。+所以模型挂了主链路照样跑完，现场断网也演示得完。++───── 时间充裕可加 ─────+日本原本在候选名单里，但公开资料对烈酒税率的表述不够明确，我们宁可不收——收一条不确定的税率，赔上的是整个规则库的可信度。</a:t></a:r><a:endParaRPr lang="en-US" dirty="0"/></a:p></p:txBody></p:sp><p:sp><p:nvSpPr><p:cNvPr id="4" name="Slide Number Placeholder 3"/><p:cNvSpPr><a:spLocks noGrp="1"/></p:cNvSpPr><p:nvPr><p:ph type="sldNum" sz="quarter" idx="10"/></p:nvPr></p:nvSpPr><p:spPr/><p:txBody><a:bodyPr/><a:lstStyle/><a:p><a:fld id="{F7021451-1387-4CA6-816F-3879F97B5CBC}" type="slidenum"><a:rPr lang="en-US"/><a:t>10</a:t></a:fld><a:endParaRPr lang="en-US"/></a:p></p:txBody></p:sp></p:spTree><p:extLst><p:ext uri="{BB962C8B-B14F-4D97-AF65-F5344CB8AC3E}"><p14:creationId xmlns:p14="http://schemas.microsoft.com/office/powerpoint/2010/main" val="1024086991"/></p:ext></p:extLst></p:cSld><p:clrMapOvr><a:masterClrMapping/></p:clrMapOvr></p:notes>
 </file>
 
 <file path=ppt/notesSlides/notesSlide11.xml><?xml version="1.0" encoding="UTF-8" standalone="yes"?>
-<p:notes xmlns:a="http://schemas.openxmlformats.org/drawingml/2006/main" xmlns:r="http://schemas.openxmlformats.org/officeDocument/2006/relationships" xmlns:p="http://schemas.openxmlformats.org/presentationml/2006/main"><p:cSld><p:spTree><p:nvGrpSpPr><p:cNvPr id="1" name=""/><p:cNvGrpSpPr/><p:nvPr/></p:nvGrpSpPr><p:grpSpPr><a:xfrm><a:off x="0" y="0"/><a:ext cx="0" cy="0"/><a:chOff x="0" y="0"/><a:chExt cx="0" cy="0"/></a:xfrm></p:grpSpPr><p:sp><p:nvSpPr><p:cNvPr id="2" name="Slide Image Placeholder 1"/><p:cNvSpPr><a:spLocks noGrp="1" noRot="1" noChangeAspect="1"/></p:cNvSpPr><p:nvPr><p:ph type="sldImg"/></p:nvPr></p:nvSpPr><p:spPr/></p:sp><p:sp><p:nvSpPr><p:cNvPr id="3" name="Notes Placeholder 2"/><p:cNvSpPr><a:spLocks noGrp="1"/></p:cNvSpPr><p:nvPr><p:ph type="body" idx="1"/></p:nvPr></p:nvSpPr><p:spPr/><p:txBody><a:bodyPr/><a:lstStyle/><a:p><a:r><a:rPr lang="en-US" dirty="0"/><a:t>（4:30–4:48）+<p:notes xmlns:a="http://schemas.openxmlformats.org/drawingml/2006/main" xmlns:r="http://schemas.openxmlformats.org/officeDocument/2006/relationships" xmlns:p="http://schemas.openxmlformats.org/presentationml/2006/main"><p:cSld><p:spTree><p:nvGrpSpPr><p:cNvPr id="1" name=""/><p:cNvGrpSpPr/><p:nvPr/></p:nvGrpSpPr><p:grpSpPr><a:xfrm><a:off x="0" y="0"/><a:ext cx="0" cy="0"/><a:chOff x="0" y="0"/><a:chExt cx="0" cy="0"/></a:xfrm></p:grpSpPr><p:sp><p:nvSpPr><p:cNvPr id="2" name="Slide Image Placeholder 1"/><p:cNvSpPr><a:spLocks noGrp="1" noRot="1" noChangeAspect="1"/></p:cNvSpPr><p:nvPr><p:ph type="sldImg"/></p:nvPr></p:nvSpPr><p:spPr/></p:sp><p:sp><p:nvSpPr><p:cNvPr id="3" name="Notes Placeholder 2"/><p:cNvSpPr><a:spLocks noGrp="1"/></p:cNvSpPr><p:nvPr><p:ph type="body" idx="1"/></p:nvPr></p:nvSpPr><p:spPr/><p:txBody><a:bodyPr/><a:lstStyle/><a:p><a:r><a:rPr lang="en-US" dirty="0"/><a:t>（4:30–4:46　16 秒　74 字）+ 接下来一百天，第三步是设计来证伪我们自己的：-跟三家走完一次首单，拿报关单回来验落地价。-误差百分之五以内这工具就能用，-差到百分之二十，税则模型就得重做。</a:t></a:r><a:endParaRPr lang="en-US" dirty="0"/></a:p></p:txBody></p:sp><p:sp><p:nvSpPr><p:cNvPr id="4" name="Slide Number Placeholder 3"/><p:cNvSpPr><a:spLocks noGrp="1"/></p:cNvSpPr><p:nvPr><p:ph type="sldNum" sz="quarter" idx="10"/></p:nvPr></p:nvSpPr><p:spPr/><p:txBody><a:bodyPr/><a:lstStyle/><a:p><a:fld id="{F7021451-1387-4CA6-816F-3879F97B5CBC}" type="slidenum"><a:rPr lang="en-US"/><a:t>11</a:t></a:fld><a:endParaRPr lang="en-US"/></a:p></p:txBody></p:sp></p:spTree><p:extLst><p:ext uri="{BB962C8B-B14F-4D97-AF65-F5344CB8AC3E}"><p14:creationId xmlns:p14="http://schemas.microsoft.com/office/powerpoint/2010/main" val="1024086991"/></p:ext></p:extLst></p:cSld><p:clrMapOvr><a:masterClrMapping/></p:clrMapOvr></p:notes>
+跟三家酒厂走完一次真实首单，拿报关单核对落地价。+误差百分之五以内就能用，差到百分之二十，税则模型得重做。++───── 时间充裕可加 ─────+我们不打算先谈商业模式。先证明能让八十九家里搭上线的从五家变成十家，再谈谁付钱。</a:t></a:r><a:endParaRPr lang="en-US" dirty="0"/></a:p></p:txBody></p:sp><p:sp><p:nvSpPr><p:cNvPr id="4" name="Slide Number Placeholder 3"/><p:cNvSpPr><a:spLocks noGrp="1"/></p:cNvSpPr><p:nvPr><p:ph type="sldNum" sz="quarter" idx="10"/></p:nvPr></p:nvSpPr><p:spPr/><p:txBody><a:bodyPr/><a:lstStyle/><a:p><a:fld id="{F7021451-1387-4CA6-816F-3879F97B5CBC}" type="slidenum"><a:rPr lang="en-US"/><a:t>11</a:t></a:fld><a:endParaRPr lang="en-US"/></a:p></p:txBody></p:sp></p:spTree><p:extLst><p:ext uri="{BB962C8B-B14F-4D97-AF65-F5344CB8AC3E}"><p14:creationId xmlns:p14="http://schemas.microsoft.com/office/powerpoint/2010/main" val="1024086991"/></p:ext></p:extLst></p:cSld><p:clrMapOvr><a:masterClrMapping/></p:clrMapOvr></p:notes>
 </file>
 
 <file path=ppt/notesSlides/notesSlide12.xml><?xml version="1.0" encoding="UTF-8" standalone="yes"?>
-<p:notes xmlns:a="http://schemas.openxmlformats.org/drawingml/2006/main" xmlns:r="http://schemas.openxmlformats.org/officeDocument/2006/relationships" xmlns:p="http://schemas.openxmlformats.org/presentationml/2006/main"><p:cSld><p:spTree><p:nvGrpSpPr><p:cNvPr id="1" name=""/><p:cNvGrpSpPr/><p:nvPr/></p:nvGrpSpPr><p:grpSpPr><a:xfrm><a:off x="0" y="0"/><a:ext cx="0" cy="0"/><a:chOff x="0" y="0"/><a:chExt cx="0" cy="0"/></a:xfrm></p:grpSpPr><p:sp><p:nvSpPr><p:cNvPr id="2" name="Slide Image Placeholder 1"/><p:cNvSpPr><a:spLocks noGrp="1" noRot="1" noChangeAspect="1"/></p:cNvSpPr><p:nvPr><p:ph type="sldImg"/></p:nvPr></p:nvSpPr><p:spPr/></p:sp><p:sp><p:nvSpPr><p:cNvPr id="3" name="Notes Placeholder 2"/><p:cNvSpPr><a:spLocks noGrp="1"/></p:cNvSpPr><p:nvPr><p:ph type="body" idx="1"/></p:nvPr></p:nvSpPr><p:spPr/><p:txBody><a:bodyPr/><a:lstStyle/><a:p><a:r><a:rPr lang="en-US" dirty="0"/><a:t>（4:48–5:00）-最后一句话。-出海不缺第一单。缺的是第二单。+<p:notes xmlns:a="http://schemas.openxmlformats.org/drawingml/2006/main" xmlns:r="http://schemas.openxmlformats.org/officeDocument/2006/relationships" xmlns:p="http://schemas.openxmlformats.org/presentationml/2006/main"><p:cSld><p:spTree><p:nvGrpSpPr><p:cNvPr id="1" name=""/><p:cNvGrpSpPr/><p:nvPr/></p:nvGrpSpPr><p:grpSpPr><a:xfrm><a:off x="0" y="0"/><a:ext cx="0" cy="0"/><a:chOff x="0" y="0"/><a:chExt cx="0" cy="0"/></a:xfrm></p:grpSpPr><p:sp><p:nvSpPr><p:cNvPr id="2" name="Slide Image Placeholder 1"/><p:cNvSpPr><a:spLocks noGrp="1" noRot="1" noChangeAspect="1"/></p:cNvSpPr><p:nvPr><p:ph type="sldImg"/></p:nvPr></p:nvSpPr><p:spPr/></p:sp><p:sp><p:nvSpPr><p:cNvPr id="3" name="Notes Placeholder 2"/><p:cNvSpPr><a:spLocks noGrp="1"/></p:cNvSpPr><p:nvPr><p:ph type="body" idx="1"/></p:nvPr></p:nvSpPr><p:spPr/><p:txBody><a:bodyPr/><a:lstStyle/><a:p><a:r><a:rPr lang="en-US" dirty="0"/><a:t>（4:46–5:00　14 秒　57 字）++最后一句。+出海不缺第一单，缺的是第二单。 货在他仓里没动，他就不会再下单—— 而你到那时才知道，已经晚了九十天。 谢谢。</a:t></a:r><a:endParaRPr lang="en-US" dirty="0"/></a:p></p:txBody></p:sp><p:sp><p:nvSpPr><p:cNvPr id="4" name="Slide Number Placeholder 3"/><p:cNvSpPr><a:spLocks noGrp="1"/></p:cNvSpPr><p:nvPr><p:ph type="sldNum" sz="quarter" idx="10"/></p:nvPr></p:nvSpPr><p:spPr/><p:txBody><a:bodyPr/><a:lstStyle/><a:p><a:fld id="{F7021451-1387-4CA6-816F-3879F97B5CBC}" type="slidenum"><a:rPr lang="en-US"/><a:t>12</a:t></a:fld><a:endParaRPr lang="en-US"/></a:p></p:txBody></p:sp></p:spTree><p:extLst><p:ext uri="{BB962C8B-B14F-4D97-AF65-F5344CB8AC3E}"><p14:creationId xmlns:p14="http://schemas.microsoft.com/office/powerpoint/2010/main" val="1024086991"/></p:ext></p:extLst></p:cSld><p:clrMapOvr><a:masterClrMapping/></p:clrMapOvr></p:notes>
@@ -558,7 +569,7 @@
           <a:p>
             <a:r>
               <a:rPr lang="en-US" dirty="0"/>
-              <a:t>以下不参与五分钟路演。评委提问时直接跳到对应页。</a:t>
+              <a:t>以下九页不参与五分钟路演，评委提问时直接跳到对应页。</a:t>
             </a:r>
             <a:endParaRPr lang="en-US" dirty="0"/>
           </a:p>
@@ -601,293 +612,183 @@
 </file>
 
 <file path=ppt/notesSlides/notesSlide14.xml><?xml version="1.0" encoding="UTF-8" standalone="yes"?>
-<p:notes xmlns:a="http://schemas.openxmlformats.org/drawingml/2006/main" xmlns:r="http://schemas.openxmlformats.org/officeDocument/2006/relationships" xmlns:p="http://schemas.openxmlformats.org/presentationml/2006/main"><p:cSld><p:spTree><p:nvGrpSpPr><p:cNvPr id="1" name=""/><p:cNvGrpSpPr/><p:nvPr/></p:nvGrpSpPr><p:grpSpPr><a:xfrm><a:off x="0" y="0"/><a:ext cx="0" cy="0"/><a:chOff x="0" y="0"/><a:chExt cx="0" cy="0"/></a:xfrm></p:grpSpPr><p:sp><p:nvSpPr><p:cNvPr id="2" name="Slide Image Placeholder 1"/><p:cNvSpPr><a:spLocks noGrp="1" noRot="1" noChangeAspect="1"/></p:cNvSpPr><p:nvPr><p:ph type="sldImg"/></p:nvPr></p:nvSpPr><p:spPr/></p:sp><p:sp><p:nvSpPr><p:cNvPr id="3" name="Notes Placeholder 2"/><p:cNvSpPr><a:spLocks noGrp="1"/></p:cNvSpPr><p:nvPr><p:ph type="body" idx="1"/></p:nvPr></p:nvSpPr><p:spPr/><p:txBody><a:bodyPr/><a:lstStyle/><a:p><a:r><a:rPr lang="en-US" dirty="0"/><a:t>怎么答：不要辩护「我们的数字很准」，直接说「不保证对，保证可查」，然后当场演示 ⓘ 弹出的来源与生效日期。-如果被追问日本／欧盟：坦白说没收，因为公开资料表述不够明确，收一条不确定的税率会毁掉整个规则库的可信度。</a:t></a:r><a:endParaRPr lang="en-US" dirty="0"/></a:p></p:txBody></p:sp><p:sp><p:nvSpPr><p:cNvPr id="4" name="Slide Number Placeholder 3"/><p:cNvSpPr><a:spLocks noGrp="1"/></p:cNvSpPr><p:nvPr><p:ph type="sldNum" sz="quarter" idx="10"/></p:nvPr></p:nvSpPr><p:spPr/><p:txBody><a:bodyPr/><a:lstStyle/><a:p><a:fld id="{F7021451-1387-4CA6-816F-3879F97B5CBC}" type="slidenum"><a:rPr lang="en-US"/><a:t>14</a:t></a:fld><a:endParaRPr lang="en-US"/></a:p></p:txBody></p:sp></p:spTree><p:extLst><p:ext uri="{BB962C8B-B14F-4D97-AF65-F5344CB8AC3E}"><p14:creationId xmlns:p14="http://schemas.microsoft.com/office/powerpoint/2010/main" val="1024086991"/></p:ext></p:extLst></p:cSld><p:clrMapOvr><a:masterClrMapping/></p:clrMapOvr></p:notes>
+<p:notes xmlns:a="http://schemas.openxmlformats.org/drawingml/2006/main" xmlns:r="http://schemas.openxmlformats.org/officeDocument/2006/relationships" xmlns:p="http://schemas.openxmlformats.org/presentationml/2006/main"><p:cSld><p:spTree><p:nvGrpSpPr><p:cNvPr id="1" name=""/><p:cNvGrpSpPr/><p:nvPr/></p:nvGrpSpPr><p:grpSpPr><a:xfrm><a:off x="0" y="0"/><a:ext cx="0" cy="0"/><a:chOff x="0" y="0"/><a:chExt cx="0" cy="0"/></a:xfrm></p:grpSpPr><p:sp><p:nvSpPr><p:cNvPr id="2" name="Slide Image Placeholder 1"/><p:cNvSpPr><a:spLocks noGrp="1" noRot="1" noChangeAspect="1"/></p:cNvSpPr><p:nvPr><p:ph type="sldImg"/></p:nvPr></p:nvSpPr><p:spPr/></p:sp><p:sp><p:nvSpPr><p:cNvPr id="3" name="Notes Placeholder 2"/><p:cNvSpPr><a:spLocks noGrp="1"/></p:cNvSpPr><p:nvPr><p:ph type="body" idx="1"/></p:nvPr></p:nvSpPr><p:spPr/><p:txBody><a:bodyPr/><a:lstStyle/><a:p><a:r><a:rPr lang="en-US" dirty="0"/><a:t>怎么答：不要辩护「我们的数字很准」。+第一句就说「不保证对，保证可查」，然后当场把鼠标移到 ⓘ 上，让他看到来源和生效日期。+如果被追问为什么没收日本或欧盟：公开资料对烈酒税率的表述不够明确，宁可不收——+收一条不确定的税率，赔上的是整个规则库的可信度。这句话本身就是答案。</a:t></a:r><a:endParaRPr lang="en-US" dirty="0"/></a:p></p:txBody></p:sp><p:sp><p:nvSpPr><p:cNvPr id="4" name="Slide Number Placeholder 3"/><p:cNvSpPr><a:spLocks noGrp="1"/></p:cNvSpPr><p:nvPr><p:ph type="sldNum" sz="quarter" idx="10"/></p:nvPr></p:nvSpPr><p:spPr/><p:txBody><a:bodyPr/><a:lstStyle/><a:p><a:fld id="{F7021451-1387-4CA6-816F-3879F97B5CBC}" type="slidenum"><a:rPr lang="en-US"/><a:t>14</a:t></a:fld><a:endParaRPr lang="en-US"/></a:p></p:txBody></p:sp></p:spTree><p:extLst><p:ext uri="{BB962C8B-B14F-4D97-AF65-F5344CB8AC3E}"><p14:creationId xmlns:p14="http://schemas.microsoft.com/office/powerpoint/2010/main" val="1024086991"/></p:ext></p:extLst></p:cSld><p:clrMapOvr><a:masterClrMapping/></p:clrMapOvr></p:notes>
 </file>
 
 <file path=ppt/notesSlides/notesSlide15.xml><?xml version="1.0" encoding="UTF-8" standalone="yes"?>
-<p:notes xmlns:a="http://schemas.openxmlformats.org/drawingml/2006/main" xmlns:r="http://schemas.openxmlformats.org/officeDocument/2006/relationships" xmlns:p="http://schemas.openxmlformats.org/presentationml/2006/main"><p:cSld><p:spTree><p:nvGrpSpPr><p:cNvPr id="1" name=""/><p:cNvGrpSpPr/><p:nvPr/></p:nvGrpSpPr><p:grpSpPr><a:xfrm><a:off x="0" y="0"/><a:ext cx="0" cy="0"/><a:chOff x="0" y="0"/><a:chExt cx="0" cy="0"/></a:xfrm></p:grpSpPr><p:sp><p:nvSpPr><p:cNvPr id="2" name="Slide Image Placeholder 1"/><p:cNvSpPr><a:spLocks noGrp="1" noRot="1" noChangeAspect="1"/></p:cNvSpPr><p:nvPr><p:ph type="sldImg"/></p:nvPr></p:nvSpPr><p:spPr/></p:sp><p:sp><p:nvSpPr><p:cNvPr id="3" name="Notes Placeholder 2"/><p:cNvSpPr><a:spLocks noGrp="1"/></p:cNvSpPr><p:nvPr><p:ph type="body" idx="1"/></p:nvPr></p:nvSpPr><p:spPr/><p:txBody><a:bodyPr/><a:lstStyle/><a:p><a:r><a:rPr lang="en-US" dirty="0"/><a:t>怎么答：这题几乎一定会被问。三个字回答——细节、稳定、可追溯。-最有杀伤力的是当场对比：让评委用手机问通用模型「白酒出口新加坡税负多少」，多半会得到一个区间；我们给的是按纯酒精量算出来的具体数字，附税则出处。</a:t></a:r><a:endParaRPr lang="en-US" dirty="0"/></a:p></p:txBody></p:sp><p:sp><p:nvSpPr><p:cNvPr id="4" name="Slide Number Placeholder 3"/><p:cNvSpPr><a:spLocks noGrp="1"/></p:cNvSpPr><p:nvPr><p:ph type="sldNum" sz="quarter" idx="10"/></p:nvPr></p:nvSpPr><p:spPr/><p:txBody><a:bodyPr/><a:lstStyle/><a:p><a:fld id="{F7021451-1387-4CA6-816F-3879F97B5CBC}" type="slidenum"><a:rPr lang="en-US"/><a:t>15</a:t></a:fld><a:endParaRPr lang="en-US"/></a:p></p:txBody></p:sp></p:spTree><p:extLst><p:ext uri="{BB962C8B-B14F-4D97-AF65-F5344CB8AC3E}"><p14:creationId xmlns:p14="http://schemas.microsoft.com/office/powerpoint/2010/main" val="1024086991"/></p:ext></p:extLst></p:cSld><p:clrMapOvr><a:masterClrMapping/></p:clrMapOvr></p:notes>
+<p:notes xmlns:a="http://schemas.openxmlformats.org/drawingml/2006/main" xmlns:r="http://schemas.openxmlformats.org/officeDocument/2006/relationships" xmlns:p="http://schemas.openxmlformats.org/presentationml/2006/main"><p:cSld><p:spTree><p:nvGrpSpPr><p:cNvPr id="1" name=""/><p:cNvGrpSpPr/><p:nvPr/></p:nvGrpSpPr><p:grpSpPr><a:xfrm><a:off x="0" y="0"/><a:ext cx="0" cy="0"/><a:chOff x="0" y="0"/><a:chExt cx="0" cy="0"/></a:xfrm></p:grpSpPr><p:sp><p:nvSpPr><p:cNvPr id="2" name="Slide Image Placeholder 1"/><p:cNvSpPr><a:spLocks noGrp="1" noRot="1" noChangeAspect="1"/></p:cNvSpPr><p:nvPr><p:ph type="sldImg"/></p:nvPr></p:nvSpPr><p:spPr/></p:sp><p:sp><p:nvSpPr><p:cNvPr id="3" name="Notes Placeholder 2"/><p:cNvSpPr><a:spLocks noGrp="1"/></p:cNvSpPr><p:nvPr><p:ph type="body" idx="1"/></p:nvPr></p:nvSpPr><p:spPr/><p:txBody><a:bodyPr/><a:lstStyle/><a:p><a:r><a:rPr lang="en-US" dirty="0"/><a:t>怎么答：这题几乎一定会被问，准备好三个字——细节、稳定、可追溯。+最有杀伤力的是当场对比：请评委用手机问通用模型「白酒出口新加坡税负多少」，+他多半会得到一个百分之三十到五十的区间；我们给的是按纯酒精量算出的具体数字，附税则出处。+补充：我们不是在跟通用模型比谁更会讲话，是把一个垂直领域的规则翻出来、写死、标上出处。</a:t></a:r><a:endParaRPr lang="en-US" dirty="0"/></a:p></p:txBody></p:sp><p:sp><p:nvSpPr><p:cNvPr id="4" name="Slide Number Placeholder 3"/><p:cNvSpPr><a:spLocks noGrp="1"/></p:cNvSpPr><p:nvPr><p:ph type="sldNum" sz="quarter" idx="10"/></p:nvPr></p:nvSpPr><p:spPr/><p:txBody><a:bodyPr/><a:lstStyle/><a:p><a:fld id="{F7021451-1387-4CA6-816F-3879F97B5CBC}" type="slidenum"><a:rPr lang="en-US"/><a:t>15</a:t></a:fld><a:endParaRPr lang="en-US"/></a:p></p:txBody></p:sp></p:spTree><p:extLst><p:ext uri="{BB962C8B-B14F-4D97-AF65-F5344CB8AC3E}"><p14:creationId xmlns:p14="http://schemas.microsoft.com/office/powerpoint/2010/main" val="1024086991"/></p:ext></p:extLst></p:cSld><p:clrMapOvr><a:masterClrMapping/></p:clrMapOvr></p:notes>
 </file>
 
 <file path=ppt/notesSlides/notesSlide16.xml><?xml version="1.0" encoding="UTF-8" standalone="yes"?>
-<p:notes xmlns:a="http://schemas.openxmlformats.org/drawingml/2006/main" xmlns:r="http://schemas.openxmlformats.org/officeDocument/2006/relationships" xmlns:p="http://schemas.openxmlformats.org/presentationml/2006/main"><p:cSld><p:spTree><p:nvGrpSpPr><p:cNvPr id="1" name=""/><p:cNvGrpSpPr/><p:nvPr/></p:nvGrpSpPr><p:grpSpPr><a:xfrm><a:off x="0" y="0"/><a:ext cx="0" cy="0"/><a:chOff x="0" y="0"/><a:chExt cx="0" cy="0"/></a:xfrm></p:grpSpPr><p:sp><p:nvSpPr><p:cNvPr id="2" name="Slide Image Placeholder 1"/><p:cNvSpPr><a:spLocks noGrp="1" noRot="1" noChangeAspect="1"/></p:cNvSpPr><p:nvPr><p:ph type="sldImg"/></p:nvPr></p:nvSpPr><p:spPr/></p:sp><p:sp><p:nvSpPr><p:cNvPr id="3" name="Notes Placeholder 2"/><p:cNvSpPr><a:spLocks noGrp="1"/></p:cNvSpPr><p:nvPr><p:ph type="body" idx="1"/></p:nvPr></p:nvSpPr><p:spPr/><p:txBody><a:bodyPr/><a:lstStyle/><a:p><a:r><a:rPr lang="en-US" dirty="0"/><a:t>怎么答：不要硬编商业模式。先承认「现在谈还太早」，再给唯一现实的入口——产区服务平台。-如果评委追问「那你们靠什么活」：中小酒企不会为网页付费，会为「少亏一柜」付费，所以第一步是把误差验出来。</a:t></a:r><a:endParaRPr lang="en-US" dirty="0"/></a:p></p:txBody></p:sp><p:sp><p:nvSpPr><p:cNvPr id="4" name="Slide Number Placeholder 3"/><p:cNvSpPr><a:spLocks noGrp="1"/></p:cNvSpPr><p:nvPr><p:ph type="sldNum" sz="quarter" idx="10"/></p:nvPr></p:nvSpPr><p:spPr/><p:txBody><a:bodyPr/><a:lstStyle/><a:p><a:fld id="{F7021451-1387-4CA6-816F-3879F97B5CBC}" type="slidenum"><a:rPr lang="en-US"/><a:t>16</a:t></a:fld><a:endParaRPr lang="en-US"/></a:p></p:txBody></p:sp></p:spTree><p:extLst><p:ext uri="{BB962C8B-B14F-4D97-AF65-F5344CB8AC3E}"><p14:creationId xmlns:p14="http://schemas.microsoft.com/office/powerpoint/2010/main" val="1024086991"/></p:ext></p:extLst></p:cSld><p:clrMapOvr><a:masterClrMapping/></p:clrMapOvr></p:notes>
+<p:notes xmlns:a="http://schemas.openxmlformats.org/drawingml/2006/main" xmlns:r="http://schemas.openxmlformats.org/officeDocument/2006/relationships" xmlns:p="http://schemas.openxmlformats.org/presentationml/2006/main"><p:cSld><p:spTree><p:nvGrpSpPr><p:cNvPr id="1" name=""/><p:cNvGrpSpPr/><p:nvPr/></p:nvGrpSpPr><p:grpSpPr><a:xfrm><a:off x="0" y="0"/><a:ext cx="0" cy="0"/><a:chOff x="0" y="0"/><a:chExt cx="0" cy="0"/></a:xfrm></p:grpSpPr><p:sp><p:nvSpPr><p:cNvPr id="2" name="Slide Image Placeholder 1"/><p:cNvSpPr><a:spLocks noGrp="1" noRot="1" noChangeAspect="1"/></p:cNvSpPr><p:nvPr><p:ph type="sldImg"/></p:nvPr></p:nvSpPr><p:spPr/></p:sp><p:sp><p:nvSpPr><p:cNvPr id="3" name="Notes Placeholder 2"/><p:cNvSpPr><a:spLocks noGrp="1"/></p:cNvSpPr><p:nvPr><p:ph type="body" idx="1"/></p:nvPr></p:nvSpPr><p:spPr/><p:txBody><a:bodyPr/><a:lstStyle/><a:p><a:r><a:rPr lang="en-US" dirty="0"/><a:t>怎么答：不要硬编商业模式，那会显得不诚实。+先承认「现在谈还太早」，再给唯一现实的入口——产区服务平台。+综保区本来就在做外贸陪跑，有预算、有台账、有企业名单，这个工具作为其中一个模块，+比单独卖 SaaS 给中小酒企现实得多。+如果追问「那你们靠什么活」：中小酒企不会为一个网页付费，会为「少亏一柜」付费，+所以第一步是把落地价误差验出来，不是先做定价页。</a:t></a:r><a:endParaRPr lang="en-US" dirty="0"/></a:p></p:txBody></p:sp><p:sp><p:nvSpPr><p:cNvPr id="4" name="Slide Number Placeholder 3"/><p:cNvSpPr><a:spLocks noGrp="1"/></p:cNvSpPr><p:nvPr><p:ph type="sldNum" sz="quarter" idx="10"/></p:nvPr></p:nvSpPr><p:spPr/><p:txBody><a:bodyPr/><a:lstStyle/><a:p><a:fld id="{F7021451-1387-4CA6-816F-3879F97B5CBC}" type="slidenum"><a:rPr lang="en-US"/><a:t>16</a:t></a:fld><a:endParaRPr lang="en-US"/></a:p></p:txBody></p:sp></p:spTree><p:extLst><p:ext uri="{BB962C8B-B14F-4D97-AF65-F5344CB8AC3E}"><p14:creationId xmlns:p14="http://schemas.microsoft.com/office/powerpoint/2010/main" val="1024086991"/></p:ext></p:extLst></p:cSld><p:clrMapOvr><a:masterClrMapping/></p:clrMapOvr></p:notes>
 </file>
 
 <file path=ppt/notesSlides/notesSlide17.xml><?xml version="1.0" encoding="UTF-8" standalone="yes"?>
-<p:notes xmlns:a="http://schemas.openxmlformats.org/drawingml/2006/main" xmlns:r="http://schemas.openxmlformats.org/officeDocument/2006/relationships" xmlns:p="http://schemas.openxmlformats.org/presentationml/2006/main"><p:cSld><p:spTree><p:nvGrpSpPr><p:cNvPr id="1" name=""/><p:cNvGrpSpPr/><p:nvPr/></p:nvGrpSpPr><p:grpSpPr><a:xfrm><a:off x="0" y="0"/><a:ext cx="0" cy="0"/><a:chOff x="0" y="0"/><a:chExt cx="0" cy="0"/></a:xfrm></p:grpSpPr><p:sp><p:nvSpPr><p:cNvPr id="2" name="Slide Image Placeholder 1"/><p:cNvSpPr><a:spLocks noGrp="1" noRot="1" noChangeAspect="1"/></p:cNvSpPr><p:nvPr><p:ph type="sldImg"/></p:nvPr></p:nvSpPr><p:spPr/></p:sp><p:sp><p:nvSpPr><p:cNvPr id="3" name="Notes Placeholder 2"/><p:cNvSpPr><a:spLocks noGrp="1"/></p:cNvSpPr><p:nvPr><p:ph type="body" idx="1"/></p:nvPr></p:nvSpPr><p:spPr/><p:txBody><a:bodyPr/><a:lstStyle/><a:p><a:r><a:rPr lang="en-US" dirty="0"/><a:t>怎么答：分两层——官方公开资料（税则牌照）和团队自建数据库（品项与用法，每条标注证据强度）。-强调五十六支贵州白酒是逐支核过的，不是抓的。</a:t></a:r><a:endParaRPr lang="en-US" dirty="0"/></a:p></p:txBody></p:sp><p:sp><p:nvSpPr><p:cNvPr id="4" name="Slide Number Placeholder 3"/><p:cNvSpPr><a:spLocks noGrp="1"/></p:cNvSpPr><p:nvPr><p:ph type="sldNum" sz="quarter" idx="10"/></p:nvPr></p:nvSpPr><p:spPr/><p:txBody><a:bodyPr/><a:lstStyle/><a:p><a:fld id="{F7021451-1387-4CA6-816F-3879F97B5CBC}" type="slidenum"><a:rPr lang="en-US"/><a:t>17</a:t></a:fld><a:endParaRPr lang="en-US"/></a:p></p:txBody></p:sp></p:spTree><p:extLst><p:ext uri="{BB962C8B-B14F-4D97-AF65-F5344CB8AC3E}"><p14:creationId xmlns:p14="http://schemas.microsoft.com/office/powerpoint/2010/main" val="1024086991"/></p:ext></p:extLst></p:cSld><p:clrMapOvr><a:masterClrMapping/></p:clrMapOvr></p:notes>
+<p:notes xmlns:a="http://schemas.openxmlformats.org/drawingml/2006/main" xmlns:r="http://schemas.openxmlformats.org/officeDocument/2006/relationships" xmlns:p="http://schemas.openxmlformats.org/presentationml/2006/main"><p:cSld><p:spTree><p:nvGrpSpPr><p:cNvPr id="1" name=""/><p:cNvGrpSpPr/><p:nvPr/></p:nvGrpSpPr><p:grpSpPr><a:xfrm><a:off x="0" y="0"/><a:ext cx="0" cy="0"/><a:chOff x="0" y="0"/><a:chExt cx="0" cy="0"/></a:xfrm></p:grpSpPr><p:sp><p:nvSpPr><p:cNvPr id="2" name="Slide Image Placeholder 1"/><p:cNvSpPr><a:spLocks noGrp="1" noRot="1" noChangeAspect="1"/></p:cNvSpPr><p:nvPr><p:ph type="sldImg"/></p:nvPr></p:nvSpPr><p:spPr/></p:sp><p:sp><p:nvSpPr><p:cNvPr id="3" name="Notes Placeholder 2"/><p:cNvSpPr><a:spLocks noGrp="1"/></p:cNvSpPr><p:nvPr><p:ph type="body" idx="1"/></p:nvPr></p:nvSpPr><p:spPr/><p:txBody><a:bodyPr/><a:lstStyle/><a:p><a:r><a:rPr lang="en-US" dirty="0"/><a:t>怎么答：分两层说。+一层是官方公开资料——香港政府新闻公报、新加坡海关、越南 2025 年新版特别消费税法、+美国 TTB 与 FDA、中国财政部与税务总局的出口退税公告。+另一层是团队自建的两份数据库：五十六支贵州白酒逐支核过、每支标注资料可信度；+海外用法每条标注证据强度，来源是 World Baijiu Day、品牌方推广和商家页面。+强调「逐支核过」，不是抓的。</a:t></a:r><a:endParaRPr lang="en-US" dirty="0"/></a:p></p:txBody></p:sp><p:sp><p:nvSpPr><p:cNvPr id="4" name="Slide Number Placeholder 3"/><p:cNvSpPr><a:spLocks noGrp="1"/></p:cNvSpPr><p:nvPr><p:ph type="sldNum" sz="quarter" idx="10"/></p:nvPr></p:nvSpPr><p:spPr/><p:txBody><a:bodyPr/><a:lstStyle/><a:p><a:fld id="{F7021451-1387-4CA6-816F-3879F97B5CBC}" type="slidenum"><a:rPr lang="en-US"/><a:t>17</a:t></a:fld><a:endParaRPr lang="en-US"/></a:p></p:txBody></p:sp></p:spTree><p:extLst><p:ext uri="{BB962C8B-B14F-4D97-AF65-F5344CB8AC3E}"><p14:creationId xmlns:p14="http://schemas.microsoft.com/office/powerpoint/2010/main" val="1024086991"/></p:ext></p:extLst></p:cSld><p:clrMapOvr><a:masterClrMapping/></p:clrMapOvr></p:notes>
 </file>
 
-<file path=ppt/notesSlides/notesSlide18.xml><?xml version="1.0" encoding="utf-8"?>
-<p:notes xmlns:a="http://schemas.openxmlformats.org/drawingml/2006/main" xmlns:r="http://schemas.openxmlformats.org/officeDocument/2006/relationships" xmlns:p="http://schemas.openxmlformats.org/presentationml/2006/main">
-  <p:cSld>
-    <p:spTree>
-      <p:nvGrpSpPr>
-        <p:cNvPr id="1" name=""/>
-        <p:cNvGrpSpPr/>
-        <p:nvPr/>
-      </p:nvGrpSpPr>
-      <p:grpSpPr>
-        <a:xfrm>
-          <a:off x="0" y="0"/>
-          <a:ext cx="0" cy="0"/>
-          <a:chOff x="0" y="0"/>
-          <a:chExt cx="0" cy="0"/>
-        </a:xfrm>
-      </p:grpSpPr>
-      <p:sp>
-        <p:nvSpPr>
-          <p:cNvPr id="2" name="Slide Image Placeholder 1"/>
-          <p:cNvSpPr>
-            <a:spLocks noGrp="1" noRot="1" noChangeAspect="1"/>
-          </p:cNvSpPr>
-          <p:nvPr>
-            <p:ph type="sldImg"/>
-          </p:nvPr>
-        </p:nvSpPr>
-        <p:spPr/>
-      </p:sp>
-      <p:sp>
-        <p:nvSpPr>
-          <p:cNvPr id="3" name="Notes Placeholder 2"/>
-          <p:cNvSpPr>
-            <a:spLocks noGrp="1"/>
-          </p:cNvSpPr>
-          <p:nvPr>
-            <p:ph type="body" idx="1"/>
-          </p:nvPr>
-        </p:nvSpPr>
-        <p:spPr/>
-        <p:txBody>
-          <a:bodyPr/>
-          <a:lstStyle/>
-          <a:p>
-            <a:r>
-              <a:rPr lang="en-US" dirty="0"/>
-              <a:t>怎么答：承认网页不是终态。但要说清楚为什么先做网页——规则库、信号权重、落地价误差这三件事没验完之前，做成机器人只是把还没校准的答案推给更多人。</a:t>
-            </a:r>
-            <a:endParaRPr lang="en-US" dirty="0"/>
-          </a:p>
-        </p:txBody>
-      </p:sp>
-      <p:sp>
-        <p:nvSpPr>
-          <p:cNvPr id="4" name="Slide Number Placeholder 3"/>
-          <p:cNvSpPr>
-            <a:spLocks noGrp="1"/>
-          </p:cNvSpPr>
-          <p:nvPr>
-            <p:ph type="sldNum" sz="quarter" idx="10"/>
-          </p:nvPr>
-        </p:nvSpPr>
-        <p:spPr/>
-        <p:txBody>
-          <a:bodyPr/>
-          <a:lstStyle/>
-          <a:p>
-            <a:fld id="{F7021451-1387-4CA6-816F-3879F97B5CBC}" type="slidenum">
-              <a:rPr lang="en-US"/>
-              <a:t>18</a:t>
-            </a:fld>
-            <a:endParaRPr lang="en-US"/>
-          </a:p>
-        </p:txBody>
-      </p:sp>
-    </p:spTree>
-    <p:extLst>
-      <p:ext uri="{BB962C8B-B14F-4D97-AF65-F5344CB8AC3E}">
-        <p14:creationId xmlns:p14="http://schemas.microsoft.com/office/powerpoint/2010/main" val="1024086991"/>
-      </p:ext>
-    </p:extLst>
-  </p:cSld>
-  <p:clrMapOvr>
-    <a:masterClrMapping/>
-  </p:clrMapOvr>
-</p:notes>
+<file path=ppt/notesSlides/notesSlide18.xml><?xml version="1.0" encoding="UTF-8" standalone="yes"?>
+<p:notes xmlns:a="http://schemas.openxmlformats.org/drawingml/2006/main" xmlns:r="http://schemas.openxmlformats.org/officeDocument/2006/relationships" xmlns:p="http://schemas.openxmlformats.org/presentationml/2006/main"><p:cSld><p:spTree><p:nvGrpSpPr><p:cNvPr id="1" name=""/><p:cNvGrpSpPr/><p:nvPr/></p:nvGrpSpPr><p:grpSpPr><a:xfrm><a:off x="0" y="0"/><a:ext cx="0" cy="0"/><a:chOff x="0" y="0"/><a:chExt cx="0" cy="0"/></a:xfrm></p:grpSpPr><p:sp><p:nvSpPr><p:cNvPr id="2" name="Slide Image Placeholder 1"/><p:cNvSpPr><a:spLocks noGrp="1" noRot="1" noChangeAspect="1"/></p:cNvSpPr><p:nvPr><p:ph type="sldImg"/></p:nvPr></p:nvSpPr><p:spPr/></p:sp><p:sp><p:nvSpPr><p:cNvPr id="3" name="Notes Placeholder 2"/><p:cNvSpPr><a:spLocks noGrp="1"/></p:cNvSpPr><p:nvPr><p:ph type="body" idx="1"/></p:nvPr></p:nvSpPr><p:spPr/><p:txBody><a:bodyPr/><a:lstStyle/><a:p><a:r><a:rPr lang="en-US" dirty="0"/><a:t>怎么答：承认网页不是终态，这一点不要回避。+外贸专员整天在微信里，不会为了判断一个买家去开网页——真正会被用起来的是企业微信机器人，+转发一段对话给它，回一份决策简报。这件事写在一百天计划的第四步。+但要说清楚为什么先做网页：规则库、信号权重、落地价误差这三件事没验完之前，+做成机器人只是把一个还没校准的答案推到更多人面前。</a:t></a:r><a:endParaRPr lang="en-US" dirty="0"/></a:p></p:txBody></p:sp><p:sp><p:nvSpPr><p:cNvPr id="4" name="Slide Number Placeholder 3"/><p:cNvSpPr><a:spLocks noGrp="1"/></p:cNvSpPr><p:nvPr><p:ph type="sldNum" sz="quarter" idx="10"/></p:nvPr></p:nvSpPr><p:spPr/><p:txBody><a:bodyPr/><a:lstStyle/><a:p><a:fld id="{F7021451-1387-4CA6-816F-3879F97B5CBC}" type="slidenum"><a:rPr lang="en-US"/><a:t>18</a:t></a:fld><a:endParaRPr lang="en-US"/></a:p></p:txBody></p:sp></p:spTree><p:extLst><p:ext uri="{BB962C8B-B14F-4D97-AF65-F5344CB8AC3E}"><p14:creationId xmlns:p14="http://schemas.microsoft.com/office/powerpoint/2010/main" val="1024086991"/></p:ext></p:extLst></p:cSld><p:clrMapOvr><a:masterClrMapping/></p:clrMapOvr></p:notes>
 </file>
 
 <file path=ppt/notesSlides/notesSlide19.xml><?xml version="1.0" encoding="UTF-8" standalone="yes"?>
-<p:notes xmlns:a="http://schemas.openxmlformats.org/drawingml/2006/main" xmlns:r="http://schemas.openxmlformats.org/officeDocument/2006/relationships" xmlns:p="http://schemas.openxmlformats.org/presentationml/2006/main"><p:cSld><p:spTree><p:nvGrpSpPr><p:cNvPr id="1" name=""/><p:cNvGrpSpPr/><p:nvPr/></p:nvGrpSpPr><p:grpSpPr><a:xfrm><a:off x="0" y="0"/><a:ext cx="0" cy="0"/><a:chOff x="0" y="0"/><a:chExt cx="0" cy="0"/></a:xfrm></p:grpSpPr><p:sp><p:nvSpPr><p:cNvPr id="2" name="Slide Image Placeholder 1"/><p:cNvSpPr><a:spLocks noGrp="1" noRot="1" noChangeAspect="1"/></p:cNvSpPr><p:nvPr><p:ph type="sldImg"/></p:nvPr></p:nvSpPr><p:spPr/></p:sp><p:sp><p:nvSpPr><p:cNvPr id="3" name="Notes Placeholder 2"/><p:cNvSpPr><a:spLocks noGrp="1"/></p:cNvSpPr><p:nvPr><p:ph type="body" idx="1"/></p:nvPr></p:nvSpPr><p:spPr/><p:txBody><a:bodyPr/><a:lstStyle/><a:p><a:r><a:rPr lang="en-US" dirty="0"/><a:t>怎么答：主动说，不等被问。这一页的作用是把可信度拉起来——一个肯讲自己边界的团队，前面说的话才值得信。-最重要的一条是「信号权重还没用真实案例校准」，这也正好是一百天计划的第二步。</a:t></a:r><a:endParaRPr lang="en-US" dirty="0"/></a:p></p:txBody></p:sp><p:sp><p:nvSpPr><p:cNvPr id="4" name="Slide Number Placeholder 3"/><p:cNvSpPr><a:spLocks noGrp="1"/></p:cNvSpPr><p:nvPr><p:ph type="sldNum" sz="quarter" idx="10"/></p:nvPr></p:nvSpPr><p:spPr/><p:txBody><a:bodyPr/><a:lstStyle/><a:p><a:fld id="{F7021451-1387-4CA6-816F-3879F97B5CBC}" type="slidenum"><a:rPr lang="en-US"/><a:t>19</a:t></a:fld><a:endParaRPr lang="en-US"/></a:p></p:txBody></p:sp></p:spTree><p:extLst><p:ext uri="{BB962C8B-B14F-4D97-AF65-F5344CB8AC3E}"><p14:creationId xmlns:p14="http://schemas.microsoft.com/office/powerpoint/2010/main" val="1024086991"/></p:ext></p:extLst></p:cSld><p:clrMapOvr><a:masterClrMapping/></p:clrMapOvr></p:notes>
+<p:notes xmlns:a="http://schemas.openxmlformats.org/drawingml/2006/main" xmlns:r="http://schemas.openxmlformats.org/officeDocument/2006/relationships" xmlns:p="http://schemas.openxmlformats.org/presentationml/2006/main"><p:cSld><p:spTree><p:nvGrpSpPr><p:cNvPr id="1" name=""/><p:cNvGrpSpPr/><p:nvPr/></p:nvGrpSpPr><p:grpSpPr><a:xfrm><a:off x="0" y="0"/><a:ext cx="0" cy="0"/><a:chOff x="0" y="0"/><a:chExt cx="0" cy="0"/></a:xfrm></p:grpSpPr><p:sp><p:nvSpPr><p:cNvPr id="2" name="Slide Image Placeholder 1"/><p:cNvSpPr><a:spLocks noGrp="1" noRot="1" noChangeAspect="1"/></p:cNvSpPr><p:nvPr><p:ph type="sldImg"/></p:nvPr></p:nvSpPr><p:spPr/></p:sp><p:sp><p:nvSpPr><p:cNvPr id="3" name="Notes Placeholder 2"/><p:cNvSpPr><a:spLocks noGrp="1"/></p:cNvSpPr><p:nvPr><p:ph type="body" idx="1"/></p:nvPr></p:nvSpPr><p:spPr/><p:txBody><a:bodyPr/><a:lstStyle/><a:p><a:r><a:rPr lang="en-US" dirty="0"/><a:t>怎么答：主动说，不等被问。+这一页的作用是把可信度拉起来——一个肯讲自己边界的团队，前面说的话才值得信。+最重要的一条是「信号权重还没用真实案例校准」，目前是团队设定值，+这也正好是一百天计划的第二步，前后是接得上的。</a:t></a:r><a:endParaRPr lang="en-US" dirty="0"/></a:p></p:txBody></p:sp><p:sp><p:nvSpPr><p:cNvPr id="4" name="Slide Number Placeholder 3"/><p:cNvSpPr><a:spLocks noGrp="1"/></p:cNvSpPr><p:nvPr><p:ph type="sldNum" sz="quarter" idx="10"/></p:nvPr></p:nvSpPr><p:spPr/><p:txBody><a:bodyPr/><a:lstStyle/><a:p><a:fld id="{F7021451-1387-4CA6-816F-3879F97B5CBC}" type="slidenum"><a:rPr lang="en-US"/><a:t>19</a:t></a:fld><a:endParaRPr lang="en-US"/></a:p></p:txBody></p:sp></p:spTree><p:extLst><p:ext uri="{BB962C8B-B14F-4D97-AF65-F5344CB8AC3E}"><p14:creationId xmlns:p14="http://schemas.microsoft.com/office/powerpoint/2010/main" val="1024086991"/></p:ext></p:extLst></p:cSld><p:clrMapOvr><a:masterClrMapping/></p:clrMapOvr></p:notes>
 </file>
 
 <file path=ppt/notesSlides/notesSlide2.xml><?xml version="1.0" encoding="UTF-8" standalone="yes"?>
-<p:notes xmlns:a="http://schemas.openxmlformats.org/drawingml/2006/main" xmlns:r="http://schemas.openxmlformats.org/officeDocument/2006/relationships" xmlns:p="http://schemas.openxmlformats.org/presentationml/2006/main"><p:cSld><p:spTree><p:nvGrpSpPr><p:cNvPr id="1" name=""/><p:cNvGrpSpPr/><p:nvPr/></p:nvGrpSpPr><p:grpSpPr><a:xfrm><a:off x="0" y="0"/><a:ext cx="0" cy="0"/><a:chOff x="0" y="0"/><a:chExt cx="0" cy="0"/></a:xfrm></p:grpSpPr><p:sp><p:nvSpPr><p:cNvPr id="2" name="Slide Image Placeholder 1"/><p:cNvSpPr><a:spLocks noGrp="1" noRot="1" noChangeAspect="1"/></p:cNvSpPr><p:nvPr><p:ph type="sldImg"/></p:nvPr></p:nvSpPr><p:spPr/></p:sp><p:sp><p:nvSpPr><p:cNvPr id="3" name="Notes Placeholder 2"/><p:cNvSpPr><a:spLocks noGrp="1"/></p:cNvSpPr><p:nvPr><p:ph type="body" idx="1"/></p:nvPr></p:nvSpPr><p:spPr/><p:txBody><a:bodyPr/><a:lstStyle/><a:p><a:r><a:rPr lang="en-US" dirty="0"/><a:t>（0:20–0:55）-先说我们为什么做这个。-遵义综合保税区二〇二五年的工作总结里，有一组很诚实的数字：-八十九家酒企完成出口备案，三十五家有意向，十一家真的出了海，-最后——五家和东南亚经销商「建立初步联系」。-转化率百分之五点六。-[指最后一级]-请注意最后一级的措辞，是「建立初步联系」，不是签约，更不是复购。-公开资料在这里就断了。</a:t></a:r><a:endParaRPr lang="en-US" dirty="0"/></a:p></p:txBody></p:sp><p:sp><p:nvSpPr><p:cNvPr id="4" name="Slide Number Placeholder 3"/><p:cNvSpPr><a:spLocks noGrp="1"/></p:cNvSpPr><p:nvPr><p:ph type="sldNum" sz="quarter" idx="10"/></p:nvPr></p:nvSpPr><p:spPr/><p:txBody><a:bodyPr/><a:lstStyle/><a:p><a:fld id="{F7021451-1387-4CA6-816F-3879F97B5CBC}" type="slidenum"><a:rPr lang="en-US"/><a:t>2</a:t></a:fld><a:endParaRPr lang="en-US"/></a:p></p:txBody></p:sp></p:spTree><p:extLst><p:ext uri="{BB962C8B-B14F-4D97-AF65-F5344CB8AC3E}"><p14:creationId xmlns:p14="http://schemas.microsoft.com/office/powerpoint/2010/main" val="1024086991"/></p:ext></p:extLst></p:cSld><p:clrMapOvr><a:masterClrMapping/></p:clrMapOvr></p:notes>
+<p:notes xmlns:a="http://schemas.openxmlformats.org/drawingml/2006/main" xmlns:r="http://schemas.openxmlformats.org/officeDocument/2006/relationships" xmlns:p="http://schemas.openxmlformats.org/presentationml/2006/main"><p:cSld><p:spTree><p:nvGrpSpPr><p:cNvPr id="1" name=""/><p:cNvGrpSpPr/><p:nvPr/></p:nvGrpSpPr><p:grpSpPr><a:xfrm><a:off x="0" y="0"/><a:ext cx="0" cy="0"/><a:chOff x="0" y="0"/><a:chExt cx="0" cy="0"/></a:xfrm></p:grpSpPr><p:sp><p:nvSpPr><p:cNvPr id="2" name="Slide Image Placeholder 1"/><p:cNvSpPr><a:spLocks noGrp="1" noRot="1" noChangeAspect="1"/></p:cNvSpPr><p:nvPr><p:ph type="sldImg"/></p:nvPr></p:nvSpPr><p:spPr/></p:sp><p:sp><p:nvSpPr><p:cNvPr id="3" name="Notes Placeholder 2"/><p:cNvSpPr><a:spLocks noGrp="1"/></p:cNvSpPr><p:nvPr><p:ph type="body" idx="1"/></p:nvPr></p:nvSpPr><p:spPr/><p:txBody><a:bodyPr/><a:lstStyle/><a:p><a:r><a:rPr lang="en-US" dirty="0"/><a:t>（0:18–0:56　38 秒　178 字）++遵义综保区去年的工作总结里，有一组很诚实的数字：+八十九家完成出口备案，三十五家有意向，十一家真的出了海，+最后五家和东南亚经销商「建立初步联系」。+[停一拍]+注意这个措辞——不是签约，更不是复购。公开资料到这里就断了。+遵义自己列的第一个障碍是：白酒属管制商品，进口方需酒牌资质。+所以你要找的不是想卖酒的人，是已经持牌的人。+这个池子在任何国家都有限、封闭，早被洋酒喂饱了。++───── 时间充裕可加 ─────+所以问题从来不是「白酒怎么出海」这种大词，是一家没有海外团队的酒厂，怎么让第一个海外经销商愿意下第二单。</a:t></a:r><a:endParaRPr lang="en-US" dirty="0"/></a:p></p:txBody></p:sp><p:sp><p:nvSpPr><p:cNvPr id="4" name="Slide Number Placeholder 3"/><p:cNvSpPr><a:spLocks noGrp="1"/></p:cNvSpPr><p:nvPr><p:ph type="sldNum" sz="quarter" idx="10"/></p:nvPr></p:nvSpPr><p:spPr/><p:txBody><a:bodyPr/><a:lstStyle/><a:p><a:fld id="{F7021451-1387-4CA6-816F-3879F97B5CBC}" type="slidenum"><a:rPr lang="en-US"/><a:t>2</a:t></a:fld><a:endParaRPr lang="en-US"/></a:p></p:txBody></p:sp></p:spTree><p:extLst><p:ext uri="{BB962C8B-B14F-4D97-AF65-F5344CB8AC3E}"><p14:creationId xmlns:p14="http://schemas.microsoft.com/office/powerpoint/2010/main" val="1024086991"/></p:ext></p:extLst></p:cSld><p:clrMapOvr><a:masterClrMapping/></p:clrMapOvr></p:notes>
 </file>
 
 <file path=ppt/notesSlides/notesSlide20.xml><?xml version="1.0" encoding="UTF-8" standalone="yes"?>
-<p:notes xmlns:a="http://schemas.openxmlformats.org/drawingml/2006/main" xmlns:r="http://schemas.openxmlformats.org/officeDocument/2006/relationships" xmlns:p="http://schemas.openxmlformats.org/presentationml/2006/main"><p:cSld><p:spTree><p:nvGrpSpPr><p:cNvPr id="1" name=""/><p:cNvGrpSpPr/><p:nvPr/></p:nvGrpSpPr><p:grpSpPr><a:xfrm><a:off x="0" y="0"/><a:ext cx="0" cy="0"/><a:chOff x="0" y="0"/><a:chExt cx="0" cy="0"/></a:xfrm></p:grpSpPr><p:sp><p:nvSpPr><p:cNvPr id="2" name="Slide Image Placeholder 1"/><p:cNvSpPr><a:spLocks noGrp="1" noRot="1" noChangeAspect="1"/></p:cNvSpPr><p:nvPr><p:ph type="sldImg"/></p:nvPr></p:nvSpPr><p:spPr/></p:sp><p:sp><p:nvSpPr><p:cNvPr id="3" name="Notes Placeholder 2"/><p:cNvSpPr><a:spLocks noGrp="1"/></p:cNvSpPr><p:nvPr><p:ph type="body" idx="1"/></p:nvPr></p:nvSpPr><p:spPr/><p:txBody><a:bodyPr/><a:lstStyle/><a:p><a:r><a:rPr lang="en-US" dirty="0"/><a:t>技术选型。如果评委是技术背景，重点讲那条分界线：规则是纯函数、模型只做抽取与措辞。-另外可以提「刻意没引入」那一行——不用图表库、不用组件库、不用数据库，税则是编译期常量，比数据库更适合审计与 diff。</a:t></a:r><a:endParaRPr lang="en-US" dirty="0"/></a:p></p:txBody></p:sp><p:sp><p:nvSpPr><p:cNvPr id="4" name="Slide Number Placeholder 3"/><p:cNvSpPr><a:spLocks noGrp="1"/></p:cNvSpPr><p:nvPr><p:ph type="sldNum" sz="quarter" idx="10"/></p:nvPr></p:nvSpPr><p:spPr/><p:txBody><a:bodyPr/><a:lstStyle/><a:p><a:fld id="{F7021451-1387-4CA6-816F-3879F97B5CBC}" type="slidenum"><a:rPr lang="en-US"/><a:t>20</a:t></a:fld><a:endParaRPr lang="en-US"/></a:p></p:txBody></p:sp></p:spTree><p:extLst><p:ext uri="{BB962C8B-B14F-4D97-AF65-F5344CB8AC3E}"><p14:creationId xmlns:p14="http://schemas.microsoft.com/office/powerpoint/2010/main" val="1024086991"/></p:ext></p:extLst></p:cSld><p:clrMapOvr><a:masterClrMapping/></p:clrMapOvr></p:notes>
+<p:notes xmlns:a="http://schemas.openxmlformats.org/drawingml/2006/main" xmlns:r="http://schemas.openxmlformats.org/officeDocument/2006/relationships" xmlns:p="http://schemas.openxmlformats.org/presentationml/2006/main"><p:cSld><p:spTree><p:nvGrpSpPr><p:cNvPr id="1" name=""/><p:cNvGrpSpPr/><p:nvPr/></p:nvGrpSpPr><p:grpSpPr><a:xfrm><a:off x="0" y="0"/><a:ext cx="0" cy="0"/><a:chOff x="0" y="0"/><a:chExt cx="0" cy="0"/></a:xfrm></p:grpSpPr><p:sp><p:nvSpPr><p:cNvPr id="2" name="Slide Image Placeholder 1"/><p:cNvSpPr><a:spLocks noGrp="1" noRot="1" noChangeAspect="1"/></p:cNvSpPr><p:nvPr><p:ph type="sldImg"/></p:nvPr></p:nvSpPr><p:spPr/></p:sp><p:sp><p:nvSpPr><p:cNvPr id="3" name="Notes Placeholder 2"/><p:cNvSpPr><a:spLocks noGrp="1"/></p:cNvSpPr><p:nvPr><p:ph type="body" idx="1"/></p:nvPr></p:nvSpPr><p:spPr/><p:txBody><a:bodyPr/><a:lstStyle/><a:p><a:r><a:rPr lang="en-US" dirty="0"/><a:t>技术选型。评委是技术背景时，重点讲那条分界线：+规则是纯函数、模型只做抽取与措辞，这不是偷懒，是因为算错一个税率就是真金白银的亏损。+另外可以提「刻意没引入」那一行——不用图表库（瀑布图、酒瓶液面全是手写 SVG 与 shader）、+不用组件库、不用数据库，税则是编译期常量，比数据库更适合审计与 diff。+判定页那瓶酒是 three.js 实时渲染的，液面高度就是套利风险分。</a:t></a:r><a:endParaRPr lang="en-US" dirty="0"/></a:p></p:txBody></p:sp><p:sp><p:nvSpPr><p:cNvPr id="4" name="Slide Number Placeholder 3"/><p:cNvSpPr><a:spLocks noGrp="1"/></p:cNvSpPr><p:nvPr><p:ph type="sldNum" sz="quarter" idx="10"/></p:nvPr></p:nvSpPr><p:spPr/><p:txBody><a:bodyPr/><a:lstStyle/><a:p><a:fld id="{F7021451-1387-4CA6-816F-3879F97B5CBC}" type="slidenum"><a:rPr lang="en-US"/><a:t>20</a:t></a:fld><a:endParaRPr lang="en-US"/></a:p></p:txBody></p:sp></p:spTree><p:extLst><p:ext uri="{BB962C8B-B14F-4D97-AF65-F5344CB8AC3E}"><p14:creationId xmlns:p14="http://schemas.microsoft.com/office/powerpoint/2010/main" val="1024086991"/></p:ext></p:extLst></p:cSld><p:clrMapOvr><a:masterClrMapping/></p:clrMapOvr></p:notes>
 </file>
 
-<file path=ppt/notesSlides/notesSlide21.xml><?xml version="1.0" encoding="utf-8"?>
-<p:notes xmlns:a="http://schemas.openxmlformats.org/drawingml/2006/main" xmlns:r="http://schemas.openxmlformats.org/officeDocument/2006/relationships" xmlns:p="http://schemas.openxmlformats.org/presentationml/2006/main">
-  <p:cSld>
-    <p:spTree>
-      <p:nvGrpSpPr>
-        <p:cNvPr id="1" name=""/>
-        <p:cNvGrpSpPr/>
-        <p:nvPr/>
-      </p:nvGrpSpPr>
-      <p:grpSpPr>
-        <a:xfrm>
-          <a:off x="0" y="0"/>
-          <a:ext cx="0" cy="0"/>
-          <a:chOff x="0" y="0"/>
-          <a:chExt cx="0" cy="0"/>
-        </a:xfrm>
-      </p:grpSpPr>
-      <p:sp>
-        <p:nvSpPr>
-          <p:cNvPr id="2" name="Slide Image Placeholder 1"/>
-          <p:cNvSpPr>
-            <a:spLocks noGrp="1" noRot="1" noChangeAspect="1"/>
-          </p:cNvSpPr>
-          <p:nvPr>
-            <p:ph type="sldImg"/>
-          </p:nvPr>
-        </p:nvSpPr>
-        <p:spPr/>
-      </p:sp>
-      <p:sp>
-        <p:nvSpPr>
-          <p:cNvPr id="3" name="Notes Placeholder 2"/>
-          <p:cNvSpPr>
-            <a:spLocks noGrp="1"/>
-          </p:cNvSpPr>
-          <p:nvPr>
-            <p:ph type="body" idx="1"/>
-          </p:nvPr>
-        </p:nvSpPr>
-        <p:spPr/>
-        <p:txBody>
-          <a:bodyPr/>
-          <a:lstStyle/>
-          <a:p>
-            <a:r>
-              <a:rPr lang="en-US" dirty="0"/>
-              <a:t>线上体验可以直接让评委扫码打开自己点。仓库是公开的，Topic 是 #Guikesong。</a:t>
-            </a:r>
-            <a:endParaRPr lang="en-US" dirty="0"/>
-          </a:p>
-        </p:txBody>
-      </p:sp>
-      <p:sp>
-        <p:nvSpPr>
-          <p:cNvPr id="4" name="Slide Number Placeholder 3"/>
-          <p:cNvSpPr>
-            <a:spLocks noGrp="1"/>
-          </p:cNvSpPr>
-          <p:nvPr>
-            <p:ph type="sldNum" sz="quarter" idx="10"/>
-          </p:nvPr>
-        </p:nvSpPr>
-        <p:spPr/>
-        <p:txBody>
-          <a:bodyPr/>
-          <a:lstStyle/>
-          <a:p>
-            <a:fld id="{F7021451-1387-4CA6-816F-3879F97B5CBC}" type="slidenum">
-              <a:rPr lang="en-US"/>
-              <a:t>21</a:t>
-            </a:fld>
-            <a:endParaRPr lang="en-US"/>
-          </a:p>
-        </p:txBody>
-      </p:sp>
-    </p:spTree>
-    <p:extLst>
-      <p:ext uri="{BB962C8B-B14F-4D97-AF65-F5344CB8AC3E}">
-        <p14:creationId xmlns:p14="http://schemas.microsoft.com/office/powerpoint/2010/main" val="1024086991"/>
-      </p:ext>
-    </p:extLst>
-  </p:cSld>
-  <p:clrMapOvr>
-    <a:masterClrMapping/>
-  </p:clrMapOvr>
-</p:notes>
+<file path=ppt/notesSlides/notesSlide21.xml><?xml version="1.0" encoding="UTF-8" standalone="yes"?>
+<p:notes xmlns:a="http://schemas.openxmlformats.org/drawingml/2006/main" xmlns:r="http://schemas.openxmlformats.org/officeDocument/2006/relationships" xmlns:p="http://schemas.openxmlformats.org/presentationml/2006/main"><p:cSld><p:spTree><p:nvGrpSpPr><p:cNvPr id="1" name=""/><p:cNvGrpSpPr/><p:nvPr/></p:nvGrpSpPr><p:grpSpPr><a:xfrm><a:off x="0" y="0"/><a:ext cx="0" cy="0"/><a:chOff x="0" y="0"/><a:chExt cx="0" cy="0"/></a:xfrm></p:grpSpPr><p:sp><p:nvSpPr><p:cNvPr id="2" name="Slide Image Placeholder 1"/><p:cNvSpPr><a:spLocks noGrp="1" noRot="1" noChangeAspect="1"/></p:cNvSpPr><p:nvPr><p:ph type="sldImg"/></p:nvPr></p:nvSpPr><p:spPr/></p:sp><p:sp><p:nvSpPr><p:cNvPr id="3" name="Notes Placeholder 2"/><p:cNvSpPr><a:spLocks noGrp="1"/></p:cNvSpPr><p:nvPr><p:ph type="body" idx="1"/></p:nvPr></p:nvSpPr><p:spPr/><p:txBody><a:bodyPr/><a:lstStyle/><a:p><a:r><a:rPr lang="en-US" dirty="0"/><a:t>线上体验可以直接请评委自己打开点，不用注册。+仓库是公开的，Topic 是 #Guikesong，README 顶部就是技术栈表。+如果还有时间，可以回到 demo 现场再跑一个越南的案例做对照——+同样八秒，出来的是「可谈」，让他们看到这工具不是只会说不。</a:t></a:r><a:endParaRPr lang="en-US" dirty="0"/></a:p></p:txBody></p:sp><p:sp><p:nvSpPr><p:cNvPr id="4" name="Slide Number Placeholder 3"/><p:cNvSpPr><a:spLocks noGrp="1"/></p:cNvSpPr><p:nvPr><p:ph type="sldNum" sz="quarter" idx="10"/></p:nvPr></p:nvSpPr><p:spPr/><p:txBody><a:bodyPr/><a:lstStyle/><a:p><a:fld id="{F7021451-1387-4CA6-816F-3879F97B5CBC}" type="slidenum"><a:rPr lang="en-US"/><a:t>21</a:t></a:fld><a:endParaRPr lang="en-US"/></a:p></p:txBody></p:sp></p:spTree><p:extLst><p:ext uri="{BB962C8B-B14F-4D97-AF65-F5344CB8AC3E}"><p14:creationId xmlns:p14="http://schemas.microsoft.com/office/powerpoint/2010/main" val="1024086991"/></p:ext></p:extLst></p:cSld><p:clrMapOvr><a:masterClrMapping/></p:clrMapOvr></p:notes>
 </file>
 
 <file path=ppt/notesSlides/notesSlide3.xml><?xml version="1.0" encoding="UTF-8" standalone="yes"?>
-<p:notes xmlns:a="http://schemas.openxmlformats.org/drawingml/2006/main" xmlns:r="http://schemas.openxmlformats.org/officeDocument/2006/relationships" xmlns:p="http://schemas.openxmlformats.org/presentationml/2006/main"><p:cSld><p:spTree><p:nvGrpSpPr><p:cNvPr id="1" name=""/><p:cNvGrpSpPr/><p:nvPr/></p:nvGrpSpPr><p:grpSpPr><a:xfrm><a:off x="0" y="0"/><a:ext cx="0" cy="0"/><a:chOff x="0" y="0"/><a:chExt cx="0" cy="0"/></a:xfrm></p:grpSpPr><p:sp><p:nvSpPr><p:cNvPr id="2" name="Slide Image Placeholder 1"/><p:cNvSpPr><a:spLocks noGrp="1" noRot="1" noChangeAspect="1"/></p:cNvSpPr><p:nvPr><p:ph type="sldImg"/></p:nvPr></p:nvSpPr><p:spPr/></p:sp><p:sp><p:nvSpPr><p:cNvPr id="3" name="Notes Placeholder 2"/><p:cNvSpPr><a:spLocks noGrp="1"/></p:cNvSpPr><p:nvPr><p:ph type="body" idx="1"/></p:nvPr></p:nvSpPr><p:spPr/><p:txBody><a:bodyPr/><a:lstStyle/><a:p><a:r><a:rPr lang="en-US" dirty="0"/><a:t>（0:55–1:20）-卡住的地方不在酿酒，在酿完之后。-中小酒企没有海外团队。展会散场，业务员手上十几张名片，-他真正的问题只有三个：-这个买家是真想卖酒，还是在做税差？-这瓶酒到他货架上要卖多少钱？-第一份合同该写死哪几条？-这三个问题，市面上的工具一个都没答。</a:t></a:r><a:endParaRPr lang="en-US" dirty="0"/></a:p></p:txBody></p:sp><p:sp><p:nvSpPr><p:cNvPr id="4" name="Slide Number Placeholder 3"/><p:cNvSpPr><a:spLocks noGrp="1"/></p:cNvSpPr><p:nvPr><p:ph type="sldNum" sz="quarter" idx="10"/></p:nvPr></p:nvSpPr><p:spPr/><p:txBody><a:bodyPr/><a:lstStyle/><a:p><a:fld id="{F7021451-1387-4CA6-816F-3879F97B5CBC}" type="slidenum"><a:rPr lang="en-US"/><a:t>3</a:t></a:fld><a:endParaRPr lang="en-US"/></a:p></p:txBody></p:sp></p:spTree><p:extLst><p:ext uri="{BB962C8B-B14F-4D97-AF65-F5344CB8AC3E}"><p14:creationId xmlns:p14="http://schemas.microsoft.com/office/powerpoint/2010/main" val="1024086991"/></p:ext></p:extLst></p:cSld><p:clrMapOvr><a:masterClrMapping/></p:clrMapOvr></p:notes>
+<p:notes xmlns:a="http://schemas.openxmlformats.org/drawingml/2006/main" xmlns:r="http://schemas.openxmlformats.org/officeDocument/2006/relationships" xmlns:p="http://schemas.openxmlformats.org/presentationml/2006/main"><p:cSld><p:spTree><p:nvGrpSpPr><p:cNvPr id="1" name=""/><p:cNvGrpSpPr/><p:nvPr/></p:nvGrpSpPr><p:grpSpPr><a:xfrm><a:off x="0" y="0"/><a:ext cx="0" cy="0"/><a:chOff x="0" y="0"/><a:chExt cx="0" cy="0"/></a:xfrm></p:grpSpPr><p:sp><p:nvSpPr><p:cNvPr id="2" name="Slide Image Placeholder 1"/><p:cNvSpPr><a:spLocks noGrp="1" noRot="1" noChangeAspect="1"/></p:cNvSpPr><p:nvPr><p:ph type="sldImg"/></p:nvPr></p:nvSpPr><p:spPr/></p:sp><p:sp><p:nvSpPr><p:cNvPr id="3" name="Notes Placeholder 2"/><p:cNvSpPr><a:spLocks noGrp="1"/></p:cNvSpPr><p:nvPr><p:ph type="body" idx="1"/></p:nvPr></p:nvSpPr><p:spPr/><p:txBody><a:bodyPr/><a:lstStyle/><a:p><a:r><a:rPr lang="en-US" dirty="0"/><a:t>（0:56–1:20　24 秒　111 字）++卡住的不在酿酒，在酿完之后。+展会散场，业务员手上十几张名片，+却分不清哪个是真经销商，哪个是来做别的事的。+他真正的问题只有三个：这人是真想卖酒还是在做税差？+这瓶酒到他货架上卖多少钱、卖得动吗？合同该写死哪几条？+现在只能靠猜。++───── 时间充裕可加 ─────+因为答案分散在五个国家的税则、牌照制度和渠道结构里，他连从哪查起都不知道。</a:t></a:r><a:endParaRPr lang="en-US" dirty="0"/></a:p></p:txBody></p:sp><p:sp><p:nvSpPr><p:cNvPr id="4" name="Slide Number Placeholder 3"/><p:cNvSpPr><a:spLocks noGrp="1"/></p:cNvSpPr><p:nvPr><p:ph type="sldNum" sz="quarter" idx="10"/></p:nvPr></p:nvSpPr><p:spPr/><p:txBody><a:bodyPr/><a:lstStyle/><a:p><a:fld id="{F7021451-1387-4CA6-816F-3879F97B5CBC}" type="slidenum"><a:rPr lang="en-US"/><a:t>3</a:t></a:fld><a:endParaRPr lang="en-US"/></a:p></p:txBody></p:sp></p:spTree><p:extLst><p:ext uri="{BB962C8B-B14F-4D97-AF65-F5344CB8AC3E}"><p14:creationId xmlns:p14="http://schemas.microsoft.com/office/powerpoint/2010/main" val="1024086991"/></p:ext></p:extLst></p:cSld><p:clrMapOvr><a:masterClrMapping/></p:clrMapOvr></p:notes>
 </file>
 
 <file path=ppt/notesSlides/notesSlide4.xml><?xml version="1.0" encoding="UTF-8" standalone="yes"?>
-<p:notes xmlns:a="http://schemas.openxmlformats.org/drawingml/2006/main" xmlns:r="http://schemas.openxmlformats.org/officeDocument/2006/relationships" xmlns:p="http://schemas.openxmlformats.org/presentationml/2006/main"><p:cSld><p:spTree><p:nvGrpSpPr><p:cNvPr id="1" name=""/><p:cNvGrpSpPr/><p:nvPr/></p:nvGrpSpPr><p:grpSpPr><a:xfrm><a:off x="0" y="0"/><a:ext cx="0" cy="0"/><a:chOff x="0" y="0"/><a:chExt cx="0" cy="0"/></a:xfrm></p:grpSpPr><p:sp><p:nvSpPr><p:cNvPr id="2" name="Slide Image Placeholder 1"/><p:cNvSpPr><a:spLocks noGrp="1" noRot="1" noChangeAspect="1"/></p:cNvSpPr><p:nvPr><p:ph type="sldImg"/></p:nvPr></p:nvSpPr><p:spPr/></p:sp><p:sp><p:nvSpPr><p:cNvPr id="3" name="Notes Placeholder 2"/><p:cNvSpPr><a:spLocks noGrp="1"/></p:cNvSpPr><p:nvPr><p:ph type="body" idx="1"/></p:nvPr></p:nvSpPr><p:spPr/><p:txBody><a:bodyPr/><a:lstStyle/><a:p><a:r><a:rPr lang="en-US" dirty="0"/><a:t>（1:20–1:55）-先说第一个问题，也是最要命的一个。+<p:notes xmlns:a="http://schemas.openxmlformats.org/drawingml/2006/main" xmlns:r="http://schemas.openxmlformats.org/officeDocument/2006/relationships" xmlns:p="http://schemas.openxmlformats.org/presentationml/2006/main"><p:cSld><p:spTree><p:nvGrpSpPr><p:cNvPr id="1" name=""/><p:cNvGrpSpPr/><p:nvPr/></p:nvGrpSpPr><p:grpSpPr><a:xfrm><a:off x="0" y="0"/><a:ext cx="0" cy="0"/><a:chOff x="0" y="0"/><a:chExt cx="0" cy="0"/></a:xfrm></p:grpSpPr><p:sp><p:nvSpPr><p:cNvPr id="2" name="Slide Image Placeholder 1"/><p:cNvSpPr><a:spLocks noGrp="1" noRot="1" noChangeAspect="1"/></p:cNvSpPr><p:nvPr><p:ph type="sldImg"/></p:nvPr></p:nvSpPr><p:spPr/></p:sp><p:sp><p:nvSpPr><p:cNvPr id="3" name="Notes Placeholder 2"/><p:cNvSpPr><a:spLocks noGrp="1"/></p:cNvSpPr><p:nvPr><p:ph type="body" idx="1"/></p:nvPr></p:nvSpPr><p:spPr/><p:txBody><a:bodyPr/><a:lstStyle/><a:p><a:r><a:rPr lang="en-US" dirty="0"/><a:t>（1:20–1:58　38 秒　159 字）++看一张真实的名片。 [指瓶子]-套利型买家要的，从来不是这瓶酒。-白酒出口，消费税百分之二十从价免征，再加增值税退税百分之十三。-他要的是这百分之三十三。-货囤进自贸仓，转手就走，酒根本没上过货架。-[停一拍]-而你以为你签下了第一个海外经销商。</a:t></a:r><a:endParaRPr lang="en-US" dirty="0"/></a:p></p:txBody></p:sp><p:sp><p:nvSpPr><p:cNvPr id="4" name="Slide Number Placeholder 3"/><p:cNvSpPr><a:spLocks noGrp="1"/></p:cNvSpPr><p:nvPr><p:ph type="sldNum" sz="quarter" idx="10"/></p:nvPr></p:nvSpPr><p:spPr/><p:txBody><a:bodyPr/><a:lstStyle/><a:p><a:fld id="{F7021451-1387-4CA6-816F-3879F97B5CBC}" type="slidenum"><a:rPr lang="en-US"/><a:t>4</a:t></a:fld><a:endParaRPr lang="en-US"/></a:p></p:txBody></p:sp></p:spTree><p:extLst><p:ext uri="{BB962C8B-B14F-4D97-AF65-F5344CB8AC3E}"><p14:creationId xmlns:p14="http://schemas.microsoft.com/office/powerpoint/2010/main" val="1024086991"/></p:ext></p:extLst></p:cSld><p:clrMapOvr><a:masterClrMapping/></p:clrMapOvr></p:notes>
+他说：出厂价最低多少，我们要最低的，先来三个柜；+标签不用改，我们自己处理；货先放自贸仓；动销数据是商业机密。+每一句单独看都不算离谱，合起来是另一回事。+他要的不是这瓶酒。+白酒出口，消费税百分之二十从价免征，加增值税退税百分之十三——+他要的是这百分之三十三。囤进自贸仓转手就走，+酒有没有上过货架跟他无关。++───── 时间充裕可加 ─────+第二个买家问的是：有没有三十八度的，因为越南特别消费税以二十度分界；标签要越南文；+先做一百五十箱放十二家中餐厅试销；能不能给品鉴小样，我们要培训服务生。+这个人是来卖酒的。差别不在语气，在他关心什么。</a:t></a:r><a:endParaRPr lang="en-US" dirty="0"/></a:p></p:txBody></p:sp><p:sp><p:nvSpPr><p:cNvPr id="4" name="Slide Number Placeholder 3"/><p:cNvSpPr><a:spLocks noGrp="1"/></p:cNvSpPr><p:nvPr><p:ph type="sldNum" sz="quarter" idx="10"/></p:nvPr></p:nvSpPr><p:spPr/><p:txBody><a:bodyPr/><a:lstStyle/><a:p><a:fld id="{F7021451-1387-4CA6-816F-3879F97B5CBC}" type="slidenum"><a:rPr lang="en-US"/><a:t>4</a:t></a:fld><a:endParaRPr lang="en-US"/></a:p></p:txBody></p:sp></p:spTree><p:extLst><p:ext uri="{BB962C8B-B14F-4D97-AF65-F5344CB8AC3E}"><p14:creationId xmlns:p14="http://schemas.microsoft.com/office/powerpoint/2010/main" val="1024086991"/></p:ext></p:extLst></p:cSld><p:clrMapOvr><a:masterClrMapping/></p:clrMapOvr></p:notes>
 </file>
 
 <file path=ppt/notesSlides/notesSlide5.xml><?xml version="1.0" encoding="UTF-8" standalone="yes"?>
-<p:notes xmlns:a="http://schemas.openxmlformats.org/drawingml/2006/main" xmlns:r="http://schemas.openxmlformats.org/officeDocument/2006/relationships" xmlns:p="http://schemas.openxmlformats.org/presentationml/2006/main"><p:cSld><p:spTree><p:nvGrpSpPr><p:cNvPr id="1" name=""/><p:cNvGrpSpPr/><p:nvPr/></p:nvGrpSpPr><p:grpSpPr><a:xfrm><a:off x="0" y="0"/><a:ext cx="0" cy="0"/><a:chOff x="0" y="0"/><a:chExt cx="0" cy="0"/></a:xfrm></p:grpSpPr><p:sp><p:nvSpPr><p:cNvPr id="2" name="Slide Image Placeholder 1"/><p:cNvSpPr><a:spLocks noGrp="1" noRot="1" noChangeAspect="1"/></p:cNvSpPr><p:nvPr><p:ph type="sldImg"/></p:nvPr></p:nvSpPr><p:spPr/></p:sp><p:sp><p:nvSpPr><p:cNvPr id="3" name="Notes Placeholder 2"/><p:cNvSpPr><a:spLocks noGrp="1"/></p:cNvSpPr><p:nvPr><p:ph type="body" idx="1"/></p:nvPr></p:nvSpPr><p:spPr/><p:txBody><a:bodyPr/><a:lstStyle/><a:p><a:r><a:rPr lang="en-US" dirty="0"/><a:t>（1:55–2:20）+<p:notes xmlns:a="http://schemas.openxmlformats.org/drawingml/2006/main" xmlns:r="http://schemas.openxmlformats.org/officeDocument/2006/relationships" xmlns:p="http://schemas.openxmlformats.org/presentationml/2006/main"><p:cSld><p:spTree><p:nvGrpSpPr><p:cNvPr id="1" name=""/><p:cNvGrpSpPr/><p:nvPr/></p:nvGrpSpPr><p:grpSpPr><a:xfrm><a:off x="0" y="0"/><a:ext cx="0" cy="0"/><a:chOff x="0" y="0"/><a:chExt cx="0" cy="0"/></a:xfrm></p:grpSpPr><p:sp><p:nvSpPr><p:cNvPr id="2" name="Slide Image Placeholder 1"/><p:cNvSpPr><a:spLocks noGrp="1" noRot="1" noChangeAspect="1"/></p:cNvSpPr><p:nvPr><p:ph type="sldImg"/></p:nvPr></p:nvSpPr><p:spPr/></p:sp><p:sp><p:nvSpPr><p:cNvPr id="3" name="Notes Placeholder 2"/><p:cNvSpPr><a:spLocks noGrp="1"/></p:cNvSpPr><p:nvPr><p:ph type="body" idx="1"/></p:nvPr></p:nvSpPr><p:spPr/><p:txBody><a:bodyPr/><a:lstStyle/><a:p><a:r><a:rPr lang="en-US" dirty="0"/><a:t>（1:58–2:20　22 秒　91 字）+ 判断错了，代价是多少。-一柜货值两百六十一万，卖不掉折价倒回国内，亏七十八万。-更贵的是——当地价格体系被打乱之后，+一柜货值两百六十一万；卖不掉折价倒回国内，亏七十八万。+但更贵的不是这笔钱，是当地价格烂掉之后， 你再也找不到第二个愿意接的经销商。-而这些，你要到九十天之后才会知道。</a:t></a:r><a:endParaRPr lang="en-US" dirty="0"/></a:p></p:txBody></p:sp><p:sp><p:nvSpPr><p:cNvPr id="4" name="Slide Number Placeholder 3"/><p:cNvSpPr><a:spLocks noGrp="1"/></p:cNvSpPr><p:nvPr><p:ph type="sldNum" sz="quarter" idx="10"/></p:nvPr></p:nvSpPr><p:spPr/><p:txBody><a:bodyPr/><a:lstStyle/><a:p><a:fld id="{F7021451-1387-4CA6-816F-3879F97B5CBC}" type="slidenum"><a:rPr lang="en-US"/><a:t>5</a:t></a:fld><a:endParaRPr lang="en-US"/></a:p></p:txBody></p:sp></p:spTree><p:extLst><p:ext uri="{BB962C8B-B14F-4D97-AF65-F5344CB8AC3E}"><p14:creationId xmlns:p14="http://schemas.microsoft.com/office/powerpoint/2010/main" val="1024086991"/></p:ext></p:extLst></p:cSld><p:clrMapOvr><a:masterClrMapping/></p:clrMapOvr></p:notes>
+而这些，你要九十天以后才会知道。++───── 时间充裕可加 ─────+这就是为什么这个判断必须发生在签约之前，不是发生在报关那一天。</a:t></a:r><a:endParaRPr lang="en-US" dirty="0"/></a:p></p:txBody></p:sp><p:sp><p:nvSpPr><p:cNvPr id="4" name="Slide Number Placeholder 3"/><p:cNvSpPr><a:spLocks noGrp="1"/></p:cNvSpPr><p:nvPr><p:ph type="sldNum" sz="quarter" idx="10"/></p:nvPr></p:nvSpPr><p:spPr/><p:txBody><a:bodyPr/><a:lstStyle/><a:p><a:fld id="{F7021451-1387-4CA6-816F-3879F97B5CBC}" type="slidenum"><a:rPr lang="en-US"/><a:t>5</a:t></a:fld><a:endParaRPr lang="en-US"/></a:p></p:txBody></p:sp></p:spTree><p:extLst><p:ext uri="{BB962C8B-B14F-4D97-AF65-F5344CB8AC3E}"><p14:creationId xmlns:p14="http://schemas.microsoft.com/office/powerpoint/2010/main" val="1024086991"/></p:ext></p:extLst></p:cSld><p:clrMapOvr><a:masterClrMapping/></p:clrMapOvr></p:notes>
 </file>
 
 <file path=ppt/notesSlides/notesSlide6.xml><?xml version="1.0" encoding="UTF-8" standalone="yes"?>
-<p:notes xmlns:a="http://schemas.openxmlformats.org/drawingml/2006/main" xmlns:r="http://schemas.openxmlformats.org/officeDocument/2006/relationships" xmlns:p="http://schemas.openxmlformats.org/presentationml/2006/main"><p:cSld><p:spTree><p:nvGrpSpPr><p:cNvPr id="1" name=""/><p:cNvGrpSpPr/><p:nvPr/></p:nvGrpSpPr><p:grpSpPr><a:xfrm><a:off x="0" y="0"/><a:ext cx="0" cy="0"/><a:chOff x="0" y="0"/><a:chExt cx="0" cy="0"/></a:xfrm></p:grpSpPr><p:sp><p:nvSpPr><p:cNvPr id="2" name="Slide Image Placeholder 1"/><p:cNvSpPr><a:spLocks noGrp="1" noRot="1" noChangeAspect="1"/></p:cNvSpPr><p:nvPr><p:ph type="sldImg"/></p:nvPr></p:nvSpPr><p:spPr/></p:sp><p:sp><p:nvSpPr><p:cNvPr id="3" name="Notes Placeholder 2"/><p:cNvSpPr><a:spLocks noGrp="1"/></p:cNvSpPr><p:nvPr><p:ph type="body" idx="1"/></p:nvPr></p:nvSpPr><p:spPr/><p:txBody><a:bodyPr/><a:lstStyle/><a:p><a:r><a:rPr lang="en-US" dirty="0"/><a:t>（2:20–2:45）+<p:notes xmlns:a="http://schemas.openxmlformats.org/drawingml/2006/main" xmlns:r="http://schemas.openxmlformats.org/officeDocument/2006/relationships" xmlns:p="http://schemas.openxmlformats.org/presentationml/2006/main"><p:cSld><p:spTree><p:nvGrpSpPr><p:cNvPr id="1" name=""/><p:cNvGrpSpPr/><p:nvPr/></p:nvGrpSpPr><p:grpSpPr><a:xfrm><a:off x="0" y="0"/><a:ext cx="0" cy="0"/><a:chOff x="0" y="0"/><a:chExt cx="0" cy="0"/></a:xfrm></p:grpSpPr><p:sp><p:nvSpPr><p:cNvPr id="2" name="Slide Image Placeholder 1"/><p:cNvSpPr><a:spLocks noGrp="1" noRot="1" noChangeAspect="1"/></p:cNvSpPr><p:nvPr><p:ph type="sldImg"/></p:nvPr></p:nvSpPr><p:spPr/></p:sp><p:sp><p:nvSpPr><p:cNvPr id="3" name="Notes Placeholder 2"/><p:cNvSpPr><a:spLocks noGrp="1"/></p:cNvSpPr><p:nvPr><p:ph type="body" idx="1"/></p:nvPr></p:nvSpPr><p:spPr/><p:txBody><a:bodyPr/><a:lstStyle/><a:p><a:r><a:rPr lang="en-US" dirty="0"/><a:t>（2:20–2:42　22 秒　89 字）+ 所以我们做了这个工具。-把展会上那段微信对话，原样贴进去。-八秒钟，出一份可以直接给老板看的决策简报。+把那段微信对话原样贴进去，不用整理，八秒出一份决策简报。 [指流程]-模型只做一件事：把这段乱七八糟的话读成结构。-判定不归它管。</a:t></a:r><a:endParaRPr lang="en-US" dirty="0"/></a:p></p:txBody></p:sp><p:sp><p:nvSpPr><p:cNvPr id="4" name="Slide Number Placeholder 3"/><p:cNvSpPr><a:spLocks noGrp="1"/></p:cNvSpPr><p:nvPr><p:ph type="sldNum" sz="quarter" idx="10"/></p:nvPr></p:nvSpPr><p:spPr/><p:txBody><a:bodyPr/><a:lstStyle/><a:p><a:fld id="{F7021451-1387-4CA6-816F-3879F97B5CBC}" type="slidenum"><a:rPr lang="en-US"/><a:t>6</a:t></a:fld><a:endParaRPr lang="en-US"/></a:p></p:txBody></p:sp></p:spTree><p:extLst><p:ext uri="{BB962C8B-B14F-4D97-AF65-F5344CB8AC3E}"><p14:creationId xmlns:p14="http://schemas.microsoft.com/office/powerpoint/2010/main" val="1024086991"/></p:ext></p:extLst></p:cSld><p:clrMapOvr><a:masterClrMapping/></p:clrMapOvr></p:notes>
+分工要说清楚：模型只做一件事，把这段乱七八糟的话读成结构。+该不该做、算多少钱、写哪几条，都不归它管。++───── 时间充裕可加 ─────+因为算错一个税率就是真金白银的亏损，这种事不能交给一个每次回答都可能不一样的东西。</a:t></a:r><a:endParaRPr lang="en-US" dirty="0"/></a:p></p:txBody></p:sp><p:sp><p:nvSpPr><p:cNvPr id="4" name="Slide Number Placeholder 3"/><p:cNvSpPr><a:spLocks noGrp="1"/></p:cNvSpPr><p:nvPr><p:ph type="sldNum" sz="quarter" idx="10"/></p:nvPr></p:nvSpPr><p:spPr/><p:txBody><a:bodyPr/><a:lstStyle/><a:p><a:fld id="{F7021451-1387-4CA6-816F-3879F97B5CBC}" type="slidenum"><a:rPr lang="en-US"/><a:t>6</a:t></a:fld><a:endParaRPr lang="en-US"/></a:p></p:txBody></p:sp></p:spTree><p:extLst><p:ext uri="{BB962C8B-B14F-4D97-AF65-F5344CB8AC3E}"><p14:creationId xmlns:p14="http://schemas.microsoft.com/office/powerpoint/2010/main" val="1024086991"/></p:ext></p:extLst></p:cSld><p:clrMapOvr><a:masterClrMapping/></p:clrMapOvr></p:notes>
 </file>
 
 <file path=ppt/notesSlides/notesSlide7.xml><?xml version="1.0" encoding="UTF-8" standalone="yes"?>
-<p:notes xmlns:a="http://schemas.openxmlformats.org/drawingml/2006/main" xmlns:r="http://schemas.openxmlformats.org/officeDocument/2006/relationships" xmlns:p="http://schemas.openxmlformats.org/presentationml/2006/main"><p:cSld><p:spTree><p:nvGrpSpPr><p:cNvPr id="1" name=""/><p:cNvGrpSpPr/><p:nvPr/></p:nvGrpSpPr><p:grpSpPr><a:xfrm><a:off x="0" y="0"/><a:ext cx="0" cy="0"/><a:chOff x="0" y="0"/><a:chExt cx="0" cy="0"/></a:xfrm></p:grpSpPr><p:sp><p:nvSpPr><p:cNvPr id="2" name="Slide Image Placeholder 1"/><p:cNvSpPr><a:spLocks noGrp="1" noRot="1" noChangeAspect="1"/></p:cNvSpPr><p:nvPr><p:ph type="sldImg"/></p:nvPr></p:nvSpPr><p:spPr/></p:sp><p:sp><p:nvSpPr><p:cNvPr id="3" name="Notes Placeholder 2"/><p:cNvSpPr><a:spLocks noGrp="1"/></p:cNvSpPr><p:nvPr><p:ph type="body" idx="1"/></p:nvPr></p:nvSpPr><p:spPr/><p:txBody><a:bodyPr/><a:lstStyle/><a:p><a:r><a:rPr lang="en-US" dirty="0"/><a:t>（2:45–3:10）-我们的判定，用一瓶酒来表示。+<p:notes xmlns:a="http://schemas.openxmlformats.org/drawingml/2006/main" xmlns:r="http://schemas.openxmlformats.org/officeDocument/2006/relationships" xmlns:p="http://schemas.openxmlformats.org/presentationml/2006/main"><p:cSld><p:spTree><p:nvGrpSpPr><p:cNvPr id="1" name=""/><p:cNvGrpSpPr/><p:nvPr/></p:nvGrpSpPr><p:grpSpPr><a:xfrm><a:off x="0" y="0"/><a:ext cx="0" cy="0"/><a:chOff x="0" y="0"/><a:chExt cx="0" cy="0"/></a:xfrm></p:grpSpPr><p:sp><p:nvSpPr><p:cNvPr id="2" name="Slide Image Placeholder 1"/><p:cNvSpPr><a:spLocks noGrp="1" noRot="1" noChangeAspect="1"/></p:cNvSpPr><p:nvPr><p:ph type="sldImg"/></p:nvPr></p:nvSpPr><p:spPr/></p:sp><p:sp><p:nvSpPr><p:cNvPr id="3" name="Notes Placeholder 2"/><p:cNvSpPr><a:spLocks noGrp="1"/></p:cNvSpPr><p:nvPr><p:ph type="body" idx="1"/></p:nvPr></p:nvSpPr><p:spPr/><p:txBody><a:bodyPr/><a:lstStyle/><a:p><a:r><a:rPr lang="en-US" dirty="0"/><a:t>（2:42–3:06　24 秒　104 字）++判定我们用一瓶酒表示。 [指两瓶]-瓶子永远是满的。变的是里面装什么。-左边这瓶装的是酒——他是来买酒的，可以谈。+瓶子永远是满的，变的是里面装什么。+左边装的是酒，他是来买酒的，可以谈。 右边这瓶，红的是税差，从瓶底把酒顶上来了。-这一瓶，不是酒。</a:t></a:r><a:endParaRPr lang="en-US" dirty="0"/></a:p></p:txBody></p:sp><p:sp><p:nvSpPr><p:cNvPr id="4" name="Slide Number Placeholder 3"/><p:cNvSpPr><a:spLocks noGrp="1"/></p:cNvSpPr><p:nvPr><p:ph type="sldNum" sz="quarter" idx="10"/></p:nvPr></p:nvSpPr><p:spPr/><p:txBody><a:bodyPr/><a:lstStyle/><a:p><a:fld id="{F7021451-1387-4CA6-816F-3879F97B5CBC}" type="slidenum"><a:rPr lang="en-US"/><a:t>7</a:t></a:fld><a:endParaRPr lang="en-US"/></a:p></p:txBody></p:sp></p:spTree><p:extLst><p:ext uri="{BB962C8B-B14F-4D97-AF65-F5344CB8AC3E}"><p14:creationId xmlns:p14="http://schemas.microsoft.com/office/powerpoint/2010/main" val="1024086991"/></p:ext></p:extLst></p:cSld><p:clrMapOvr><a:masterClrMapping/></p:clrMapOvr></p:notes>
+这一瓶里装的不是酒。+业务员不必看懂评分模型，看一眼瓶子就知道该不该往下谈。++───── 时间充裕可加 ─────+红色占多高，就是套利风险分是多少——这两件事在界面上是同一个东西。</a:t></a:r><a:endParaRPr lang="en-US" dirty="0"/></a:p></p:txBody></p:sp><p:sp><p:nvSpPr><p:cNvPr id="4" name="Slide Number Placeholder 3"/><p:cNvSpPr><a:spLocks noGrp="1"/></p:cNvSpPr><p:nvPr><p:ph type="sldNum" sz="quarter" idx="10"/></p:nvPr></p:nvSpPr><p:spPr/><p:txBody><a:bodyPr/><a:lstStyle/><a:p><a:fld id="{F7021451-1387-4CA6-816F-3879F97B5CBC}" type="slidenum"><a:rPr lang="en-US"/><a:t>7</a:t></a:fld><a:endParaRPr lang="en-US"/></a:p></p:txBody></p:sp></p:spTree><p:extLst><p:ext uri="{BB962C8B-B14F-4D97-AF65-F5344CB8AC3E}"><p14:creationId xmlns:p14="http://schemas.microsoft.com/office/powerpoint/2010/main" val="1024086991"/></p:ext></p:extLst></p:cSld><p:clrMapOvr><a:masterClrMapping/></p:clrMapOvr></p:notes>
 </file>
 
 <file path=ppt/notesSlides/notesSlide8.xml><?xml version="1.0" encoding="UTF-8" standalone="yes"?>
-<p:notes xmlns:a="http://schemas.openxmlformats.org/drawingml/2006/main" xmlns:r="http://schemas.openxmlformats.org/officeDocument/2006/relationships" xmlns:p="http://schemas.openxmlformats.org/presentationml/2006/main"><p:cSld><p:spTree><p:nvGrpSpPr><p:cNvPr id="1" name=""/><p:cNvGrpSpPr/><p:nvPr/></p:nvGrpSpPr><p:grpSpPr><a:xfrm><a:off x="0" y="0"/><a:ext cx="0" cy="0"/><a:chOff x="0" y="0"/><a:chExt cx="0" cy="0"/></a:xfrm></p:grpSpPr><p:sp><p:nvSpPr><p:cNvPr id="2" name="Slide Image Placeholder 1"/><p:cNvSpPr><a:spLocks noGrp="1" noRot="1" noChangeAspect="1"/></p:cNvSpPr><p:nvPr><p:ph type="sldImg"/></p:nvPr></p:nvSpPr><p:spPr/></p:sp><p:sp><p:nvSpPr><p:cNvPr id="3" name="Notes Placeholder 2"/><p:cNvSpPr><a:spLocks noGrp="1"/></p:cNvSpPr><p:nvPr><p:ph type="body" idx="1"/></p:nvPr></p:nvSpPr><p:spPr/><p:txBody><a:bodyPr/><a:lstStyle/><a:p><a:r><a:rPr lang="en-US" dirty="0"/><a:t>（3:10–3:35）-展开是六个页签，一页回答一个问题。-[逐个点]-该不该做、凭什么这么判、这瓶酒卖多少钱、+<p:notes xmlns:a="http://schemas.openxmlformats.org/drawingml/2006/main" xmlns:r="http://schemas.openxmlformats.org/officeDocument/2006/relationships" xmlns:p="http://schemas.openxmlformats.org/presentationml/2006/main"><p:cSld><p:spTree><p:nvGrpSpPr><p:cNvPr id="1" name=""/><p:cNvGrpSpPr/><p:nvPr/></p:nvGrpSpPr><p:grpSpPr><a:xfrm><a:off x="0" y="0"/><a:ext cx="0" cy="0"/><a:chOff x="0" y="0"/><a:chExt cx="0" cy="0"/></a:xfrm></p:grpSpPr><p:sp><p:nvSpPr><p:cNvPr id="2" name="Slide Image Placeholder 1"/><p:cNvSpPr><a:spLocks noGrp="1" noRot="1" noChangeAspect="1"/></p:cNvSpPr><p:nvPr><p:ph type="sldImg"/></p:nvPr></p:nvSpPr><p:spPr/></p:sp><p:sp><p:nvSpPr><p:cNvPr id="3" name="Notes Placeholder 2"/><p:cNvSpPr><a:spLocks noGrp="1"/></p:cNvSpPr><p:nvPr><p:ph type="body" idx="1"/></p:nvPr></p:nvSpPr><p:spPr/><p:txBody><a:bodyPr/><a:lstStyle/><a:p><a:r><a:rPr lang="en-US" dirty="0"/><a:t>（3:06–3:32　26 秒　110 字）++展开是六个页签，一页回答一个问题：+该不该做、凭什么这么判、卖多少钱、 他有没有牌照、怎么跟他讲、合同和之后九十天怎么盯。-业务员站在展位上，需要的是六个答案，不是一篇报告。-[这里切到现场 demo]</a:t></a:r><a:endParaRPr lang="en-US" dirty="0"/></a:p></p:txBody></p:sp><p:sp><p:nvSpPr><p:cNvPr id="4" name="Slide Number Placeholder 3"/><p:cNvSpPr><a:spLocks noGrp="1"/></p:cNvSpPr><p:nvPr><p:ph type="sldNum" sz="quarter" idx="10"/></p:nvPr></p:nvSpPr><p:spPr/><p:txBody><a:bodyPr/><a:lstStyle/><a:p><a:fld id="{F7021451-1387-4CA6-816F-3879F97B5CBC}" type="slidenum"><a:rPr lang="en-US"/><a:t>8</a:t></a:fld><a:endParaRPr lang="en-US"/></a:p></p:txBody></p:sp></p:spTree><p:extLst><p:ext uri="{BB962C8B-B14F-4D97-AF65-F5344CB8AC3E}"><p14:creationId xmlns:p14="http://schemas.microsoft.com/office/powerpoint/2010/main" val="1024086991"/></p:ext></p:extLst></p:cSld><p:clrMapOvr><a:masterClrMapping/></p:clrMapOvr></p:notes>
+六项信号是模型给的初判，但最后一票在人手上——+AI 看得到文字，看不到展位上他说「标签不用改」时的表情。+[切到现场 demo]++───── 时间充裕可加 ─────+改任何一项，判定、必问清单、合同条款会立刻跟着重算。</a:t></a:r><a:endParaRPr lang="en-US" dirty="0"/></a:p></p:txBody></p:sp><p:sp><p:nvSpPr><p:cNvPr id="4" name="Slide Number Placeholder 3"/><p:cNvSpPr><a:spLocks noGrp="1"/></p:cNvSpPr><p:nvPr><p:ph type="sldNum" sz="quarter" idx="10"/></p:nvPr></p:nvSpPr><p:spPr/><p:txBody><a:bodyPr/><a:lstStyle/><a:p><a:fld id="{F7021451-1387-4CA6-816F-3879F97B5CBC}" type="slidenum"><a:rPr lang="en-US"/><a:t>8</a:t></a:fld><a:endParaRPr lang="en-US"/></a:p></p:txBody></p:sp></p:spTree><p:extLst><p:ext uri="{BB962C8B-B14F-4D97-AF65-F5344CB8AC3E}"><p14:creationId xmlns:p14="http://schemas.microsoft.com/office/powerpoint/2010/main" val="1024086991"/></p:ext></p:extLst></p:cSld><p:clrMapOvr><a:masterClrMapping/></p:clrMapOvr></p:notes>
 </file>
 
 <file path=ppt/notesSlides/notesSlide9.xml><?xml version="1.0" encoding="UTF-8" standalone="yes"?>
-<p:notes xmlns:a="http://schemas.openxmlformats.org/drawingml/2006/main" xmlns:r="http://schemas.openxmlformats.org/officeDocument/2006/relationships" xmlns:p="http://schemas.openxmlformats.org/presentationml/2006/main"><p:cSld><p:spTree><p:nvGrpSpPr><p:cNvPr id="1" name=""/><p:cNvGrpSpPr/><p:nvPr/></p:nvGrpSpPr><p:grpSpPr><a:xfrm><a:off x="0" y="0"/><a:ext cx="0" cy="0"/><a:chOff x="0" y="0"/><a:chExt cx="0" cy="0"/></a:xfrm></p:grpSpPr><p:sp><p:nvSpPr><p:cNvPr id="2" name="Slide Image Placeholder 1"/><p:cNvSpPr><a:spLocks noGrp="1" noRot="1" noChangeAspect="1"/></p:cNvSpPr><p:nvPr><p:ph type="sldImg"/></p:nvPr></p:nvSpPr><p:spPr/></p:sp><p:sp><p:nvSpPr><p:cNvPr id="3" name="Notes Placeholder 2"/><p:cNvSpPr><a:spLocks noGrp="1"/></p:cNvSpPr><p:nvPr><p:ph type="body" idx="1"/></p:nvPr></p:nvSpPr><p:spPr/><p:txBody><a:bodyPr/><a:lstStyle/><a:p><a:r><a:rPr lang="en-US" dirty="0"/><a:t>（3:35–4:05）+<p:notes xmlns:a="http://schemas.openxmlformats.org/drawingml/2006/main" xmlns:r="http://schemas.openxmlformats.org/officeDocument/2006/relationships" xmlns:p="http://schemas.openxmlformats.org/presentationml/2006/main"><p:cSld><p:spTree><p:nvGrpSpPr><p:cNvPr id="1" name=""/><p:cNvGrpSpPr/><p:nvPr/></p:nvGrpSpPr><p:grpSpPr><a:xfrm><a:off x="0" y="0"/><a:ext cx="0" cy="0"/><a:chOff x="0" y="0"/><a:chExt cx="0" cy="0"/></a:xfrm></p:grpSpPr><p:sp><p:nvSpPr><p:cNvPr id="2" name="Slide Image Placeholder 1"/><p:cNvSpPr><a:spLocks noGrp="1" noRot="1" noChangeAspect="1"/></p:cNvSpPr><p:nvPr><p:ph type="sldImg"/></p:nvPr></p:nvSpPr><p:spPr/></p:sp><p:sp><p:nvSpPr><p:cNvPr id="3" name="Notes Placeholder 2"/><p:cNvSpPr><a:spLocks noGrp="1"/></p:cNvSpPr><p:nvPr><p:ph type="body" idx="1"/></p:nvPr></p:nvSpPr><p:spPr/><p:txBody><a:bodyPr/><a:lstStyle/><a:p><a:r><a:rPr lang="en-US" dirty="0"/><a:t>（3:32–4:04　32 秒　147 字）+ 为什么不直接问通用大模型？ 因为这三条它不会告诉你，是我们逐条翻税则翻出来的：-香港烈酒减税，只减两百港币以上的那一部分。-新加坡按纯酒精量课税——降度数，等于直接少缴税。-美国的 CBMA 额度，必须由中国生产商主动指派，进口商自己拿不到。-一瓶差十块七，一柜十几万，不花你一毛钱。</a:t></a:r><a:endParaRPr lang="en-US" dirty="0"/></a:p></p:txBody></p:sp><p:sp><p:nvSpPr><p:cNvPr id="4" name="Slide Number Placeholder 3"/><p:cNvSpPr><a:spLocks noGrp="1"/></p:cNvSpPr><p:nvPr><p:ph type="sldNum" sz="quarter" idx="10"/></p:nvPr></p:nvSpPr><p:spPr/><p:txBody><a:bodyPr/><a:lstStyle/><a:p><a:fld id="{F7021451-1387-4CA6-816F-3879F97B5CBC}" type="slidenum"><a:rPr lang="en-US"/><a:t>9</a:t></a:fld><a:endParaRPr lang="en-US"/></a:p></p:txBody></p:sp></p:spTree><p:extLst><p:ext uri="{BB962C8B-B14F-4D97-AF65-F5344CB8AC3E}"><p14:creationId xmlns:p14="http://schemas.microsoft.com/office/powerpoint/2010/main" val="1024086991"/></p:ext></p:extLst></p:cSld><p:clrMapOvr><a:masterClrMapping/></p:clrMapOvr></p:notes>
+香港烈酒减税只减两百港币以上那一部分，低价酒完全享受不到。+新加坡按纯酒精量课税，不看瓶数，降度数等于直接少缴税。+美国的 CBMA 额度必须由中国生产商主动指派，进口商自己拿不到；+一瓶差十块七，一柜十几万，而且不花你一毛钱。++───── 时间充裕可加 ─────+通用模型给你的多半是「约百分之三十到五十综合税负」这种区间。拿这个去跟老板报价，是会出事的。</a:t></a:r><a:endParaRPr lang="en-US" dirty="0"/></a:p></p:txBody></p:sp><p:sp><p:nvSpPr><p:cNvPr id="4" name="Slide Number Placeholder 3"/><p:cNvSpPr><a:spLocks noGrp="1"/></p:cNvSpPr><p:nvPr><p:ph type="sldNum" sz="quarter" idx="10"/></p:nvPr></p:nvSpPr><p:spPr/><p:txBody><a:bodyPr/><a:lstStyle/><a:p><a:fld id="{F7021451-1387-4CA6-816F-3879F97B5CBC}" type="slidenum"><a:rPr lang="en-US"/><a:t>9</a:t></a:fld><a:endParaRPr lang="en-US"/></a:p></p:txBody></p:sp></p:spTree><p:extLst><p:ext uri="{BB962C8B-B14F-4D97-AF65-F5344CB8AC3E}"><p14:creationId xmlns:p14="http://schemas.microsoft.com/office/powerpoint/2010/main" val="1024086991"/></p:ext></p:extLst></p:cSld><p:clrMapOvr><a:masterClrMapping/></p:clrMapOvr></p:notes>
 </file>
 
 <file path=ppt/slideLayouts/slideLayout1.xml><?xml version="1.0" encoding="utf-8"?>

--- a/docs/第二单_SecondOrder_路演.pptx
+++ b/docs/第二单_SecondOrder_路演.pptx
@@ -476,51 +476,542 @@
 </p:notesMaster>
 </file>
 
-<file path=ppt/notesSlides/notesSlide1.xml><?xml version="1.0" encoding="UTF-8" standalone="yes"?>
-<p:notes xmlns:a="http://schemas.openxmlformats.org/drawingml/2006/main" xmlns:r="http://schemas.openxmlformats.org/officeDocument/2006/relationships" xmlns:p="http://schemas.openxmlformats.org/presentationml/2006/main"><p:cSld><p:spTree><p:nvGrpSpPr><p:cNvPr id="1" name=""/><p:cNvGrpSpPr/><p:nvPr/></p:nvGrpSpPr><p:grpSpPr><a:xfrm><a:off x="0" y="0"/><a:ext cx="0" cy="0"/><a:chOff x="0" y="0"/><a:chExt cx="0" cy="0"/></a:xfrm></p:grpSpPr><p:sp><p:nvSpPr><p:cNvPr id="2" name="Slide Image Placeholder 1"/><p:cNvSpPr><a:spLocks noGrp="1" noRot="1" noChangeAspect="1"/></p:cNvSpPr><p:nvPr><p:ph type="sldImg"/></p:nvPr></p:nvSpPr><p:spPr/></p:sp><p:sp><p:nvSpPr><p:cNvPr id="3" name="Notes Placeholder 2"/><p:cNvSpPr><a:spLocks noGrp="1"/></p:cNvSpPr><p:nvPr><p:ph type="body" idx="1"/></p:nvPr></p:nvSpPr><p:spPr/><p:txBody><a:bodyPr/><a:lstStyle/><a:p><a:r><a:rPr lang="en-US" dirty="0"/><a:t>（0:00–0:18　18 秒　79 字）--[停两秒，让评委先看完标题]-各位评委好。-扫码验茅台真假，大家都会。我们做的是同一个动作，方向反过来——-扫的不是酒，是买家。-它叫「第二单」，用户是贵州仁怀、遵义那些没有海外团队的中小酒企。--───── 时间充裕可加 ─────-为什么不是第一单，最后一页会回答。</a:t></a:r><a:endParaRPr lang="en-US" dirty="0"/></a:p></p:txBody></p:sp><p:sp><p:nvSpPr><p:cNvPr id="4" name="Slide Number Placeholder 3"/><p:cNvSpPr><a:spLocks noGrp="1"/></p:cNvSpPr><p:nvPr><p:ph type="sldNum" sz="quarter" idx="10"/></p:nvPr></p:nvSpPr><p:spPr/><p:txBody><a:bodyPr/><a:lstStyle/><a:p><a:fld id="{F7021451-1387-4CA6-816F-3879F97B5CBC}" type="slidenum"><a:rPr lang="en-US"/><a:t>1</a:t></a:fld><a:endParaRPr lang="en-US"/></a:p></p:txBody></p:sp></p:spTree><p:extLst><p:ext uri="{BB962C8B-B14F-4D97-AF65-F5344CB8AC3E}"><p14:creationId xmlns:p14="http://schemas.microsoft.com/office/powerpoint/2010/main" val="1024086991"/></p:ext></p:extLst></p:cSld><p:clrMapOvr><a:masterClrMapping/></p:clrMapOvr></p:notes>
+<file path=ppt/notesSlides/notesSlide1.xml><?xml version="1.0" encoding="utf-8"?>
+<p:notes xmlns:a="http://schemas.openxmlformats.org/drawingml/2006/main" xmlns:r="http://schemas.openxmlformats.org/officeDocument/2006/relationships" xmlns:p="http://schemas.openxmlformats.org/presentationml/2006/main">
+  <p:cSld>
+    <p:spTree>
+      <p:nvGrpSpPr>
+        <p:cNvPr id="1" name=""/>
+        <p:cNvGrpSpPr/>
+        <p:nvPr/>
+      </p:nvGrpSpPr>
+      <p:grpSpPr>
+        <a:xfrm>
+          <a:off x="0" y="0"/>
+          <a:ext cx="0" cy="0"/>
+          <a:chOff x="0" y="0"/>
+          <a:chExt cx="0" cy="0"/>
+        </a:xfrm>
+      </p:grpSpPr>
+      <p:sp>
+        <p:nvSpPr>
+          <p:cNvPr id="2" name="Slide Image Placeholder 1"/>
+          <p:cNvSpPr>
+            <a:spLocks noGrp="1" noRot="1" noChangeAspect="1"/>
+          </p:cNvSpPr>
+          <p:nvPr>
+            <p:ph type="sldImg"/>
+          </p:nvPr>
+        </p:nvSpPr>
+        <p:spPr/>
+      </p:sp>
+      <p:sp>
+        <p:nvSpPr>
+          <p:cNvPr id="3" name="Notes Placeholder 2"/>
+          <p:cNvSpPr>
+            <a:spLocks noGrp="1"/>
+          </p:cNvSpPr>
+          <p:nvPr>
+            <p:ph type="body" idx="1"/>
+          </p:nvPr>
+        </p:nvSpPr>
+        <p:spPr/>
+        <p:txBody>
+          <a:bodyPr/>
+          <a:lstStyle/>
+          <a:p>
+            <a:r>
+              <a:rPr lang="en-US" dirty="0"/>
+              <a:t>（0:00–0:18　18 秒　79 字）</a:t>
+            </a:r>
+          </a:p>
+          <a:p>
+            <a:r>
+              <a:rPr lang="zh-CN" altLang="en-US" dirty="0"/>
+              <a:t/>
+            </a:r>
+          </a:p>
+          <a:p>
+            <a:r>
+              <a:rPr lang="zh-CN" altLang="en-US" dirty="0"/>
+              <a:t>[停两秒，让评委先看完标题]</a:t>
+            </a:r>
+          </a:p>
+          <a:p>
+            <a:r>
+              <a:rPr lang="zh-CN" altLang="en-US" dirty="0"/>
+              <a:t>各位评委好。</a:t>
+            </a:r>
+          </a:p>
+          <a:p>
+            <a:r>
+              <a:rPr lang="zh-CN" altLang="en-US" dirty="0"/>
+              <a:t>扫码验茅台真假，大家都会。我们做的是同一个动作，方向反过来——</a:t>
+            </a:r>
+          </a:p>
+          <a:p>
+            <a:r>
+              <a:rPr lang="zh-CN" altLang="en-US" dirty="0"/>
+              <a:t>扫的不是酒，是买家。</a:t>
+            </a:r>
+          </a:p>
+          <a:p>
+            <a:r>
+              <a:rPr lang="zh-CN" altLang="en-US" dirty="0"/>
+              <a:t>它叫「第二单」，用户是贵州仁怀、遵义那些没有海外团队的中小酒企。</a:t>
+            </a:r>
+          </a:p>
+          <a:p>
+            <a:r>
+              <a:rPr lang="zh-CN" altLang="en-US" dirty="0"/>
+              <a:t/>
+            </a:r>
+          </a:p>
+          <a:p>
+            <a:r>
+              <a:rPr lang="zh-CN" altLang="en-US" dirty="0"/>
+              <a:t>───── 时间充裕可加 ─────</a:t>
+            </a:r>
+          </a:p>
+          <a:p>
+            <a:r>
+              <a:rPr lang="zh-CN" altLang="en-US" dirty="0"/>
+              <a:t>为什么不是第一单，最后一页会回答。</a:t>
+            </a:r>
+            <a:endParaRPr lang="en-US" dirty="0"/>
+          </a:p>
+        </p:txBody>
+      </p:sp>
+      <p:sp>
+        <p:nvSpPr>
+          <p:cNvPr id="4" name="Slide Number Placeholder 3"/>
+          <p:cNvSpPr>
+            <a:spLocks noGrp="1"/>
+          </p:cNvSpPr>
+          <p:nvPr>
+            <p:ph type="sldNum" sz="quarter" idx="10"/>
+          </p:nvPr>
+        </p:nvSpPr>
+        <p:spPr/>
+        <p:txBody>
+          <a:bodyPr/>
+          <a:lstStyle/>
+          <a:p>
+            <a:fld id="{F7021451-1387-4CA6-816F-3879F97B5CBC}" type="slidenum">
+              <a:rPr lang="en-US"/>
+              <a:t>1</a:t>
+            </a:fld>
+            <a:endParaRPr lang="en-US"/>
+          </a:p>
+        </p:txBody>
+      </p:sp>
+    </p:spTree>
+    <p:extLst>
+      <p:ext uri="{BB962C8B-B14F-4D97-AF65-F5344CB8AC3E}">
+        <p14:creationId xmlns:p14="http://schemas.microsoft.com/office/powerpoint/2010/main" val="1024086991"/>
+      </p:ext>
+    </p:extLst>
+  </p:cSld>
+  <p:clrMapOvr>
+    <a:masterClrMapping/>
+  </p:clrMapOvr>
+</p:notes>
 </file>
 
-<file path=ppt/notesSlides/notesSlide10.xml><?xml version="1.0" encoding="UTF-8" standalone="yes"?>
-<p:notes xmlns:a="http://schemas.openxmlformats.org/drawingml/2006/main" xmlns:r="http://schemas.openxmlformats.org/officeDocument/2006/relationships" xmlns:p="http://schemas.openxmlformats.org/presentationml/2006/main"><p:cSld><p:spTree><p:nvGrpSpPr><p:cNvPr id="1" name=""/><p:cNvGrpSpPr/><p:nvPr/></p:nvGrpSpPr><p:grpSpPr><a:xfrm><a:off x="0" y="0"/><a:ext cx="0" cy="0"/><a:chOff x="0" y="0"/><a:chExt cx="0" cy="0"/></a:xfrm></p:grpSpPr><p:sp><p:nvSpPr><p:cNvPr id="2" name="Slide Image Placeholder 1"/><p:cNvSpPr><a:spLocks noGrp="1" noRot="1" noChangeAspect="1"/></p:cNvSpPr><p:nvPr><p:ph type="sldImg"/></p:nvPr></p:nvSpPr><p:spPr/></p:sp><p:sp><p:nvSpPr><p:cNvPr id="3" name="Notes Placeholder 2"/><p:cNvSpPr><a:spLocks noGrp="1"/></p:cNvSpPr><p:nvPr><p:ph type="body" idx="1"/></p:nvPr></p:nvSpPr><p:spPr/><p:txBody><a:bodyPr/><a:lstStyle/><a:p><a:r><a:rPr lang="en-US" dirty="0"/><a:t>（4:04–4:30　26 秒　121 字）--技术上只坚持一件事：规则算账，模型说人话。-税则、牌照、风险评分、合同条款全是可审计的纯函数，-同样输入永远同样输出，每条都带来源和生效日期。-模型只负责两件事：读懂对话，把结论写成一封能寄出去的信。-所以模型挂了主链路照样跑完，现场断网也演示得完。--───── 时间充裕可加 ─────-日本原本在候选名单里，但公开资料对烈酒税率的表述不够明确，我们宁可不收——收一条不确定的税率，赔上的是整个规则库的可信度。</a:t></a:r><a:endParaRPr lang="en-US" dirty="0"/></a:p></p:txBody></p:sp><p:sp><p:nvSpPr><p:cNvPr id="4" name="Slide Number Placeholder 3"/><p:cNvSpPr><a:spLocks noGrp="1"/></p:cNvSpPr><p:nvPr><p:ph type="sldNum" sz="quarter" idx="10"/></p:nvPr></p:nvSpPr><p:spPr/><p:txBody><a:bodyPr/><a:lstStyle/><a:p><a:fld id="{F7021451-1387-4CA6-816F-3879F97B5CBC}" type="slidenum"><a:rPr lang="en-US"/><a:t>10</a:t></a:fld><a:endParaRPr lang="en-US"/></a:p></p:txBody></p:sp></p:spTree><p:extLst><p:ext uri="{BB962C8B-B14F-4D97-AF65-F5344CB8AC3E}"><p14:creationId xmlns:p14="http://schemas.microsoft.com/office/powerpoint/2010/main" val="1024086991"/></p:ext></p:extLst></p:cSld><p:clrMapOvr><a:masterClrMapping/></p:clrMapOvr></p:notes>
+<file path=ppt/notesSlides/notesSlide10.xml><?xml version="1.0" encoding="utf-8"?>
+<p:notes xmlns:a="http://schemas.openxmlformats.org/drawingml/2006/main" xmlns:r="http://schemas.openxmlformats.org/officeDocument/2006/relationships" xmlns:p="http://schemas.openxmlformats.org/presentationml/2006/main">
+  <p:cSld>
+    <p:spTree>
+      <p:nvGrpSpPr>
+        <p:cNvPr id="1" name=""/>
+        <p:cNvGrpSpPr/>
+        <p:nvPr/>
+      </p:nvGrpSpPr>
+      <p:grpSpPr>
+        <a:xfrm>
+          <a:off x="0" y="0"/>
+          <a:ext cx="0" cy="0"/>
+          <a:chOff x="0" y="0"/>
+          <a:chExt cx="0" cy="0"/>
+        </a:xfrm>
+      </p:grpSpPr>
+      <p:sp>
+        <p:nvSpPr>
+          <p:cNvPr id="2" name="Slide Image Placeholder 1"/>
+          <p:cNvSpPr>
+            <a:spLocks noGrp="1" noRot="1" noChangeAspect="1"/>
+          </p:cNvSpPr>
+          <p:nvPr>
+            <p:ph type="sldImg"/>
+          </p:nvPr>
+        </p:nvSpPr>
+        <p:spPr/>
+      </p:sp>
+      <p:sp>
+        <p:nvSpPr>
+          <p:cNvPr id="3" name="Notes Placeholder 2"/>
+          <p:cNvSpPr>
+            <a:spLocks noGrp="1"/>
+          </p:cNvSpPr>
+          <p:nvPr>
+            <p:ph type="body" idx="1"/>
+          </p:nvPr>
+        </p:nvSpPr>
+        <p:spPr/>
+        <p:txBody>
+          <a:bodyPr/>
+          <a:lstStyle/>
+          <a:p>
+            <a:r>
+              <a:rPr lang="en-US" dirty="0"/>
+              <a:t>（4:04–4:30　26 秒　121 字）</a:t>
+            </a:r>
+          </a:p>
+          <a:p>
+            <a:r>
+              <a:rPr lang="zh-CN" altLang="en-US" dirty="0"/>
+              <a:t/>
+            </a:r>
+          </a:p>
+          <a:p>
+            <a:r>
+              <a:rPr lang="zh-CN" altLang="en-US" dirty="0"/>
+              <a:t>技术上只坚持一件事：规则算账，模型说人话。</a:t>
+            </a:r>
+          </a:p>
+          <a:p>
+            <a:r>
+              <a:rPr lang="zh-CN" altLang="en-US" dirty="0"/>
+              <a:t>税则、牌照、风险评分、合同条款全是可审计的纯函数，</a:t>
+            </a:r>
+          </a:p>
+          <a:p>
+            <a:r>
+              <a:rPr lang="zh-CN" altLang="en-US" dirty="0"/>
+              <a:t>同样输入永远同样输出，每条都带来源和生效日期。</a:t>
+            </a:r>
+          </a:p>
+          <a:p>
+            <a:r>
+              <a:rPr lang="zh-CN" altLang="en-US" dirty="0"/>
+              <a:t>模型只负责两件事：读懂对话，把结论写成一封能寄出去的信。</a:t>
+            </a:r>
+          </a:p>
+          <a:p>
+            <a:r>
+              <a:rPr lang="zh-CN" altLang="en-US" dirty="0"/>
+              <a:t>所以模型挂了主链路照样跑完，现场断网也演示得完。</a:t>
+            </a:r>
+          </a:p>
+          <a:p>
+            <a:r>
+              <a:rPr lang="zh-CN" altLang="en-US" dirty="0"/>
+              <a:t/>
+            </a:r>
+          </a:p>
+          <a:p>
+            <a:r>
+              <a:rPr lang="zh-CN" altLang="en-US" dirty="0"/>
+              <a:t>───── 时间充裕可加 ─────</a:t>
+            </a:r>
+          </a:p>
+          <a:p>
+            <a:r>
+              <a:rPr lang="zh-CN" altLang="en-US" dirty="0"/>
+              <a:t>日本原本在候选名单里，但公开资料对烈酒税率的表述不够明确，我们宁可不收——收一条不确定的税率，赔上的是整个规则库的可信度。</a:t>
+            </a:r>
+            <a:endParaRPr lang="en-US" dirty="0"/>
+          </a:p>
+        </p:txBody>
+      </p:sp>
+      <p:sp>
+        <p:nvSpPr>
+          <p:cNvPr id="4" name="Slide Number Placeholder 3"/>
+          <p:cNvSpPr>
+            <a:spLocks noGrp="1"/>
+          </p:cNvSpPr>
+          <p:nvPr>
+            <p:ph type="sldNum" sz="quarter" idx="10"/>
+          </p:nvPr>
+        </p:nvSpPr>
+        <p:spPr/>
+        <p:txBody>
+          <a:bodyPr/>
+          <a:lstStyle/>
+          <a:p>
+            <a:fld id="{F7021451-1387-4CA6-816F-3879F97B5CBC}" type="slidenum">
+              <a:rPr lang="en-US"/>
+              <a:t>10</a:t>
+            </a:fld>
+            <a:endParaRPr lang="en-US"/>
+          </a:p>
+        </p:txBody>
+      </p:sp>
+    </p:spTree>
+    <p:extLst>
+      <p:ext uri="{BB962C8B-B14F-4D97-AF65-F5344CB8AC3E}">
+        <p14:creationId xmlns:p14="http://schemas.microsoft.com/office/powerpoint/2010/main" val="1024086991"/>
+      </p:ext>
+    </p:extLst>
+  </p:cSld>
+  <p:clrMapOvr>
+    <a:masterClrMapping/>
+  </p:clrMapOvr>
+</p:notes>
 </file>
 
-<file path=ppt/notesSlides/notesSlide11.xml><?xml version="1.0" encoding="UTF-8" standalone="yes"?>
-<p:notes xmlns:a="http://schemas.openxmlformats.org/drawingml/2006/main" xmlns:r="http://schemas.openxmlformats.org/officeDocument/2006/relationships" xmlns:p="http://schemas.openxmlformats.org/presentationml/2006/main"><p:cSld><p:spTree><p:nvGrpSpPr><p:cNvPr id="1" name=""/><p:cNvGrpSpPr/><p:nvPr/></p:nvGrpSpPr><p:grpSpPr><a:xfrm><a:off x="0" y="0"/><a:ext cx="0" cy="0"/><a:chOff x="0" y="0"/><a:chExt cx="0" cy="0"/></a:xfrm></p:grpSpPr><p:sp><p:nvSpPr><p:cNvPr id="2" name="Slide Image Placeholder 1"/><p:cNvSpPr><a:spLocks noGrp="1" noRot="1" noChangeAspect="1"/></p:cNvSpPr><p:nvPr><p:ph type="sldImg"/></p:nvPr></p:nvSpPr><p:spPr/></p:sp><p:sp><p:nvSpPr><p:cNvPr id="3" name="Notes Placeholder 2"/><p:cNvSpPr><a:spLocks noGrp="1"/></p:cNvSpPr><p:nvPr><p:ph type="body" idx="1"/></p:nvPr></p:nvSpPr><p:spPr/><p:txBody><a:bodyPr/><a:lstStyle/><a:p><a:r><a:rPr lang="en-US" dirty="0"/><a:t>（4:30–4:46　16 秒　74 字）--接下来一百天，第三步是设计来证伪我们自己的：-跟三家酒厂走完一次真实首单，拿报关单核对落地价。-误差百分之五以内就能用，差到百分之二十，税则模型得重做。--───── 时间充裕可加 ─────-我们不打算先谈商业模式。先证明能让八十九家里搭上线的从五家变成十家，再谈谁付钱。</a:t></a:r><a:endParaRPr lang="en-US" dirty="0"/></a:p></p:txBody></p:sp><p:sp><p:nvSpPr><p:cNvPr id="4" name="Slide Number Placeholder 3"/><p:cNvSpPr><a:spLocks noGrp="1"/></p:cNvSpPr><p:nvPr><p:ph type="sldNum" sz="quarter" idx="10"/></p:nvPr></p:nvSpPr><p:spPr/><p:txBody><a:bodyPr/><a:lstStyle/><a:p><a:fld id="{F7021451-1387-4CA6-816F-3879F97B5CBC}" type="slidenum"><a:rPr lang="en-US"/><a:t>11</a:t></a:fld><a:endParaRPr lang="en-US"/></a:p></p:txBody></p:sp></p:spTree><p:extLst><p:ext uri="{BB962C8B-B14F-4D97-AF65-F5344CB8AC3E}"><p14:creationId xmlns:p14="http://schemas.microsoft.com/office/powerpoint/2010/main" val="1024086991"/></p:ext></p:extLst></p:cSld><p:clrMapOvr><a:masterClrMapping/></p:clrMapOvr></p:notes>
+<file path=ppt/notesSlides/notesSlide11.xml><?xml version="1.0" encoding="utf-8"?>
+<p:notes xmlns:a="http://schemas.openxmlformats.org/drawingml/2006/main" xmlns:r="http://schemas.openxmlformats.org/officeDocument/2006/relationships" xmlns:p="http://schemas.openxmlformats.org/presentationml/2006/main">
+  <p:cSld>
+    <p:spTree>
+      <p:nvGrpSpPr>
+        <p:cNvPr id="1" name=""/>
+        <p:cNvGrpSpPr/>
+        <p:nvPr/>
+      </p:nvGrpSpPr>
+      <p:grpSpPr>
+        <a:xfrm>
+          <a:off x="0" y="0"/>
+          <a:ext cx="0" cy="0"/>
+          <a:chOff x="0" y="0"/>
+          <a:chExt cx="0" cy="0"/>
+        </a:xfrm>
+      </p:grpSpPr>
+      <p:sp>
+        <p:nvSpPr>
+          <p:cNvPr id="2" name="Slide Image Placeholder 1"/>
+          <p:cNvSpPr>
+            <a:spLocks noGrp="1" noRot="1" noChangeAspect="1"/>
+          </p:cNvSpPr>
+          <p:nvPr>
+            <p:ph type="sldImg"/>
+          </p:nvPr>
+        </p:nvSpPr>
+        <p:spPr/>
+      </p:sp>
+      <p:sp>
+        <p:nvSpPr>
+          <p:cNvPr id="3" name="Notes Placeholder 2"/>
+          <p:cNvSpPr>
+            <a:spLocks noGrp="1"/>
+          </p:cNvSpPr>
+          <p:nvPr>
+            <p:ph type="body" idx="1"/>
+          </p:nvPr>
+        </p:nvSpPr>
+        <p:spPr/>
+        <p:txBody>
+          <a:bodyPr/>
+          <a:lstStyle/>
+          <a:p>
+            <a:r>
+              <a:rPr lang="en-US" dirty="0"/>
+              <a:t>（4:30–4:46　16 秒　74 字）</a:t>
+            </a:r>
+          </a:p>
+          <a:p>
+            <a:r>
+              <a:rPr lang="zh-CN" altLang="en-US" dirty="0"/>
+              <a:t/>
+            </a:r>
+          </a:p>
+          <a:p>
+            <a:r>
+              <a:rPr lang="zh-CN" altLang="en-US" dirty="0"/>
+              <a:t>接下来一百天，第三步是设计来证伪我们自己的：</a:t>
+            </a:r>
+          </a:p>
+          <a:p>
+            <a:r>
+              <a:rPr lang="zh-CN" altLang="en-US" dirty="0"/>
+              <a:t>跟三家酒厂走完一次真实首单，拿报关单核对落地价。</a:t>
+            </a:r>
+          </a:p>
+          <a:p>
+            <a:r>
+              <a:rPr lang="zh-CN" altLang="en-US" dirty="0"/>
+              <a:t>误差百分之五以内就能用，差到百分之二十，税则模型得重做。</a:t>
+            </a:r>
+          </a:p>
+          <a:p>
+            <a:r>
+              <a:rPr lang="zh-CN" altLang="en-US" dirty="0"/>
+              <a:t/>
+            </a:r>
+          </a:p>
+          <a:p>
+            <a:r>
+              <a:rPr lang="zh-CN" altLang="en-US" dirty="0"/>
+              <a:t>───── 时间充裕可加 ─────</a:t>
+            </a:r>
+          </a:p>
+          <a:p>
+            <a:r>
+              <a:rPr lang="zh-CN" altLang="en-US" dirty="0"/>
+              <a:t>我们不打算先谈商业模式。先证明能让八十九家里搭上线的从五家变成十家，再谈谁付钱。</a:t>
+            </a:r>
+            <a:endParaRPr lang="en-US" dirty="0"/>
+          </a:p>
+        </p:txBody>
+      </p:sp>
+      <p:sp>
+        <p:nvSpPr>
+          <p:cNvPr id="4" name="Slide Number Placeholder 3"/>
+          <p:cNvSpPr>
+            <a:spLocks noGrp="1"/>
+          </p:cNvSpPr>
+          <p:nvPr>
+            <p:ph type="sldNum" sz="quarter" idx="10"/>
+          </p:nvPr>
+        </p:nvSpPr>
+        <p:spPr/>
+        <p:txBody>
+          <a:bodyPr/>
+          <a:lstStyle/>
+          <a:p>
+            <a:fld id="{F7021451-1387-4CA6-816F-3879F97B5CBC}" type="slidenum">
+              <a:rPr lang="en-US"/>
+              <a:t>11</a:t>
+            </a:fld>
+            <a:endParaRPr lang="en-US"/>
+          </a:p>
+        </p:txBody>
+      </p:sp>
+    </p:spTree>
+    <p:extLst>
+      <p:ext uri="{BB962C8B-B14F-4D97-AF65-F5344CB8AC3E}">
+        <p14:creationId xmlns:p14="http://schemas.microsoft.com/office/powerpoint/2010/main" val="1024086991"/>
+      </p:ext>
+    </p:extLst>
+  </p:cSld>
+  <p:clrMapOvr>
+    <a:masterClrMapping/>
+  </p:clrMapOvr>
+</p:notes>
 </file>
 
-<file path=ppt/notesSlides/notesSlide12.xml><?xml version="1.0" encoding="UTF-8" standalone="yes"?>
-<p:notes xmlns:a="http://schemas.openxmlformats.org/drawingml/2006/main" xmlns:r="http://schemas.openxmlformats.org/officeDocument/2006/relationships" xmlns:p="http://schemas.openxmlformats.org/presentationml/2006/main"><p:cSld><p:spTree><p:nvGrpSpPr><p:cNvPr id="1" name=""/><p:cNvGrpSpPr/><p:nvPr/></p:nvGrpSpPr><p:grpSpPr><a:xfrm><a:off x="0" y="0"/><a:ext cx="0" cy="0"/><a:chOff x="0" y="0"/><a:chExt cx="0" cy="0"/></a:xfrm></p:grpSpPr><p:sp><p:nvSpPr><p:cNvPr id="2" name="Slide Image Placeholder 1"/><p:cNvSpPr><a:spLocks noGrp="1" noRot="1" noChangeAspect="1"/></p:cNvSpPr><p:nvPr><p:ph type="sldImg"/></p:nvPr></p:nvSpPr><p:spPr/></p:sp><p:sp><p:nvSpPr><p:cNvPr id="3" name="Notes Placeholder 2"/><p:cNvSpPr><a:spLocks noGrp="1"/></p:cNvSpPr><p:nvPr><p:ph type="body" idx="1"/></p:nvPr></p:nvSpPr><p:spPr/><p:txBody><a:bodyPr/><a:lstStyle/><a:p><a:r><a:rPr lang="en-US" dirty="0"/><a:t>（4:46–5:00　14 秒　57 字）--最后一句。-出海不缺第一单，缺的是第二单。-货在他仓里没动，他就不会再下单——-而你到那时才知道，已经晚了九十天。-谢谢。</a:t></a:r><a:endParaRPr lang="en-US" dirty="0"/></a:p></p:txBody></p:sp><p:sp><p:nvSpPr><p:cNvPr id="4" name="Slide Number Placeholder 3"/><p:cNvSpPr><a:spLocks noGrp="1"/></p:cNvSpPr><p:nvPr><p:ph type="sldNum" sz="quarter" idx="10"/></p:nvPr></p:nvSpPr><p:spPr/><p:txBody><a:bodyPr/><a:lstStyle/><a:p><a:fld id="{F7021451-1387-4CA6-816F-3879F97B5CBC}" type="slidenum"><a:rPr lang="en-US"/><a:t>12</a:t></a:fld><a:endParaRPr lang="en-US"/></a:p></p:txBody></p:sp></p:spTree><p:extLst><p:ext uri="{BB962C8B-B14F-4D97-AF65-F5344CB8AC3E}"><p14:creationId xmlns:p14="http://schemas.microsoft.com/office/powerpoint/2010/main" val="1024086991"/></p:ext></p:extLst></p:cSld><p:clrMapOvr><a:masterClrMapping/></p:clrMapOvr></p:notes>
+<file path=ppt/notesSlides/notesSlide12.xml><?xml version="1.0" encoding="utf-8"?>
+<p:notes xmlns:a="http://schemas.openxmlformats.org/drawingml/2006/main" xmlns:r="http://schemas.openxmlformats.org/officeDocument/2006/relationships" xmlns:p="http://schemas.openxmlformats.org/presentationml/2006/main">
+  <p:cSld>
+    <p:spTree>
+      <p:nvGrpSpPr>
+        <p:cNvPr id="1" name=""/>
+        <p:cNvGrpSpPr/>
+        <p:nvPr/>
+      </p:nvGrpSpPr>
+      <p:grpSpPr>
+        <a:xfrm>
+          <a:off x="0" y="0"/>
+          <a:ext cx="0" cy="0"/>
+          <a:chOff x="0" y="0"/>
+          <a:chExt cx="0" cy="0"/>
+        </a:xfrm>
+      </p:grpSpPr>
+      <p:sp>
+        <p:nvSpPr>
+          <p:cNvPr id="2" name="Slide Image Placeholder 1"/>
+          <p:cNvSpPr>
+            <a:spLocks noGrp="1" noRot="1" noChangeAspect="1"/>
+          </p:cNvSpPr>
+          <p:nvPr>
+            <p:ph type="sldImg"/>
+          </p:nvPr>
+        </p:nvSpPr>
+        <p:spPr/>
+      </p:sp>
+      <p:sp>
+        <p:nvSpPr>
+          <p:cNvPr id="3" name="Notes Placeholder 2"/>
+          <p:cNvSpPr>
+            <a:spLocks noGrp="1"/>
+          </p:cNvSpPr>
+          <p:nvPr>
+            <p:ph type="body" idx="1"/>
+          </p:nvPr>
+        </p:nvSpPr>
+        <p:spPr/>
+        <p:txBody>
+          <a:bodyPr/>
+          <a:lstStyle/>
+          <a:p>
+            <a:r>
+              <a:rPr lang="en-US" dirty="0"/>
+              <a:t>（4:46–5:00　14 秒　57 字）</a:t>
+            </a:r>
+          </a:p>
+          <a:p>
+            <a:r>
+              <a:rPr lang="zh-CN" altLang="en-US" dirty="0"/>
+              <a:t/>
+            </a:r>
+          </a:p>
+          <a:p>
+            <a:r>
+              <a:rPr lang="zh-CN" altLang="en-US" dirty="0"/>
+              <a:t>最后一句。</a:t>
+            </a:r>
+          </a:p>
+          <a:p>
+            <a:r>
+              <a:rPr lang="zh-CN" altLang="en-US" dirty="0"/>
+              <a:t>出海不缺第一单，缺的是第二单。</a:t>
+            </a:r>
+          </a:p>
+          <a:p>
+            <a:r>
+              <a:rPr lang="zh-CN" altLang="en-US" dirty="0"/>
+              <a:t>货在他仓里没动，他就不会再下单——</a:t>
+            </a:r>
+          </a:p>
+          <a:p>
+            <a:r>
+              <a:rPr lang="zh-CN" altLang="en-US" dirty="0"/>
+              <a:t>而你到那时才知道，已经晚了九十天。</a:t>
+            </a:r>
+          </a:p>
+          <a:p>
+            <a:r>
+              <a:rPr lang="zh-CN" altLang="en-US" dirty="0"/>
+              <a:t>谢谢。</a:t>
+            </a:r>
+            <a:endParaRPr lang="en-US" dirty="0"/>
+          </a:p>
+        </p:txBody>
+      </p:sp>
+      <p:sp>
+        <p:nvSpPr>
+          <p:cNvPr id="4" name="Slide Number Placeholder 3"/>
+          <p:cNvSpPr>
+            <a:spLocks noGrp="1"/>
+          </p:cNvSpPr>
+          <p:nvPr>
+            <p:ph type="sldNum" sz="quarter" idx="10"/>
+          </p:nvPr>
+        </p:nvSpPr>
+        <p:spPr/>
+        <p:txBody>
+          <a:bodyPr/>
+          <a:lstStyle/>
+          <a:p>
+            <a:fld id="{F7021451-1387-4CA6-816F-3879F97B5CBC}" type="slidenum">
+              <a:rPr lang="en-US"/>
+              <a:t>12</a:t>
+            </a:fld>
+            <a:endParaRPr lang="en-US"/>
+          </a:p>
+        </p:txBody>
+      </p:sp>
+    </p:spTree>
+    <p:extLst>
+      <p:ext uri="{BB962C8B-B14F-4D97-AF65-F5344CB8AC3E}">
+        <p14:creationId xmlns:p14="http://schemas.microsoft.com/office/powerpoint/2010/main" val="1024086991"/>
+      </p:ext>
+    </p:extLst>
+  </p:cSld>
+  <p:clrMapOvr>
+    <a:masterClrMapping/>
+  </p:clrMapOvr>
+</p:notes>
 </file>
 
 <file path=ppt/notesSlides/notesSlide13.xml><?xml version="1.0" encoding="utf-8"?>
@@ -611,184 +1102,2108 @@
 </p:notes>
 </file>
 
-<file path=ppt/notesSlides/notesSlide14.xml><?xml version="1.0" encoding="UTF-8" standalone="yes"?>
-<p:notes xmlns:a="http://schemas.openxmlformats.org/drawingml/2006/main" xmlns:r="http://schemas.openxmlformats.org/officeDocument/2006/relationships" xmlns:p="http://schemas.openxmlformats.org/presentationml/2006/main"><p:cSld><p:spTree><p:nvGrpSpPr><p:cNvPr id="1" name=""/><p:cNvGrpSpPr/><p:nvPr/></p:nvGrpSpPr><p:grpSpPr><a:xfrm><a:off x="0" y="0"/><a:ext cx="0" cy="0"/><a:chOff x="0" y="0"/><a:chExt cx="0" cy="0"/></a:xfrm></p:grpSpPr><p:sp><p:nvSpPr><p:cNvPr id="2" name="Slide Image Placeholder 1"/><p:cNvSpPr><a:spLocks noGrp="1" noRot="1" noChangeAspect="1"/></p:cNvSpPr><p:nvPr><p:ph type="sldImg"/></p:nvPr></p:nvSpPr><p:spPr/></p:sp><p:sp><p:nvSpPr><p:cNvPr id="3" name="Notes Placeholder 2"/><p:cNvSpPr><a:spLocks noGrp="1"/></p:cNvSpPr><p:nvPr><p:ph type="body" idx="1"/></p:nvPr></p:nvSpPr><p:spPr/><p:txBody><a:bodyPr/><a:lstStyle/><a:p><a:r><a:rPr lang="en-US" dirty="0"/><a:t>怎么答：不要辩护「我们的数字很准」。-第一句就说「不保证对，保证可查」，然后当场把鼠标移到 ⓘ 上，让他看到来源和生效日期。-如果被追问为什么没收日本或欧盟：公开资料对烈酒税率的表述不够明确，宁可不收——-收一条不确定的税率，赔上的是整个规则库的可信度。这句话本身就是答案。</a:t></a:r><a:endParaRPr lang="en-US" dirty="0"/></a:p></p:txBody></p:sp><p:sp><p:nvSpPr><p:cNvPr id="4" name="Slide Number Placeholder 3"/><p:cNvSpPr><a:spLocks noGrp="1"/></p:cNvSpPr><p:nvPr><p:ph type="sldNum" sz="quarter" idx="10"/></p:nvPr></p:nvSpPr><p:spPr/><p:txBody><a:bodyPr/><a:lstStyle/><a:p><a:fld id="{F7021451-1387-4CA6-816F-3879F97B5CBC}" type="slidenum"><a:rPr lang="en-US"/><a:t>14</a:t></a:fld><a:endParaRPr lang="en-US"/></a:p></p:txBody></p:sp></p:spTree><p:extLst><p:ext uri="{BB962C8B-B14F-4D97-AF65-F5344CB8AC3E}"><p14:creationId xmlns:p14="http://schemas.microsoft.com/office/powerpoint/2010/main" val="1024086991"/></p:ext></p:extLst></p:cSld><p:clrMapOvr><a:masterClrMapping/></p:clrMapOvr></p:notes>
+<file path=ppt/notesSlides/notesSlide14.xml><?xml version="1.0" encoding="utf-8"?>
+<p:notes xmlns:a="http://schemas.openxmlformats.org/drawingml/2006/main" xmlns:r="http://schemas.openxmlformats.org/officeDocument/2006/relationships" xmlns:p="http://schemas.openxmlformats.org/presentationml/2006/main">
+  <p:cSld>
+    <p:spTree>
+      <p:nvGrpSpPr>
+        <p:cNvPr id="1" name=""/>
+        <p:cNvGrpSpPr/>
+        <p:nvPr/>
+      </p:nvGrpSpPr>
+      <p:grpSpPr>
+        <a:xfrm>
+          <a:off x="0" y="0"/>
+          <a:ext cx="0" cy="0"/>
+          <a:chOff x="0" y="0"/>
+          <a:chExt cx="0" cy="0"/>
+        </a:xfrm>
+      </p:grpSpPr>
+      <p:sp>
+        <p:nvSpPr>
+          <p:cNvPr id="2" name="Slide Image Placeholder 1"/>
+          <p:cNvSpPr>
+            <a:spLocks noGrp="1" noRot="1" noChangeAspect="1"/>
+          </p:cNvSpPr>
+          <p:nvPr>
+            <p:ph type="sldImg"/>
+          </p:nvPr>
+        </p:nvSpPr>
+        <p:spPr/>
+      </p:sp>
+      <p:sp>
+        <p:nvSpPr>
+          <p:cNvPr id="3" name="Notes Placeholder 2"/>
+          <p:cNvSpPr>
+            <a:spLocks noGrp="1"/>
+          </p:cNvSpPr>
+          <p:nvPr>
+            <p:ph type="body" idx="1"/>
+          </p:nvPr>
+        </p:nvSpPr>
+        <p:spPr/>
+        <p:txBody>
+          <a:bodyPr/>
+          <a:lstStyle/>
+          <a:p>
+            <a:r>
+              <a:rPr lang="en-US" dirty="0"/>
+              <a:t>怎么答：不要辩护「我们的数字很准」。</a:t>
+            </a:r>
+          </a:p>
+          <a:p>
+            <a:r>
+              <a:rPr lang="zh-CN" altLang="en-US" dirty="0"/>
+              <a:t>第一句就说「不保证对，保证可查」，然后当场把鼠标移到 ⓘ 上，让他看到来源和生效日期。</a:t>
+            </a:r>
+          </a:p>
+          <a:p>
+            <a:r>
+              <a:rPr lang="zh-CN" altLang="en-US" dirty="0"/>
+              <a:t>如果被追问为什么没收日本或欧盟：公开资料对烈酒税率的表述不够明确，宁可不收——</a:t>
+            </a:r>
+          </a:p>
+          <a:p>
+            <a:r>
+              <a:rPr lang="zh-CN" altLang="en-US" dirty="0"/>
+              <a:t>收一条不确定的税率，赔上的是整个规则库的可信度。这句话本身就是答案。</a:t>
+            </a:r>
+            <a:endParaRPr lang="en-US" dirty="0"/>
+          </a:p>
+        </p:txBody>
+      </p:sp>
+      <p:sp>
+        <p:nvSpPr>
+          <p:cNvPr id="4" name="Slide Number Placeholder 3"/>
+          <p:cNvSpPr>
+            <a:spLocks noGrp="1"/>
+          </p:cNvSpPr>
+          <p:nvPr>
+            <p:ph type="sldNum" sz="quarter" idx="10"/>
+          </p:nvPr>
+        </p:nvSpPr>
+        <p:spPr/>
+        <p:txBody>
+          <a:bodyPr/>
+          <a:lstStyle/>
+          <a:p>
+            <a:fld id="{F7021451-1387-4CA6-816F-3879F97B5CBC}" type="slidenum">
+              <a:rPr lang="en-US"/>
+              <a:t>14</a:t>
+            </a:fld>
+            <a:endParaRPr lang="en-US"/>
+          </a:p>
+        </p:txBody>
+      </p:sp>
+    </p:spTree>
+    <p:extLst>
+      <p:ext uri="{BB962C8B-B14F-4D97-AF65-F5344CB8AC3E}">
+        <p14:creationId xmlns:p14="http://schemas.microsoft.com/office/powerpoint/2010/main" val="1024086991"/>
+      </p:ext>
+    </p:extLst>
+  </p:cSld>
+  <p:clrMapOvr>
+    <a:masterClrMapping/>
+  </p:clrMapOvr>
+</p:notes>
 </file>
 
-<file path=ppt/notesSlides/notesSlide15.xml><?xml version="1.0" encoding="UTF-8" standalone="yes"?>
-<p:notes xmlns:a="http://schemas.openxmlformats.org/drawingml/2006/main" xmlns:r="http://schemas.openxmlformats.org/officeDocument/2006/relationships" xmlns:p="http://schemas.openxmlformats.org/presentationml/2006/main"><p:cSld><p:spTree><p:nvGrpSpPr><p:cNvPr id="1" name=""/><p:cNvGrpSpPr/><p:nvPr/></p:nvGrpSpPr><p:grpSpPr><a:xfrm><a:off x="0" y="0"/><a:ext cx="0" cy="0"/><a:chOff x="0" y="0"/><a:chExt cx="0" cy="0"/></a:xfrm></p:grpSpPr><p:sp><p:nvSpPr><p:cNvPr id="2" name="Slide Image Placeholder 1"/><p:cNvSpPr><a:spLocks noGrp="1" noRot="1" noChangeAspect="1"/></p:cNvSpPr><p:nvPr><p:ph type="sldImg"/></p:nvPr></p:nvSpPr><p:spPr/></p:sp><p:sp><p:nvSpPr><p:cNvPr id="3" name="Notes Placeholder 2"/><p:cNvSpPr><a:spLocks noGrp="1"/></p:cNvSpPr><p:nvPr><p:ph type="body" idx="1"/></p:nvPr></p:nvSpPr><p:spPr/><p:txBody><a:bodyPr/><a:lstStyle/><a:p><a:r><a:rPr lang="en-US" dirty="0"/><a:t>怎么答：这题几乎一定会被问，准备好三个字——细节、稳定、可追溯。-最有杀伤力的是当场对比：请评委用手机问通用模型「白酒出口新加坡税负多少」，-他多半会得到一个百分之三十到五十的区间；我们给的是按纯酒精量算出的具体数字，附税则出处。-补充：我们不是在跟通用模型比谁更会讲话，是把一个垂直领域的规则翻出来、写死、标上出处。</a:t></a:r><a:endParaRPr lang="en-US" dirty="0"/></a:p></p:txBody></p:sp><p:sp><p:nvSpPr><p:cNvPr id="4" name="Slide Number Placeholder 3"/><p:cNvSpPr><a:spLocks noGrp="1"/></p:cNvSpPr><p:nvPr><p:ph type="sldNum" sz="quarter" idx="10"/></p:nvPr></p:nvSpPr><p:spPr/><p:txBody><a:bodyPr/><a:lstStyle/><a:p><a:fld id="{F7021451-1387-4CA6-816F-3879F97B5CBC}" type="slidenum"><a:rPr lang="en-US"/><a:t>15</a:t></a:fld><a:endParaRPr lang="en-US"/></a:p></p:txBody></p:sp></p:spTree><p:extLst><p:ext uri="{BB962C8B-B14F-4D97-AF65-F5344CB8AC3E}"><p14:creationId xmlns:p14="http://schemas.microsoft.com/office/powerpoint/2010/main" val="1024086991"/></p:ext></p:extLst></p:cSld><p:clrMapOvr><a:masterClrMapping/></p:clrMapOvr></p:notes>
+<file path=ppt/notesSlides/notesSlide15.xml><?xml version="1.0" encoding="utf-8"?>
+<p:notes xmlns:a="http://schemas.openxmlformats.org/drawingml/2006/main" xmlns:r="http://schemas.openxmlformats.org/officeDocument/2006/relationships" xmlns:p="http://schemas.openxmlformats.org/presentationml/2006/main">
+  <p:cSld>
+    <p:spTree>
+      <p:nvGrpSpPr>
+        <p:cNvPr id="1" name=""/>
+        <p:cNvGrpSpPr/>
+        <p:nvPr/>
+      </p:nvGrpSpPr>
+      <p:grpSpPr>
+        <a:xfrm>
+          <a:off x="0" y="0"/>
+          <a:ext cx="0" cy="0"/>
+          <a:chOff x="0" y="0"/>
+          <a:chExt cx="0" cy="0"/>
+        </a:xfrm>
+      </p:grpSpPr>
+      <p:sp>
+        <p:nvSpPr>
+          <p:cNvPr id="2" name="Slide Image Placeholder 1"/>
+          <p:cNvSpPr>
+            <a:spLocks noGrp="1" noRot="1" noChangeAspect="1"/>
+          </p:cNvSpPr>
+          <p:nvPr>
+            <p:ph type="sldImg"/>
+          </p:nvPr>
+        </p:nvSpPr>
+        <p:spPr/>
+      </p:sp>
+      <p:sp>
+        <p:nvSpPr>
+          <p:cNvPr id="3" name="Notes Placeholder 2"/>
+          <p:cNvSpPr>
+            <a:spLocks noGrp="1"/>
+          </p:cNvSpPr>
+          <p:nvPr>
+            <p:ph type="body" idx="1"/>
+          </p:nvPr>
+        </p:nvSpPr>
+        <p:spPr/>
+        <p:txBody>
+          <a:bodyPr/>
+          <a:lstStyle/>
+          <a:p>
+            <a:r>
+              <a:rPr lang="en-US" dirty="0"/>
+              <a:t>怎么答：这题几乎一定会被问，准备好三个字——细节、稳定、可追溯。</a:t>
+            </a:r>
+          </a:p>
+          <a:p>
+            <a:r>
+              <a:rPr lang="zh-CN" altLang="en-US" dirty="0"/>
+              <a:t>最有杀伤力的是当场对比：请评委用手机问通用模型「白酒出口新加坡税负多少」，</a:t>
+            </a:r>
+          </a:p>
+          <a:p>
+            <a:r>
+              <a:rPr lang="zh-CN" altLang="en-US" dirty="0"/>
+              <a:t>他多半会得到一个百分之三十到五十的区间；我们给的是按纯酒精量算出的具体数字，附税则出处。</a:t>
+            </a:r>
+          </a:p>
+          <a:p>
+            <a:r>
+              <a:rPr lang="zh-CN" altLang="en-US" dirty="0"/>
+              <a:t>补充：我们不是在跟通用模型比谁更会讲话，是把一个垂直领域的规则翻出来、写死、标上出处。</a:t>
+            </a:r>
+            <a:endParaRPr lang="en-US" dirty="0"/>
+          </a:p>
+        </p:txBody>
+      </p:sp>
+      <p:sp>
+        <p:nvSpPr>
+          <p:cNvPr id="4" name="Slide Number Placeholder 3"/>
+          <p:cNvSpPr>
+            <a:spLocks noGrp="1"/>
+          </p:cNvSpPr>
+          <p:nvPr>
+            <p:ph type="sldNum" sz="quarter" idx="10"/>
+          </p:nvPr>
+        </p:nvSpPr>
+        <p:spPr/>
+        <p:txBody>
+          <a:bodyPr/>
+          <a:lstStyle/>
+          <a:p>
+            <a:fld id="{F7021451-1387-4CA6-816F-3879F97B5CBC}" type="slidenum">
+              <a:rPr lang="en-US"/>
+              <a:t>15</a:t>
+            </a:fld>
+            <a:endParaRPr lang="en-US"/>
+          </a:p>
+        </p:txBody>
+      </p:sp>
+    </p:spTree>
+    <p:extLst>
+      <p:ext uri="{BB962C8B-B14F-4D97-AF65-F5344CB8AC3E}">
+        <p14:creationId xmlns:p14="http://schemas.microsoft.com/office/powerpoint/2010/main" val="1024086991"/>
+      </p:ext>
+    </p:extLst>
+  </p:cSld>
+  <p:clrMapOvr>
+    <a:masterClrMapping/>
+  </p:clrMapOvr>
+</p:notes>
 </file>
 
-<file path=ppt/notesSlides/notesSlide16.xml><?xml version="1.0" encoding="UTF-8" standalone="yes"?>
-<p:notes xmlns:a="http://schemas.openxmlformats.org/drawingml/2006/main" xmlns:r="http://schemas.openxmlformats.org/officeDocument/2006/relationships" xmlns:p="http://schemas.openxmlformats.org/presentationml/2006/main"><p:cSld><p:spTree><p:nvGrpSpPr><p:cNvPr id="1" name=""/><p:cNvGrpSpPr/><p:nvPr/></p:nvGrpSpPr><p:grpSpPr><a:xfrm><a:off x="0" y="0"/><a:ext cx="0" cy="0"/><a:chOff x="0" y="0"/><a:chExt cx="0" cy="0"/></a:xfrm></p:grpSpPr><p:sp><p:nvSpPr><p:cNvPr id="2" name="Slide Image Placeholder 1"/><p:cNvSpPr><a:spLocks noGrp="1" noRot="1" noChangeAspect="1"/></p:cNvSpPr><p:nvPr><p:ph type="sldImg"/></p:nvPr></p:nvSpPr><p:spPr/></p:sp><p:sp><p:nvSpPr><p:cNvPr id="3" name="Notes Placeholder 2"/><p:cNvSpPr><a:spLocks noGrp="1"/></p:cNvSpPr><p:nvPr><p:ph type="body" idx="1"/></p:nvPr></p:nvSpPr><p:spPr/><p:txBody><a:bodyPr/><a:lstStyle/><a:p><a:r><a:rPr lang="en-US" dirty="0"/><a:t>怎么答：不要硬编商业模式，那会显得不诚实。-先承认「现在谈还太早」，再给唯一现实的入口——产区服务平台。-综保区本来就在做外贸陪跑，有预算、有台账、有企业名单，这个工具作为其中一个模块，-比单独卖 SaaS 给中小酒企现实得多。-如果追问「那你们靠什么活」：中小酒企不会为一个网页付费，会为「少亏一柜」付费，-所以第一步是把落地价误差验出来，不是先做定价页。</a:t></a:r><a:endParaRPr lang="en-US" dirty="0"/></a:p></p:txBody></p:sp><p:sp><p:nvSpPr><p:cNvPr id="4" name="Slide Number Placeholder 3"/><p:cNvSpPr><a:spLocks noGrp="1"/></p:cNvSpPr><p:nvPr><p:ph type="sldNum" sz="quarter" idx="10"/></p:nvPr></p:nvSpPr><p:spPr/><p:txBody><a:bodyPr/><a:lstStyle/><a:p><a:fld id="{F7021451-1387-4CA6-816F-3879F97B5CBC}" type="slidenum"><a:rPr lang="en-US"/><a:t>16</a:t></a:fld><a:endParaRPr lang="en-US"/></a:p></p:txBody></p:sp></p:spTree><p:extLst><p:ext uri="{BB962C8B-B14F-4D97-AF65-F5344CB8AC3E}"><p14:creationId xmlns:p14="http://schemas.microsoft.com/office/powerpoint/2010/main" val="1024086991"/></p:ext></p:extLst></p:cSld><p:clrMapOvr><a:masterClrMapping/></p:clrMapOvr></p:notes>
+<file path=ppt/notesSlides/notesSlide16.xml><?xml version="1.0" encoding="utf-8"?>
+<p:notes xmlns:a="http://schemas.openxmlformats.org/drawingml/2006/main" xmlns:r="http://schemas.openxmlformats.org/officeDocument/2006/relationships" xmlns:p="http://schemas.openxmlformats.org/presentationml/2006/main">
+  <p:cSld>
+    <p:spTree>
+      <p:nvGrpSpPr>
+        <p:cNvPr id="1" name=""/>
+        <p:cNvGrpSpPr/>
+        <p:nvPr/>
+      </p:nvGrpSpPr>
+      <p:grpSpPr>
+        <a:xfrm>
+          <a:off x="0" y="0"/>
+          <a:ext cx="0" cy="0"/>
+          <a:chOff x="0" y="0"/>
+          <a:chExt cx="0" cy="0"/>
+        </a:xfrm>
+      </p:grpSpPr>
+      <p:sp>
+        <p:nvSpPr>
+          <p:cNvPr id="2" name="Slide Image Placeholder 1"/>
+          <p:cNvSpPr>
+            <a:spLocks noGrp="1" noRot="1" noChangeAspect="1"/>
+          </p:cNvSpPr>
+          <p:nvPr>
+            <p:ph type="sldImg"/>
+          </p:nvPr>
+        </p:nvSpPr>
+        <p:spPr/>
+      </p:sp>
+      <p:sp>
+        <p:nvSpPr>
+          <p:cNvPr id="3" name="Notes Placeholder 2"/>
+          <p:cNvSpPr>
+            <a:spLocks noGrp="1"/>
+          </p:cNvSpPr>
+          <p:nvPr>
+            <p:ph type="body" idx="1"/>
+          </p:nvPr>
+        </p:nvSpPr>
+        <p:spPr/>
+        <p:txBody>
+          <a:bodyPr/>
+          <a:lstStyle/>
+          <a:p>
+            <a:r>
+              <a:rPr lang="en-US" dirty="0"/>
+              <a:t>怎么答：不要硬编商业模式，那会显得不诚实。</a:t>
+            </a:r>
+          </a:p>
+          <a:p>
+            <a:r>
+              <a:rPr lang="zh-CN" altLang="en-US" dirty="0"/>
+              <a:t>先承认「现在谈还太早」，再给唯一现实的入口——产区服务平台。</a:t>
+            </a:r>
+          </a:p>
+          <a:p>
+            <a:r>
+              <a:rPr lang="zh-CN" altLang="en-US" dirty="0"/>
+              <a:t>综保区本来就在做外贸陪跑，有预算、有台账、有企业名单，这个工具作为其中一个模块，</a:t>
+            </a:r>
+          </a:p>
+          <a:p>
+            <a:r>
+              <a:rPr lang="zh-CN" altLang="en-US" dirty="0"/>
+              <a:t>比单独卖 SaaS 给中小酒企现实得多。</a:t>
+            </a:r>
+          </a:p>
+          <a:p>
+            <a:r>
+              <a:rPr lang="zh-CN" altLang="en-US" dirty="0"/>
+              <a:t>如果追问「那你们靠什么活」：中小酒企不会为一个网页付费，会为「少亏一柜」付费，</a:t>
+            </a:r>
+          </a:p>
+          <a:p>
+            <a:r>
+              <a:rPr lang="zh-CN" altLang="en-US" dirty="0"/>
+              <a:t>所以第一步是把落地价误差验出来，不是先做定价页。</a:t>
+            </a:r>
+            <a:endParaRPr lang="en-US" dirty="0"/>
+          </a:p>
+        </p:txBody>
+      </p:sp>
+      <p:sp>
+        <p:nvSpPr>
+          <p:cNvPr id="4" name="Slide Number Placeholder 3"/>
+          <p:cNvSpPr>
+            <a:spLocks noGrp="1"/>
+          </p:cNvSpPr>
+          <p:nvPr>
+            <p:ph type="sldNum" sz="quarter" idx="10"/>
+          </p:nvPr>
+        </p:nvSpPr>
+        <p:spPr/>
+        <p:txBody>
+          <a:bodyPr/>
+          <a:lstStyle/>
+          <a:p>
+            <a:fld id="{F7021451-1387-4CA6-816F-3879F97B5CBC}" type="slidenum">
+              <a:rPr lang="en-US"/>
+              <a:t>16</a:t>
+            </a:fld>
+            <a:endParaRPr lang="en-US"/>
+          </a:p>
+        </p:txBody>
+      </p:sp>
+    </p:spTree>
+    <p:extLst>
+      <p:ext uri="{BB962C8B-B14F-4D97-AF65-F5344CB8AC3E}">
+        <p14:creationId xmlns:p14="http://schemas.microsoft.com/office/powerpoint/2010/main" val="1024086991"/>
+      </p:ext>
+    </p:extLst>
+  </p:cSld>
+  <p:clrMapOvr>
+    <a:masterClrMapping/>
+  </p:clrMapOvr>
+</p:notes>
 </file>
 
-<file path=ppt/notesSlides/notesSlide17.xml><?xml version="1.0" encoding="UTF-8" standalone="yes"?>
-<p:notes xmlns:a="http://schemas.openxmlformats.org/drawingml/2006/main" xmlns:r="http://schemas.openxmlformats.org/officeDocument/2006/relationships" xmlns:p="http://schemas.openxmlformats.org/presentationml/2006/main"><p:cSld><p:spTree><p:nvGrpSpPr><p:cNvPr id="1" name=""/><p:cNvGrpSpPr/><p:nvPr/></p:nvGrpSpPr><p:grpSpPr><a:xfrm><a:off x="0" y="0"/><a:ext cx="0" cy="0"/><a:chOff x="0" y="0"/><a:chExt cx="0" cy="0"/></a:xfrm></p:grpSpPr><p:sp><p:nvSpPr><p:cNvPr id="2" name="Slide Image Placeholder 1"/><p:cNvSpPr><a:spLocks noGrp="1" noRot="1" noChangeAspect="1"/></p:cNvSpPr><p:nvPr><p:ph type="sldImg"/></p:nvPr></p:nvSpPr><p:spPr/></p:sp><p:sp><p:nvSpPr><p:cNvPr id="3" name="Notes Placeholder 2"/><p:cNvSpPr><a:spLocks noGrp="1"/></p:cNvSpPr><p:nvPr><p:ph type="body" idx="1"/></p:nvPr></p:nvSpPr><p:spPr/><p:txBody><a:bodyPr/><a:lstStyle/><a:p><a:r><a:rPr lang="en-US" dirty="0"/><a:t>怎么答：分两层说。-一层是官方公开资料——香港政府新闻公报、新加坡海关、越南 2025 年新版特别消费税法、-美国 TTB 与 FDA、中国财政部与税务总局的出口退税公告。-另一层是团队自建的两份数据库：五十六支贵州白酒逐支核过、每支标注资料可信度；-海外用法每条标注证据强度，来源是 World Baijiu Day、品牌方推广和商家页面。-强调「逐支核过」，不是抓的。</a:t></a:r><a:endParaRPr lang="en-US" dirty="0"/></a:p></p:txBody></p:sp><p:sp><p:nvSpPr><p:cNvPr id="4" name="Slide Number Placeholder 3"/><p:cNvSpPr><a:spLocks noGrp="1"/></p:cNvSpPr><p:nvPr><p:ph type="sldNum" sz="quarter" idx="10"/></p:nvPr></p:nvSpPr><p:spPr/><p:txBody><a:bodyPr/><a:lstStyle/><a:p><a:fld id="{F7021451-1387-4CA6-816F-3879F97B5CBC}" type="slidenum"><a:rPr lang="en-US"/><a:t>17</a:t></a:fld><a:endParaRPr lang="en-US"/></a:p></p:txBody></p:sp></p:spTree><p:extLst><p:ext uri="{BB962C8B-B14F-4D97-AF65-F5344CB8AC3E}"><p14:creationId xmlns:p14="http://schemas.microsoft.com/office/powerpoint/2010/main" val="1024086991"/></p:ext></p:extLst></p:cSld><p:clrMapOvr><a:masterClrMapping/></p:clrMapOvr></p:notes>
+<file path=ppt/notesSlides/notesSlide17.xml><?xml version="1.0" encoding="utf-8"?>
+<p:notes xmlns:a="http://schemas.openxmlformats.org/drawingml/2006/main" xmlns:r="http://schemas.openxmlformats.org/officeDocument/2006/relationships" xmlns:p="http://schemas.openxmlformats.org/presentationml/2006/main">
+  <p:cSld>
+    <p:spTree>
+      <p:nvGrpSpPr>
+        <p:cNvPr id="1" name=""/>
+        <p:cNvGrpSpPr/>
+        <p:nvPr/>
+      </p:nvGrpSpPr>
+      <p:grpSpPr>
+        <a:xfrm>
+          <a:off x="0" y="0"/>
+          <a:ext cx="0" cy="0"/>
+          <a:chOff x="0" y="0"/>
+          <a:chExt cx="0" cy="0"/>
+        </a:xfrm>
+      </p:grpSpPr>
+      <p:sp>
+        <p:nvSpPr>
+          <p:cNvPr id="2" name="Slide Image Placeholder 1"/>
+          <p:cNvSpPr>
+            <a:spLocks noGrp="1" noRot="1" noChangeAspect="1"/>
+          </p:cNvSpPr>
+          <p:nvPr>
+            <p:ph type="sldImg"/>
+          </p:nvPr>
+        </p:nvSpPr>
+        <p:spPr/>
+      </p:sp>
+      <p:sp>
+        <p:nvSpPr>
+          <p:cNvPr id="3" name="Notes Placeholder 2"/>
+          <p:cNvSpPr>
+            <a:spLocks noGrp="1"/>
+          </p:cNvSpPr>
+          <p:nvPr>
+            <p:ph type="body" idx="1"/>
+          </p:nvPr>
+        </p:nvSpPr>
+        <p:spPr/>
+        <p:txBody>
+          <a:bodyPr/>
+          <a:lstStyle/>
+          <a:p>
+            <a:r>
+              <a:rPr lang="en-US" dirty="0"/>
+              <a:t>怎么答：分两层说。</a:t>
+            </a:r>
+          </a:p>
+          <a:p>
+            <a:r>
+              <a:rPr lang="zh-CN" altLang="en-US" dirty="0"/>
+              <a:t>一层是官方公开资料——香港政府新闻公报、新加坡海关、越南 2025 年新版特别消费税法、</a:t>
+            </a:r>
+          </a:p>
+          <a:p>
+            <a:r>
+              <a:rPr lang="zh-CN" altLang="en-US" dirty="0"/>
+              <a:t>美国 TTB 与 FDA、中国财政部与税务总局的出口退税公告。</a:t>
+            </a:r>
+          </a:p>
+          <a:p>
+            <a:r>
+              <a:rPr lang="zh-CN" altLang="en-US" dirty="0"/>
+              <a:t>另一层是团队自建的两份数据库：五十六支贵州白酒逐支核过、每支标注资料可信度；</a:t>
+            </a:r>
+          </a:p>
+          <a:p>
+            <a:r>
+              <a:rPr lang="zh-CN" altLang="en-US" dirty="0"/>
+              <a:t>海外用法每条标注证据强度，来源是 World Baijiu Day、品牌方推广和商家页面。</a:t>
+            </a:r>
+          </a:p>
+          <a:p>
+            <a:r>
+              <a:rPr lang="zh-CN" altLang="en-US" dirty="0"/>
+              <a:t>强调「逐支核过」，不是抓的。</a:t>
+            </a:r>
+            <a:endParaRPr lang="en-US" dirty="0"/>
+          </a:p>
+        </p:txBody>
+      </p:sp>
+      <p:sp>
+        <p:nvSpPr>
+          <p:cNvPr id="4" name="Slide Number Placeholder 3"/>
+          <p:cNvSpPr>
+            <a:spLocks noGrp="1"/>
+          </p:cNvSpPr>
+          <p:nvPr>
+            <p:ph type="sldNum" sz="quarter" idx="10"/>
+          </p:nvPr>
+        </p:nvSpPr>
+        <p:spPr/>
+        <p:txBody>
+          <a:bodyPr/>
+          <a:lstStyle/>
+          <a:p>
+            <a:fld id="{F7021451-1387-4CA6-816F-3879F97B5CBC}" type="slidenum">
+              <a:rPr lang="en-US"/>
+              <a:t>17</a:t>
+            </a:fld>
+            <a:endParaRPr lang="en-US"/>
+          </a:p>
+        </p:txBody>
+      </p:sp>
+    </p:spTree>
+    <p:extLst>
+      <p:ext uri="{BB962C8B-B14F-4D97-AF65-F5344CB8AC3E}">
+        <p14:creationId xmlns:p14="http://schemas.microsoft.com/office/powerpoint/2010/main" val="1024086991"/>
+      </p:ext>
+    </p:extLst>
+  </p:cSld>
+  <p:clrMapOvr>
+    <a:masterClrMapping/>
+  </p:clrMapOvr>
+</p:notes>
 </file>
 
-<file path=ppt/notesSlides/notesSlide18.xml><?xml version="1.0" encoding="UTF-8" standalone="yes"?>
-<p:notes xmlns:a="http://schemas.openxmlformats.org/drawingml/2006/main" xmlns:r="http://schemas.openxmlformats.org/officeDocument/2006/relationships" xmlns:p="http://schemas.openxmlformats.org/presentationml/2006/main"><p:cSld><p:spTree><p:nvGrpSpPr><p:cNvPr id="1" name=""/><p:cNvGrpSpPr/><p:nvPr/></p:nvGrpSpPr><p:grpSpPr><a:xfrm><a:off x="0" y="0"/><a:ext cx="0" cy="0"/><a:chOff x="0" y="0"/><a:chExt cx="0" cy="0"/></a:xfrm></p:grpSpPr><p:sp><p:nvSpPr><p:cNvPr id="2" name="Slide Image Placeholder 1"/><p:cNvSpPr><a:spLocks noGrp="1" noRot="1" noChangeAspect="1"/></p:cNvSpPr><p:nvPr><p:ph type="sldImg"/></p:nvPr></p:nvSpPr><p:spPr/></p:sp><p:sp><p:nvSpPr><p:cNvPr id="3" name="Notes Placeholder 2"/><p:cNvSpPr><a:spLocks noGrp="1"/></p:cNvSpPr><p:nvPr><p:ph type="body" idx="1"/></p:nvPr></p:nvSpPr><p:spPr/><p:txBody><a:bodyPr/><a:lstStyle/><a:p><a:r><a:rPr lang="en-US" dirty="0"/><a:t>怎么答：承认网页不是终态，这一点不要回避。-外贸专员整天在微信里，不会为了判断一个买家去开网页——真正会被用起来的是企业微信机器人，-转发一段对话给它，回一份决策简报。这件事写在一百天计划的第四步。-但要说清楚为什么先做网页：规则库、信号权重、落地价误差这三件事没验完之前，-做成机器人只是把一个还没校准的答案推到更多人面前。</a:t></a:r><a:endParaRPr lang="en-US" dirty="0"/></a:p></p:txBody></p:sp><p:sp><p:nvSpPr><p:cNvPr id="4" name="Slide Number Placeholder 3"/><p:cNvSpPr><a:spLocks noGrp="1"/></p:cNvSpPr><p:nvPr><p:ph type="sldNum" sz="quarter" idx="10"/></p:nvPr></p:nvSpPr><p:spPr/><p:txBody><a:bodyPr/><a:lstStyle/><a:p><a:fld id="{F7021451-1387-4CA6-816F-3879F97B5CBC}" type="slidenum"><a:rPr lang="en-US"/><a:t>18</a:t></a:fld><a:endParaRPr lang="en-US"/></a:p></p:txBody></p:sp></p:spTree><p:extLst><p:ext uri="{BB962C8B-B14F-4D97-AF65-F5344CB8AC3E}"><p14:creationId xmlns:p14="http://schemas.microsoft.com/office/powerpoint/2010/main" val="1024086991"/></p:ext></p:extLst></p:cSld><p:clrMapOvr><a:masterClrMapping/></p:clrMapOvr></p:notes>
+<file path=ppt/notesSlides/notesSlide18.xml><?xml version="1.0" encoding="utf-8"?>
+<p:notes xmlns:a="http://schemas.openxmlformats.org/drawingml/2006/main" xmlns:r="http://schemas.openxmlformats.org/officeDocument/2006/relationships" xmlns:p="http://schemas.openxmlformats.org/presentationml/2006/main">
+  <p:cSld>
+    <p:spTree>
+      <p:nvGrpSpPr>
+        <p:cNvPr id="1" name=""/>
+        <p:cNvGrpSpPr/>
+        <p:nvPr/>
+      </p:nvGrpSpPr>
+      <p:grpSpPr>
+        <a:xfrm>
+          <a:off x="0" y="0"/>
+          <a:ext cx="0" cy="0"/>
+          <a:chOff x="0" y="0"/>
+          <a:chExt cx="0" cy="0"/>
+        </a:xfrm>
+      </p:grpSpPr>
+      <p:sp>
+        <p:nvSpPr>
+          <p:cNvPr id="2" name="Slide Image Placeholder 1"/>
+          <p:cNvSpPr>
+            <a:spLocks noGrp="1" noRot="1" noChangeAspect="1"/>
+          </p:cNvSpPr>
+          <p:nvPr>
+            <p:ph type="sldImg"/>
+          </p:nvPr>
+        </p:nvSpPr>
+        <p:spPr/>
+      </p:sp>
+      <p:sp>
+        <p:nvSpPr>
+          <p:cNvPr id="3" name="Notes Placeholder 2"/>
+          <p:cNvSpPr>
+            <a:spLocks noGrp="1"/>
+          </p:cNvSpPr>
+          <p:nvPr>
+            <p:ph type="body" idx="1"/>
+          </p:nvPr>
+        </p:nvSpPr>
+        <p:spPr/>
+        <p:txBody>
+          <a:bodyPr/>
+          <a:lstStyle/>
+          <a:p>
+            <a:r>
+              <a:rPr lang="en-US" dirty="0"/>
+              <a:t>怎么答：承认网页不是终态，这一点不要回避。</a:t>
+            </a:r>
+          </a:p>
+          <a:p>
+            <a:r>
+              <a:rPr lang="zh-CN" altLang="en-US" dirty="0"/>
+              <a:t>外贸专员整天在微信里，不会为了判断一个买家去开网页——真正会被用起来的是企业微信机器人，</a:t>
+            </a:r>
+          </a:p>
+          <a:p>
+            <a:r>
+              <a:rPr lang="zh-CN" altLang="en-US" dirty="0"/>
+              <a:t>转发一段对话给它，回一份决策简报。这件事写在一百天计划的第四步。</a:t>
+            </a:r>
+          </a:p>
+          <a:p>
+            <a:r>
+              <a:rPr lang="zh-CN" altLang="en-US" dirty="0"/>
+              <a:t>但要说清楚为什么先做网页：规则库、信号权重、落地价误差这三件事没验完之前，</a:t>
+            </a:r>
+          </a:p>
+          <a:p>
+            <a:r>
+              <a:rPr lang="zh-CN" altLang="en-US" dirty="0"/>
+              <a:t>做成机器人只是把一个还没校准的答案推到更多人面前。</a:t>
+            </a:r>
+            <a:endParaRPr lang="en-US" dirty="0"/>
+          </a:p>
+        </p:txBody>
+      </p:sp>
+      <p:sp>
+        <p:nvSpPr>
+          <p:cNvPr id="4" name="Slide Number Placeholder 3"/>
+          <p:cNvSpPr>
+            <a:spLocks noGrp="1"/>
+          </p:cNvSpPr>
+          <p:nvPr>
+            <p:ph type="sldNum" sz="quarter" idx="10"/>
+          </p:nvPr>
+        </p:nvSpPr>
+        <p:spPr/>
+        <p:txBody>
+          <a:bodyPr/>
+          <a:lstStyle/>
+          <a:p>
+            <a:fld id="{F7021451-1387-4CA6-816F-3879F97B5CBC}" type="slidenum">
+              <a:rPr lang="en-US"/>
+              <a:t>18</a:t>
+            </a:fld>
+            <a:endParaRPr lang="en-US"/>
+          </a:p>
+        </p:txBody>
+      </p:sp>
+    </p:spTree>
+    <p:extLst>
+      <p:ext uri="{BB962C8B-B14F-4D97-AF65-F5344CB8AC3E}">
+        <p14:creationId xmlns:p14="http://schemas.microsoft.com/office/powerpoint/2010/main" val="1024086991"/>
+      </p:ext>
+    </p:extLst>
+  </p:cSld>
+  <p:clrMapOvr>
+    <a:masterClrMapping/>
+  </p:clrMapOvr>
+</p:notes>
 </file>
 
-<file path=ppt/notesSlides/notesSlide19.xml><?xml version="1.0" encoding="UTF-8" standalone="yes"?>
-<p:notes xmlns:a="http://schemas.openxmlformats.org/drawingml/2006/main" xmlns:r="http://schemas.openxmlformats.org/officeDocument/2006/relationships" xmlns:p="http://schemas.openxmlformats.org/presentationml/2006/main"><p:cSld><p:spTree><p:nvGrpSpPr><p:cNvPr id="1" name=""/><p:cNvGrpSpPr/><p:nvPr/></p:nvGrpSpPr><p:grpSpPr><a:xfrm><a:off x="0" y="0"/><a:ext cx="0" cy="0"/><a:chOff x="0" y="0"/><a:chExt cx="0" cy="0"/></a:xfrm></p:grpSpPr><p:sp><p:nvSpPr><p:cNvPr id="2" name="Slide Image Placeholder 1"/><p:cNvSpPr><a:spLocks noGrp="1" noRot="1" noChangeAspect="1"/></p:cNvSpPr><p:nvPr><p:ph type="sldImg"/></p:nvPr></p:nvSpPr><p:spPr/></p:sp><p:sp><p:nvSpPr><p:cNvPr id="3" name="Notes Placeholder 2"/><p:cNvSpPr><a:spLocks noGrp="1"/></p:cNvSpPr><p:nvPr><p:ph type="body" idx="1"/></p:nvPr></p:nvSpPr><p:spPr/><p:txBody><a:bodyPr/><a:lstStyle/><a:p><a:r><a:rPr lang="en-US" dirty="0"/><a:t>怎么答：主动说，不等被问。-这一页的作用是把可信度拉起来——一个肯讲自己边界的团队，前面说的话才值得信。-最重要的一条是「信号权重还没用真实案例校准」，目前是团队设定值，-这也正好是一百天计划的第二步，前后是接得上的。</a:t></a:r><a:endParaRPr lang="en-US" dirty="0"/></a:p></p:txBody></p:sp><p:sp><p:nvSpPr><p:cNvPr id="4" name="Slide Number Placeholder 3"/><p:cNvSpPr><a:spLocks noGrp="1"/></p:cNvSpPr><p:nvPr><p:ph type="sldNum" sz="quarter" idx="10"/></p:nvPr></p:nvSpPr><p:spPr/><p:txBody><a:bodyPr/><a:lstStyle/><a:p><a:fld id="{F7021451-1387-4CA6-816F-3879F97B5CBC}" type="slidenum"><a:rPr lang="en-US"/><a:t>19</a:t></a:fld><a:endParaRPr lang="en-US"/></a:p></p:txBody></p:sp></p:spTree><p:extLst><p:ext uri="{BB962C8B-B14F-4D97-AF65-F5344CB8AC3E}"><p14:creationId xmlns:p14="http://schemas.microsoft.com/office/powerpoint/2010/main" val="1024086991"/></p:ext></p:extLst></p:cSld><p:clrMapOvr><a:masterClrMapping/></p:clrMapOvr></p:notes>
+<file path=ppt/notesSlides/notesSlide19.xml><?xml version="1.0" encoding="utf-8"?>
+<p:notes xmlns:a="http://schemas.openxmlformats.org/drawingml/2006/main" xmlns:r="http://schemas.openxmlformats.org/officeDocument/2006/relationships" xmlns:p="http://schemas.openxmlformats.org/presentationml/2006/main">
+  <p:cSld>
+    <p:spTree>
+      <p:nvGrpSpPr>
+        <p:cNvPr id="1" name=""/>
+        <p:cNvGrpSpPr/>
+        <p:nvPr/>
+      </p:nvGrpSpPr>
+      <p:grpSpPr>
+        <a:xfrm>
+          <a:off x="0" y="0"/>
+          <a:ext cx="0" cy="0"/>
+          <a:chOff x="0" y="0"/>
+          <a:chExt cx="0" cy="0"/>
+        </a:xfrm>
+      </p:grpSpPr>
+      <p:sp>
+        <p:nvSpPr>
+          <p:cNvPr id="2" name="Slide Image Placeholder 1"/>
+          <p:cNvSpPr>
+            <a:spLocks noGrp="1" noRot="1" noChangeAspect="1"/>
+          </p:cNvSpPr>
+          <p:nvPr>
+            <p:ph type="sldImg"/>
+          </p:nvPr>
+        </p:nvSpPr>
+        <p:spPr/>
+      </p:sp>
+      <p:sp>
+        <p:nvSpPr>
+          <p:cNvPr id="3" name="Notes Placeholder 2"/>
+          <p:cNvSpPr>
+            <a:spLocks noGrp="1"/>
+          </p:cNvSpPr>
+          <p:nvPr>
+            <p:ph type="body" idx="1"/>
+          </p:nvPr>
+        </p:nvSpPr>
+        <p:spPr/>
+        <p:txBody>
+          <a:bodyPr/>
+          <a:lstStyle/>
+          <a:p>
+            <a:r>
+              <a:rPr lang="en-US" dirty="0"/>
+              <a:t>怎么答：主动说，不等被问。</a:t>
+            </a:r>
+          </a:p>
+          <a:p>
+            <a:r>
+              <a:rPr lang="zh-CN" altLang="en-US" dirty="0"/>
+              <a:t>这一页的作用是把可信度拉起来——一个肯讲自己边界的团队，前面说的话才值得信。</a:t>
+            </a:r>
+          </a:p>
+          <a:p>
+            <a:r>
+              <a:rPr lang="zh-CN" altLang="en-US" dirty="0"/>
+              <a:t>最重要的一条是「信号权重还没用真实案例校准」，目前是团队设定值，</a:t>
+            </a:r>
+          </a:p>
+          <a:p>
+            <a:r>
+              <a:rPr lang="zh-CN" altLang="en-US" dirty="0"/>
+              <a:t>这也正好是一百天计划的第二步，前后是接得上的。</a:t>
+            </a:r>
+            <a:endParaRPr lang="en-US" dirty="0"/>
+          </a:p>
+        </p:txBody>
+      </p:sp>
+      <p:sp>
+        <p:nvSpPr>
+          <p:cNvPr id="4" name="Slide Number Placeholder 3"/>
+          <p:cNvSpPr>
+            <a:spLocks noGrp="1"/>
+          </p:cNvSpPr>
+          <p:nvPr>
+            <p:ph type="sldNum" sz="quarter" idx="10"/>
+          </p:nvPr>
+        </p:nvSpPr>
+        <p:spPr/>
+        <p:txBody>
+          <a:bodyPr/>
+          <a:lstStyle/>
+          <a:p>
+            <a:fld id="{F7021451-1387-4CA6-816F-3879F97B5CBC}" type="slidenum">
+              <a:rPr lang="en-US"/>
+              <a:t>19</a:t>
+            </a:fld>
+            <a:endParaRPr lang="en-US"/>
+          </a:p>
+        </p:txBody>
+      </p:sp>
+    </p:spTree>
+    <p:extLst>
+      <p:ext uri="{BB962C8B-B14F-4D97-AF65-F5344CB8AC3E}">
+        <p14:creationId xmlns:p14="http://schemas.microsoft.com/office/powerpoint/2010/main" val="1024086991"/>
+      </p:ext>
+    </p:extLst>
+  </p:cSld>
+  <p:clrMapOvr>
+    <a:masterClrMapping/>
+  </p:clrMapOvr>
+</p:notes>
 </file>
 
-<file path=ppt/notesSlides/notesSlide2.xml><?xml version="1.0" encoding="UTF-8" standalone="yes"?>
-<p:notes xmlns:a="http://schemas.openxmlformats.org/drawingml/2006/main" xmlns:r="http://schemas.openxmlformats.org/officeDocument/2006/relationships" xmlns:p="http://schemas.openxmlformats.org/presentationml/2006/main"><p:cSld><p:spTree><p:nvGrpSpPr><p:cNvPr id="1" name=""/><p:cNvGrpSpPr/><p:nvPr/></p:nvGrpSpPr><p:grpSpPr><a:xfrm><a:off x="0" y="0"/><a:ext cx="0" cy="0"/><a:chOff x="0" y="0"/><a:chExt cx="0" cy="0"/></a:xfrm></p:grpSpPr><p:sp><p:nvSpPr><p:cNvPr id="2" name="Slide Image Placeholder 1"/><p:cNvSpPr><a:spLocks noGrp="1" noRot="1" noChangeAspect="1"/></p:cNvSpPr><p:nvPr><p:ph type="sldImg"/></p:nvPr></p:nvSpPr><p:spPr/></p:sp><p:sp><p:nvSpPr><p:cNvPr id="3" name="Notes Placeholder 2"/><p:cNvSpPr><a:spLocks noGrp="1"/></p:cNvSpPr><p:nvPr><p:ph type="body" idx="1"/></p:nvPr></p:nvSpPr><p:spPr/><p:txBody><a:bodyPr/><a:lstStyle/><a:p><a:r><a:rPr lang="en-US" dirty="0"/><a:t>（0:18–0:56　38 秒　178 字）--遵义综保区去年的工作总结里，有一组很诚实的数字：-八十九家完成出口备案，三十五家有意向，十一家真的出了海，-最后五家和东南亚经销商「建立初步联系」。-[停一拍]-注意这个措辞——不是签约，更不是复购。公开资料到这里就断了。-遵义自己列的第一个障碍是：白酒属管制商品，进口方需酒牌资质。-所以你要找的不是想卖酒的人，是已经持牌的人。-这个池子在任何国家都有限、封闭，早被洋酒喂饱了。--───── 时间充裕可加 ─────-所以问题从来不是「白酒怎么出海」这种大词，是一家没有海外团队的酒厂，怎么让第一个海外经销商愿意下第二单。</a:t></a:r><a:endParaRPr lang="en-US" dirty="0"/></a:p></p:txBody></p:sp><p:sp><p:nvSpPr><p:cNvPr id="4" name="Slide Number Placeholder 3"/><p:cNvSpPr><a:spLocks noGrp="1"/></p:cNvSpPr><p:nvPr><p:ph type="sldNum" sz="quarter" idx="10"/></p:nvPr></p:nvSpPr><p:spPr/><p:txBody><a:bodyPr/><a:lstStyle/><a:p><a:fld id="{F7021451-1387-4CA6-816F-3879F97B5CBC}" type="slidenum"><a:rPr lang="en-US"/><a:t>2</a:t></a:fld><a:endParaRPr lang="en-US"/></a:p></p:txBody></p:sp></p:spTree><p:extLst><p:ext uri="{BB962C8B-B14F-4D97-AF65-F5344CB8AC3E}"><p14:creationId xmlns:p14="http://schemas.microsoft.com/office/powerpoint/2010/main" val="1024086991"/></p:ext></p:extLst></p:cSld><p:clrMapOvr><a:masterClrMapping/></p:clrMapOvr></p:notes>
+<file path=ppt/notesSlides/notesSlide2.xml><?xml version="1.0" encoding="utf-8"?>
+<p:notes xmlns:a="http://schemas.openxmlformats.org/drawingml/2006/main" xmlns:r="http://schemas.openxmlformats.org/officeDocument/2006/relationships" xmlns:p="http://schemas.openxmlformats.org/presentationml/2006/main">
+  <p:cSld>
+    <p:spTree>
+      <p:nvGrpSpPr>
+        <p:cNvPr id="1" name=""/>
+        <p:cNvGrpSpPr/>
+        <p:nvPr/>
+      </p:nvGrpSpPr>
+      <p:grpSpPr>
+        <a:xfrm>
+          <a:off x="0" y="0"/>
+          <a:ext cx="0" cy="0"/>
+          <a:chOff x="0" y="0"/>
+          <a:chExt cx="0" cy="0"/>
+        </a:xfrm>
+      </p:grpSpPr>
+      <p:sp>
+        <p:nvSpPr>
+          <p:cNvPr id="2" name="Slide Image Placeholder 1"/>
+          <p:cNvSpPr>
+            <a:spLocks noGrp="1" noRot="1" noChangeAspect="1"/>
+          </p:cNvSpPr>
+          <p:nvPr>
+            <p:ph type="sldImg"/>
+          </p:nvPr>
+        </p:nvSpPr>
+        <p:spPr/>
+      </p:sp>
+      <p:sp>
+        <p:nvSpPr>
+          <p:cNvPr id="3" name="Notes Placeholder 2"/>
+          <p:cNvSpPr>
+            <a:spLocks noGrp="1"/>
+          </p:cNvSpPr>
+          <p:nvPr>
+            <p:ph type="body" idx="1"/>
+          </p:nvPr>
+        </p:nvSpPr>
+        <p:spPr/>
+        <p:txBody>
+          <a:bodyPr/>
+          <a:lstStyle/>
+          <a:p>
+            <a:r>
+              <a:rPr lang="en-US" dirty="0"/>
+              <a:t>（0:18–0:56　38 秒　178 字）</a:t>
+            </a:r>
+          </a:p>
+          <a:p>
+            <a:r>
+              <a:rPr lang="zh-CN" altLang="en-US" dirty="0"/>
+              <a:t/>
+            </a:r>
+          </a:p>
+          <a:p>
+            <a:r>
+              <a:rPr lang="zh-CN" altLang="en-US" dirty="0"/>
+              <a:t>遵义综保区去年的工作总结里，有一组很诚实的数字：</a:t>
+            </a:r>
+          </a:p>
+          <a:p>
+            <a:r>
+              <a:rPr lang="zh-CN" altLang="en-US" dirty="0"/>
+              <a:t>八十九家完成出口备案，三十五家有意向，十一家真的出了海，</a:t>
+            </a:r>
+          </a:p>
+          <a:p>
+            <a:r>
+              <a:rPr lang="zh-CN" altLang="en-US" dirty="0"/>
+              <a:t>最后五家和东南亚经销商「建立初步联系」。</a:t>
+            </a:r>
+          </a:p>
+          <a:p>
+            <a:r>
+              <a:rPr lang="zh-CN" altLang="en-US" dirty="0"/>
+              <a:t>[停一拍]</a:t>
+            </a:r>
+          </a:p>
+          <a:p>
+            <a:r>
+              <a:rPr lang="zh-CN" altLang="en-US" dirty="0"/>
+              <a:t>注意这个措辞——不是签约，更不是复购。公开资料到这里就断了。</a:t>
+            </a:r>
+          </a:p>
+          <a:p>
+            <a:r>
+              <a:rPr lang="zh-CN" altLang="en-US" dirty="0"/>
+              <a:t>遵义自己列的第一个障碍是：白酒属管制商品，进口方需酒牌资质。</a:t>
+            </a:r>
+          </a:p>
+          <a:p>
+            <a:r>
+              <a:rPr lang="zh-CN" altLang="en-US" dirty="0"/>
+              <a:t>所以你要找的不是想卖酒的人，是已经持牌的人。</a:t>
+            </a:r>
+          </a:p>
+          <a:p>
+            <a:r>
+              <a:rPr lang="zh-CN" altLang="en-US" dirty="0"/>
+              <a:t>这个池子在任何国家都有限、封闭，早被洋酒喂饱了。</a:t>
+            </a:r>
+          </a:p>
+          <a:p>
+            <a:r>
+              <a:rPr lang="zh-CN" altLang="en-US" dirty="0"/>
+              <a:t/>
+            </a:r>
+          </a:p>
+          <a:p>
+            <a:r>
+              <a:rPr lang="zh-CN" altLang="en-US" dirty="0"/>
+              <a:t>───── 时间充裕可加 ─────</a:t>
+            </a:r>
+          </a:p>
+          <a:p>
+            <a:r>
+              <a:rPr lang="zh-CN" altLang="en-US" dirty="0"/>
+              <a:t>所以问题从来不是「白酒怎么出海」这种大词，是一家没有海外团队的酒厂，怎么让第一个海外经销商愿意下第二单。</a:t>
+            </a:r>
+            <a:endParaRPr lang="en-US" dirty="0"/>
+          </a:p>
+        </p:txBody>
+      </p:sp>
+      <p:sp>
+        <p:nvSpPr>
+          <p:cNvPr id="4" name="Slide Number Placeholder 3"/>
+          <p:cNvSpPr>
+            <a:spLocks noGrp="1"/>
+          </p:cNvSpPr>
+          <p:nvPr>
+            <p:ph type="sldNum" sz="quarter" idx="10"/>
+          </p:nvPr>
+        </p:nvSpPr>
+        <p:spPr/>
+        <p:txBody>
+          <a:bodyPr/>
+          <a:lstStyle/>
+          <a:p>
+            <a:fld id="{F7021451-1387-4CA6-816F-3879F97B5CBC}" type="slidenum">
+              <a:rPr lang="en-US"/>
+              <a:t>2</a:t>
+            </a:fld>
+            <a:endParaRPr lang="en-US"/>
+          </a:p>
+        </p:txBody>
+      </p:sp>
+    </p:spTree>
+    <p:extLst>
+      <p:ext uri="{BB962C8B-B14F-4D97-AF65-F5344CB8AC3E}">
+        <p14:creationId xmlns:p14="http://schemas.microsoft.com/office/powerpoint/2010/main" val="1024086991"/>
+      </p:ext>
+    </p:extLst>
+  </p:cSld>
+  <p:clrMapOvr>
+    <a:masterClrMapping/>
+  </p:clrMapOvr>
+</p:notes>
 </file>
 
-<file path=ppt/notesSlides/notesSlide20.xml><?xml version="1.0" encoding="UTF-8" standalone="yes"?>
-<p:notes xmlns:a="http://schemas.openxmlformats.org/drawingml/2006/main" xmlns:r="http://schemas.openxmlformats.org/officeDocument/2006/relationships" xmlns:p="http://schemas.openxmlformats.org/presentationml/2006/main"><p:cSld><p:spTree><p:nvGrpSpPr><p:cNvPr id="1" name=""/><p:cNvGrpSpPr/><p:nvPr/></p:nvGrpSpPr><p:grpSpPr><a:xfrm><a:off x="0" y="0"/><a:ext cx="0" cy="0"/><a:chOff x="0" y="0"/><a:chExt cx="0" cy="0"/></a:xfrm></p:grpSpPr><p:sp><p:nvSpPr><p:cNvPr id="2" name="Slide Image Placeholder 1"/><p:cNvSpPr><a:spLocks noGrp="1" noRot="1" noChangeAspect="1"/></p:cNvSpPr><p:nvPr><p:ph type="sldImg"/></p:nvPr></p:nvSpPr><p:spPr/></p:sp><p:sp><p:nvSpPr><p:cNvPr id="3" name="Notes Placeholder 2"/><p:cNvSpPr><a:spLocks noGrp="1"/></p:cNvSpPr><p:nvPr><p:ph type="body" idx="1"/></p:nvPr></p:nvSpPr><p:spPr/><p:txBody><a:bodyPr/><a:lstStyle/><a:p><a:r><a:rPr lang="en-US" dirty="0"/><a:t>技术选型。评委是技术背景时，重点讲那条分界线：-规则是纯函数、模型只做抽取与措辞，这不是偷懒，是因为算错一个税率就是真金白银的亏损。-另外可以提「刻意没引入」那一行——不用图表库（瀑布图、酒瓶液面全是手写 SVG 与 shader）、-不用组件库、不用数据库，税则是编译期常量，比数据库更适合审计与 diff。-判定页那瓶酒是 three.js 实时渲染的，液面高度就是套利风险分。</a:t></a:r><a:endParaRPr lang="en-US" dirty="0"/></a:p></p:txBody></p:sp><p:sp><p:nvSpPr><p:cNvPr id="4" name="Slide Number Placeholder 3"/><p:cNvSpPr><a:spLocks noGrp="1"/></p:cNvSpPr><p:nvPr><p:ph type="sldNum" sz="quarter" idx="10"/></p:nvPr></p:nvSpPr><p:spPr/><p:txBody><a:bodyPr/><a:lstStyle/><a:p><a:fld id="{F7021451-1387-4CA6-816F-3879F97B5CBC}" type="slidenum"><a:rPr lang="en-US"/><a:t>20</a:t></a:fld><a:endParaRPr lang="en-US"/></a:p></p:txBody></p:sp></p:spTree><p:extLst><p:ext uri="{BB962C8B-B14F-4D97-AF65-F5344CB8AC3E}"><p14:creationId xmlns:p14="http://schemas.microsoft.com/office/powerpoint/2010/main" val="1024086991"/></p:ext></p:extLst></p:cSld><p:clrMapOvr><a:masterClrMapping/></p:clrMapOvr></p:notes>
+<file path=ppt/notesSlides/notesSlide20.xml><?xml version="1.0" encoding="utf-8"?>
+<p:notes xmlns:a="http://schemas.openxmlformats.org/drawingml/2006/main" xmlns:r="http://schemas.openxmlformats.org/officeDocument/2006/relationships" xmlns:p="http://schemas.openxmlformats.org/presentationml/2006/main">
+  <p:cSld>
+    <p:spTree>
+      <p:nvGrpSpPr>
+        <p:cNvPr id="1" name=""/>
+        <p:cNvGrpSpPr/>
+        <p:nvPr/>
+      </p:nvGrpSpPr>
+      <p:grpSpPr>
+        <a:xfrm>
+          <a:off x="0" y="0"/>
+          <a:ext cx="0" cy="0"/>
+          <a:chOff x="0" y="0"/>
+          <a:chExt cx="0" cy="0"/>
+        </a:xfrm>
+      </p:grpSpPr>
+      <p:sp>
+        <p:nvSpPr>
+          <p:cNvPr id="2" name="Slide Image Placeholder 1"/>
+          <p:cNvSpPr>
+            <a:spLocks noGrp="1" noRot="1" noChangeAspect="1"/>
+          </p:cNvSpPr>
+          <p:nvPr>
+            <p:ph type="sldImg"/>
+          </p:nvPr>
+        </p:nvSpPr>
+        <p:spPr/>
+      </p:sp>
+      <p:sp>
+        <p:nvSpPr>
+          <p:cNvPr id="3" name="Notes Placeholder 2"/>
+          <p:cNvSpPr>
+            <a:spLocks noGrp="1"/>
+          </p:cNvSpPr>
+          <p:nvPr>
+            <p:ph type="body" idx="1"/>
+          </p:nvPr>
+        </p:nvSpPr>
+        <p:spPr/>
+        <p:txBody>
+          <a:bodyPr/>
+          <a:lstStyle/>
+          <a:p>
+            <a:r>
+              <a:rPr lang="en-US" dirty="0"/>
+              <a:t>技术选型。评委是技术背景时，重点讲那条分界线：</a:t>
+            </a:r>
+          </a:p>
+          <a:p>
+            <a:r>
+              <a:rPr lang="zh-CN" altLang="en-US" dirty="0"/>
+              <a:t>规则是纯函数、模型只做抽取与措辞，这不是偷懒，是因为算错一个税率就是真金白银的亏损。</a:t>
+            </a:r>
+          </a:p>
+          <a:p>
+            <a:r>
+              <a:rPr lang="zh-CN" altLang="en-US" dirty="0"/>
+              <a:t>另外可以提「刻意没引入」那一行——不用图表库（瀑布图、酒瓶液面全是手写 SVG 与 shader）、</a:t>
+            </a:r>
+          </a:p>
+          <a:p>
+            <a:r>
+              <a:rPr lang="zh-CN" altLang="en-US" dirty="0"/>
+              <a:t>不用组件库、不用数据库，税则是编译期常量，比数据库更适合审计与 diff。</a:t>
+            </a:r>
+          </a:p>
+          <a:p>
+            <a:r>
+              <a:rPr lang="zh-CN" altLang="en-US" dirty="0"/>
+              <a:t>判定页那瓶酒是 three.js 实时渲染的，液面高度就是套利风险分。</a:t>
+            </a:r>
+            <a:endParaRPr lang="en-US" dirty="0"/>
+          </a:p>
+        </p:txBody>
+      </p:sp>
+      <p:sp>
+        <p:nvSpPr>
+          <p:cNvPr id="4" name="Slide Number Placeholder 3"/>
+          <p:cNvSpPr>
+            <a:spLocks noGrp="1"/>
+          </p:cNvSpPr>
+          <p:nvPr>
+            <p:ph type="sldNum" sz="quarter" idx="10"/>
+          </p:nvPr>
+        </p:nvSpPr>
+        <p:spPr/>
+        <p:txBody>
+          <a:bodyPr/>
+          <a:lstStyle/>
+          <a:p>
+            <a:fld id="{F7021451-1387-4CA6-816F-3879F97B5CBC}" type="slidenum">
+              <a:rPr lang="en-US"/>
+              <a:t>20</a:t>
+            </a:fld>
+            <a:endParaRPr lang="en-US"/>
+          </a:p>
+        </p:txBody>
+      </p:sp>
+    </p:spTree>
+    <p:extLst>
+      <p:ext uri="{BB962C8B-B14F-4D97-AF65-F5344CB8AC3E}">
+        <p14:creationId xmlns:p14="http://schemas.microsoft.com/office/powerpoint/2010/main" val="1024086991"/>
+      </p:ext>
+    </p:extLst>
+  </p:cSld>
+  <p:clrMapOvr>
+    <a:masterClrMapping/>
+  </p:clrMapOvr>
+</p:notes>
 </file>
 
-<file path=ppt/notesSlides/notesSlide21.xml><?xml version="1.0" encoding="UTF-8" standalone="yes"?>
-<p:notes xmlns:a="http://schemas.openxmlformats.org/drawingml/2006/main" xmlns:r="http://schemas.openxmlformats.org/officeDocument/2006/relationships" xmlns:p="http://schemas.openxmlformats.org/presentationml/2006/main"><p:cSld><p:spTree><p:nvGrpSpPr><p:cNvPr id="1" name=""/><p:cNvGrpSpPr/><p:nvPr/></p:nvGrpSpPr><p:grpSpPr><a:xfrm><a:off x="0" y="0"/><a:ext cx="0" cy="0"/><a:chOff x="0" y="0"/><a:chExt cx="0" cy="0"/></a:xfrm></p:grpSpPr><p:sp><p:nvSpPr><p:cNvPr id="2" name="Slide Image Placeholder 1"/><p:cNvSpPr><a:spLocks noGrp="1" noRot="1" noChangeAspect="1"/></p:cNvSpPr><p:nvPr><p:ph type="sldImg"/></p:nvPr></p:nvSpPr><p:spPr/></p:sp><p:sp><p:nvSpPr><p:cNvPr id="3" name="Notes Placeholder 2"/><p:cNvSpPr><a:spLocks noGrp="1"/></p:cNvSpPr><p:nvPr><p:ph type="body" idx="1"/></p:nvPr></p:nvSpPr><p:spPr/><p:txBody><a:bodyPr/><a:lstStyle/><a:p><a:r><a:rPr lang="en-US" dirty="0"/><a:t>线上体验可以直接请评委自己打开点，不用注册。-仓库是公开的，Topic 是 #Guikesong，README 顶部就是技术栈表。-如果还有时间，可以回到 demo 现场再跑一个越南的案例做对照——-同样八秒，出来的是「可谈」，让他们看到这工具不是只会说不。</a:t></a:r><a:endParaRPr lang="en-US" dirty="0"/></a:p></p:txBody></p:sp><p:sp><p:nvSpPr><p:cNvPr id="4" name="Slide Number Placeholder 3"/><p:cNvSpPr><a:spLocks noGrp="1"/></p:cNvSpPr><p:nvPr><p:ph type="sldNum" sz="quarter" idx="10"/></p:nvPr></p:nvSpPr><p:spPr/><p:txBody><a:bodyPr/><a:lstStyle/><a:p><a:fld id="{F7021451-1387-4CA6-816F-3879F97B5CBC}" type="slidenum"><a:rPr lang="en-US"/><a:t>21</a:t></a:fld><a:endParaRPr lang="en-US"/></a:p></p:txBody></p:sp></p:spTree><p:extLst><p:ext uri="{BB962C8B-B14F-4D97-AF65-F5344CB8AC3E}"><p14:creationId xmlns:p14="http://schemas.microsoft.com/office/powerpoint/2010/main" val="1024086991"/></p:ext></p:extLst></p:cSld><p:clrMapOvr><a:masterClrMapping/></p:clrMapOvr></p:notes>
+<file path=ppt/notesSlides/notesSlide21.xml><?xml version="1.0" encoding="utf-8"?>
+<p:notes xmlns:a="http://schemas.openxmlformats.org/drawingml/2006/main" xmlns:r="http://schemas.openxmlformats.org/officeDocument/2006/relationships" xmlns:p="http://schemas.openxmlformats.org/presentationml/2006/main">
+  <p:cSld>
+    <p:spTree>
+      <p:nvGrpSpPr>
+        <p:cNvPr id="1" name=""/>
+        <p:cNvGrpSpPr/>
+        <p:nvPr/>
+      </p:nvGrpSpPr>
+      <p:grpSpPr>
+        <a:xfrm>
+          <a:off x="0" y="0"/>
+          <a:ext cx="0" cy="0"/>
+          <a:chOff x="0" y="0"/>
+          <a:chExt cx="0" cy="0"/>
+        </a:xfrm>
+      </p:grpSpPr>
+      <p:sp>
+        <p:nvSpPr>
+          <p:cNvPr id="2" name="Slide Image Placeholder 1"/>
+          <p:cNvSpPr>
+            <a:spLocks noGrp="1" noRot="1" noChangeAspect="1"/>
+          </p:cNvSpPr>
+          <p:nvPr>
+            <p:ph type="sldImg"/>
+          </p:nvPr>
+        </p:nvSpPr>
+        <p:spPr/>
+      </p:sp>
+      <p:sp>
+        <p:nvSpPr>
+          <p:cNvPr id="3" name="Notes Placeholder 2"/>
+          <p:cNvSpPr>
+            <a:spLocks noGrp="1"/>
+          </p:cNvSpPr>
+          <p:nvPr>
+            <p:ph type="body" idx="1"/>
+          </p:nvPr>
+        </p:nvSpPr>
+        <p:spPr/>
+        <p:txBody>
+          <a:bodyPr/>
+          <a:lstStyle/>
+          <a:p>
+            <a:r>
+              <a:rPr lang="en-US" dirty="0"/>
+              <a:t>线上体验可以直接请评委自己打开点，不用注册。</a:t>
+            </a:r>
+          </a:p>
+          <a:p>
+            <a:r>
+              <a:rPr lang="zh-CN" altLang="en-US" dirty="0"/>
+              <a:t>仓库是公开的，Topic 是 #Guikesong，README 顶部就是技术栈表。</a:t>
+            </a:r>
+          </a:p>
+          <a:p>
+            <a:r>
+              <a:rPr lang="zh-CN" altLang="en-US" dirty="0"/>
+              <a:t>如果还有时间，可以回到 demo 现场再跑一个越南的案例做对照——</a:t>
+            </a:r>
+          </a:p>
+          <a:p>
+            <a:r>
+              <a:rPr lang="zh-CN" altLang="en-US" dirty="0"/>
+              <a:t>同样八秒，出来的是「可谈」，让他们看到这工具不是只会说不。</a:t>
+            </a:r>
+            <a:endParaRPr lang="en-US" dirty="0"/>
+          </a:p>
+        </p:txBody>
+      </p:sp>
+      <p:sp>
+        <p:nvSpPr>
+          <p:cNvPr id="4" name="Slide Number Placeholder 3"/>
+          <p:cNvSpPr>
+            <a:spLocks noGrp="1"/>
+          </p:cNvSpPr>
+          <p:nvPr>
+            <p:ph type="sldNum" sz="quarter" idx="10"/>
+          </p:nvPr>
+        </p:nvSpPr>
+        <p:spPr/>
+        <p:txBody>
+          <a:bodyPr/>
+          <a:lstStyle/>
+          <a:p>
+            <a:fld id="{F7021451-1387-4CA6-816F-3879F97B5CBC}" type="slidenum">
+              <a:rPr lang="en-US"/>
+              <a:t>21</a:t>
+            </a:fld>
+            <a:endParaRPr lang="en-US"/>
+          </a:p>
+        </p:txBody>
+      </p:sp>
+    </p:spTree>
+    <p:extLst>
+      <p:ext uri="{BB962C8B-B14F-4D97-AF65-F5344CB8AC3E}">
+        <p14:creationId xmlns:p14="http://schemas.microsoft.com/office/powerpoint/2010/main" val="1024086991"/>
+      </p:ext>
+    </p:extLst>
+  </p:cSld>
+  <p:clrMapOvr>
+    <a:masterClrMapping/>
+  </p:clrMapOvr>
+</p:notes>
 </file>
 
-<file path=ppt/notesSlides/notesSlide3.xml><?xml version="1.0" encoding="UTF-8" standalone="yes"?>
-<p:notes xmlns:a="http://schemas.openxmlformats.org/drawingml/2006/main" xmlns:r="http://schemas.openxmlformats.org/officeDocument/2006/relationships" xmlns:p="http://schemas.openxmlformats.org/presentationml/2006/main"><p:cSld><p:spTree><p:nvGrpSpPr><p:cNvPr id="1" name=""/><p:cNvGrpSpPr/><p:nvPr/></p:nvGrpSpPr><p:grpSpPr><a:xfrm><a:off x="0" y="0"/><a:ext cx="0" cy="0"/><a:chOff x="0" y="0"/><a:chExt cx="0" cy="0"/></a:xfrm></p:grpSpPr><p:sp><p:nvSpPr><p:cNvPr id="2" name="Slide Image Placeholder 1"/><p:cNvSpPr><a:spLocks noGrp="1" noRot="1" noChangeAspect="1"/></p:cNvSpPr><p:nvPr><p:ph type="sldImg"/></p:nvPr></p:nvSpPr><p:spPr/></p:sp><p:sp><p:nvSpPr><p:cNvPr id="3" name="Notes Placeholder 2"/><p:cNvSpPr><a:spLocks noGrp="1"/></p:cNvSpPr><p:nvPr><p:ph type="body" idx="1"/></p:nvPr></p:nvSpPr><p:spPr/><p:txBody><a:bodyPr/><a:lstStyle/><a:p><a:r><a:rPr lang="en-US" dirty="0"/><a:t>（0:56–1:20　24 秒　111 字）--卡住的不在酿酒，在酿完之后。-展会散场，业务员手上十几张名片，-却分不清哪个是真经销商，哪个是来做别的事的。-他真正的问题只有三个：这人是真想卖酒还是在做税差？-这瓶酒到他货架上卖多少钱、卖得动吗？合同该写死哪几条？-现在只能靠猜。--───── 时间充裕可加 ─────-因为答案分散在五个国家的税则、牌照制度和渠道结构里，他连从哪查起都不知道。</a:t></a:r><a:endParaRPr lang="en-US" dirty="0"/></a:p></p:txBody></p:sp><p:sp><p:nvSpPr><p:cNvPr id="4" name="Slide Number Placeholder 3"/><p:cNvSpPr><a:spLocks noGrp="1"/></p:cNvSpPr><p:nvPr><p:ph type="sldNum" sz="quarter" idx="10"/></p:nvPr></p:nvSpPr><p:spPr/><p:txBody><a:bodyPr/><a:lstStyle/><a:p><a:fld id="{F7021451-1387-4CA6-816F-3879F97B5CBC}" type="slidenum"><a:rPr lang="en-US"/><a:t>3</a:t></a:fld><a:endParaRPr lang="en-US"/></a:p></p:txBody></p:sp></p:spTree><p:extLst><p:ext uri="{BB962C8B-B14F-4D97-AF65-F5344CB8AC3E}"><p14:creationId xmlns:p14="http://schemas.microsoft.com/office/powerpoint/2010/main" val="1024086991"/></p:ext></p:extLst></p:cSld><p:clrMapOvr><a:masterClrMapping/></p:clrMapOvr></p:notes>
+<file path=ppt/notesSlides/notesSlide3.xml><?xml version="1.0" encoding="utf-8"?>
+<p:notes xmlns:a="http://schemas.openxmlformats.org/drawingml/2006/main" xmlns:r="http://schemas.openxmlformats.org/officeDocument/2006/relationships" xmlns:p="http://schemas.openxmlformats.org/presentationml/2006/main">
+  <p:cSld>
+    <p:spTree>
+      <p:nvGrpSpPr>
+        <p:cNvPr id="1" name=""/>
+        <p:cNvGrpSpPr/>
+        <p:nvPr/>
+      </p:nvGrpSpPr>
+      <p:grpSpPr>
+        <a:xfrm>
+          <a:off x="0" y="0"/>
+          <a:ext cx="0" cy="0"/>
+          <a:chOff x="0" y="0"/>
+          <a:chExt cx="0" cy="0"/>
+        </a:xfrm>
+      </p:grpSpPr>
+      <p:sp>
+        <p:nvSpPr>
+          <p:cNvPr id="2" name="Slide Image Placeholder 1"/>
+          <p:cNvSpPr>
+            <a:spLocks noGrp="1" noRot="1" noChangeAspect="1"/>
+          </p:cNvSpPr>
+          <p:nvPr>
+            <p:ph type="sldImg"/>
+          </p:nvPr>
+        </p:nvSpPr>
+        <p:spPr/>
+      </p:sp>
+      <p:sp>
+        <p:nvSpPr>
+          <p:cNvPr id="3" name="Notes Placeholder 2"/>
+          <p:cNvSpPr>
+            <a:spLocks noGrp="1"/>
+          </p:cNvSpPr>
+          <p:nvPr>
+            <p:ph type="body" idx="1"/>
+          </p:nvPr>
+        </p:nvSpPr>
+        <p:spPr/>
+        <p:txBody>
+          <a:bodyPr/>
+          <a:lstStyle/>
+          <a:p>
+            <a:r>
+              <a:rPr lang="en-US" dirty="0"/>
+              <a:t>（0:56–1:20　24 秒　111 字）</a:t>
+            </a:r>
+          </a:p>
+          <a:p>
+            <a:r>
+              <a:rPr lang="zh-CN" altLang="en-US" dirty="0"/>
+              <a:t/>
+            </a:r>
+          </a:p>
+          <a:p>
+            <a:r>
+              <a:rPr lang="zh-CN" altLang="en-US" dirty="0"/>
+              <a:t>卡住的不在酿酒，在酿完之后。</a:t>
+            </a:r>
+          </a:p>
+          <a:p>
+            <a:r>
+              <a:rPr lang="zh-CN" altLang="en-US" dirty="0"/>
+              <a:t>展会散场，业务员手上十几张名片，</a:t>
+            </a:r>
+          </a:p>
+          <a:p>
+            <a:r>
+              <a:rPr lang="zh-CN" altLang="en-US" dirty="0"/>
+              <a:t>却分不清哪个是真经销商，哪个是来做别的事的。</a:t>
+            </a:r>
+          </a:p>
+          <a:p>
+            <a:r>
+              <a:rPr lang="zh-CN" altLang="en-US" dirty="0"/>
+              <a:t>他真正的问题只有三个：这人是真想卖酒还是在做税差？</a:t>
+            </a:r>
+          </a:p>
+          <a:p>
+            <a:r>
+              <a:rPr lang="zh-CN" altLang="en-US" dirty="0"/>
+              <a:t>这瓶酒到他货架上卖多少钱、卖得动吗？合同该写死哪几条？</a:t>
+            </a:r>
+          </a:p>
+          <a:p>
+            <a:r>
+              <a:rPr lang="zh-CN" altLang="en-US" dirty="0"/>
+              <a:t>现在只能靠猜。</a:t>
+            </a:r>
+          </a:p>
+          <a:p>
+            <a:r>
+              <a:rPr lang="zh-CN" altLang="en-US" dirty="0"/>
+              <a:t/>
+            </a:r>
+          </a:p>
+          <a:p>
+            <a:r>
+              <a:rPr lang="zh-CN" altLang="en-US" dirty="0"/>
+              <a:t>───── 时间充裕可加 ─────</a:t>
+            </a:r>
+          </a:p>
+          <a:p>
+            <a:r>
+              <a:rPr lang="zh-CN" altLang="en-US" dirty="0"/>
+              <a:t>因为答案分散在五个国家的税则、牌照制度和渠道结构里，他连从哪查起都不知道。</a:t>
+            </a:r>
+            <a:endParaRPr lang="en-US" dirty="0"/>
+          </a:p>
+        </p:txBody>
+      </p:sp>
+      <p:sp>
+        <p:nvSpPr>
+          <p:cNvPr id="4" name="Slide Number Placeholder 3"/>
+          <p:cNvSpPr>
+            <a:spLocks noGrp="1"/>
+          </p:cNvSpPr>
+          <p:nvPr>
+            <p:ph type="sldNum" sz="quarter" idx="10"/>
+          </p:nvPr>
+        </p:nvSpPr>
+        <p:spPr/>
+        <p:txBody>
+          <a:bodyPr/>
+          <a:lstStyle/>
+          <a:p>
+            <a:fld id="{F7021451-1387-4CA6-816F-3879F97B5CBC}" type="slidenum">
+              <a:rPr lang="en-US"/>
+              <a:t>3</a:t>
+            </a:fld>
+            <a:endParaRPr lang="en-US"/>
+          </a:p>
+        </p:txBody>
+      </p:sp>
+    </p:spTree>
+    <p:extLst>
+      <p:ext uri="{BB962C8B-B14F-4D97-AF65-F5344CB8AC3E}">
+        <p14:creationId xmlns:p14="http://schemas.microsoft.com/office/powerpoint/2010/main" val="1024086991"/>
+      </p:ext>
+    </p:extLst>
+  </p:cSld>
+  <p:clrMapOvr>
+    <a:masterClrMapping/>
+  </p:clrMapOvr>
+</p:notes>
 </file>
 
-<file path=ppt/notesSlides/notesSlide4.xml><?xml version="1.0" encoding="UTF-8" standalone="yes"?>
-<p:notes xmlns:a="http://schemas.openxmlformats.org/drawingml/2006/main" xmlns:r="http://schemas.openxmlformats.org/officeDocument/2006/relationships" xmlns:p="http://schemas.openxmlformats.org/presentationml/2006/main"><p:cSld><p:spTree><p:nvGrpSpPr><p:cNvPr id="1" name=""/><p:cNvGrpSpPr/><p:nvPr/></p:nvGrpSpPr><p:grpSpPr><a:xfrm><a:off x="0" y="0"/><a:ext cx="0" cy="0"/><a:chOff x="0" y="0"/><a:chExt cx="0" cy="0"/></a:xfrm></p:grpSpPr><p:sp><p:nvSpPr><p:cNvPr id="2" name="Slide Image Placeholder 1"/><p:cNvSpPr><a:spLocks noGrp="1" noRot="1" noChangeAspect="1"/></p:cNvSpPr><p:nvPr><p:ph type="sldImg"/></p:nvPr></p:nvSpPr><p:spPr/></p:sp><p:sp><p:nvSpPr><p:cNvPr id="3" name="Notes Placeholder 2"/><p:cNvSpPr><a:spLocks noGrp="1"/></p:cNvSpPr><p:nvPr><p:ph type="body" idx="1"/></p:nvPr></p:nvSpPr><p:spPr/><p:txBody><a:bodyPr/><a:lstStyle/><a:p><a:r><a:rPr lang="en-US" dirty="0"/><a:t>（1:20–1:58　38 秒　159 字）--看一张真实的名片。-[指瓶子]-他说：出厂价最低多少，我们要最低的，先来三个柜；-标签不用改，我们自己处理；货先放自贸仓；动销数据是商业机密。-每一句单独看都不算离谱，合起来是另一回事。-他要的不是这瓶酒。-白酒出口，消费税百分之二十从价免征，加增值税退税百分之十三——-他要的是这百分之三十三。囤进自贸仓转手就走，-酒有没有上过货架跟他无关。--───── 时间充裕可加 ─────-第二个买家问的是：有没有三十八度的，因为越南特别消费税以二十度分界；标签要越南文；-先做一百五十箱放十二家中餐厅试销；能不能给品鉴小样，我们要培训服务生。-这个人是来卖酒的。差别不在语气，在他关心什么。</a:t></a:r><a:endParaRPr lang="en-US" dirty="0"/></a:p></p:txBody></p:sp><p:sp><p:nvSpPr><p:cNvPr id="4" name="Slide Number Placeholder 3"/><p:cNvSpPr><a:spLocks noGrp="1"/></p:cNvSpPr><p:nvPr><p:ph type="sldNum" sz="quarter" idx="10"/></p:nvPr></p:nvSpPr><p:spPr/><p:txBody><a:bodyPr/><a:lstStyle/><a:p><a:fld id="{F7021451-1387-4CA6-816F-3879F97B5CBC}" type="slidenum"><a:rPr lang="en-US"/><a:t>4</a:t></a:fld><a:endParaRPr lang="en-US"/></a:p></p:txBody></p:sp></p:spTree><p:extLst><p:ext uri="{BB962C8B-B14F-4D97-AF65-F5344CB8AC3E}"><p14:creationId xmlns:p14="http://schemas.microsoft.com/office/powerpoint/2010/main" val="1024086991"/></p:ext></p:extLst></p:cSld><p:clrMapOvr><a:masterClrMapping/></p:clrMapOvr></p:notes>
+<file path=ppt/notesSlides/notesSlide4.xml><?xml version="1.0" encoding="utf-8"?>
+<p:notes xmlns:a="http://schemas.openxmlformats.org/drawingml/2006/main" xmlns:r="http://schemas.openxmlformats.org/officeDocument/2006/relationships" xmlns:p="http://schemas.openxmlformats.org/presentationml/2006/main">
+  <p:cSld>
+    <p:spTree>
+      <p:nvGrpSpPr>
+        <p:cNvPr id="1" name=""/>
+        <p:cNvGrpSpPr/>
+        <p:nvPr/>
+      </p:nvGrpSpPr>
+      <p:grpSpPr>
+        <a:xfrm>
+          <a:off x="0" y="0"/>
+          <a:ext cx="0" cy="0"/>
+          <a:chOff x="0" y="0"/>
+          <a:chExt cx="0" cy="0"/>
+        </a:xfrm>
+      </p:grpSpPr>
+      <p:sp>
+        <p:nvSpPr>
+          <p:cNvPr id="2" name="Slide Image Placeholder 1"/>
+          <p:cNvSpPr>
+            <a:spLocks noGrp="1" noRot="1" noChangeAspect="1"/>
+          </p:cNvSpPr>
+          <p:nvPr>
+            <p:ph type="sldImg"/>
+          </p:nvPr>
+        </p:nvSpPr>
+        <p:spPr/>
+      </p:sp>
+      <p:sp>
+        <p:nvSpPr>
+          <p:cNvPr id="3" name="Notes Placeholder 2"/>
+          <p:cNvSpPr>
+            <a:spLocks noGrp="1"/>
+          </p:cNvSpPr>
+          <p:nvPr>
+            <p:ph type="body" idx="1"/>
+          </p:nvPr>
+        </p:nvSpPr>
+        <p:spPr/>
+        <p:txBody>
+          <a:bodyPr/>
+          <a:lstStyle/>
+          <a:p>
+            <a:r>
+              <a:rPr lang="en-US" dirty="0"/>
+              <a:t>（1:20–1:58　38 秒　159 字）</a:t>
+            </a:r>
+          </a:p>
+          <a:p>
+            <a:r>
+              <a:rPr lang="zh-CN" altLang="en-US" dirty="0"/>
+              <a:t/>
+            </a:r>
+          </a:p>
+          <a:p>
+            <a:r>
+              <a:rPr lang="zh-CN" altLang="en-US" dirty="0"/>
+              <a:t>看一张真实的名片。</a:t>
+            </a:r>
+          </a:p>
+          <a:p>
+            <a:r>
+              <a:rPr lang="zh-CN" altLang="en-US" dirty="0"/>
+              <a:t>[指瓶子]</a:t>
+            </a:r>
+          </a:p>
+          <a:p>
+            <a:r>
+              <a:rPr lang="zh-CN" altLang="en-US" dirty="0"/>
+              <a:t>他说：出厂价最低多少，我们要最低的，先来三个柜；</a:t>
+            </a:r>
+          </a:p>
+          <a:p>
+            <a:r>
+              <a:rPr lang="zh-CN" altLang="en-US" dirty="0"/>
+              <a:t>标签不用改，我们自己处理；货先放自贸仓；动销数据是商业机密。</a:t>
+            </a:r>
+          </a:p>
+          <a:p>
+            <a:r>
+              <a:rPr lang="zh-CN" altLang="en-US" dirty="0"/>
+              <a:t>每一句单独看都不算离谱，合起来是另一回事。</a:t>
+            </a:r>
+          </a:p>
+          <a:p>
+            <a:r>
+              <a:rPr lang="zh-CN" altLang="en-US" dirty="0"/>
+              <a:t>他要的不是这瓶酒。</a:t>
+            </a:r>
+          </a:p>
+          <a:p>
+            <a:r>
+              <a:rPr lang="zh-CN" altLang="en-US" dirty="0"/>
+              <a:t>白酒出口，消费税百分之二十从价免征，加增值税退税百分之十三——</a:t>
+            </a:r>
+          </a:p>
+          <a:p>
+            <a:r>
+              <a:rPr lang="zh-CN" altLang="en-US" dirty="0"/>
+              <a:t>他要的是这百分之三十三。囤进自贸仓转手就走，</a:t>
+            </a:r>
+          </a:p>
+          <a:p>
+            <a:r>
+              <a:rPr lang="zh-CN" altLang="en-US" dirty="0"/>
+              <a:t>酒有没有上过货架跟他无关。</a:t>
+            </a:r>
+          </a:p>
+          <a:p>
+            <a:r>
+              <a:rPr lang="zh-CN" altLang="en-US" dirty="0"/>
+              <a:t/>
+            </a:r>
+          </a:p>
+          <a:p>
+            <a:r>
+              <a:rPr lang="zh-CN" altLang="en-US" dirty="0"/>
+              <a:t>───── 时间充裕可加 ─────</a:t>
+            </a:r>
+          </a:p>
+          <a:p>
+            <a:r>
+              <a:rPr lang="zh-CN" altLang="en-US" dirty="0"/>
+              <a:t>第二个买家问的是：有没有三十八度的，因为越南特别消费税以二十度分界；标签要越南文；</a:t>
+            </a:r>
+          </a:p>
+          <a:p>
+            <a:r>
+              <a:rPr lang="zh-CN" altLang="en-US" dirty="0"/>
+              <a:t>先做一百五十箱放十二家中餐厅试销；能不能给品鉴小样，我们要培训服务生。</a:t>
+            </a:r>
+          </a:p>
+          <a:p>
+            <a:r>
+              <a:rPr lang="zh-CN" altLang="en-US" dirty="0"/>
+              <a:t>这个人是来卖酒的。差别不在语气，在他关心什么。</a:t>
+            </a:r>
+            <a:endParaRPr lang="en-US" dirty="0"/>
+          </a:p>
+        </p:txBody>
+      </p:sp>
+      <p:sp>
+        <p:nvSpPr>
+          <p:cNvPr id="4" name="Slide Number Placeholder 3"/>
+          <p:cNvSpPr>
+            <a:spLocks noGrp="1"/>
+          </p:cNvSpPr>
+          <p:nvPr>
+            <p:ph type="sldNum" sz="quarter" idx="10"/>
+          </p:nvPr>
+        </p:nvSpPr>
+        <p:spPr/>
+        <p:txBody>
+          <a:bodyPr/>
+          <a:lstStyle/>
+          <a:p>
+            <a:fld id="{F7021451-1387-4CA6-816F-3879F97B5CBC}" type="slidenum">
+              <a:rPr lang="en-US"/>
+              <a:t>4</a:t>
+            </a:fld>
+            <a:endParaRPr lang="en-US"/>
+          </a:p>
+        </p:txBody>
+      </p:sp>
+    </p:spTree>
+    <p:extLst>
+      <p:ext uri="{BB962C8B-B14F-4D97-AF65-F5344CB8AC3E}">
+        <p14:creationId xmlns:p14="http://schemas.microsoft.com/office/powerpoint/2010/main" val="1024086991"/>
+      </p:ext>
+    </p:extLst>
+  </p:cSld>
+  <p:clrMapOvr>
+    <a:masterClrMapping/>
+  </p:clrMapOvr>
+</p:notes>
 </file>
 
-<file path=ppt/notesSlides/notesSlide5.xml><?xml version="1.0" encoding="UTF-8" standalone="yes"?>
-<p:notes xmlns:a="http://schemas.openxmlformats.org/drawingml/2006/main" xmlns:r="http://schemas.openxmlformats.org/officeDocument/2006/relationships" xmlns:p="http://schemas.openxmlformats.org/presentationml/2006/main"><p:cSld><p:spTree><p:nvGrpSpPr><p:cNvPr id="1" name=""/><p:cNvGrpSpPr/><p:nvPr/></p:nvGrpSpPr><p:grpSpPr><a:xfrm><a:off x="0" y="0"/><a:ext cx="0" cy="0"/><a:chOff x="0" y="0"/><a:chExt cx="0" cy="0"/></a:xfrm></p:grpSpPr><p:sp><p:nvSpPr><p:cNvPr id="2" name="Slide Image Placeholder 1"/><p:cNvSpPr><a:spLocks noGrp="1" noRot="1" noChangeAspect="1"/></p:cNvSpPr><p:nvPr><p:ph type="sldImg"/></p:nvPr></p:nvSpPr><p:spPr/></p:sp><p:sp><p:nvSpPr><p:cNvPr id="3" name="Notes Placeholder 2"/><p:cNvSpPr><a:spLocks noGrp="1"/></p:cNvSpPr><p:nvPr><p:ph type="body" idx="1"/></p:nvPr></p:nvSpPr><p:spPr/><p:txBody><a:bodyPr/><a:lstStyle/><a:p><a:r><a:rPr lang="en-US" dirty="0"/><a:t>（1:58–2:20　22 秒　91 字）--判断错了，代价是多少。-一柜货值两百六十一万；卖不掉折价倒回国内，亏七十八万。-但更贵的不是这笔钱，是当地价格烂掉之后，-你再也找不到第二个愿意接的经销商。-而这些，你要九十天以后才会知道。--───── 时间充裕可加 ─────-这就是为什么这个判断必须发生在签约之前，不是发生在报关那一天。</a:t></a:r><a:endParaRPr lang="en-US" dirty="0"/></a:p></p:txBody></p:sp><p:sp><p:nvSpPr><p:cNvPr id="4" name="Slide Number Placeholder 3"/><p:cNvSpPr><a:spLocks noGrp="1"/></p:cNvSpPr><p:nvPr><p:ph type="sldNum" sz="quarter" idx="10"/></p:nvPr></p:nvSpPr><p:spPr/><p:txBody><a:bodyPr/><a:lstStyle/><a:p><a:fld id="{F7021451-1387-4CA6-816F-3879F97B5CBC}" type="slidenum"><a:rPr lang="en-US"/><a:t>5</a:t></a:fld><a:endParaRPr lang="en-US"/></a:p></p:txBody></p:sp></p:spTree><p:extLst><p:ext uri="{BB962C8B-B14F-4D97-AF65-F5344CB8AC3E}"><p14:creationId xmlns:p14="http://schemas.microsoft.com/office/powerpoint/2010/main" val="1024086991"/></p:ext></p:extLst></p:cSld><p:clrMapOvr><a:masterClrMapping/></p:clrMapOvr></p:notes>
+<file path=ppt/notesSlides/notesSlide5.xml><?xml version="1.0" encoding="utf-8"?>
+<p:notes xmlns:a="http://schemas.openxmlformats.org/drawingml/2006/main" xmlns:r="http://schemas.openxmlformats.org/officeDocument/2006/relationships" xmlns:p="http://schemas.openxmlformats.org/presentationml/2006/main">
+  <p:cSld>
+    <p:spTree>
+      <p:nvGrpSpPr>
+        <p:cNvPr id="1" name=""/>
+        <p:cNvGrpSpPr/>
+        <p:nvPr/>
+      </p:nvGrpSpPr>
+      <p:grpSpPr>
+        <a:xfrm>
+          <a:off x="0" y="0"/>
+          <a:ext cx="0" cy="0"/>
+          <a:chOff x="0" y="0"/>
+          <a:chExt cx="0" cy="0"/>
+        </a:xfrm>
+      </p:grpSpPr>
+      <p:sp>
+        <p:nvSpPr>
+          <p:cNvPr id="2" name="Slide Image Placeholder 1"/>
+          <p:cNvSpPr>
+            <a:spLocks noGrp="1" noRot="1" noChangeAspect="1"/>
+          </p:cNvSpPr>
+          <p:nvPr>
+            <p:ph type="sldImg"/>
+          </p:nvPr>
+        </p:nvSpPr>
+        <p:spPr/>
+      </p:sp>
+      <p:sp>
+        <p:nvSpPr>
+          <p:cNvPr id="3" name="Notes Placeholder 2"/>
+          <p:cNvSpPr>
+            <a:spLocks noGrp="1"/>
+          </p:cNvSpPr>
+          <p:nvPr>
+            <p:ph type="body" idx="1"/>
+          </p:nvPr>
+        </p:nvSpPr>
+        <p:spPr/>
+        <p:txBody>
+          <a:bodyPr/>
+          <a:lstStyle/>
+          <a:p>
+            <a:r>
+              <a:rPr lang="en-US" dirty="0"/>
+              <a:t>（1:58–2:20　22 秒　91 字）</a:t>
+            </a:r>
+          </a:p>
+          <a:p>
+            <a:r>
+              <a:rPr lang="zh-CN" altLang="en-US" dirty="0"/>
+              <a:t/>
+            </a:r>
+          </a:p>
+          <a:p>
+            <a:r>
+              <a:rPr lang="zh-CN" altLang="en-US" dirty="0"/>
+              <a:t>判断错了，代价是多少。</a:t>
+            </a:r>
+          </a:p>
+          <a:p>
+            <a:r>
+              <a:rPr lang="zh-CN" altLang="en-US" dirty="0"/>
+              <a:t>一柜货值两百六十一万；卖不掉折价倒回国内，亏七十八万。</a:t>
+            </a:r>
+          </a:p>
+          <a:p>
+            <a:r>
+              <a:rPr lang="zh-CN" altLang="en-US" dirty="0"/>
+              <a:t>但更贵的不是这笔钱，是当地价格烂掉之后，</a:t>
+            </a:r>
+          </a:p>
+          <a:p>
+            <a:r>
+              <a:rPr lang="zh-CN" altLang="en-US" dirty="0"/>
+              <a:t>你再也找不到第二个愿意接的经销商。</a:t>
+            </a:r>
+          </a:p>
+          <a:p>
+            <a:r>
+              <a:rPr lang="zh-CN" altLang="en-US" dirty="0"/>
+              <a:t>而这些，你要九十天以后才会知道。</a:t>
+            </a:r>
+          </a:p>
+          <a:p>
+            <a:r>
+              <a:rPr lang="zh-CN" altLang="en-US" dirty="0"/>
+              <a:t/>
+            </a:r>
+          </a:p>
+          <a:p>
+            <a:r>
+              <a:rPr lang="zh-CN" altLang="en-US" dirty="0"/>
+              <a:t>───── 时间充裕可加 ─────</a:t>
+            </a:r>
+          </a:p>
+          <a:p>
+            <a:r>
+              <a:rPr lang="zh-CN" altLang="en-US" dirty="0"/>
+              <a:t>这就是为什么这个判断必须发生在签约之前，不是发生在报关那一天。</a:t>
+            </a:r>
+            <a:endParaRPr lang="en-US" dirty="0"/>
+          </a:p>
+        </p:txBody>
+      </p:sp>
+      <p:sp>
+        <p:nvSpPr>
+          <p:cNvPr id="4" name="Slide Number Placeholder 3"/>
+          <p:cNvSpPr>
+            <a:spLocks noGrp="1"/>
+          </p:cNvSpPr>
+          <p:nvPr>
+            <p:ph type="sldNum" sz="quarter" idx="10"/>
+          </p:nvPr>
+        </p:nvSpPr>
+        <p:spPr/>
+        <p:txBody>
+          <a:bodyPr/>
+          <a:lstStyle/>
+          <a:p>
+            <a:fld id="{F7021451-1387-4CA6-816F-3879F97B5CBC}" type="slidenum">
+              <a:rPr lang="en-US"/>
+              <a:t>5</a:t>
+            </a:fld>
+            <a:endParaRPr lang="en-US"/>
+          </a:p>
+        </p:txBody>
+      </p:sp>
+    </p:spTree>
+    <p:extLst>
+      <p:ext uri="{BB962C8B-B14F-4D97-AF65-F5344CB8AC3E}">
+        <p14:creationId xmlns:p14="http://schemas.microsoft.com/office/powerpoint/2010/main" val="1024086991"/>
+      </p:ext>
+    </p:extLst>
+  </p:cSld>
+  <p:clrMapOvr>
+    <a:masterClrMapping/>
+  </p:clrMapOvr>
+</p:notes>
 </file>
 
-<file path=ppt/notesSlides/notesSlide6.xml><?xml version="1.0" encoding="UTF-8" standalone="yes"?>
-<p:notes xmlns:a="http://schemas.openxmlformats.org/drawingml/2006/main" xmlns:r="http://schemas.openxmlformats.org/officeDocument/2006/relationships" xmlns:p="http://schemas.openxmlformats.org/presentationml/2006/main"><p:cSld><p:spTree><p:nvGrpSpPr><p:cNvPr id="1" name=""/><p:cNvGrpSpPr/><p:nvPr/></p:nvGrpSpPr><p:grpSpPr><a:xfrm><a:off x="0" y="0"/><a:ext cx="0" cy="0"/><a:chOff x="0" y="0"/><a:chExt cx="0" cy="0"/></a:xfrm></p:grpSpPr><p:sp><p:nvSpPr><p:cNvPr id="2" name="Slide Image Placeholder 1"/><p:cNvSpPr><a:spLocks noGrp="1" noRot="1" noChangeAspect="1"/></p:cNvSpPr><p:nvPr><p:ph type="sldImg"/></p:nvPr></p:nvSpPr><p:spPr/></p:sp><p:sp><p:nvSpPr><p:cNvPr id="3" name="Notes Placeholder 2"/><p:cNvSpPr><a:spLocks noGrp="1"/></p:cNvSpPr><p:nvPr><p:ph type="body" idx="1"/></p:nvPr></p:nvSpPr><p:spPr/><p:txBody><a:bodyPr/><a:lstStyle/><a:p><a:r><a:rPr lang="en-US" dirty="0"/><a:t>（2:20–2:42　22 秒　89 字）--所以我们做了这个工具。-把那段微信对话原样贴进去，不用整理，八秒出一份决策简报。-[指流程]-分工要说清楚：模型只做一件事，把这段乱七八糟的话读成结构。-该不该做、算多少钱、写哪几条，都不归它管。--───── 时间充裕可加 ─────-因为算错一个税率就是真金白银的亏损，这种事不能交给一个每次回答都可能不一样的东西。</a:t></a:r><a:endParaRPr lang="en-US" dirty="0"/></a:p></p:txBody></p:sp><p:sp><p:nvSpPr><p:cNvPr id="4" name="Slide Number Placeholder 3"/><p:cNvSpPr><a:spLocks noGrp="1"/></p:cNvSpPr><p:nvPr><p:ph type="sldNum" sz="quarter" idx="10"/></p:nvPr></p:nvSpPr><p:spPr/><p:txBody><a:bodyPr/><a:lstStyle/><a:p><a:fld id="{F7021451-1387-4CA6-816F-3879F97B5CBC}" type="slidenum"><a:rPr lang="en-US"/><a:t>6</a:t></a:fld><a:endParaRPr lang="en-US"/></a:p></p:txBody></p:sp></p:spTree><p:extLst><p:ext uri="{BB962C8B-B14F-4D97-AF65-F5344CB8AC3E}"><p14:creationId xmlns:p14="http://schemas.microsoft.com/office/powerpoint/2010/main" val="1024086991"/></p:ext></p:extLst></p:cSld><p:clrMapOvr><a:masterClrMapping/></p:clrMapOvr></p:notes>
+<file path=ppt/notesSlides/notesSlide6.xml><?xml version="1.0" encoding="utf-8"?>
+<p:notes xmlns:a="http://schemas.openxmlformats.org/drawingml/2006/main" xmlns:r="http://schemas.openxmlformats.org/officeDocument/2006/relationships" xmlns:p="http://schemas.openxmlformats.org/presentationml/2006/main">
+  <p:cSld>
+    <p:spTree>
+      <p:nvGrpSpPr>
+        <p:cNvPr id="1" name=""/>
+        <p:cNvGrpSpPr/>
+        <p:nvPr/>
+      </p:nvGrpSpPr>
+      <p:grpSpPr>
+        <a:xfrm>
+          <a:off x="0" y="0"/>
+          <a:ext cx="0" cy="0"/>
+          <a:chOff x="0" y="0"/>
+          <a:chExt cx="0" cy="0"/>
+        </a:xfrm>
+      </p:grpSpPr>
+      <p:sp>
+        <p:nvSpPr>
+          <p:cNvPr id="2" name="Slide Image Placeholder 1"/>
+          <p:cNvSpPr>
+            <a:spLocks noGrp="1" noRot="1" noChangeAspect="1"/>
+          </p:cNvSpPr>
+          <p:nvPr>
+            <p:ph type="sldImg"/>
+          </p:nvPr>
+        </p:nvSpPr>
+        <p:spPr/>
+      </p:sp>
+      <p:sp>
+        <p:nvSpPr>
+          <p:cNvPr id="3" name="Notes Placeholder 2"/>
+          <p:cNvSpPr>
+            <a:spLocks noGrp="1"/>
+          </p:cNvSpPr>
+          <p:nvPr>
+            <p:ph type="body" idx="1"/>
+          </p:nvPr>
+        </p:nvSpPr>
+        <p:spPr/>
+        <p:txBody>
+          <a:bodyPr/>
+          <a:lstStyle/>
+          <a:p>
+            <a:r>
+              <a:rPr lang="en-US" dirty="0"/>
+              <a:t>（2:20–2:42　22 秒　89 字）</a:t>
+            </a:r>
+          </a:p>
+          <a:p>
+            <a:r>
+              <a:rPr lang="zh-CN" altLang="en-US" dirty="0"/>
+              <a:t/>
+            </a:r>
+          </a:p>
+          <a:p>
+            <a:r>
+              <a:rPr lang="zh-CN" altLang="en-US" dirty="0"/>
+              <a:t>所以我们做了这个工具。</a:t>
+            </a:r>
+          </a:p>
+          <a:p>
+            <a:r>
+              <a:rPr lang="zh-CN" altLang="en-US" dirty="0"/>
+              <a:t>把那段微信对话原样贴进去，不用整理，八秒出一份决策简报。</a:t>
+            </a:r>
+          </a:p>
+          <a:p>
+            <a:r>
+              <a:rPr lang="zh-CN" altLang="en-US" dirty="0"/>
+              <a:t>[指流程]</a:t>
+            </a:r>
+          </a:p>
+          <a:p>
+            <a:r>
+              <a:rPr lang="zh-CN" altLang="en-US" dirty="0"/>
+              <a:t>分工要说清楚：模型只做一件事，把这段乱七八糟的话读成结构。</a:t>
+            </a:r>
+          </a:p>
+          <a:p>
+            <a:r>
+              <a:rPr lang="zh-CN" altLang="en-US" dirty="0"/>
+              <a:t>该不该做、算多少钱、写哪几条，都不归它管。</a:t>
+            </a:r>
+          </a:p>
+          <a:p>
+            <a:r>
+              <a:rPr lang="zh-CN" altLang="en-US" dirty="0"/>
+              <a:t/>
+            </a:r>
+          </a:p>
+          <a:p>
+            <a:r>
+              <a:rPr lang="zh-CN" altLang="en-US" dirty="0"/>
+              <a:t>───── 时间充裕可加 ─────</a:t>
+            </a:r>
+          </a:p>
+          <a:p>
+            <a:r>
+              <a:rPr lang="zh-CN" altLang="en-US" dirty="0"/>
+              <a:t>因为算错一个税率就是真金白银的亏损，这种事不能交给一个每次回答都可能不一样的东西。</a:t>
+            </a:r>
+            <a:endParaRPr lang="en-US" dirty="0"/>
+          </a:p>
+        </p:txBody>
+      </p:sp>
+      <p:sp>
+        <p:nvSpPr>
+          <p:cNvPr id="4" name="Slide Number Placeholder 3"/>
+          <p:cNvSpPr>
+            <a:spLocks noGrp="1"/>
+          </p:cNvSpPr>
+          <p:nvPr>
+            <p:ph type="sldNum" sz="quarter" idx="10"/>
+          </p:nvPr>
+        </p:nvSpPr>
+        <p:spPr/>
+        <p:txBody>
+          <a:bodyPr/>
+          <a:lstStyle/>
+          <a:p>
+            <a:fld id="{F7021451-1387-4CA6-816F-3879F97B5CBC}" type="slidenum">
+              <a:rPr lang="en-US"/>
+              <a:t>6</a:t>
+            </a:fld>
+            <a:endParaRPr lang="en-US"/>
+          </a:p>
+        </p:txBody>
+      </p:sp>
+    </p:spTree>
+    <p:extLst>
+      <p:ext uri="{BB962C8B-B14F-4D97-AF65-F5344CB8AC3E}">
+        <p14:creationId xmlns:p14="http://schemas.microsoft.com/office/powerpoint/2010/main" val="1024086991"/>
+      </p:ext>
+    </p:extLst>
+  </p:cSld>
+  <p:clrMapOvr>
+    <a:masterClrMapping/>
+  </p:clrMapOvr>
+</p:notes>
 </file>
 
-<file path=ppt/notesSlides/notesSlide7.xml><?xml version="1.0" encoding="UTF-8" standalone="yes"?>
-<p:notes xmlns:a="http://schemas.openxmlformats.org/drawingml/2006/main" xmlns:r="http://schemas.openxmlformats.org/officeDocument/2006/relationships" xmlns:p="http://schemas.openxmlformats.org/presentationml/2006/main"><p:cSld><p:spTree><p:nvGrpSpPr><p:cNvPr id="1" name=""/><p:cNvGrpSpPr/><p:nvPr/></p:nvGrpSpPr><p:grpSpPr><a:xfrm><a:off x="0" y="0"/><a:ext cx="0" cy="0"/><a:chOff x="0" y="0"/><a:chExt cx="0" cy="0"/></a:xfrm></p:grpSpPr><p:sp><p:nvSpPr><p:cNvPr id="2" name="Slide Image Placeholder 1"/><p:cNvSpPr><a:spLocks noGrp="1" noRot="1" noChangeAspect="1"/></p:cNvSpPr><p:nvPr><p:ph type="sldImg"/></p:nvPr></p:nvSpPr><p:spPr/></p:sp><p:sp><p:nvSpPr><p:cNvPr id="3" name="Notes Placeholder 2"/><p:cNvSpPr><a:spLocks noGrp="1"/></p:cNvSpPr><p:nvPr><p:ph type="body" idx="1"/></p:nvPr></p:nvSpPr><p:spPr/><p:txBody><a:bodyPr/><a:lstStyle/><a:p><a:r><a:rPr lang="en-US" dirty="0"/><a:t>（2:42–3:06　24 秒　104 字）--判定我们用一瓶酒表示。-[指两瓶]-瓶子永远是满的，变的是里面装什么。-左边装的是酒，他是来买酒的，可以谈。-右边这瓶，红的是税差，从瓶底把酒顶上来了。-这一瓶里装的不是酒。-业务员不必看懂评分模型，看一眼瓶子就知道该不该往下谈。--───── 时间充裕可加 ─────-红色占多高，就是套利风险分是多少——这两件事在界面上是同一个东西。</a:t></a:r><a:endParaRPr lang="en-US" dirty="0"/></a:p></p:txBody></p:sp><p:sp><p:nvSpPr><p:cNvPr id="4" name="Slide Number Placeholder 3"/><p:cNvSpPr><a:spLocks noGrp="1"/></p:cNvSpPr><p:nvPr><p:ph type="sldNum" sz="quarter" idx="10"/></p:nvPr></p:nvSpPr><p:spPr/><p:txBody><a:bodyPr/><a:lstStyle/><a:p><a:fld id="{F7021451-1387-4CA6-816F-3879F97B5CBC}" type="slidenum"><a:rPr lang="en-US"/><a:t>7</a:t></a:fld><a:endParaRPr lang="en-US"/></a:p></p:txBody></p:sp></p:spTree><p:extLst><p:ext uri="{BB962C8B-B14F-4D97-AF65-F5344CB8AC3E}"><p14:creationId xmlns:p14="http://schemas.microsoft.com/office/powerpoint/2010/main" val="1024086991"/></p:ext></p:extLst></p:cSld><p:clrMapOvr><a:masterClrMapping/></p:clrMapOvr></p:notes>
+<file path=ppt/notesSlides/notesSlide7.xml><?xml version="1.0" encoding="utf-8"?>
+<p:notes xmlns:a="http://schemas.openxmlformats.org/drawingml/2006/main" xmlns:r="http://schemas.openxmlformats.org/officeDocument/2006/relationships" xmlns:p="http://schemas.openxmlformats.org/presentationml/2006/main">
+  <p:cSld>
+    <p:spTree>
+      <p:nvGrpSpPr>
+        <p:cNvPr id="1" name=""/>
+        <p:cNvGrpSpPr/>
+        <p:nvPr/>
+      </p:nvGrpSpPr>
+      <p:grpSpPr>
+        <a:xfrm>
+          <a:off x="0" y="0"/>
+          <a:ext cx="0" cy="0"/>
+          <a:chOff x="0" y="0"/>
+          <a:chExt cx="0" cy="0"/>
+        </a:xfrm>
+      </p:grpSpPr>
+      <p:sp>
+        <p:nvSpPr>
+          <p:cNvPr id="2" name="Slide Image Placeholder 1"/>
+          <p:cNvSpPr>
+            <a:spLocks noGrp="1" noRot="1" noChangeAspect="1"/>
+          </p:cNvSpPr>
+          <p:nvPr>
+            <p:ph type="sldImg"/>
+          </p:nvPr>
+        </p:nvSpPr>
+        <p:spPr/>
+      </p:sp>
+      <p:sp>
+        <p:nvSpPr>
+          <p:cNvPr id="3" name="Notes Placeholder 2"/>
+          <p:cNvSpPr>
+            <a:spLocks noGrp="1"/>
+          </p:cNvSpPr>
+          <p:nvPr>
+            <p:ph type="body" idx="1"/>
+          </p:nvPr>
+        </p:nvSpPr>
+        <p:spPr/>
+        <p:txBody>
+          <a:bodyPr/>
+          <a:lstStyle/>
+          <a:p>
+            <a:r>
+              <a:rPr lang="en-US" dirty="0"/>
+              <a:t>（2:42–3:06　24 秒　104 字）</a:t>
+            </a:r>
+          </a:p>
+          <a:p>
+            <a:r>
+              <a:rPr lang="zh-CN" altLang="en-US" dirty="0"/>
+              <a:t/>
+            </a:r>
+          </a:p>
+          <a:p>
+            <a:r>
+              <a:rPr lang="zh-CN" altLang="en-US" dirty="0"/>
+              <a:t>判定我们用一瓶酒表示。</a:t>
+            </a:r>
+          </a:p>
+          <a:p>
+            <a:r>
+              <a:rPr lang="zh-CN" altLang="en-US" dirty="0"/>
+              <a:t>[指两瓶]</a:t>
+            </a:r>
+          </a:p>
+          <a:p>
+            <a:r>
+              <a:rPr lang="zh-CN" altLang="en-US" dirty="0"/>
+              <a:t>瓶子永远是满的，变的是里面装什么。</a:t>
+            </a:r>
+          </a:p>
+          <a:p>
+            <a:r>
+              <a:rPr lang="zh-CN" altLang="en-US" dirty="0"/>
+              <a:t>左边装的是酒，他是来买酒的，可以谈。</a:t>
+            </a:r>
+          </a:p>
+          <a:p>
+            <a:r>
+              <a:rPr lang="zh-CN" altLang="en-US" dirty="0"/>
+              <a:t>右边这瓶，红的是税差，从瓶底把酒顶上来了。</a:t>
+            </a:r>
+          </a:p>
+          <a:p>
+            <a:r>
+              <a:rPr lang="zh-CN" altLang="en-US" dirty="0"/>
+              <a:t>这一瓶里装的不是酒。</a:t>
+            </a:r>
+          </a:p>
+          <a:p>
+            <a:r>
+              <a:rPr lang="zh-CN" altLang="en-US" dirty="0"/>
+              <a:t>业务员不必看懂评分模型，看一眼瓶子就知道该不该往下谈。</a:t>
+            </a:r>
+          </a:p>
+          <a:p>
+            <a:r>
+              <a:rPr lang="zh-CN" altLang="en-US" dirty="0"/>
+              <a:t/>
+            </a:r>
+          </a:p>
+          <a:p>
+            <a:r>
+              <a:rPr lang="zh-CN" altLang="en-US" dirty="0"/>
+              <a:t>───── 时间充裕可加 ─────</a:t>
+            </a:r>
+          </a:p>
+          <a:p>
+            <a:r>
+              <a:rPr lang="zh-CN" altLang="en-US" dirty="0"/>
+              <a:t>红色占多高，就是套利风险分是多少——这两件事在界面上是同一个东西。</a:t>
+            </a:r>
+            <a:endParaRPr lang="en-US" dirty="0"/>
+          </a:p>
+        </p:txBody>
+      </p:sp>
+      <p:sp>
+        <p:nvSpPr>
+          <p:cNvPr id="4" name="Slide Number Placeholder 3"/>
+          <p:cNvSpPr>
+            <a:spLocks noGrp="1"/>
+          </p:cNvSpPr>
+          <p:nvPr>
+            <p:ph type="sldNum" sz="quarter" idx="10"/>
+          </p:nvPr>
+        </p:nvSpPr>
+        <p:spPr/>
+        <p:txBody>
+          <a:bodyPr/>
+          <a:lstStyle/>
+          <a:p>
+            <a:fld id="{F7021451-1387-4CA6-816F-3879F97B5CBC}" type="slidenum">
+              <a:rPr lang="en-US"/>
+              <a:t>7</a:t>
+            </a:fld>
+            <a:endParaRPr lang="en-US"/>
+          </a:p>
+        </p:txBody>
+      </p:sp>
+    </p:spTree>
+    <p:extLst>
+      <p:ext uri="{BB962C8B-B14F-4D97-AF65-F5344CB8AC3E}">
+        <p14:creationId xmlns:p14="http://schemas.microsoft.com/office/powerpoint/2010/main" val="1024086991"/>
+      </p:ext>
+    </p:extLst>
+  </p:cSld>
+  <p:clrMapOvr>
+    <a:masterClrMapping/>
+  </p:clrMapOvr>
+</p:notes>
 </file>
 
-<file path=ppt/notesSlides/notesSlide8.xml><?xml version="1.0" encoding="UTF-8" standalone="yes"?>
-<p:notes xmlns:a="http://schemas.openxmlformats.org/drawingml/2006/main" xmlns:r="http://schemas.openxmlformats.org/officeDocument/2006/relationships" xmlns:p="http://schemas.openxmlformats.org/presentationml/2006/main"><p:cSld><p:spTree><p:nvGrpSpPr><p:cNvPr id="1" name=""/><p:cNvGrpSpPr/><p:nvPr/></p:nvGrpSpPr><p:grpSpPr><a:xfrm><a:off x="0" y="0"/><a:ext cx="0" cy="0"/><a:chOff x="0" y="0"/><a:chExt cx="0" cy="0"/></a:xfrm></p:grpSpPr><p:sp><p:nvSpPr><p:cNvPr id="2" name="Slide Image Placeholder 1"/><p:cNvSpPr><a:spLocks noGrp="1" noRot="1" noChangeAspect="1"/></p:cNvSpPr><p:nvPr><p:ph type="sldImg"/></p:nvPr></p:nvSpPr><p:spPr/></p:sp><p:sp><p:nvSpPr><p:cNvPr id="3" name="Notes Placeholder 2"/><p:cNvSpPr><a:spLocks noGrp="1"/></p:cNvSpPr><p:nvPr><p:ph type="body" idx="1"/></p:nvPr></p:nvSpPr><p:spPr/><p:txBody><a:bodyPr/><a:lstStyle/><a:p><a:r><a:rPr lang="en-US" dirty="0"/><a:t>（3:06–3:32　26 秒　110 字）--展开是六个页签，一页回答一个问题：-该不该做、凭什么这么判、卖多少钱、-他有没有牌照、怎么跟他讲、合同和之后九十天怎么盯。-六项信号是模型给的初判，但最后一票在人手上——-AI 看得到文字，看不到展位上他说「标签不用改」时的表情。-[切到现场 demo]--───── 时间充裕可加 ─────-改任何一项，判定、必问清单、合同条款会立刻跟着重算。</a:t></a:r><a:endParaRPr lang="en-US" dirty="0"/></a:p></p:txBody></p:sp><p:sp><p:nvSpPr><p:cNvPr id="4" name="Slide Number Placeholder 3"/><p:cNvSpPr><a:spLocks noGrp="1"/></p:cNvSpPr><p:nvPr><p:ph type="sldNum" sz="quarter" idx="10"/></p:nvPr></p:nvSpPr><p:spPr/><p:txBody><a:bodyPr/><a:lstStyle/><a:p><a:fld id="{F7021451-1387-4CA6-816F-3879F97B5CBC}" type="slidenum"><a:rPr lang="en-US"/><a:t>8</a:t></a:fld><a:endParaRPr lang="en-US"/></a:p></p:txBody></p:sp></p:spTree><p:extLst><p:ext uri="{BB962C8B-B14F-4D97-AF65-F5344CB8AC3E}"><p14:creationId xmlns:p14="http://schemas.microsoft.com/office/powerpoint/2010/main" val="1024086991"/></p:ext></p:extLst></p:cSld><p:clrMapOvr><a:masterClrMapping/></p:clrMapOvr></p:notes>
+<file path=ppt/notesSlides/notesSlide8.xml><?xml version="1.0" encoding="utf-8"?>
+<p:notes xmlns:a="http://schemas.openxmlformats.org/drawingml/2006/main" xmlns:r="http://schemas.openxmlformats.org/officeDocument/2006/relationships" xmlns:p="http://schemas.openxmlformats.org/presentationml/2006/main">
+  <p:cSld>
+    <p:spTree>
+      <p:nvGrpSpPr>
+        <p:cNvPr id="1" name=""/>
+        <p:cNvGrpSpPr/>
+        <p:nvPr/>
+      </p:nvGrpSpPr>
+      <p:grpSpPr>
+        <a:xfrm>
+          <a:off x="0" y="0"/>
+          <a:ext cx="0" cy="0"/>
+          <a:chOff x="0" y="0"/>
+          <a:chExt cx="0" cy="0"/>
+        </a:xfrm>
+      </p:grpSpPr>
+      <p:sp>
+        <p:nvSpPr>
+          <p:cNvPr id="2" name="Slide Image Placeholder 1"/>
+          <p:cNvSpPr>
+            <a:spLocks noGrp="1" noRot="1" noChangeAspect="1"/>
+          </p:cNvSpPr>
+          <p:nvPr>
+            <p:ph type="sldImg"/>
+          </p:nvPr>
+        </p:nvSpPr>
+        <p:spPr/>
+      </p:sp>
+      <p:sp>
+        <p:nvSpPr>
+          <p:cNvPr id="3" name="Notes Placeholder 2"/>
+          <p:cNvSpPr>
+            <a:spLocks noGrp="1"/>
+          </p:cNvSpPr>
+          <p:nvPr>
+            <p:ph type="body" idx="1"/>
+          </p:nvPr>
+        </p:nvSpPr>
+        <p:spPr/>
+        <p:txBody>
+          <a:bodyPr/>
+          <a:lstStyle/>
+          <a:p>
+            <a:r>
+              <a:rPr lang="en-US" dirty="0"/>
+              <a:t>（3:06–3:32　26 秒　110 字）</a:t>
+            </a:r>
+          </a:p>
+          <a:p>
+            <a:r>
+              <a:rPr lang="zh-CN" altLang="en-US" dirty="0"/>
+              <a:t/>
+            </a:r>
+          </a:p>
+          <a:p>
+            <a:r>
+              <a:rPr lang="zh-CN" altLang="en-US" dirty="0"/>
+              <a:t>展开是六个页签，一页回答一个问题：</a:t>
+            </a:r>
+          </a:p>
+          <a:p>
+            <a:r>
+              <a:rPr lang="zh-CN" altLang="en-US" dirty="0"/>
+              <a:t>该不该做、凭什么这么判、卖多少钱、</a:t>
+            </a:r>
+          </a:p>
+          <a:p>
+            <a:r>
+              <a:rPr lang="zh-CN" altLang="en-US" dirty="0"/>
+              <a:t>他有没有牌照、怎么跟他讲、合同和之后九十天怎么盯。</a:t>
+            </a:r>
+          </a:p>
+          <a:p>
+            <a:r>
+              <a:rPr lang="zh-CN" altLang="en-US" dirty="0"/>
+              <a:t>六项信号是模型给的初判，但最后一票在人手上——</a:t>
+            </a:r>
+          </a:p>
+          <a:p>
+            <a:r>
+              <a:rPr lang="zh-CN" altLang="en-US" dirty="0"/>
+              <a:t>AI 看得到文字，看不到展位上他说「标签不用改」时的表情。</a:t>
+            </a:r>
+          </a:p>
+          <a:p>
+            <a:r>
+              <a:rPr lang="zh-CN" altLang="en-US" dirty="0"/>
+              <a:t>[切到现场 demo]</a:t>
+            </a:r>
+          </a:p>
+          <a:p>
+            <a:r>
+              <a:rPr lang="zh-CN" altLang="en-US" dirty="0"/>
+              <a:t/>
+            </a:r>
+          </a:p>
+          <a:p>
+            <a:r>
+              <a:rPr lang="zh-CN" altLang="en-US" dirty="0"/>
+              <a:t>───── 时间充裕可加 ─────</a:t>
+            </a:r>
+          </a:p>
+          <a:p>
+            <a:r>
+              <a:rPr lang="zh-CN" altLang="en-US" dirty="0"/>
+              <a:t>改任何一项，判定、必问清单、合同条款会立刻跟着重算。</a:t>
+            </a:r>
+            <a:endParaRPr lang="en-US" dirty="0"/>
+          </a:p>
+        </p:txBody>
+      </p:sp>
+      <p:sp>
+        <p:nvSpPr>
+          <p:cNvPr id="4" name="Slide Number Placeholder 3"/>
+          <p:cNvSpPr>
+            <a:spLocks noGrp="1"/>
+          </p:cNvSpPr>
+          <p:nvPr>
+            <p:ph type="sldNum" sz="quarter" idx="10"/>
+          </p:nvPr>
+        </p:nvSpPr>
+        <p:spPr/>
+        <p:txBody>
+          <a:bodyPr/>
+          <a:lstStyle/>
+          <a:p>
+            <a:fld id="{F7021451-1387-4CA6-816F-3879F97B5CBC}" type="slidenum">
+              <a:rPr lang="en-US"/>
+              <a:t>8</a:t>
+            </a:fld>
+            <a:endParaRPr lang="en-US"/>
+          </a:p>
+        </p:txBody>
+      </p:sp>
+    </p:spTree>
+    <p:extLst>
+      <p:ext uri="{BB962C8B-B14F-4D97-AF65-F5344CB8AC3E}">
+        <p14:creationId xmlns:p14="http://schemas.microsoft.com/office/powerpoint/2010/main" val="1024086991"/>
+      </p:ext>
+    </p:extLst>
+  </p:cSld>
+  <p:clrMapOvr>
+    <a:masterClrMapping/>
+  </p:clrMapOvr>
+</p:notes>
 </file>
 
-<file path=ppt/notesSlides/notesSlide9.xml><?xml version="1.0" encoding="UTF-8" standalone="yes"?>
-<p:notes xmlns:a="http://schemas.openxmlformats.org/drawingml/2006/main" xmlns:r="http://schemas.openxmlformats.org/officeDocument/2006/relationships" xmlns:p="http://schemas.openxmlformats.org/presentationml/2006/main"><p:cSld><p:spTree><p:nvGrpSpPr><p:cNvPr id="1" name=""/><p:cNvGrpSpPr/><p:nvPr/></p:nvGrpSpPr><p:grpSpPr><a:xfrm><a:off x="0" y="0"/><a:ext cx="0" cy="0"/><a:chOff x="0" y="0"/><a:chExt cx="0" cy="0"/></a:xfrm></p:grpSpPr><p:sp><p:nvSpPr><p:cNvPr id="2" name="Slide Image Placeholder 1"/><p:cNvSpPr><a:spLocks noGrp="1" noRot="1" noChangeAspect="1"/></p:cNvSpPr><p:nvPr><p:ph type="sldImg"/></p:nvPr></p:nvSpPr><p:spPr/></p:sp><p:sp><p:nvSpPr><p:cNvPr id="3" name="Notes Placeholder 2"/><p:cNvSpPr><a:spLocks noGrp="1"/></p:cNvSpPr><p:nvPr><p:ph type="body" idx="1"/></p:nvPr></p:nvSpPr><p:spPr/><p:txBody><a:bodyPr/><a:lstStyle/><a:p><a:r><a:rPr lang="en-US" dirty="0"/><a:t>（3:32–4:04　32 秒　147 字）--为什么不直接问通用大模型？-因为这三条它不会告诉你，是我们逐条翻税则翻出来的：-香港烈酒减税只减两百港币以上那一部分，低价酒完全享受不到。-新加坡按纯酒精量课税，不看瓶数，降度数等于直接少缴税。-美国的 CBMA 额度必须由中国生产商主动指派，进口商自己拿不到；-一瓶差十块七，一柜十几万，而且不花你一毛钱。--───── 时间充裕可加 ─────-通用模型给你的多半是「约百分之三十到五十综合税负」这种区间。拿这个去跟老板报价，是会出事的。</a:t></a:r><a:endParaRPr lang="en-US" dirty="0"/></a:p></p:txBody></p:sp><p:sp><p:nvSpPr><p:cNvPr id="4" name="Slide Number Placeholder 3"/><p:cNvSpPr><a:spLocks noGrp="1"/></p:cNvSpPr><p:nvPr><p:ph type="sldNum" sz="quarter" idx="10"/></p:nvPr></p:nvSpPr><p:spPr/><p:txBody><a:bodyPr/><a:lstStyle/><a:p><a:fld id="{F7021451-1387-4CA6-816F-3879F97B5CBC}" type="slidenum"><a:rPr lang="en-US"/><a:t>9</a:t></a:fld><a:endParaRPr lang="en-US"/></a:p></p:txBody></p:sp></p:spTree><p:extLst><p:ext uri="{BB962C8B-B14F-4D97-AF65-F5344CB8AC3E}"><p14:creationId xmlns:p14="http://schemas.microsoft.com/office/powerpoint/2010/main" val="1024086991"/></p:ext></p:extLst></p:cSld><p:clrMapOvr><a:masterClrMapping/></p:clrMapOvr></p:notes>
+<file path=ppt/notesSlides/notesSlide9.xml><?xml version="1.0" encoding="utf-8"?>
+<p:notes xmlns:a="http://schemas.openxmlformats.org/drawingml/2006/main" xmlns:r="http://schemas.openxmlformats.org/officeDocument/2006/relationships" xmlns:p="http://schemas.openxmlformats.org/presentationml/2006/main">
+  <p:cSld>
+    <p:spTree>
+      <p:nvGrpSpPr>
+        <p:cNvPr id="1" name=""/>
+        <p:cNvGrpSpPr/>
+        <p:nvPr/>
+      </p:nvGrpSpPr>
+      <p:grpSpPr>
+        <a:xfrm>
+          <a:off x="0" y="0"/>
+          <a:ext cx="0" cy="0"/>
+          <a:chOff x="0" y="0"/>
+          <a:chExt cx="0" cy="0"/>
+        </a:xfrm>
+      </p:grpSpPr>
+      <p:sp>
+        <p:nvSpPr>
+          <p:cNvPr id="2" name="Slide Image Placeholder 1"/>
+          <p:cNvSpPr>
+            <a:spLocks noGrp="1" noRot="1" noChangeAspect="1"/>
+          </p:cNvSpPr>
+          <p:nvPr>
+            <p:ph type="sldImg"/>
+          </p:nvPr>
+        </p:nvSpPr>
+        <p:spPr/>
+      </p:sp>
+      <p:sp>
+        <p:nvSpPr>
+          <p:cNvPr id="3" name="Notes Placeholder 2"/>
+          <p:cNvSpPr>
+            <a:spLocks noGrp="1"/>
+          </p:cNvSpPr>
+          <p:nvPr>
+            <p:ph type="body" idx="1"/>
+          </p:nvPr>
+        </p:nvSpPr>
+        <p:spPr/>
+        <p:txBody>
+          <a:bodyPr/>
+          <a:lstStyle/>
+          <a:p>
+            <a:r>
+              <a:rPr lang="en-US" dirty="0"/>
+              <a:t>（3:32–4:04　32 秒　147 字）</a:t>
+            </a:r>
+          </a:p>
+          <a:p>
+            <a:r>
+              <a:rPr lang="zh-CN" altLang="en-US" dirty="0"/>
+              <a:t/>
+            </a:r>
+          </a:p>
+          <a:p>
+            <a:r>
+              <a:rPr lang="zh-CN" altLang="en-US" dirty="0"/>
+              <a:t>为什么不直接问通用大模型？</a:t>
+            </a:r>
+          </a:p>
+          <a:p>
+            <a:r>
+              <a:rPr lang="zh-CN" altLang="en-US" dirty="0"/>
+              <a:t>因为这三条它不会告诉你，是我们逐条翻税则翻出来的：</a:t>
+            </a:r>
+          </a:p>
+          <a:p>
+            <a:r>
+              <a:rPr lang="zh-CN" altLang="en-US" dirty="0"/>
+              <a:t>香港烈酒减税只减两百港币以上那一部分，低价酒完全享受不到。</a:t>
+            </a:r>
+          </a:p>
+          <a:p>
+            <a:r>
+              <a:rPr lang="zh-CN" altLang="en-US" dirty="0"/>
+              <a:t>新加坡按纯酒精量课税，不看瓶数，降度数等于直接少缴税。</a:t>
+            </a:r>
+          </a:p>
+          <a:p>
+            <a:r>
+              <a:rPr lang="zh-CN" altLang="en-US" dirty="0"/>
+              <a:t>美国的 CBMA 额度必须由中国生产商主动指派，进口商自己拿不到；</a:t>
+            </a:r>
+          </a:p>
+          <a:p>
+            <a:r>
+              <a:rPr lang="zh-CN" altLang="en-US" dirty="0"/>
+              <a:t>一瓶差十块七，一柜十几万，而且不花你一毛钱。</a:t>
+            </a:r>
+          </a:p>
+          <a:p>
+            <a:r>
+              <a:rPr lang="zh-CN" altLang="en-US" dirty="0"/>
+              <a:t/>
+            </a:r>
+          </a:p>
+          <a:p>
+            <a:r>
+              <a:rPr lang="zh-CN" altLang="en-US" dirty="0"/>
+              <a:t>───── 时间充裕可加 ─────</a:t>
+            </a:r>
+          </a:p>
+          <a:p>
+            <a:r>
+              <a:rPr lang="zh-CN" altLang="en-US" dirty="0"/>
+              <a:t>通用模型给你的多半是「约百分之三十到五十综合税负」这种区间。拿这个去跟老板报价，是会出事的。</a:t>
+            </a:r>
+            <a:endParaRPr lang="en-US" dirty="0"/>
+          </a:p>
+        </p:txBody>
+      </p:sp>
+      <p:sp>
+        <p:nvSpPr>
+          <p:cNvPr id="4" name="Slide Number Placeholder 3"/>
+          <p:cNvSpPr>
+            <a:spLocks noGrp="1"/>
+          </p:cNvSpPr>
+          <p:nvPr>
+            <p:ph type="sldNum" sz="quarter" idx="10"/>
+          </p:nvPr>
+        </p:nvSpPr>
+        <p:spPr/>
+        <p:txBody>
+          <a:bodyPr/>
+          <a:lstStyle/>
+          <a:p>
+            <a:fld id="{F7021451-1387-4CA6-816F-3879F97B5CBC}" type="slidenum">
+              <a:rPr lang="en-US"/>
+              <a:t>9</a:t>
+            </a:fld>
+            <a:endParaRPr lang="en-US"/>
+          </a:p>
+        </p:txBody>
+      </p:sp>
+    </p:spTree>
+    <p:extLst>
+      <p:ext uri="{BB962C8B-B14F-4D97-AF65-F5344CB8AC3E}">
+        <p14:creationId xmlns:p14="http://schemas.microsoft.com/office/powerpoint/2010/main" val="1024086991"/>
+      </p:ext>
+    </p:extLst>
+  </p:cSld>
+  <p:clrMapOvr>
+    <a:masterClrMapping/>
+  </p:clrMapOvr>
+</p:notes>
 </file>
 
 <file path=ppt/slideLayouts/slideLayout1.xml><?xml version="1.0" encoding="utf-8"?>
